--- a/ppt/group_inno_award/Riley_Submission_Deck_Opus.pptx
+++ b/ppt/group_inno_award/Riley_Submission_Deck_Opus.pptx
@@ -704,7 +704,7 @@
           <a:lstStyle/>
           <a:p>
             <a:r>
-              <a:t>Riley is a virtual coworker for AIA employees, inside Microsoft Teams. You describe the outcome; Riley coordinates AIA's data, systems and AI capabilities to do much of the work; you review and approve.</a:t>
+              <a:t>Riley is AIA's virtual coworker in Microsoft Teams. Employees describe the outcome they need; Riley coordinates AIA's data, systems and AI capabilities to complete much of the work; the employee reviews and approves. The whole pitch is one idea: today the employee is the connector - Riley becomes the connector.</a:t>
             </a:r>
           </a:p>
         </p:txBody>
@@ -774,7 +774,7 @@
           <a:lstStyle/>
           <a:p>
             <a:r>
-              <a:t>Built on existing or emerging enterprise AI technology, not a from-scratch engine. Delivered in Microsoft Teams. Riley acts only with the employee's own access, data stays under AIA controls, and the employee approves before anything is finalized, sent to anyone, or entered into a business system. Riley keeps a traceable record; learning is governed; quality is independently sampled. No specific logging, memory or training architecture is committed to.</a:t>
+              <a:t>Built on existing or emerging enterprise AI technology, not a from-scratch engine, and delivered in Microsoft Teams. Riley acts only with the access the employee already has and never bypasses permissions. Sensitive and customer data stay under AIA's existing controls; approved external sources only. The employee approves before anything is finalized, sent to anyone, or entered into a business system. Riley records the request, capabilities used, output, approval and final action. Feedback-driven learning is governed with risk and IT; quality gets periodic independent sample reviews. No specific logging, memory or training architecture is committed to.</a:t>
             </a:r>
           </a:p>
         </p:txBody>
@@ -844,7 +844,7 @@
           <a:lstStyle/>
           <a:p>
             <a:r>
-              <a:t>Phases run in sequence and each proceeds only if the previous one shows results. Phase 2 is the core test of the idea: a capability built by a different AIA team becomes usable through Riley with no new tool for employees. Phase 3 replaces the illustrative scenario with a projection from measured data.</a:t>
+              <a:t>Phase 0 (Month 1): select the pilot team and workflow, baseline effort, time and steps, confirm data, security, record-keeping and governance, nominate the independent quality reviewer. Phase 1 (Months 2-4): one workflow, one team, approval before final action, measured against baseline. Phase 2 (Months 5-7): connect an AI tool built by a different AIA team and extend to a second workflow - the core test. Phase 3 (Months 8-12): more teams and capabilities; replace the scenario with a measured projection. Gate 1: employee effort reduced, quality maintained or improved, usage sustained. Gate 2: the new capability works through Riley with no new tool, and effort, quality and usage hold across both workflows.</a:t>
             </a:r>
           </a:p>
         </p:txBody>
@@ -914,7 +914,7 @@
           <a:lstStyle/>
           <a:p>
             <a:r>
-              <a:t>The ask: select a pilot team, fund Phase 1 with the award's seed funding, build and test the first workflow, measure the result, then prove the multiplier in Phase 2. The budget is a preliminary planning estimate, not AIA-costed or benchmarked, excluding existing staff time.</a:t>
+              <a:t>The ask: select a pilot team, fund Phase 1 with the award's seed funding, build and test the first workflow, measure the result, then prove the multiplier in Phase 2. The budget is a preliminary planning estimate, not AIA-costed or benchmarked, and excludes existing staff time. Close on the idea: today the employee is the connector; Riley becomes the connector.</a:t>
             </a:r>
           </a:p>
         </p:txBody>
@@ -984,7 +984,7 @@
           <a:lstStyle/>
           <a:p>
             <a:r>
-              <a:t>What it is, the problem, why it matters. The one line to remember: Riley is not the AI model - it is the AIA layer that turns separate AI capabilities into one coworker employees can use.</a:t>
+              <a:t>The logic: AIA will keep building and adopting AI capabilities. Without a common layer, every new tool is one more thing for employees to find, learn and stitch together. So AIA needs one employee-facing coworker layer. Riley is that layer. The fragmentation point is an observation from inside AIA, not a measured count.</a:t>
             </a:r>
           </a:p>
         </p:txBody>
@@ -1054,7 +1054,7 @@
           <a:lstStyle/>
           <a:p>
             <a:r>
-              <a:t>This is an observed organizational problem, not a measured one. Each tool is valuable, but the employee has to find, learn and combine them. Riley becomes the one connector. McKinsey context: interaction workers spend nearly 20% of the workweek looking for internal information or tracking down colleagues (2012).</a:t>
+              <a:t>Left: today each tool is valuable, but the employee has to find, learn, switch and combine them. Right: Riley becomes the one connector; every capability is reached through one conversation. Context if asked: McKinsey Global Institute (2012) found interaction workers spend nearly 20% of the workweek looking for internal information or tracking down colleagues.</a:t>
             </a:r>
           </a:p>
         </p:txBody>
@@ -1124,7 +1124,7 @@
           <a:lstStyle/>
           <a:p>
             <a:r>
-              <a:t>Illustrative conversation in Microsoft Teams. The complaints workflow is a candidate first pilot, not the definition of Riley. Riley may plan and carry out intermediate steps itself, but nothing is finalized, sent to anyone, or entered into a business system until the employee approves.</a:t>
+              <a:t>Illustrative conversation in Microsoft Teams. The complaints workflow is a candidate first pilot, not the definition of Riley. Riley may plan and carry out intermediate steps itself, but the employee reviews and approves before anything is finalized, sent to anyone, or entered into a business system.</a:t>
             </a:r>
           </a:p>
         </p:txBody>
@@ -1194,7 +1194,7 @@
           <a:lstStyle/>
           <a:p>
             <a:r>
-              <a:t>Illustrative scenario, not a forecast. 1,000 is a scenario size, not a pilot population or an AIA employee count. 1 hour is not yet proven - the pilot exists to test whether this level of improvement is achievable. Why 1 hour is a modest assumption: it is 2.5% of a 40-hour week, about one-eighth of the time McKinsey found knowledge workers spend looking for internal information or tracking down colleagues. Framing is released capacity for higher-value work (Double Employee Value).</a:t>
+              <a:t>Illustrative scenario, not a forecast. 1,000 is a scenario size - not a pilot population and not an AIA employee count. 1 hour is not yet proven; the pilot exists to test whether it is achievable. Why 1 hour is modest: it is 2.5% of a 40-hour week, about one-eighth of the nearly 20% of the week McKinsey (2012) found knowledge workers spend looking for internal information or tracking down colleagues. The value is released capacity for higher-value work - Double Employee Value.</a:t>
             </a:r>
           </a:p>
         </p:txBody>
@@ -1264,7 +1264,7 @@
           <a:lstStyle/>
           <a:p>
             <a:r>
-              <a:t>Six measures, three questions. Quality is not left to the requesting employee alone: periodic independent sample reviews by a business reviewer or subject-matter expert. In Phase 3 the illustrative scenario is replaced by a projection built from this measured data.</a:t>
+              <a:t>Six measures on the real Phase 1 team against a Phase 0 baseline: active employee effort per task, end-to-end completion time, output quality (rated by the employee and confirmed by periodic independent sample reviews from a business reviewer or subject-matter expert), rework rate, manual steps and systems touched, and adoption and repeat use. In Phase 3 the illustrative scenario is replaced with a projection from real data.</a:t>
             </a:r>
           </a:p>
         </p:txBody>
@@ -1334,7 +1334,7 @@
           <a:lstStyle/>
           <a:p>
             <a:r>
-              <a:t>Riley does not compete with Copilot. Copilot Studio, another enterprise agent platform, or future technology could be the engine - a build decision, not the innovation. A generic platform does not arrive knowing AIA. Riley is the AIA-specific coworker layer that connects AIA data, systems, AI capabilities from different teams, business processes, permissions and governance, employee feedback and auditability through one employee experience.</a:t>
+              <a:t>Riley does not compete with Copilot. Copilot Studio, another enterprise agent platform, or future technology could be the engine - a build decision, not the innovation. A generic platform does not arrive knowing AIA. Riley is the AIA-specific coworker layer connecting AIA data, systems, AI capabilities from different teams, business processes, permissions and governance, employee feedback and auditability through one experience.</a:t>
             </a:r>
           </a:p>
         </p:txBody>
@@ -1404,7 +1404,7 @@
           <a:lstStyle/>
           <a:p>
             <a:r>
-              <a:t>Without Riley, every new AI solution can become another separate tool to discover and learn. With Riley, a newly connected capability increases what Riley can do while employees keep using the same interface. Connections are not free or automatic: each needs technical and governance work, done once per capability. Phase 2 exists to prove this thesis.</a:t>
+              <a:t>Without Riley, each new AI capability can become another separate tool to discover and learn. With Riley, a newly connected capability increases what Riley can do while employees keep using the same interface. Integration is not free or automatic: each connection needs technical and governance work, done once per capability, then available to every authorized employee. Phase 2 proves this with an AI tool built by a different AIA team.</a:t>
             </a:r>
           </a:p>
         </p:txBody>
@@ -1474,7 +1474,7 @@
           <a:lstStyle/>
           <a:p>
             <a:r>
-              <a:t>Enduring value, not a one-time productivity gain: Riley's usefulness can grow as more capabilities, workflows and employee feedback are added. Reach grows from one pilot team, to back-office teams across many functions, to the long-term vision of every AIA employee. Across markets, the core experience can be reused while each market adds its own integrations, data controls, governance and process configuration.</a:t>
+              <a:t>Reach grows from one pilot team, to back-office teams across many functions, to the long-term vision: every AIA employee with a virtual coworker that understands the outcome they need and coordinates AIA's capabilities to complete much of the work, with the employee accountable for every decision. Value compounds rather than being a one-time gain: more capabilities, more workflows and more governed feedback. Across markets the core experience can be reused, while each market adds its own integrations, data controls, governance and process configuration.</a:t>
             </a:r>
           </a:p>
         </p:txBody>
@@ -6207,8 +6207,8 @@
         </p:nvSpPr>
         <p:spPr>
           <a:xfrm>
-            <a:off x="448056" y="3657600"/>
-            <a:ext cx="5669280" cy="1188720"/>
+            <a:off x="448056" y="3703320"/>
+            <a:ext cx="5760720" cy="1097280"/>
           </a:xfrm>
           <a:prstGeom prst="rect">
             <a:avLst/>
@@ -6221,15 +6221,31 @@
           </a:bodyPr>
           <a:lstStyle/>
           <a:p>
+            <a:pPr algn="l">
+              <a:spcAft>
+                <a:spcPts val="600"/>
+              </a:spcAft>
+            </a:pPr>
+            <a:r>
+              <a:rPr sz="2200" b="1" i="0">
+                <a:solidFill>
+                  <a:srgbClr val="FFFFFF"/>
+                </a:solidFill>
+                <a:latin typeface="Arial"/>
+              </a:rPr>
+              <a:t>Today, the employee is the connector.</a:t>
+            </a:r>
+          </a:p>
+          <a:p>
             <a:pPr algn="l"/>
             <a:r>
-              <a:rPr sz="1800" b="0" i="0">
+              <a:rPr sz="2200" b="1" i="0">
                 <a:solidFill>
                   <a:srgbClr val="FFFFFF"/>
                 </a:solidFill>
                 <a:latin typeface="Arial"/>
               </a:rPr>
-              <a:t>Describe the outcome you need. Riley coordinates AIA’s data, systems and AI capabilities to complete much of the work. You review and approve.</a:t>
+              <a:t>Riley becomes the connector.</a:t>
             </a:r>
           </a:p>
         </p:txBody>
@@ -6362,8 +6378,8 @@
         </p:nvSpPr>
         <p:spPr>
           <a:xfrm>
-            <a:off x="457200" y="1691640"/>
-            <a:ext cx="1965960" cy="1481328"/>
+            <a:off x="457200" y="2011680"/>
+            <a:ext cx="2514600" cy="1783080"/>
           </a:xfrm>
           <a:prstGeom prst="roundRect">
             <a:avLst>
@@ -6401,8 +6417,8 @@
         </p:blipFill>
         <p:spPr>
           <a:xfrm>
-            <a:off x="621792" y="1828800"/>
-            <a:ext cx="347472" cy="347472"/>
+            <a:off x="685800" y="2212848"/>
+            <a:ext cx="457200" cy="457200"/>
           </a:xfrm>
           <a:prstGeom prst="rect">
             <a:avLst/>
@@ -6417,8 +6433,8 @@
         </p:nvSpPr>
         <p:spPr>
           <a:xfrm>
-            <a:off x="621792" y="2212848"/>
-            <a:ext cx="1691639" cy="274320"/>
+            <a:off x="685800" y="2788920"/>
+            <a:ext cx="2103120" cy="347472"/>
           </a:xfrm>
           <a:prstGeom prst="rect">
             <a:avLst/>
@@ -6433,7 +6449,7 @@
           <a:p>
             <a:pPr algn="l"/>
             <a:r>
-              <a:rPr sz="1500" b="1" i="0">
+              <a:rPr sz="1900" b="1" i="0">
                 <a:solidFill>
                   <a:srgbClr val="333D47"/>
                 </a:solidFill>
@@ -6452,8 +6468,8 @@
         </p:nvSpPr>
         <p:spPr>
           <a:xfrm>
-            <a:off x="621792" y="2496312"/>
-            <a:ext cx="1691639" cy="603504"/>
+            <a:off x="685800" y="3172968"/>
+            <a:ext cx="2103120" cy="566928"/>
           </a:xfrm>
           <a:prstGeom prst="rect">
             <a:avLst/>
@@ -6468,13 +6484,13 @@
           <a:p>
             <a:pPr algn="l"/>
             <a:r>
-              <a:rPr sz="1200" b="0" i="0">
+              <a:rPr sz="1500" b="0" i="0">
                 <a:solidFill>
                   <a:srgbClr val="5A6570"/>
                 </a:solidFill>
                 <a:latin typeface="Arial"/>
               </a:rPr>
-              <a:t>The tool employees already use</a:t>
+              <a:t>Where employees already work</a:t>
             </a:r>
           </a:p>
         </p:txBody>
@@ -6487,8 +6503,8 @@
         </p:nvSpPr>
         <p:spPr>
           <a:xfrm>
-            <a:off x="2496312" y="2313432"/>
-            <a:ext cx="219456" cy="237744"/>
+            <a:off x="3063240" y="2770632"/>
+            <a:ext cx="237744" cy="274320"/>
           </a:xfrm>
           <a:prstGeom prst="rightArrow">
             <a:avLst/>
@@ -6514,8 +6530,8 @@
         </p:nvSpPr>
         <p:spPr>
           <a:xfrm>
-            <a:off x="2788920" y="1691640"/>
-            <a:ext cx="1965960" cy="1481328"/>
+            <a:off x="3383280" y="2011680"/>
+            <a:ext cx="2514600" cy="1783080"/>
           </a:xfrm>
           <a:prstGeom prst="roundRect">
             <a:avLst>
@@ -6553,8 +6569,8 @@
         </p:blipFill>
         <p:spPr>
           <a:xfrm>
-            <a:off x="2953512" y="1828800"/>
-            <a:ext cx="347472" cy="347472"/>
+            <a:off x="3611880" y="2212848"/>
+            <a:ext cx="457200" cy="457200"/>
           </a:xfrm>
           <a:prstGeom prst="rect">
             <a:avLst/>
@@ -6569,8 +6585,8 @@
         </p:nvSpPr>
         <p:spPr>
           <a:xfrm>
-            <a:off x="2953512" y="2212848"/>
-            <a:ext cx="1691639" cy="274320"/>
+            <a:off x="3611880" y="2788920"/>
+            <a:ext cx="2103120" cy="347472"/>
           </a:xfrm>
           <a:prstGeom prst="rect">
             <a:avLst/>
@@ -6585,7 +6601,7 @@
           <a:p>
             <a:pPr algn="l"/>
             <a:r>
-              <a:rPr sz="1500" b="1" i="0">
+              <a:rPr sz="1900" b="1" i="0">
                 <a:solidFill>
                   <a:srgbClr val="333D47"/>
                 </a:solidFill>
@@ -6604,8 +6620,8 @@
         </p:nvSpPr>
         <p:spPr>
           <a:xfrm>
-            <a:off x="2953512" y="2496312"/>
-            <a:ext cx="1691639" cy="603504"/>
+            <a:off x="3611880" y="3172968"/>
+            <a:ext cx="2103120" cy="566928"/>
           </a:xfrm>
           <a:prstGeom prst="rect">
             <a:avLst/>
@@ -6620,13 +6636,13 @@
           <a:p>
             <a:pPr algn="l"/>
             <a:r>
-              <a:rPr sz="1200" b="0" i="0">
+              <a:rPr sz="1500" b="0" i="0">
                 <a:solidFill>
                   <a:srgbClr val="5A6570"/>
                 </a:solidFill>
                 <a:latin typeface="Arial"/>
               </a:rPr>
-              <a:t>On an existing enterprise AI engine, not built from scratch</a:t>
+              <a:t>On an enterprise AI engine</a:t>
             </a:r>
           </a:p>
         </p:txBody>
@@ -6639,8 +6655,8 @@
         </p:nvSpPr>
         <p:spPr>
           <a:xfrm>
-            <a:off x="4828031" y="2313432"/>
-            <a:ext cx="219456" cy="237744"/>
+            <a:off x="5989320" y="2770632"/>
+            <a:ext cx="237744" cy="274320"/>
           </a:xfrm>
           <a:prstGeom prst="rightArrow">
             <a:avLst/>
@@ -6666,8 +6682,158 @@
         </p:nvSpPr>
         <p:spPr>
           <a:xfrm>
-            <a:off x="5120640" y="1691640"/>
-            <a:ext cx="1965960" cy="1481328"/>
+            <a:off x="6309360" y="2011680"/>
+            <a:ext cx="2514600" cy="1783080"/>
+          </a:xfrm>
+          <a:prstGeom prst="roundRect">
+            <a:avLst>
+              <a:gd name="adj" fmla="val 8000"/>
+            </a:avLst>
+          </a:prstGeom>
+          <a:solidFill>
+            <a:srgbClr val="D31145"/>
+          </a:solidFill>
+          <a:ln>
+            <a:noFill/>
+          </a:ln>
+        </p:spPr>
+        <p:txBody>
+          <a:bodyPr rtlCol="0" anchor="ctr"/>
+          <a:lstStyle/>
+          <a:p/>
+        </p:txBody>
+      </p:sp>
+      <p:pic>
+        <p:nvPicPr>
+          <p:cNvPr id="17" name="Picture 16" descr="LuUserCheck_w.png"/>
+          <p:cNvPicPr>
+            <a:picLocks noChangeAspect="1"/>
+          </p:cNvPicPr>
+          <p:nvPr/>
+        </p:nvPicPr>
+        <p:blipFill>
+          <a:blip r:embed="rId5"/>
+          <a:stretch>
+            <a:fillRect/>
+          </a:stretch>
+        </p:blipFill>
+        <p:spPr>
+          <a:xfrm>
+            <a:off x="6537960" y="2212848"/>
+            <a:ext cx="457200" cy="457200"/>
+          </a:xfrm>
+          <a:prstGeom prst="rect">
+            <a:avLst/>
+          </a:prstGeom>
+        </p:spPr>
+      </p:pic>
+      <p:sp>
+        <p:nvSpPr>
+          <p:cNvPr id="18" name="TextBox 17"/>
+          <p:cNvSpPr txBox="1"/>
+          <p:nvPr/>
+        </p:nvSpPr>
+        <p:spPr>
+          <a:xfrm>
+            <a:off x="6537960" y="2788920"/>
+            <a:ext cx="2103120" cy="347472"/>
+          </a:xfrm>
+          <a:prstGeom prst="rect">
+            <a:avLst/>
+          </a:prstGeom>
+          <a:noFill/>
+        </p:spPr>
+        <p:txBody>
+          <a:bodyPr wrap="square" lIns="0" rIns="0" tIns="0" bIns="0" anchor="t">
+            <a:noAutofit/>
+          </a:bodyPr>
+          <a:lstStyle/>
+          <a:p>
+            <a:pPr algn="l"/>
+            <a:r>
+              <a:rPr sz="1900" b="1" i="0">
+                <a:solidFill>
+                  <a:srgbClr val="FFFFFF"/>
+                </a:solidFill>
+                <a:latin typeface="Arial"/>
+              </a:rPr>
+              <a:t>Approval gate</a:t>
+            </a:r>
+          </a:p>
+        </p:txBody>
+      </p:sp>
+      <p:sp>
+        <p:nvSpPr>
+          <p:cNvPr id="19" name="TextBox 18"/>
+          <p:cNvSpPr txBox="1"/>
+          <p:nvPr/>
+        </p:nvSpPr>
+        <p:spPr>
+          <a:xfrm>
+            <a:off x="6537960" y="3172968"/>
+            <a:ext cx="2103120" cy="566928"/>
+          </a:xfrm>
+          <a:prstGeom prst="rect">
+            <a:avLst/>
+          </a:prstGeom>
+          <a:noFill/>
+        </p:spPr>
+        <p:txBody>
+          <a:bodyPr wrap="square" lIns="0" rIns="0" tIns="0" bIns="0" anchor="t">
+            <a:noAutofit/>
+          </a:bodyPr>
+          <a:lstStyle/>
+          <a:p>
+            <a:pPr algn="l"/>
+            <a:r>
+              <a:rPr sz="1500" b="0" i="0">
+                <a:solidFill>
+                  <a:srgbClr val="FFFFFF"/>
+                </a:solidFill>
+                <a:latin typeface="Arial"/>
+              </a:rPr>
+              <a:t>The employee signs off before any final action</a:t>
+            </a:r>
+          </a:p>
+        </p:txBody>
+      </p:sp>
+      <p:sp>
+        <p:nvSpPr>
+          <p:cNvPr id="20" name="Right Arrow 19"/>
+          <p:cNvSpPr/>
+          <p:nvPr/>
+        </p:nvSpPr>
+        <p:spPr>
+          <a:xfrm>
+            <a:off x="8915400" y="2770632"/>
+            <a:ext cx="237744" cy="274320"/>
+          </a:xfrm>
+          <a:prstGeom prst="rightArrow">
+            <a:avLst/>
+          </a:prstGeom>
+          <a:solidFill>
+            <a:srgbClr val="8A939B"/>
+          </a:solidFill>
+          <a:ln>
+            <a:noFill/>
+          </a:ln>
+        </p:spPr>
+        <p:txBody>
+          <a:bodyPr rtlCol="0" anchor="ctr"/>
+          <a:lstStyle/>
+          <a:p/>
+        </p:txBody>
+      </p:sp>
+      <p:sp>
+        <p:nvSpPr>
+          <p:cNvPr id="21" name="Rounded Rectangle 20"/>
+          <p:cNvSpPr/>
+          <p:nvPr/>
+        </p:nvSpPr>
+        <p:spPr>
+          <a:xfrm>
+            <a:off x="9235440" y="2011680"/>
+            <a:ext cx="2514600" cy="1783080"/>
           </a:xfrm>
           <a:prstGeom prst="roundRect">
             <a:avLst>
@@ -6691,7 +6857,502 @@
       </p:sp>
       <p:pic>
         <p:nvPicPr>
-          <p:cNvPr id="17" name="Picture 16" descr="LuFileText_c.png"/>
+          <p:cNvPr id="22" name="Picture 21" descr="LuSend_c.png"/>
+          <p:cNvPicPr>
+            <a:picLocks noChangeAspect="1"/>
+          </p:cNvPicPr>
+          <p:nvPr/>
+        </p:nvPicPr>
+        <p:blipFill>
+          <a:blip r:embed="rId6"/>
+          <a:stretch>
+            <a:fillRect/>
+          </a:stretch>
+        </p:blipFill>
+        <p:spPr>
+          <a:xfrm>
+            <a:off x="9464040" y="2212848"/>
+            <a:ext cx="457200" cy="457200"/>
+          </a:xfrm>
+          <a:prstGeom prst="rect">
+            <a:avLst/>
+          </a:prstGeom>
+        </p:spPr>
+      </p:pic>
+      <p:sp>
+        <p:nvSpPr>
+          <p:cNvPr id="23" name="TextBox 22"/>
+          <p:cNvSpPr txBox="1"/>
+          <p:nvPr/>
+        </p:nvSpPr>
+        <p:spPr>
+          <a:xfrm>
+            <a:off x="9464040" y="2788920"/>
+            <a:ext cx="2103120" cy="347472"/>
+          </a:xfrm>
+          <a:prstGeom prst="rect">
+            <a:avLst/>
+          </a:prstGeom>
+          <a:noFill/>
+        </p:spPr>
+        <p:txBody>
+          <a:bodyPr wrap="square" lIns="0" rIns="0" tIns="0" bIns="0" anchor="t">
+            <a:noAutofit/>
+          </a:bodyPr>
+          <a:lstStyle/>
+          <a:p>
+            <a:pPr algn="l"/>
+            <a:r>
+              <a:rPr sz="1900" b="1" i="0">
+                <a:solidFill>
+                  <a:srgbClr val="333D47"/>
+                </a:solidFill>
+                <a:latin typeface="Arial"/>
+              </a:rPr>
+              <a:t>Action taken</a:t>
+            </a:r>
+          </a:p>
+        </p:txBody>
+      </p:sp>
+      <p:sp>
+        <p:nvSpPr>
+          <p:cNvPr id="24" name="TextBox 23"/>
+          <p:cNvSpPr txBox="1"/>
+          <p:nvPr/>
+        </p:nvSpPr>
+        <p:spPr>
+          <a:xfrm>
+            <a:off x="9464040" y="3172968"/>
+            <a:ext cx="2103120" cy="566928"/>
+          </a:xfrm>
+          <a:prstGeom prst="rect">
+            <a:avLst/>
+          </a:prstGeom>
+          <a:noFill/>
+        </p:spPr>
+        <p:txBody>
+          <a:bodyPr wrap="square" lIns="0" rIns="0" tIns="0" bIns="0" anchor="t">
+            <a:noAutofit/>
+          </a:bodyPr>
+          <a:lstStyle/>
+          <a:p>
+            <a:pPr algn="l"/>
+            <a:r>
+              <a:rPr sz="1500" b="0" i="0">
+                <a:solidFill>
+                  <a:srgbClr val="5A6570"/>
+                </a:solidFill>
+                <a:latin typeface="Arial"/>
+              </a:rPr>
+              <a:t>Recorded and traceable</a:t>
+            </a:r>
+          </a:p>
+        </p:txBody>
+      </p:sp>
+      <p:sp>
+        <p:nvSpPr>
+          <p:cNvPr id="25" name="Rounded Rectangle 24"/>
+          <p:cNvSpPr/>
+          <p:nvPr/>
+        </p:nvSpPr>
+        <p:spPr>
+          <a:xfrm>
+            <a:off x="457200" y="4206240"/>
+            <a:ext cx="2697480" cy="1005840"/>
+          </a:xfrm>
+          <a:prstGeom prst="roundRect">
+            <a:avLst>
+              <a:gd name="adj" fmla="val 10000"/>
+            </a:avLst>
+          </a:prstGeom>
+          <a:solidFill>
+            <a:srgbClr val="F4F2F0"/>
+          </a:solidFill>
+          <a:ln>
+            <a:noFill/>
+          </a:ln>
+        </p:spPr>
+        <p:txBody>
+          <a:bodyPr rtlCol="0" anchor="ctr"/>
+          <a:lstStyle/>
+          <a:p/>
+        </p:txBody>
+      </p:sp>
+      <p:sp>
+        <p:nvSpPr>
+          <p:cNvPr id="26" name="Oval 25"/>
+          <p:cNvSpPr/>
+          <p:nvPr/>
+        </p:nvSpPr>
+        <p:spPr>
+          <a:xfrm>
+            <a:off x="658368" y="4407408"/>
+            <a:ext cx="603504" cy="603504"/>
+          </a:xfrm>
+          <a:prstGeom prst="ellipse">
+            <a:avLst/>
+          </a:prstGeom>
+          <a:solidFill>
+            <a:srgbClr val="333D47"/>
+          </a:solidFill>
+          <a:ln>
+            <a:noFill/>
+          </a:ln>
+        </p:spPr>
+        <p:txBody>
+          <a:bodyPr rtlCol="0" anchor="ctr"/>
+          <a:lstStyle/>
+          <a:p/>
+        </p:txBody>
+      </p:sp>
+      <p:pic>
+        <p:nvPicPr>
+          <p:cNvPr id="27" name="Picture 26" descr="LuKeyRound_w.png"/>
+          <p:cNvPicPr>
+            <a:picLocks noChangeAspect="1"/>
+          </p:cNvPicPr>
+          <p:nvPr/>
+        </p:nvPicPr>
+        <p:blipFill>
+          <a:blip r:embed="rId7"/>
+          <a:stretch>
+            <a:fillRect/>
+          </a:stretch>
+        </p:blipFill>
+        <p:spPr>
+          <a:xfrm>
+            <a:off x="803208" y="4552248"/>
+            <a:ext cx="313822" cy="313822"/>
+          </a:xfrm>
+          <a:prstGeom prst="rect">
+            <a:avLst/>
+          </a:prstGeom>
+        </p:spPr>
+      </p:pic>
+      <p:sp>
+        <p:nvSpPr>
+          <p:cNvPr id="28" name="TextBox 27"/>
+          <p:cNvSpPr txBox="1"/>
+          <p:nvPr/>
+        </p:nvSpPr>
+        <p:spPr>
+          <a:xfrm>
+            <a:off x="1399032" y="4206240"/>
+            <a:ext cx="1673352" cy="1005840"/>
+          </a:xfrm>
+          <a:prstGeom prst="rect">
+            <a:avLst/>
+          </a:prstGeom>
+          <a:noFill/>
+        </p:spPr>
+        <p:txBody>
+          <a:bodyPr wrap="square" lIns="0" rIns="0" tIns="0" bIns="0" anchor="ctr">
+            <a:noAutofit/>
+          </a:bodyPr>
+          <a:lstStyle/>
+          <a:p>
+            <a:pPr algn="l"/>
+            <a:r>
+              <a:rPr sz="1500" b="1" i="0">
+                <a:solidFill>
+                  <a:srgbClr val="333D47"/>
+                </a:solidFill>
+                <a:latin typeface="Arial"/>
+              </a:rPr>
+              <a:t>Your permissions only</a:t>
+            </a:r>
+          </a:p>
+        </p:txBody>
+      </p:sp>
+      <p:sp>
+        <p:nvSpPr>
+          <p:cNvPr id="29" name="Rounded Rectangle 28"/>
+          <p:cNvSpPr/>
+          <p:nvPr/>
+        </p:nvSpPr>
+        <p:spPr>
+          <a:xfrm>
+            <a:off x="3319272" y="4206240"/>
+            <a:ext cx="2697480" cy="1005840"/>
+          </a:xfrm>
+          <a:prstGeom prst="roundRect">
+            <a:avLst>
+              <a:gd name="adj" fmla="val 10000"/>
+            </a:avLst>
+          </a:prstGeom>
+          <a:solidFill>
+            <a:srgbClr val="F4F2F0"/>
+          </a:solidFill>
+          <a:ln>
+            <a:noFill/>
+          </a:ln>
+        </p:spPr>
+        <p:txBody>
+          <a:bodyPr rtlCol="0" anchor="ctr"/>
+          <a:lstStyle/>
+          <a:p/>
+        </p:txBody>
+      </p:sp>
+      <p:sp>
+        <p:nvSpPr>
+          <p:cNvPr id="30" name="Oval 29"/>
+          <p:cNvSpPr/>
+          <p:nvPr/>
+        </p:nvSpPr>
+        <p:spPr>
+          <a:xfrm>
+            <a:off x="3520440" y="4407408"/>
+            <a:ext cx="603504" cy="603504"/>
+          </a:xfrm>
+          <a:prstGeom prst="ellipse">
+            <a:avLst/>
+          </a:prstGeom>
+          <a:solidFill>
+            <a:srgbClr val="333D47"/>
+          </a:solidFill>
+          <a:ln>
+            <a:noFill/>
+          </a:ln>
+        </p:spPr>
+        <p:txBody>
+          <a:bodyPr rtlCol="0" anchor="ctr"/>
+          <a:lstStyle/>
+          <a:p/>
+        </p:txBody>
+      </p:sp>
+      <p:pic>
+        <p:nvPicPr>
+          <p:cNvPr id="31" name="Picture 30" descr="LuShieldCheck_w.png"/>
+          <p:cNvPicPr>
+            <a:picLocks noChangeAspect="1"/>
+          </p:cNvPicPr>
+          <p:nvPr/>
+        </p:nvPicPr>
+        <p:blipFill>
+          <a:blip r:embed="rId8"/>
+          <a:stretch>
+            <a:fillRect/>
+          </a:stretch>
+        </p:blipFill>
+        <p:spPr>
+          <a:xfrm>
+            <a:off x="3665280" y="4552248"/>
+            <a:ext cx="313822" cy="313822"/>
+          </a:xfrm>
+          <a:prstGeom prst="rect">
+            <a:avLst/>
+          </a:prstGeom>
+        </p:spPr>
+      </p:pic>
+      <p:sp>
+        <p:nvSpPr>
+          <p:cNvPr id="32" name="TextBox 31"/>
+          <p:cNvSpPr txBox="1"/>
+          <p:nvPr/>
+        </p:nvSpPr>
+        <p:spPr>
+          <a:xfrm>
+            <a:off x="4261104" y="4206240"/>
+            <a:ext cx="1673352" cy="1005840"/>
+          </a:xfrm>
+          <a:prstGeom prst="rect">
+            <a:avLst/>
+          </a:prstGeom>
+          <a:noFill/>
+        </p:spPr>
+        <p:txBody>
+          <a:bodyPr wrap="square" lIns="0" rIns="0" tIns="0" bIns="0" anchor="ctr">
+            <a:noAutofit/>
+          </a:bodyPr>
+          <a:lstStyle/>
+          <a:p>
+            <a:pPr algn="l"/>
+            <a:r>
+              <a:rPr sz="1500" b="1" i="0">
+                <a:solidFill>
+                  <a:srgbClr val="333D47"/>
+                </a:solidFill>
+                <a:latin typeface="Arial"/>
+              </a:rPr>
+              <a:t>AIA data controls</a:t>
+            </a:r>
+          </a:p>
+        </p:txBody>
+      </p:sp>
+      <p:sp>
+        <p:nvSpPr>
+          <p:cNvPr id="33" name="Rounded Rectangle 32"/>
+          <p:cNvSpPr/>
+          <p:nvPr/>
+        </p:nvSpPr>
+        <p:spPr>
+          <a:xfrm>
+            <a:off x="6181344" y="4206240"/>
+            <a:ext cx="2697480" cy="1005840"/>
+          </a:xfrm>
+          <a:prstGeom prst="roundRect">
+            <a:avLst>
+              <a:gd name="adj" fmla="val 10000"/>
+            </a:avLst>
+          </a:prstGeom>
+          <a:solidFill>
+            <a:srgbClr val="F4F2F0"/>
+          </a:solidFill>
+          <a:ln>
+            <a:noFill/>
+          </a:ln>
+        </p:spPr>
+        <p:txBody>
+          <a:bodyPr rtlCol="0" anchor="ctr"/>
+          <a:lstStyle/>
+          <a:p/>
+        </p:txBody>
+      </p:sp>
+      <p:sp>
+        <p:nvSpPr>
+          <p:cNvPr id="34" name="Oval 33"/>
+          <p:cNvSpPr/>
+          <p:nvPr/>
+        </p:nvSpPr>
+        <p:spPr>
+          <a:xfrm>
+            <a:off x="6382512" y="4407408"/>
+            <a:ext cx="603504" cy="603504"/>
+          </a:xfrm>
+          <a:prstGeom prst="ellipse">
+            <a:avLst/>
+          </a:prstGeom>
+          <a:solidFill>
+            <a:srgbClr val="333D47"/>
+          </a:solidFill>
+          <a:ln>
+            <a:noFill/>
+          </a:ln>
+        </p:spPr>
+        <p:txBody>
+          <a:bodyPr rtlCol="0" anchor="ctr"/>
+          <a:lstStyle/>
+          <a:p/>
+        </p:txBody>
+      </p:sp>
+      <p:pic>
+        <p:nvPicPr>
+          <p:cNvPr id="35" name="Picture 34" descr="LuRefreshCw_w.png"/>
+          <p:cNvPicPr>
+            <a:picLocks noChangeAspect="1"/>
+          </p:cNvPicPr>
+          <p:nvPr/>
+        </p:nvPicPr>
+        <p:blipFill>
+          <a:blip r:embed="rId9"/>
+          <a:stretch>
+            <a:fillRect/>
+          </a:stretch>
+        </p:blipFill>
+        <p:spPr>
+          <a:xfrm>
+            <a:off x="6527352" y="4552248"/>
+            <a:ext cx="313822" cy="313822"/>
+          </a:xfrm>
+          <a:prstGeom prst="rect">
+            <a:avLst/>
+          </a:prstGeom>
+        </p:spPr>
+      </p:pic>
+      <p:sp>
+        <p:nvSpPr>
+          <p:cNvPr id="36" name="TextBox 35"/>
+          <p:cNvSpPr txBox="1"/>
+          <p:nvPr/>
+        </p:nvSpPr>
+        <p:spPr>
+          <a:xfrm>
+            <a:off x="7123176" y="4206240"/>
+            <a:ext cx="1673352" cy="1005840"/>
+          </a:xfrm>
+          <a:prstGeom prst="rect">
+            <a:avLst/>
+          </a:prstGeom>
+          <a:noFill/>
+        </p:spPr>
+        <p:txBody>
+          <a:bodyPr wrap="square" lIns="0" rIns="0" tIns="0" bIns="0" anchor="ctr">
+            <a:noAutofit/>
+          </a:bodyPr>
+          <a:lstStyle/>
+          <a:p>
+            <a:pPr algn="l"/>
+            <a:r>
+              <a:rPr sz="1500" b="1" i="0">
+                <a:solidFill>
+                  <a:srgbClr val="333D47"/>
+                </a:solidFill>
+                <a:latin typeface="Arial"/>
+              </a:rPr>
+              <a:t>Governed learning</a:t>
+            </a:r>
+          </a:p>
+        </p:txBody>
+      </p:sp>
+      <p:sp>
+        <p:nvSpPr>
+          <p:cNvPr id="37" name="Rounded Rectangle 36"/>
+          <p:cNvSpPr/>
+          <p:nvPr/>
+        </p:nvSpPr>
+        <p:spPr>
+          <a:xfrm>
+            <a:off x="9043416" y="4206240"/>
+            <a:ext cx="2697480" cy="1005840"/>
+          </a:xfrm>
+          <a:prstGeom prst="roundRect">
+            <a:avLst>
+              <a:gd name="adj" fmla="val 10000"/>
+            </a:avLst>
+          </a:prstGeom>
+          <a:solidFill>
+            <a:srgbClr val="F4F2F0"/>
+          </a:solidFill>
+          <a:ln>
+            <a:noFill/>
+          </a:ln>
+        </p:spPr>
+        <p:txBody>
+          <a:bodyPr rtlCol="0" anchor="ctr"/>
+          <a:lstStyle/>
+          <a:p/>
+        </p:txBody>
+      </p:sp>
+      <p:sp>
+        <p:nvSpPr>
+          <p:cNvPr id="38" name="Oval 37"/>
+          <p:cNvSpPr/>
+          <p:nvPr/>
+        </p:nvSpPr>
+        <p:spPr>
+          <a:xfrm>
+            <a:off x="9244584" y="4407408"/>
+            <a:ext cx="603504" cy="603504"/>
+          </a:xfrm>
+          <a:prstGeom prst="ellipse">
+            <a:avLst/>
+          </a:prstGeom>
+          <a:solidFill>
+            <a:srgbClr val="333D47"/>
+          </a:solidFill>
+          <a:ln>
+            <a:noFill/>
+          </a:ln>
+        </p:spPr>
+        <p:txBody>
+          <a:bodyPr rtlCol="0" anchor="ctr"/>
+          <a:lstStyle/>
+          <a:p/>
+        </p:txBody>
+      </p:sp>
+      <p:pic>
+        <p:nvPicPr>
+          <p:cNvPr id="39" name="Picture 38" descr="LuUserCheck_w.png"/>
           <p:cNvPicPr>
             <a:picLocks noChangeAspect="1"/>
           </p:cNvPicPr>
@@ -6705,8 +7366,8 @@
         </p:blipFill>
         <p:spPr>
           <a:xfrm>
-            <a:off x="5285231" y="1828800"/>
-            <a:ext cx="347472" cy="347472"/>
+            <a:off x="9389424" y="4552248"/>
+            <a:ext cx="313822" cy="313822"/>
           </a:xfrm>
           <a:prstGeom prst="rect">
             <a:avLst/>
@@ -6715,439 +7376,14 @@
       </p:pic>
       <p:sp>
         <p:nvSpPr>
-          <p:cNvPr id="18" name="TextBox 17"/>
+          <p:cNvPr id="40" name="TextBox 39"/>
           <p:cNvSpPr txBox="1"/>
           <p:nvPr/>
         </p:nvSpPr>
         <p:spPr>
           <a:xfrm>
-            <a:off x="5285231" y="2212848"/>
-            <a:ext cx="1691639" cy="274320"/>
-          </a:xfrm>
-          <a:prstGeom prst="rect">
-            <a:avLst/>
-          </a:prstGeom>
-          <a:noFill/>
-        </p:spPr>
-        <p:txBody>
-          <a:bodyPr wrap="square" lIns="0" rIns="0" tIns="0" bIns="0" anchor="t">
-            <a:noAutofit/>
-          </a:bodyPr>
-          <a:lstStyle/>
-          <a:p>
-            <a:pPr algn="l"/>
-            <a:r>
-              <a:rPr sz="1500" b="1" i="0">
-                <a:solidFill>
-                  <a:srgbClr val="333D47"/>
-                </a:solidFill>
-                <a:latin typeface="Arial"/>
-              </a:rPr>
-              <a:t>Finished draft</a:t>
-            </a:r>
-          </a:p>
-        </p:txBody>
-      </p:sp>
-      <p:sp>
-        <p:nvSpPr>
-          <p:cNvPr id="19" name="TextBox 18"/>
-          <p:cNvSpPr txBox="1"/>
-          <p:nvPr/>
-        </p:nvSpPr>
-        <p:spPr>
-          <a:xfrm>
-            <a:off x="5285231" y="2496312"/>
-            <a:ext cx="1691639" cy="603504"/>
-          </a:xfrm>
-          <a:prstGeom prst="rect">
-            <a:avLst/>
-          </a:prstGeom>
-          <a:noFill/>
-        </p:spPr>
-        <p:txBody>
-          <a:bodyPr wrap="square" lIns="0" rIns="0" tIns="0" bIns="0" anchor="t">
-            <a:noAutofit/>
-          </a:bodyPr>
-          <a:lstStyle/>
-          <a:p>
-            <a:pPr algn="l"/>
-            <a:r>
-              <a:rPr sz="1200" b="0" i="0">
-                <a:solidFill>
-                  <a:srgbClr val="5A6570"/>
-                </a:solidFill>
-                <a:latin typeface="Arial"/>
-              </a:rPr>
-              <a:t>Ready for review</a:t>
-            </a:r>
-          </a:p>
-        </p:txBody>
-      </p:sp>
-      <p:sp>
-        <p:nvSpPr>
-          <p:cNvPr id="20" name="Right Arrow 19"/>
-          <p:cNvSpPr/>
-          <p:nvPr/>
-        </p:nvSpPr>
-        <p:spPr>
-          <a:xfrm>
-            <a:off x="7159752" y="2313432"/>
-            <a:ext cx="219456" cy="237744"/>
-          </a:xfrm>
-          <a:prstGeom prst="rightArrow">
-            <a:avLst/>
-          </a:prstGeom>
-          <a:solidFill>
-            <a:srgbClr val="8A939B"/>
-          </a:solidFill>
-          <a:ln>
-            <a:noFill/>
-          </a:ln>
-        </p:spPr>
-        <p:txBody>
-          <a:bodyPr rtlCol="0" anchor="ctr"/>
-          <a:lstStyle/>
-          <a:p/>
-        </p:txBody>
-      </p:sp>
-      <p:sp>
-        <p:nvSpPr>
-          <p:cNvPr id="21" name="Rounded Rectangle 20"/>
-          <p:cNvSpPr/>
-          <p:nvPr/>
-        </p:nvSpPr>
-        <p:spPr>
-          <a:xfrm>
-            <a:off x="7452359" y="1691640"/>
-            <a:ext cx="1965960" cy="1481328"/>
-          </a:xfrm>
-          <a:prstGeom prst="roundRect">
-            <a:avLst>
-              <a:gd name="adj" fmla="val 8000"/>
-            </a:avLst>
-          </a:prstGeom>
-          <a:solidFill>
-            <a:srgbClr val="D31145"/>
-          </a:solidFill>
-          <a:ln>
-            <a:noFill/>
-          </a:ln>
-        </p:spPr>
-        <p:txBody>
-          <a:bodyPr rtlCol="0" anchor="ctr"/>
-          <a:lstStyle/>
-          <a:p/>
-        </p:txBody>
-      </p:sp>
-      <p:pic>
-        <p:nvPicPr>
-          <p:cNvPr id="22" name="Picture 21" descr="LuUserCheck_w.png"/>
-          <p:cNvPicPr>
-            <a:picLocks noChangeAspect="1"/>
-          </p:cNvPicPr>
-          <p:nvPr/>
-        </p:nvPicPr>
-        <p:blipFill>
-          <a:blip r:embed="rId6"/>
-          <a:stretch>
-            <a:fillRect/>
-          </a:stretch>
-        </p:blipFill>
-        <p:spPr>
-          <a:xfrm>
-            <a:off x="7616951" y="1828800"/>
-            <a:ext cx="347472" cy="347472"/>
-          </a:xfrm>
-          <a:prstGeom prst="rect">
-            <a:avLst/>
-          </a:prstGeom>
-        </p:spPr>
-      </p:pic>
-      <p:sp>
-        <p:nvSpPr>
-          <p:cNvPr id="23" name="TextBox 22"/>
-          <p:cNvSpPr txBox="1"/>
-          <p:nvPr/>
-        </p:nvSpPr>
-        <p:spPr>
-          <a:xfrm>
-            <a:off x="7616951" y="2212848"/>
-            <a:ext cx="1691639" cy="274320"/>
-          </a:xfrm>
-          <a:prstGeom prst="rect">
-            <a:avLst/>
-          </a:prstGeom>
-          <a:noFill/>
-        </p:spPr>
-        <p:txBody>
-          <a:bodyPr wrap="square" lIns="0" rIns="0" tIns="0" bIns="0" anchor="t">
-            <a:noAutofit/>
-          </a:bodyPr>
-          <a:lstStyle/>
-          <a:p>
-            <a:pPr algn="l"/>
-            <a:r>
-              <a:rPr sz="1500" b="1" i="0">
-                <a:solidFill>
-                  <a:srgbClr val="FFFFFF"/>
-                </a:solidFill>
-                <a:latin typeface="Arial"/>
-              </a:rPr>
-              <a:t>Approval gate</a:t>
-            </a:r>
-          </a:p>
-        </p:txBody>
-      </p:sp>
-      <p:sp>
-        <p:nvSpPr>
-          <p:cNvPr id="24" name="TextBox 23"/>
-          <p:cNvSpPr txBox="1"/>
-          <p:nvPr/>
-        </p:nvSpPr>
-        <p:spPr>
-          <a:xfrm>
-            <a:off x="7616951" y="2496312"/>
-            <a:ext cx="1691639" cy="603504"/>
-          </a:xfrm>
-          <a:prstGeom prst="rect">
-            <a:avLst/>
-          </a:prstGeom>
-          <a:noFill/>
-        </p:spPr>
-        <p:txBody>
-          <a:bodyPr wrap="square" lIns="0" rIns="0" tIns="0" bIns="0" anchor="t">
-            <a:noAutofit/>
-          </a:bodyPr>
-          <a:lstStyle/>
-          <a:p>
-            <a:pPr algn="l"/>
-            <a:r>
-              <a:rPr sz="1200" b="0" i="0">
-                <a:solidFill>
-                  <a:srgbClr val="FFFFFF"/>
-                </a:solidFill>
-                <a:latin typeface="Arial"/>
-              </a:rPr>
-              <a:t>The employee reviews and approves</a:t>
-            </a:r>
-          </a:p>
-        </p:txBody>
-      </p:sp>
-      <p:sp>
-        <p:nvSpPr>
-          <p:cNvPr id="25" name="Right Arrow 24"/>
-          <p:cNvSpPr/>
-          <p:nvPr/>
-        </p:nvSpPr>
-        <p:spPr>
-          <a:xfrm>
-            <a:off x="9491472" y="2313432"/>
-            <a:ext cx="219456" cy="237744"/>
-          </a:xfrm>
-          <a:prstGeom prst="rightArrow">
-            <a:avLst/>
-          </a:prstGeom>
-          <a:solidFill>
-            <a:srgbClr val="8A939B"/>
-          </a:solidFill>
-          <a:ln>
-            <a:noFill/>
-          </a:ln>
-        </p:spPr>
-        <p:txBody>
-          <a:bodyPr rtlCol="0" anchor="ctr"/>
-          <a:lstStyle/>
-          <a:p/>
-        </p:txBody>
-      </p:sp>
-      <p:sp>
-        <p:nvSpPr>
-          <p:cNvPr id="26" name="Rounded Rectangle 25"/>
-          <p:cNvSpPr/>
-          <p:nvPr/>
-        </p:nvSpPr>
-        <p:spPr>
-          <a:xfrm>
-            <a:off x="9784080" y="1691640"/>
-            <a:ext cx="1965960" cy="1481328"/>
-          </a:xfrm>
-          <a:prstGeom prst="roundRect">
-            <a:avLst>
-              <a:gd name="adj" fmla="val 8000"/>
-            </a:avLst>
-          </a:prstGeom>
-          <a:solidFill>
-            <a:srgbClr val="FFFFFF"/>
-          </a:solidFill>
-          <a:ln w="12700">
-            <a:solidFill>
-              <a:srgbClr val="C9C4C0"/>
-            </a:solidFill>
-          </a:ln>
-        </p:spPr>
-        <p:txBody>
-          <a:bodyPr rtlCol="0" anchor="ctr"/>
-          <a:lstStyle/>
-          <a:p/>
-        </p:txBody>
-      </p:sp>
-      <p:pic>
-        <p:nvPicPr>
-          <p:cNvPr id="27" name="Picture 26" descr="LuSend_c.png"/>
-          <p:cNvPicPr>
-            <a:picLocks noChangeAspect="1"/>
-          </p:cNvPicPr>
-          <p:nvPr/>
-        </p:nvPicPr>
-        <p:blipFill>
-          <a:blip r:embed="rId7"/>
-          <a:stretch>
-            <a:fillRect/>
-          </a:stretch>
-        </p:blipFill>
-        <p:spPr>
-          <a:xfrm>
-            <a:off x="9948672" y="1828800"/>
-            <a:ext cx="347472" cy="347472"/>
-          </a:xfrm>
-          <a:prstGeom prst="rect">
-            <a:avLst/>
-          </a:prstGeom>
-        </p:spPr>
-      </p:pic>
-      <p:sp>
-        <p:nvSpPr>
-          <p:cNvPr id="28" name="TextBox 27"/>
-          <p:cNvSpPr txBox="1"/>
-          <p:nvPr/>
-        </p:nvSpPr>
-        <p:spPr>
-          <a:xfrm>
-            <a:off x="9948672" y="2212848"/>
-            <a:ext cx="1691639" cy="274320"/>
-          </a:xfrm>
-          <a:prstGeom prst="rect">
-            <a:avLst/>
-          </a:prstGeom>
-          <a:noFill/>
-        </p:spPr>
-        <p:txBody>
-          <a:bodyPr wrap="square" lIns="0" rIns="0" tIns="0" bIns="0" anchor="t">
-            <a:noAutofit/>
-          </a:bodyPr>
-          <a:lstStyle/>
-          <a:p>
-            <a:pPr algn="l"/>
-            <a:r>
-              <a:rPr sz="1500" b="1" i="0">
-                <a:solidFill>
-                  <a:srgbClr val="333D47"/>
-                </a:solidFill>
-                <a:latin typeface="Arial"/>
-              </a:rPr>
-              <a:t>Final action</a:t>
-            </a:r>
-          </a:p>
-        </p:txBody>
-      </p:sp>
-      <p:sp>
-        <p:nvSpPr>
-          <p:cNvPr id="29" name="TextBox 28"/>
-          <p:cNvSpPr txBox="1"/>
-          <p:nvPr/>
-        </p:nvSpPr>
-        <p:spPr>
-          <a:xfrm>
-            <a:off x="9948672" y="2496312"/>
-            <a:ext cx="1691639" cy="603504"/>
-          </a:xfrm>
-          <a:prstGeom prst="rect">
-            <a:avLst/>
-          </a:prstGeom>
-          <a:noFill/>
-        </p:spPr>
-        <p:txBody>
-          <a:bodyPr wrap="square" lIns="0" rIns="0" tIns="0" bIns="0" anchor="t">
-            <a:noAutofit/>
-          </a:bodyPr>
-          <a:lstStyle/>
-          <a:p>
-            <a:pPr algn="l"/>
-            <a:r>
-              <a:rPr sz="1200" b="0" i="0">
-                <a:solidFill>
-                  <a:srgbClr val="5A6570"/>
-                </a:solidFill>
-                <a:latin typeface="Arial"/>
-              </a:rPr>
-              <a:t>Finalize, send to anyone, or enter into a system</a:t>
-            </a:r>
-          </a:p>
-        </p:txBody>
-      </p:sp>
-      <p:sp>
-        <p:nvSpPr>
-          <p:cNvPr id="30" name="Rounded Rectangle 29"/>
-          <p:cNvSpPr/>
-          <p:nvPr/>
-        </p:nvSpPr>
-        <p:spPr>
-          <a:xfrm>
-            <a:off x="457200" y="3310128"/>
-            <a:ext cx="11292840" cy="512064"/>
-          </a:xfrm>
-          <a:prstGeom prst="roundRect">
-            <a:avLst>
-              <a:gd name="adj" fmla="val 20000"/>
-            </a:avLst>
-          </a:prstGeom>
-          <a:solidFill>
-            <a:srgbClr val="F4F2F0"/>
-          </a:solidFill>
-          <a:ln>
-            <a:noFill/>
-          </a:ln>
-        </p:spPr>
-        <p:txBody>
-          <a:bodyPr rtlCol="0" anchor="ctr"/>
-          <a:lstStyle/>
-          <a:p/>
-        </p:txBody>
-      </p:sp>
-      <p:pic>
-        <p:nvPicPr>
-          <p:cNvPr id="31" name="Picture 30" descr="LuHistory_r.png"/>
-          <p:cNvPicPr>
-            <a:picLocks noChangeAspect="1"/>
-          </p:cNvPicPr>
-          <p:nvPr/>
-        </p:nvPicPr>
-        <p:blipFill>
-          <a:blip r:embed="rId8"/>
-          <a:stretch>
-            <a:fillRect/>
-          </a:stretch>
-        </p:blipFill>
-        <p:spPr>
-          <a:xfrm>
-            <a:off x="685800" y="3401568"/>
-            <a:ext cx="329184" cy="329184"/>
-          </a:xfrm>
-          <a:prstGeom prst="rect">
-            <a:avLst/>
-          </a:prstGeom>
-        </p:spPr>
-      </p:pic>
-      <p:sp>
-        <p:nvSpPr>
-          <p:cNvPr id="32" name="TextBox 31"/>
-          <p:cNvSpPr txBox="1"/>
-          <p:nvPr/>
-        </p:nvSpPr>
-        <p:spPr>
-          <a:xfrm>
-            <a:off x="1143000" y="3310128"/>
-            <a:ext cx="10424160" cy="512064"/>
+            <a:off x="9985248" y="4206240"/>
+            <a:ext cx="1673352" cy="1005840"/>
           </a:xfrm>
           <a:prstGeom prst="rect">
             <a:avLst/>
@@ -7164,628 +7400,11 @@
             <a:r>
               <a:rPr sz="1500" b="1" i="0">
                 <a:solidFill>
-                  <a:srgbClr val="D31145"/>
-                </a:solidFill>
-                <a:latin typeface="Arial"/>
-              </a:rPr>
-              <a:t>Traceable and reviewable.  </a:t>
-            </a:r>
-            <a:r>
-              <a:rPr sz="1500" b="0" i="0">
-                <a:solidFill>
                   <a:srgbClr val="333D47"/>
                 </a:solidFill>
                 <a:latin typeface="Arial"/>
               </a:rPr>
-              <a:t>Riley records the request, capabilities used, output, approval and final action.</a:t>
-            </a:r>
-          </a:p>
-        </p:txBody>
-      </p:sp>
-      <p:sp>
-        <p:nvSpPr>
-          <p:cNvPr id="33" name="Rounded Rectangle 32"/>
-          <p:cNvSpPr/>
-          <p:nvPr/>
-        </p:nvSpPr>
-        <p:spPr>
-          <a:xfrm>
-            <a:off x="457200" y="3986784"/>
-            <a:ext cx="2697480" cy="1645920"/>
-          </a:xfrm>
-          <a:prstGeom prst="roundRect">
-            <a:avLst>
-              <a:gd name="adj" fmla="val 6000"/>
-            </a:avLst>
-          </a:prstGeom>
-          <a:solidFill>
-            <a:srgbClr val="FFFFFF"/>
-          </a:solidFill>
-          <a:ln w="12700">
-            <a:solidFill>
-              <a:srgbClr val="C9C4C0"/>
-            </a:solidFill>
-          </a:ln>
-        </p:spPr>
-        <p:txBody>
-          <a:bodyPr rtlCol="0" anchor="ctr"/>
-          <a:lstStyle/>
-          <a:p/>
-        </p:txBody>
-      </p:sp>
-      <p:sp>
-        <p:nvSpPr>
-          <p:cNvPr id="34" name="Oval 33"/>
-          <p:cNvSpPr/>
-          <p:nvPr/>
-        </p:nvSpPr>
-        <p:spPr>
-          <a:xfrm>
-            <a:off x="658368" y="4114800"/>
-            <a:ext cx="457200" cy="457200"/>
-          </a:xfrm>
-          <a:prstGeom prst="ellipse">
-            <a:avLst/>
-          </a:prstGeom>
-          <a:solidFill>
-            <a:srgbClr val="333D47"/>
-          </a:solidFill>
-          <a:ln>
-            <a:noFill/>
-          </a:ln>
-        </p:spPr>
-        <p:txBody>
-          <a:bodyPr rtlCol="0" anchor="ctr"/>
-          <a:lstStyle/>
-          <a:p/>
-        </p:txBody>
-      </p:sp>
-      <p:pic>
-        <p:nvPicPr>
-          <p:cNvPr id="35" name="Picture 34" descr="LuKeyRound_w.png"/>
-          <p:cNvPicPr>
-            <a:picLocks noChangeAspect="1"/>
-          </p:cNvPicPr>
-          <p:nvPr/>
-        </p:nvPicPr>
-        <p:blipFill>
-          <a:blip r:embed="rId9"/>
-          <a:stretch>
-            <a:fillRect/>
-          </a:stretch>
-        </p:blipFill>
-        <p:spPr>
-          <a:xfrm>
-            <a:off x="768096" y="4224528"/>
-            <a:ext cx="237744" cy="237744"/>
-          </a:xfrm>
-          <a:prstGeom prst="rect">
-            <a:avLst/>
-          </a:prstGeom>
-        </p:spPr>
-      </p:pic>
-      <p:sp>
-        <p:nvSpPr>
-          <p:cNvPr id="36" name="TextBox 35"/>
-          <p:cNvSpPr txBox="1"/>
-          <p:nvPr/>
-        </p:nvSpPr>
-        <p:spPr>
-          <a:xfrm>
-            <a:off x="1234440" y="4114800"/>
-            <a:ext cx="1783080" cy="457200"/>
-          </a:xfrm>
-          <a:prstGeom prst="rect">
-            <a:avLst/>
-          </a:prstGeom>
-          <a:noFill/>
-        </p:spPr>
-        <p:txBody>
-          <a:bodyPr wrap="square" lIns="0" rIns="0" tIns="0" bIns="0" anchor="ctr">
-            <a:noAutofit/>
-          </a:bodyPr>
-          <a:lstStyle/>
-          <a:p>
-            <a:pPr algn="l"/>
-            <a:r>
-              <a:rPr sz="1500" b="1" i="0">
-                <a:solidFill>
-                  <a:srgbClr val="333D47"/>
-                </a:solidFill>
-                <a:latin typeface="Arial"/>
-              </a:rPr>
-              <a:t>Your permissions only</a:t>
-            </a:r>
-          </a:p>
-        </p:txBody>
-      </p:sp>
-      <p:sp>
-        <p:nvSpPr>
-          <p:cNvPr id="37" name="TextBox 36"/>
-          <p:cNvSpPr txBox="1"/>
-          <p:nvPr/>
-        </p:nvSpPr>
-        <p:spPr>
-          <a:xfrm>
-            <a:off x="658368" y="4663440"/>
-            <a:ext cx="2331720" cy="914400"/>
-          </a:xfrm>
-          <a:prstGeom prst="rect">
-            <a:avLst/>
-          </a:prstGeom>
-          <a:noFill/>
-        </p:spPr>
-        <p:txBody>
-          <a:bodyPr wrap="square" lIns="0" rIns="0" tIns="0" bIns="0" anchor="t">
-            <a:noAutofit/>
-          </a:bodyPr>
-          <a:lstStyle/>
-          <a:p>
-            <a:pPr algn="l"/>
-            <a:r>
-              <a:rPr sz="1300" b="0" i="0">
-                <a:solidFill>
-                  <a:srgbClr val="5A6570"/>
-                </a:solidFill>
-                <a:latin typeface="Arial"/>
-              </a:rPr>
-              <a:t>Riley acts with the access the employee already has, and never bypasses existing permissions.</a:t>
-            </a:r>
-          </a:p>
-        </p:txBody>
-      </p:sp>
-      <p:sp>
-        <p:nvSpPr>
-          <p:cNvPr id="38" name="Rounded Rectangle 37"/>
-          <p:cNvSpPr/>
-          <p:nvPr/>
-        </p:nvSpPr>
-        <p:spPr>
-          <a:xfrm>
-            <a:off x="3319272" y="3986784"/>
-            <a:ext cx="2697480" cy="1645920"/>
-          </a:xfrm>
-          <a:prstGeom prst="roundRect">
-            <a:avLst>
-              <a:gd name="adj" fmla="val 6000"/>
-            </a:avLst>
-          </a:prstGeom>
-          <a:solidFill>
-            <a:srgbClr val="FFFFFF"/>
-          </a:solidFill>
-          <a:ln w="12700">
-            <a:solidFill>
-              <a:srgbClr val="C9C4C0"/>
-            </a:solidFill>
-          </a:ln>
-        </p:spPr>
-        <p:txBody>
-          <a:bodyPr rtlCol="0" anchor="ctr"/>
-          <a:lstStyle/>
-          <a:p/>
-        </p:txBody>
-      </p:sp>
-      <p:sp>
-        <p:nvSpPr>
-          <p:cNvPr id="39" name="Oval 38"/>
-          <p:cNvSpPr/>
-          <p:nvPr/>
-        </p:nvSpPr>
-        <p:spPr>
-          <a:xfrm>
-            <a:off x="3520440" y="4114800"/>
-            <a:ext cx="457200" cy="457200"/>
-          </a:xfrm>
-          <a:prstGeom prst="ellipse">
-            <a:avLst/>
-          </a:prstGeom>
-          <a:solidFill>
-            <a:srgbClr val="333D47"/>
-          </a:solidFill>
-          <a:ln>
-            <a:noFill/>
-          </a:ln>
-        </p:spPr>
-        <p:txBody>
-          <a:bodyPr rtlCol="0" anchor="ctr"/>
-          <a:lstStyle/>
-          <a:p/>
-        </p:txBody>
-      </p:sp>
-      <p:pic>
-        <p:nvPicPr>
-          <p:cNvPr id="40" name="Picture 39" descr="LuShieldCheck_w.png"/>
-          <p:cNvPicPr>
-            <a:picLocks noChangeAspect="1"/>
-          </p:cNvPicPr>
-          <p:nvPr/>
-        </p:nvPicPr>
-        <p:blipFill>
-          <a:blip r:embed="rId10"/>
-          <a:stretch>
-            <a:fillRect/>
-          </a:stretch>
-        </p:blipFill>
-        <p:spPr>
-          <a:xfrm>
-            <a:off x="3630168" y="4224528"/>
-            <a:ext cx="237744" cy="237744"/>
-          </a:xfrm>
-          <a:prstGeom prst="rect">
-            <a:avLst/>
-          </a:prstGeom>
-        </p:spPr>
-      </p:pic>
-      <p:sp>
-        <p:nvSpPr>
-          <p:cNvPr id="41" name="TextBox 40"/>
-          <p:cNvSpPr txBox="1"/>
-          <p:nvPr/>
-        </p:nvSpPr>
-        <p:spPr>
-          <a:xfrm>
-            <a:off x="4096512" y="4114800"/>
-            <a:ext cx="1783080" cy="457200"/>
-          </a:xfrm>
-          <a:prstGeom prst="rect">
-            <a:avLst/>
-          </a:prstGeom>
-          <a:noFill/>
-        </p:spPr>
-        <p:txBody>
-          <a:bodyPr wrap="square" lIns="0" rIns="0" tIns="0" bIns="0" anchor="ctr">
-            <a:noAutofit/>
-          </a:bodyPr>
-          <a:lstStyle/>
-          <a:p>
-            <a:pPr algn="l"/>
-            <a:r>
-              <a:rPr sz="1500" b="1" i="0">
-                <a:solidFill>
-                  <a:srgbClr val="333D47"/>
-                </a:solidFill>
-                <a:latin typeface="Arial"/>
-              </a:rPr>
-              <a:t>AIA data controls</a:t>
-            </a:r>
-          </a:p>
-        </p:txBody>
-      </p:sp>
-      <p:sp>
-        <p:nvSpPr>
-          <p:cNvPr id="42" name="TextBox 41"/>
-          <p:cNvSpPr txBox="1"/>
-          <p:nvPr/>
-        </p:nvSpPr>
-        <p:spPr>
-          <a:xfrm>
-            <a:off x="3520440" y="4663440"/>
-            <a:ext cx="2331720" cy="914400"/>
-          </a:xfrm>
-          <a:prstGeom prst="rect">
-            <a:avLst/>
-          </a:prstGeom>
-          <a:noFill/>
-        </p:spPr>
-        <p:txBody>
-          <a:bodyPr wrap="square" lIns="0" rIns="0" tIns="0" bIns="0" anchor="t">
-            <a:noAutofit/>
-          </a:bodyPr>
-          <a:lstStyle/>
-          <a:p>
-            <a:pPr algn="l"/>
-            <a:r>
-              <a:rPr sz="1300" b="0" i="0">
-                <a:solidFill>
-                  <a:srgbClr val="5A6570"/>
-                </a:solidFill>
-                <a:latin typeface="Arial"/>
-              </a:rPr>
-              <a:t>Sensitive and customer data stay under AIA’s existing controls. Approved external sources only.</a:t>
-            </a:r>
-          </a:p>
-        </p:txBody>
-      </p:sp>
-      <p:sp>
-        <p:nvSpPr>
-          <p:cNvPr id="43" name="Rounded Rectangle 42"/>
-          <p:cNvSpPr/>
-          <p:nvPr/>
-        </p:nvSpPr>
-        <p:spPr>
-          <a:xfrm>
-            <a:off x="6181344" y="3986784"/>
-            <a:ext cx="2697480" cy="1645920"/>
-          </a:xfrm>
-          <a:prstGeom prst="roundRect">
-            <a:avLst>
-              <a:gd name="adj" fmla="val 6000"/>
-            </a:avLst>
-          </a:prstGeom>
-          <a:solidFill>
-            <a:srgbClr val="FFFFFF"/>
-          </a:solidFill>
-          <a:ln w="12700">
-            <a:solidFill>
-              <a:srgbClr val="C9C4C0"/>
-            </a:solidFill>
-          </a:ln>
-        </p:spPr>
-        <p:txBody>
-          <a:bodyPr rtlCol="0" anchor="ctr"/>
-          <a:lstStyle/>
-          <a:p/>
-        </p:txBody>
-      </p:sp>
-      <p:sp>
-        <p:nvSpPr>
-          <p:cNvPr id="44" name="Oval 43"/>
-          <p:cNvSpPr/>
-          <p:nvPr/>
-        </p:nvSpPr>
-        <p:spPr>
-          <a:xfrm>
-            <a:off x="6382512" y="4114800"/>
-            <a:ext cx="457200" cy="457200"/>
-          </a:xfrm>
-          <a:prstGeom prst="ellipse">
-            <a:avLst/>
-          </a:prstGeom>
-          <a:solidFill>
-            <a:srgbClr val="333D47"/>
-          </a:solidFill>
-          <a:ln>
-            <a:noFill/>
-          </a:ln>
-        </p:spPr>
-        <p:txBody>
-          <a:bodyPr rtlCol="0" anchor="ctr"/>
-          <a:lstStyle/>
-          <a:p/>
-        </p:txBody>
-      </p:sp>
-      <p:pic>
-        <p:nvPicPr>
-          <p:cNvPr id="45" name="Picture 44" descr="LuRefreshCw_w.png"/>
-          <p:cNvPicPr>
-            <a:picLocks noChangeAspect="1"/>
-          </p:cNvPicPr>
-          <p:nvPr/>
-        </p:nvPicPr>
-        <p:blipFill>
-          <a:blip r:embed="rId11"/>
-          <a:stretch>
-            <a:fillRect/>
-          </a:stretch>
-        </p:blipFill>
-        <p:spPr>
-          <a:xfrm>
-            <a:off x="6492240" y="4224528"/>
-            <a:ext cx="237744" cy="237744"/>
-          </a:xfrm>
-          <a:prstGeom prst="rect">
-            <a:avLst/>
-          </a:prstGeom>
-        </p:spPr>
-      </p:pic>
-      <p:sp>
-        <p:nvSpPr>
-          <p:cNvPr id="46" name="TextBox 45"/>
-          <p:cNvSpPr txBox="1"/>
-          <p:nvPr/>
-        </p:nvSpPr>
-        <p:spPr>
-          <a:xfrm>
-            <a:off x="6958584" y="4114800"/>
-            <a:ext cx="1783080" cy="457200"/>
-          </a:xfrm>
-          <a:prstGeom prst="rect">
-            <a:avLst/>
-          </a:prstGeom>
-          <a:noFill/>
-        </p:spPr>
-        <p:txBody>
-          <a:bodyPr wrap="square" lIns="0" rIns="0" tIns="0" bIns="0" anchor="ctr">
-            <a:noAutofit/>
-          </a:bodyPr>
-          <a:lstStyle/>
-          <a:p>
-            <a:pPr algn="l"/>
-            <a:r>
-              <a:rPr sz="1500" b="1" i="0">
-                <a:solidFill>
-                  <a:srgbClr val="333D47"/>
-                </a:solidFill>
-                <a:latin typeface="Arial"/>
-              </a:rPr>
-              <a:t>Governed learning</a:t>
-            </a:r>
-          </a:p>
-        </p:txBody>
-      </p:sp>
-      <p:sp>
-        <p:nvSpPr>
-          <p:cNvPr id="47" name="TextBox 46"/>
-          <p:cNvSpPr txBox="1"/>
-          <p:nvPr/>
-        </p:nvSpPr>
-        <p:spPr>
-          <a:xfrm>
-            <a:off x="6382512" y="4663440"/>
-            <a:ext cx="2331720" cy="914400"/>
-          </a:xfrm>
-          <a:prstGeom prst="rect">
-            <a:avLst/>
-          </a:prstGeom>
-          <a:noFill/>
-        </p:spPr>
-        <p:txBody>
-          <a:bodyPr wrap="square" lIns="0" rIns="0" tIns="0" bIns="0" anchor="t">
-            <a:noAutofit/>
-          </a:bodyPr>
-          <a:lstStyle/>
-          <a:p>
-            <a:pPr algn="l"/>
-            <a:r>
-              <a:rPr sz="1300" b="0" i="0">
-                <a:solidFill>
-                  <a:srgbClr val="5A6570"/>
-                </a:solidFill>
-                <a:latin typeface="Arial"/>
-              </a:rPr>
-              <a:t>What feedback is captured, who sees it and how improvements are reviewed is agreed with risk and IT.</a:t>
-            </a:r>
-          </a:p>
-        </p:txBody>
-      </p:sp>
-      <p:sp>
-        <p:nvSpPr>
-          <p:cNvPr id="48" name="Rounded Rectangle 47"/>
-          <p:cNvSpPr/>
-          <p:nvPr/>
-        </p:nvSpPr>
-        <p:spPr>
-          <a:xfrm>
-            <a:off x="9043416" y="3986784"/>
-            <a:ext cx="2697480" cy="1645920"/>
-          </a:xfrm>
-          <a:prstGeom prst="roundRect">
-            <a:avLst>
-              <a:gd name="adj" fmla="val 6000"/>
-            </a:avLst>
-          </a:prstGeom>
-          <a:solidFill>
-            <a:srgbClr val="FFFFFF"/>
-          </a:solidFill>
-          <a:ln w="12700">
-            <a:solidFill>
-              <a:srgbClr val="C9C4C0"/>
-            </a:solidFill>
-          </a:ln>
-        </p:spPr>
-        <p:txBody>
-          <a:bodyPr rtlCol="0" anchor="ctr"/>
-          <a:lstStyle/>
-          <a:p/>
-        </p:txBody>
-      </p:sp>
-      <p:sp>
-        <p:nvSpPr>
-          <p:cNvPr id="49" name="Oval 48"/>
-          <p:cNvSpPr/>
-          <p:nvPr/>
-        </p:nvSpPr>
-        <p:spPr>
-          <a:xfrm>
-            <a:off x="9244584" y="4114800"/>
-            <a:ext cx="457200" cy="457200"/>
-          </a:xfrm>
-          <a:prstGeom prst="ellipse">
-            <a:avLst/>
-          </a:prstGeom>
-          <a:solidFill>
-            <a:srgbClr val="333D47"/>
-          </a:solidFill>
-          <a:ln>
-            <a:noFill/>
-          </a:ln>
-        </p:spPr>
-        <p:txBody>
-          <a:bodyPr rtlCol="0" anchor="ctr"/>
-          <a:lstStyle/>
-          <a:p/>
-        </p:txBody>
-      </p:sp>
-      <p:pic>
-        <p:nvPicPr>
-          <p:cNvPr id="50" name="Picture 49" descr="LuUserCheck_w.png"/>
-          <p:cNvPicPr>
-            <a:picLocks noChangeAspect="1"/>
-          </p:cNvPicPr>
-          <p:nvPr/>
-        </p:nvPicPr>
-        <p:blipFill>
-          <a:blip r:embed="rId6"/>
-          <a:stretch>
-            <a:fillRect/>
-          </a:stretch>
-        </p:blipFill>
-        <p:spPr>
-          <a:xfrm>
-            <a:off x="9354312" y="4224528"/>
-            <a:ext cx="237744" cy="237744"/>
-          </a:xfrm>
-          <a:prstGeom prst="rect">
-            <a:avLst/>
-          </a:prstGeom>
-        </p:spPr>
-      </p:pic>
-      <p:sp>
-        <p:nvSpPr>
-          <p:cNvPr id="51" name="TextBox 50"/>
-          <p:cNvSpPr txBox="1"/>
-          <p:nvPr/>
-        </p:nvSpPr>
-        <p:spPr>
-          <a:xfrm>
-            <a:off x="9820656" y="4114800"/>
-            <a:ext cx="1783080" cy="457200"/>
-          </a:xfrm>
-          <a:prstGeom prst="rect">
-            <a:avLst/>
-          </a:prstGeom>
-          <a:noFill/>
-        </p:spPr>
-        <p:txBody>
-          <a:bodyPr wrap="square" lIns="0" rIns="0" tIns="0" bIns="0" anchor="ctr">
-            <a:noAutofit/>
-          </a:bodyPr>
-          <a:lstStyle/>
-          <a:p>
-            <a:pPr algn="l"/>
-            <a:r>
-              <a:rPr sz="1500" b="1" i="0">
-                <a:solidFill>
-                  <a:srgbClr val="333D47"/>
-                </a:solidFill>
-                <a:latin typeface="Arial"/>
-              </a:rPr>
               <a:t>Independent quality review</a:t>
-            </a:r>
-          </a:p>
-        </p:txBody>
-      </p:sp>
-      <p:sp>
-        <p:nvSpPr>
-          <p:cNvPr id="52" name="TextBox 51"/>
-          <p:cNvSpPr txBox="1"/>
-          <p:nvPr/>
-        </p:nvSpPr>
-        <p:spPr>
-          <a:xfrm>
-            <a:off x="9244584" y="4663440"/>
-            <a:ext cx="2331720" cy="914400"/>
-          </a:xfrm>
-          <a:prstGeom prst="rect">
-            <a:avLst/>
-          </a:prstGeom>
-          <a:noFill/>
-        </p:spPr>
-        <p:txBody>
-          <a:bodyPr wrap="square" lIns="0" rIns="0" tIns="0" bIns="0" anchor="t">
-            <a:noAutofit/>
-          </a:bodyPr>
-          <a:lstStyle/>
-          <a:p>
-            <a:pPr algn="l"/>
-            <a:r>
-              <a:rPr sz="1300" b="0" i="0">
-                <a:solidFill>
-                  <a:srgbClr val="5A6570"/>
-                </a:solidFill>
-                <a:latin typeface="Arial"/>
-              </a:rPr>
-              <a:t>Periodic sample reviews by a business reviewer or subject-matter expert.</a:t>
             </a:r>
           </a:p>
         </p:txBody>
@@ -7992,7 +7611,7 @@
         <p:spPr>
           <a:xfrm>
             <a:off x="658368" y="2240279"/>
-            <a:ext cx="1874520" cy="566928"/>
+            <a:ext cx="1874520" cy="603504"/>
           </a:xfrm>
           <a:prstGeom prst="rect">
             <a:avLst/>
@@ -8007,7 +7626,7 @@
           <a:p>
             <a:pPr algn="l"/>
             <a:r>
-              <a:rPr sz="1800" b="1" i="0">
+              <a:rPr sz="1900" b="1" i="0">
                 <a:solidFill>
                   <a:srgbClr val="333D47"/>
                 </a:solidFill>
@@ -8026,8 +7645,8 @@
         </p:nvSpPr>
         <p:spPr>
           <a:xfrm>
-            <a:off x="658368" y="2862072"/>
-            <a:ext cx="1874520" cy="1280160"/>
+            <a:off x="658368" y="2926080"/>
+            <a:ext cx="1874520" cy="1188720"/>
           </a:xfrm>
           <a:prstGeom prst="rect">
             <a:avLst/>
@@ -8042,11 +7661,11 @@
           <a:p>
             <a:pPr algn="l">
               <a:spcAft>
-                <a:spcPts val="300"/>
+                <a:spcPts val="400"/>
               </a:spcAft>
             </a:pPr>
             <a:r>
-              <a:rPr sz="900" b="0" i="0">
+              <a:rPr sz="1000" b="0" i="0">
                 <a:solidFill>
                   <a:srgbClr val="D31145"/>
                 </a:solidFill>
@@ -8055,7 +7674,7 @@
               <a:t>●  </a:t>
             </a:r>
             <a:r>
-              <a:rPr sz="1300" b="0" i="0">
+              <a:rPr sz="1400" b="0" i="0">
                 <a:solidFill>
                   <a:srgbClr val="333D47"/>
                 </a:solidFill>
@@ -8067,11 +7686,11 @@
           <a:p>
             <a:pPr algn="l">
               <a:spcAft>
-                <a:spcPts val="300"/>
+                <a:spcPts val="400"/>
               </a:spcAft>
             </a:pPr>
             <a:r>
-              <a:rPr sz="900" b="0" i="0">
+              <a:rPr sz="1000" b="0" i="0">
                 <a:solidFill>
                   <a:srgbClr val="D31145"/>
                 </a:solidFill>
@@ -8080,38 +7699,13 @@
               <a:t>●  </a:t>
             </a:r>
             <a:r>
-              <a:rPr sz="1300" b="0" i="0">
+              <a:rPr sz="1400" b="0" i="0">
                 <a:solidFill>
                   <a:srgbClr val="333D47"/>
                 </a:solidFill>
                 <a:latin typeface="Arial"/>
               </a:rPr>
-              <a:t>Baseline effort, time, steps</a:t>
-            </a:r>
-          </a:p>
-          <a:p>
-            <a:pPr algn="l">
-              <a:spcAft>
-                <a:spcPts val="300"/>
-              </a:spcAft>
-            </a:pPr>
-            <a:r>
-              <a:rPr sz="900" b="0" i="0">
-                <a:solidFill>
-                  <a:srgbClr val="D31145"/>
-                </a:solidFill>
-                <a:latin typeface="Arial"/>
-              </a:rPr>
-              <a:t>●  </a:t>
-            </a:r>
-            <a:r>
-              <a:rPr sz="1300" b="0" i="0">
-                <a:solidFill>
-                  <a:srgbClr val="333D47"/>
-                </a:solidFill>
-                <a:latin typeface="Arial"/>
-              </a:rPr>
-              <a:t>Confirm data, security, records, governance</a:t>
+              <a:t>Baseline today’s effort</a:t>
             </a:r>
           </a:p>
         </p:txBody>
@@ -8198,7 +7792,7 @@
         <p:spPr>
           <a:xfrm>
             <a:off x="3099816" y="2240279"/>
-            <a:ext cx="2331720" cy="566928"/>
+            <a:ext cx="2331720" cy="603504"/>
           </a:xfrm>
           <a:prstGeom prst="rect">
             <a:avLst/>
@@ -8213,7 +7807,7 @@
           <a:p>
             <a:pPr algn="l"/>
             <a:r>
-              <a:rPr sz="1800" b="1" i="0">
+              <a:rPr sz="1900" b="1" i="0">
                 <a:solidFill>
                   <a:srgbClr val="333D47"/>
                 </a:solidFill>
@@ -8232,8 +7826,8 @@
         </p:nvSpPr>
         <p:spPr>
           <a:xfrm>
-            <a:off x="3099816" y="2862072"/>
-            <a:ext cx="2331720" cy="1280160"/>
+            <a:off x="3099816" y="2926080"/>
+            <a:ext cx="2331720" cy="1188720"/>
           </a:xfrm>
           <a:prstGeom prst="rect">
             <a:avLst/>
@@ -8248,11 +7842,11 @@
           <a:p>
             <a:pPr algn="l">
               <a:spcAft>
-                <a:spcPts val="300"/>
+                <a:spcPts val="400"/>
               </a:spcAft>
             </a:pPr>
             <a:r>
-              <a:rPr sz="900" b="0" i="0">
+              <a:rPr sz="1000" b="0" i="0">
                 <a:solidFill>
                   <a:srgbClr val="D31145"/>
                 </a:solidFill>
@@ -8261,7 +7855,7 @@
               <a:t>●  </a:t>
             </a:r>
             <a:r>
-              <a:rPr sz="1300" b="0" i="0">
+              <a:rPr sz="1400" b="0" i="0">
                 <a:solidFill>
                   <a:srgbClr val="333D47"/>
                 </a:solidFill>
@@ -8273,11 +7867,11 @@
           <a:p>
             <a:pPr algn="l">
               <a:spcAft>
-                <a:spcPts val="300"/>
+                <a:spcPts val="400"/>
               </a:spcAft>
             </a:pPr>
             <a:r>
-              <a:rPr sz="900" b="0" i="0">
+              <a:rPr sz="1000" b="0" i="0">
                 <a:solidFill>
                   <a:srgbClr val="D31145"/>
                 </a:solidFill>
@@ -8286,38 +7880,13 @@
               <a:t>●  </a:t>
             </a:r>
             <a:r>
-              <a:rPr sz="1300" b="0" i="0">
+              <a:rPr sz="1400" b="0" i="0">
                 <a:solidFill>
                   <a:srgbClr val="333D47"/>
                 </a:solidFill>
                 <a:latin typeface="Arial"/>
               </a:rPr>
-              <a:t>Approval before final action</a:t>
-            </a:r>
-          </a:p>
-          <a:p>
-            <a:pPr algn="l">
-              <a:spcAft>
-                <a:spcPts val="300"/>
-              </a:spcAft>
-            </a:pPr>
-            <a:r>
-              <a:rPr sz="900" b="0" i="0">
-                <a:solidFill>
-                  <a:srgbClr val="D31145"/>
-                </a:solidFill>
-                <a:latin typeface="Arial"/>
-              </a:rPr>
-              <a:t>●  </a:t>
-            </a:r>
-            <a:r>
-              <a:rPr sz="1300" b="0" i="0">
-                <a:solidFill>
-                  <a:srgbClr val="333D47"/>
-                </a:solidFill>
-                <a:latin typeface="Arial"/>
-              </a:rPr>
-              <a:t>Measure vs. baseline, incl. independent quality reviews</a:t>
+              <a:t>Measure against baseline</a:t>
             </a:r>
           </a:p>
         </p:txBody>
@@ -8381,7 +7950,7 @@
                 </a:solidFill>
                 <a:latin typeface="Arial"/>
               </a:rPr>
-              <a:t>THE CORE TEST OF THE IDEA</a:t>
+              <a:t>THE CORE TEST</a:t>
             </a:r>
           </a:p>
         </p:txBody>
@@ -8439,7 +8008,7 @@
         <p:spPr>
           <a:xfrm>
             <a:off x="5998464" y="2286000"/>
-            <a:ext cx="2697480" cy="566928"/>
+            <a:ext cx="2697480" cy="603504"/>
           </a:xfrm>
           <a:prstGeom prst="rect">
             <a:avLst/>
@@ -8454,7 +8023,7 @@
           <a:p>
             <a:pPr algn="l"/>
             <a:r>
-              <a:rPr sz="1800" b="1" i="0">
+              <a:rPr sz="1900" b="1" i="0">
                 <a:solidFill>
                   <a:srgbClr val="FFFFFF"/>
                 </a:solidFill>
@@ -8473,8 +8042,8 @@
         </p:nvSpPr>
         <p:spPr>
           <a:xfrm>
-            <a:off x="5998464" y="2907792"/>
-            <a:ext cx="2697480" cy="1280160"/>
+            <a:off x="5998464" y="2971800"/>
+            <a:ext cx="2697480" cy="1188720"/>
           </a:xfrm>
           <a:prstGeom prst="rect">
             <a:avLst/>
@@ -8489,11 +8058,11 @@
           <a:p>
             <a:pPr algn="l">
               <a:spcAft>
-                <a:spcPts val="300"/>
+                <a:spcPts val="400"/>
               </a:spcAft>
             </a:pPr>
             <a:r>
-              <a:rPr sz="900" b="0" i="0">
+              <a:rPr sz="1000" b="0" i="0">
                 <a:solidFill>
                   <a:srgbClr val="FFFFFF"/>
                 </a:solidFill>
@@ -8502,23 +8071,23 @@
               <a:t>●  </a:t>
             </a:r>
             <a:r>
-              <a:rPr sz="1300" b="0" i="0">
+              <a:rPr sz="1400" b="0" i="0">
                 <a:solidFill>
                   <a:srgbClr val="FFFFFF"/>
                 </a:solidFill>
                 <a:latin typeface="Arial"/>
               </a:rPr>
-              <a:t>Connect an AI tool built by a different AIA team</a:t>
+              <a:t>Connect another AIA team’s AI tool</a:t>
             </a:r>
           </a:p>
           <a:p>
             <a:pPr algn="l">
               <a:spcAft>
-                <a:spcPts val="300"/>
+                <a:spcPts val="400"/>
               </a:spcAft>
             </a:pPr>
             <a:r>
-              <a:rPr sz="900" b="0" i="0">
+              <a:rPr sz="1000" b="0" i="0">
                 <a:solidFill>
                   <a:srgbClr val="FFFFFF"/>
                 </a:solidFill>
@@ -8527,13 +8096,13 @@
               <a:t>●  </a:t>
             </a:r>
             <a:r>
-              <a:rPr sz="1300" b="0" i="0">
+              <a:rPr sz="1400" b="0" i="0">
                 <a:solidFill>
                   <a:srgbClr val="FFFFFF"/>
                 </a:solidFill>
                 <a:latin typeface="Arial"/>
               </a:rPr>
-              <a:t>Extend to a second workflow or team</a:t>
+              <a:t>Add a second workflow</a:t>
             </a:r>
           </a:p>
         </p:txBody>
@@ -8620,7 +8189,7 @@
         <p:spPr>
           <a:xfrm>
             <a:off x="9262872" y="2240279"/>
-            <a:ext cx="2331720" cy="566928"/>
+            <a:ext cx="2331720" cy="603504"/>
           </a:xfrm>
           <a:prstGeom prst="rect">
             <a:avLst/>
@@ -8635,7 +8204,7 @@
           <a:p>
             <a:pPr algn="l"/>
             <a:r>
-              <a:rPr sz="1800" b="1" i="0">
+              <a:rPr sz="1900" b="1" i="0">
                 <a:solidFill>
                   <a:srgbClr val="333D47"/>
                 </a:solidFill>
@@ -8654,8 +8223,8 @@
         </p:nvSpPr>
         <p:spPr>
           <a:xfrm>
-            <a:off x="9262872" y="2862072"/>
-            <a:ext cx="2331720" cy="1280160"/>
+            <a:off x="9262872" y="2926080"/>
+            <a:ext cx="2331720" cy="1188720"/>
           </a:xfrm>
           <a:prstGeom prst="rect">
             <a:avLst/>
@@ -8670,11 +8239,11 @@
           <a:p>
             <a:pPr algn="l">
               <a:spcAft>
-                <a:spcPts val="300"/>
+                <a:spcPts val="400"/>
               </a:spcAft>
             </a:pPr>
             <a:r>
-              <a:rPr sz="900" b="0" i="0">
+              <a:rPr sz="1000" b="0" i="0">
                 <a:solidFill>
                   <a:srgbClr val="D31145"/>
                 </a:solidFill>
@@ -8683,23 +8252,23 @@
               <a:t>●  </a:t>
             </a:r>
             <a:r>
-              <a:rPr sz="1300" b="0" i="0">
+              <a:rPr sz="1400" b="0" i="0">
                 <a:solidFill>
                   <a:srgbClr val="333D47"/>
                 </a:solidFill>
                 <a:latin typeface="Arial"/>
               </a:rPr>
-              <a:t>More teams and connected capabilities</a:t>
+              <a:t>More teams, more capabilities</a:t>
             </a:r>
           </a:p>
           <a:p>
             <a:pPr algn="l">
               <a:spcAft>
-                <a:spcPts val="300"/>
+                <a:spcPts val="400"/>
               </a:spcAft>
             </a:pPr>
             <a:r>
-              <a:rPr sz="900" b="0" i="0">
+              <a:rPr sz="1000" b="0" i="0">
                 <a:solidFill>
                   <a:srgbClr val="D31145"/>
                 </a:solidFill>
@@ -8708,13 +8277,13 @@
               <a:t>●  </a:t>
             </a:r>
             <a:r>
-              <a:rPr sz="1300" b="0" i="0">
+              <a:rPr sz="1400" b="0" i="0">
                 <a:solidFill>
                   <a:srgbClr val="333D47"/>
                 </a:solidFill>
                 <a:latin typeface="Arial"/>
               </a:rPr>
-              <a:t>Replace the scenario with measured projections</a:t>
+              <a:t>Real data replaces the scenario</a:t>
             </a:r>
           </a:p>
         </p:txBody>
@@ -8791,8 +8360,8 @@
         </p:nvSpPr>
         <p:spPr>
           <a:xfrm>
-            <a:off x="4187952" y="4754880"/>
-            <a:ext cx="3017520" cy="960120"/>
+            <a:off x="4187952" y="4800600"/>
+            <a:ext cx="3017520" cy="822960"/>
           </a:xfrm>
           <a:prstGeom prst="rect">
             <a:avLst/>
@@ -8817,19 +8386,19 @@
                 </a:solidFill>
                 <a:latin typeface="Arial"/>
               </a:rPr>
-              <a:t>GO / NO-GO 1</a:t>
+              <a:t>GO / NO-GO</a:t>
             </a:r>
           </a:p>
           <a:p>
             <a:pPr algn="ctr"/>
             <a:r>
-              <a:rPr sz="1300" b="0" i="0">
+              <a:rPr sz="1500" b="1" i="0">
                 <a:solidFill>
                   <a:srgbClr val="333D47"/>
                 </a:solidFill>
                 <a:latin typeface="Arial"/>
               </a:rPr>
-              <a:t>Proceed only if employee effort is reduced, quality is maintained or improved, and usage is sustained.</a:t>
+              <a:t>Effort down, quality held, usage sustained</a:t>
             </a:r>
           </a:p>
         </p:txBody>
@@ -8871,8 +8440,8 @@
         </p:nvSpPr>
         <p:spPr>
           <a:xfrm>
-            <a:off x="7452360" y="4754880"/>
-            <a:ext cx="3017520" cy="960120"/>
+            <a:off x="7452360" y="4800600"/>
+            <a:ext cx="3017520" cy="822960"/>
           </a:xfrm>
           <a:prstGeom prst="rect">
             <a:avLst/>
@@ -8897,70 +8466,19 @@
                 </a:solidFill>
                 <a:latin typeface="Arial"/>
               </a:rPr>
-              <a:t>GO / NO-GO 2</a:t>
+              <a:t>GO / NO-GO</a:t>
             </a:r>
           </a:p>
           <a:p>
             <a:pPr algn="ctr"/>
             <a:r>
-              <a:rPr sz="1300" b="0" i="0">
+              <a:rPr sz="1500" b="1" i="0">
                 <a:solidFill>
                   <a:srgbClr val="333D47"/>
                 </a:solidFill>
                 <a:latin typeface="Arial"/>
               </a:rPr>
-              <a:t>Proceed only if the new capability works through Riley with no new tool, and results hold across both workflows.</a:t>
-            </a:r>
-          </a:p>
-        </p:txBody>
-      </p:sp>
-      <p:sp>
-        <p:nvSpPr>
-          <p:cNvPr id="28" name="TextBox 27"/>
-          <p:cNvSpPr txBox="1"/>
-          <p:nvPr/>
-        </p:nvSpPr>
-        <p:spPr>
-          <a:xfrm>
-            <a:off x="457200" y="4754880"/>
-            <a:ext cx="3566160" cy="960120"/>
-          </a:xfrm>
-          <a:prstGeom prst="rect">
-            <a:avLst/>
-          </a:prstGeom>
-          <a:noFill/>
-        </p:spPr>
-        <p:txBody>
-          <a:bodyPr wrap="square" lIns="0" rIns="0" tIns="0" bIns="0" anchor="t">
-            <a:noAutofit/>
-          </a:bodyPr>
-          <a:lstStyle/>
-          <a:p>
-            <a:pPr algn="l">
-              <a:spcAft>
-                <a:spcPts val="400"/>
-              </a:spcAft>
-            </a:pPr>
-            <a:r>
-              <a:rPr sz="1700" b="1" i="0">
-                <a:solidFill>
-                  <a:srgbClr val="333D47"/>
-                </a:solidFill>
-                <a:latin typeface="Arial"/>
-              </a:rPr>
-              <a:t>Evidence decides every step.</a:t>
-            </a:r>
-          </a:p>
-          <a:p>
-            <a:pPr algn="l"/>
-            <a:r>
-              <a:rPr sz="1300" b="0" i="0">
-                <a:solidFill>
-                  <a:srgbClr val="5A6570"/>
-                </a:solidFill>
-                <a:latin typeface="Arial"/>
-              </a:rPr>
-              <a:t>Each phase must show results before the next begins.</a:t>
+              <a:t>New capability works through Riley, with no new tool</a:t>
             </a:r>
           </a:p>
         </p:txBody>
@@ -9027,7 +8545,7 @@
         <p:spPr>
           <a:xfrm>
             <a:off x="448056" y="1938528"/>
-            <a:ext cx="5760720" cy="777240"/>
+            <a:ext cx="5760720" cy="822960"/>
           </a:xfrm>
           <a:prstGeom prst="rect">
             <a:avLst/>
@@ -9042,13 +8560,25 @@
           <a:p>
             <a:pPr algn="l"/>
             <a:r>
-              <a:rPr sz="2200" b="1" i="0">
+              <a:rPr sz="2400" b="1" i="0">
                 <a:solidFill>
                   <a:srgbClr val="FFFFFF"/>
                 </a:solidFill>
                 <a:latin typeface="Arial"/>
               </a:rPr>
-              <a:t>Seed funding for Phase 1, and one pilot team to prove Riley works.</a:t>
+              <a:t>Seed funding for Phase 1.</a:t>
+            </a:r>
+          </a:p>
+          <a:p>
+            <a:pPr algn="l"/>
+            <a:r>
+              <a:rPr sz="2400" b="1" i="0">
+                <a:solidFill>
+                  <a:srgbClr val="FFFFFF"/>
+                </a:solidFill>
+                <a:latin typeface="Arial"/>
+              </a:rPr>
+              <a:t>One pilot team.</a:t>
             </a:r>
           </a:p>
         </p:txBody>
@@ -9061,8 +8591,8 @@
         </p:nvSpPr>
         <p:spPr>
           <a:xfrm>
-            <a:off x="448056" y="2880360"/>
-            <a:ext cx="347472" cy="347472"/>
+            <a:off x="448056" y="3017520"/>
+            <a:ext cx="365760" cy="365760"/>
           </a:xfrm>
           <a:prstGeom prst="ellipse">
             <a:avLst/>
@@ -9088,8 +8618,8 @@
         </p:nvSpPr>
         <p:spPr>
           <a:xfrm>
-            <a:off x="448056" y="2880360"/>
-            <a:ext cx="347472" cy="347472"/>
+            <a:off x="448056" y="3017520"/>
+            <a:ext cx="365760" cy="365760"/>
           </a:xfrm>
           <a:prstGeom prst="rect">
             <a:avLst/>
@@ -9104,7 +8634,7 @@
           <a:p>
             <a:pPr algn="ctr"/>
             <a:r>
-              <a:rPr sz="1400" b="1" i="0">
+              <a:rPr sz="1500" b="1" i="0">
                 <a:solidFill>
                   <a:srgbClr val="D31145"/>
                 </a:solidFill>
@@ -9123,8 +8653,8 @@
         </p:nvSpPr>
         <p:spPr>
           <a:xfrm>
-            <a:off x="960120" y="2862072"/>
-            <a:ext cx="5303520" cy="384048"/>
+            <a:off x="978408" y="2999232"/>
+            <a:ext cx="5303520" cy="402336"/>
           </a:xfrm>
           <a:prstGeom prst="rect">
             <a:avLst/>
@@ -9139,13 +8669,13 @@
           <a:p>
             <a:pPr algn="l"/>
             <a:r>
-              <a:rPr sz="1700" b="1" i="0">
+              <a:rPr sz="1800" b="1" i="0">
                 <a:solidFill>
                   <a:srgbClr val="FFFFFF"/>
                 </a:solidFill>
                 <a:latin typeface="Arial"/>
               </a:rPr>
-              <a:t>Select a pilot team and first workflow</a:t>
+              <a:t>Select a pilot team and workflow</a:t>
             </a:r>
           </a:p>
         </p:txBody>
@@ -9158,8 +8688,8 @@
         </p:nvSpPr>
         <p:spPr>
           <a:xfrm>
-            <a:off x="448056" y="3337560"/>
-            <a:ext cx="347472" cy="347472"/>
+            <a:off x="448056" y="3493008"/>
+            <a:ext cx="365760" cy="365760"/>
           </a:xfrm>
           <a:prstGeom prst="ellipse">
             <a:avLst/>
@@ -9185,8 +8715,8 @@
         </p:nvSpPr>
         <p:spPr>
           <a:xfrm>
-            <a:off x="448056" y="3337560"/>
-            <a:ext cx="347472" cy="347472"/>
+            <a:off x="448056" y="3493008"/>
+            <a:ext cx="365760" cy="365760"/>
           </a:xfrm>
           <a:prstGeom prst="rect">
             <a:avLst/>
@@ -9201,7 +8731,7 @@
           <a:p>
             <a:pPr algn="ctr"/>
             <a:r>
-              <a:rPr sz="1400" b="1" i="0">
+              <a:rPr sz="1500" b="1" i="0">
                 <a:solidFill>
                   <a:srgbClr val="D31145"/>
                 </a:solidFill>
@@ -9220,8 +8750,8 @@
         </p:nvSpPr>
         <p:spPr>
           <a:xfrm>
-            <a:off x="960120" y="3319272"/>
-            <a:ext cx="5303520" cy="384048"/>
+            <a:off x="978408" y="3474720"/>
+            <a:ext cx="5303520" cy="402336"/>
           </a:xfrm>
           <a:prstGeom prst="rect">
             <a:avLst/>
@@ -9236,7 +8766,7 @@
           <a:p>
             <a:pPr algn="l"/>
             <a:r>
-              <a:rPr sz="1700" b="1" i="0">
+              <a:rPr sz="1800" b="1" i="0">
                 <a:solidFill>
                   <a:srgbClr val="FFFFFF"/>
                 </a:solidFill>
@@ -9255,8 +8785,8 @@
         </p:nvSpPr>
         <p:spPr>
           <a:xfrm>
-            <a:off x="448056" y="3794760"/>
-            <a:ext cx="347472" cy="347472"/>
+            <a:off x="448056" y="3968496"/>
+            <a:ext cx="365760" cy="365760"/>
           </a:xfrm>
           <a:prstGeom prst="ellipse">
             <a:avLst/>
@@ -9282,8 +8812,8 @@
         </p:nvSpPr>
         <p:spPr>
           <a:xfrm>
-            <a:off x="448056" y="3794760"/>
-            <a:ext cx="347472" cy="347472"/>
+            <a:off x="448056" y="3968496"/>
+            <a:ext cx="365760" cy="365760"/>
           </a:xfrm>
           <a:prstGeom prst="rect">
             <a:avLst/>
@@ -9298,7 +8828,7 @@
           <a:p>
             <a:pPr algn="ctr"/>
             <a:r>
-              <a:rPr sz="1400" b="1" i="0">
+              <a:rPr sz="1500" b="1" i="0">
                 <a:solidFill>
                   <a:srgbClr val="D31145"/>
                 </a:solidFill>
@@ -9317,8 +8847,8 @@
         </p:nvSpPr>
         <p:spPr>
           <a:xfrm>
-            <a:off x="960120" y="3776472"/>
-            <a:ext cx="5303520" cy="384048"/>
+            <a:off x="978408" y="3950208"/>
+            <a:ext cx="5303520" cy="402336"/>
           </a:xfrm>
           <a:prstGeom prst="rect">
             <a:avLst/>
@@ -9333,7 +8863,7 @@
           <a:p>
             <a:pPr algn="l"/>
             <a:r>
-              <a:rPr sz="1700" b="1" i="0">
+              <a:rPr sz="1800" b="1" i="0">
                 <a:solidFill>
                   <a:srgbClr val="FFFFFF"/>
                 </a:solidFill>
@@ -9352,8 +8882,8 @@
         </p:nvSpPr>
         <p:spPr>
           <a:xfrm>
-            <a:off x="448056" y="4251960"/>
-            <a:ext cx="347472" cy="347472"/>
+            <a:off x="448056" y="4443983"/>
+            <a:ext cx="365760" cy="365760"/>
           </a:xfrm>
           <a:prstGeom prst="ellipse">
             <a:avLst/>
@@ -9379,8 +8909,8 @@
         </p:nvSpPr>
         <p:spPr>
           <a:xfrm>
-            <a:off x="448056" y="4251960"/>
-            <a:ext cx="347472" cy="347472"/>
+            <a:off x="448056" y="4443983"/>
+            <a:ext cx="365760" cy="365760"/>
           </a:xfrm>
           <a:prstGeom prst="rect">
             <a:avLst/>
@@ -9395,7 +8925,7 @@
           <a:p>
             <a:pPr algn="ctr"/>
             <a:r>
-              <a:rPr sz="1400" b="1" i="0">
+              <a:rPr sz="1500" b="1" i="0">
                 <a:solidFill>
                   <a:srgbClr val="D31145"/>
                 </a:solidFill>
@@ -9414,8 +8944,8 @@
         </p:nvSpPr>
         <p:spPr>
           <a:xfrm>
-            <a:off x="960120" y="4233672"/>
-            <a:ext cx="5303520" cy="384048"/>
+            <a:off x="978408" y="4425696"/>
+            <a:ext cx="5303520" cy="402336"/>
           </a:xfrm>
           <a:prstGeom prst="rect">
             <a:avLst/>
@@ -9430,13 +8960,13 @@
           <a:p>
             <a:pPr algn="l"/>
             <a:r>
-              <a:rPr sz="1700" b="1" i="0">
+              <a:rPr sz="1800" b="1" i="0">
                 <a:solidFill>
                   <a:srgbClr val="FFFFFF"/>
                 </a:solidFill>
                 <a:latin typeface="Arial"/>
               </a:rPr>
-              <a:t>Measure the result against the baseline</a:t>
+              <a:t>Measure the result</a:t>
             </a:r>
           </a:p>
         </p:txBody>
@@ -9449,8 +8979,8 @@
         </p:nvSpPr>
         <p:spPr>
           <a:xfrm>
-            <a:off x="448056" y="4709160"/>
-            <a:ext cx="347472" cy="347472"/>
+            <a:off x="448056" y="4919472"/>
+            <a:ext cx="365760" cy="365760"/>
           </a:xfrm>
           <a:prstGeom prst="ellipse">
             <a:avLst/>
@@ -9476,8 +9006,8 @@
         </p:nvSpPr>
         <p:spPr>
           <a:xfrm>
-            <a:off x="448056" y="4709160"/>
-            <a:ext cx="347472" cy="347472"/>
+            <a:off x="448056" y="4919472"/>
+            <a:ext cx="365760" cy="365760"/>
           </a:xfrm>
           <a:prstGeom prst="rect">
             <a:avLst/>
@@ -9492,7 +9022,7 @@
           <a:p>
             <a:pPr algn="ctr"/>
             <a:r>
-              <a:rPr sz="1400" b="1" i="0">
+              <a:rPr sz="1500" b="1" i="0">
                 <a:solidFill>
                   <a:srgbClr val="D31145"/>
                 </a:solidFill>
@@ -9511,8 +9041,8 @@
         </p:nvSpPr>
         <p:spPr>
           <a:xfrm>
-            <a:off x="960120" y="4690872"/>
-            <a:ext cx="5303520" cy="384048"/>
+            <a:off x="978408" y="4901184"/>
+            <a:ext cx="5303520" cy="402336"/>
           </a:xfrm>
           <a:prstGeom prst="rect">
             <a:avLst/>
@@ -9527,7 +9057,7 @@
           <a:p>
             <a:pPr algn="l"/>
             <a:r>
-              <a:rPr sz="1700" b="1" i="0">
+              <a:rPr sz="1800" b="1" i="0">
                 <a:solidFill>
                   <a:srgbClr val="FFFFFF"/>
                 </a:solidFill>
@@ -9546,8 +9076,8 @@
         </p:nvSpPr>
         <p:spPr>
           <a:xfrm>
-            <a:off x="448056" y="5230368"/>
-            <a:ext cx="5760720" cy="502920"/>
+            <a:off x="448056" y="5440680"/>
+            <a:ext cx="5760720" cy="457200"/>
           </a:xfrm>
           <a:prstGeom prst="rect">
             <a:avLst/>
@@ -9568,7 +9098,7 @@
                 </a:solidFill>
                 <a:latin typeface="Arial"/>
               </a:rPr>
-              <a:t>Phase 1 estimate: ~US$20,000–60,000 incremental. A preliminary planning figure, to be scoped with IT and Finance in Phase 0.</a:t>
+              <a:t>Phase 1 estimate: ~US$20,000–60,000 incremental (preliminary; scoped with IT and Finance in Phase 0).</a:t>
             </a:r>
           </a:p>
         </p:txBody>
@@ -9623,7 +9153,7 @@
                 </a:solidFill>
                 <a:latin typeface="Arial"/>
               </a:rPr>
-              <a:t>Riley in 30 seconds</a:t>
+              <a:t>More AI is coming. Someone has to connect it.</a:t>
             </a:r>
           </a:p>
         </p:txBody>
@@ -9658,7 +9188,7 @@
                 </a:solidFill>
                 <a:latin typeface="Arial"/>
               </a:rPr>
-              <a:t>AT A GLANCE</a:t>
+              <a:t>WHY RILEY</a:t>
             </a:r>
           </a:p>
         </p:txBody>
@@ -9701,8 +9231,8 @@
         </p:nvSpPr>
         <p:spPr>
           <a:xfrm>
-            <a:off x="457200" y="1600200"/>
-            <a:ext cx="3566160" cy="3337560"/>
+            <a:off x="457200" y="1828800"/>
+            <a:ext cx="3291840" cy="3291840"/>
           </a:xfrm>
           <a:prstGeom prst="roundRect">
             <a:avLst>
@@ -9730,8 +9260,8 @@
         </p:nvSpPr>
         <p:spPr>
           <a:xfrm>
-            <a:off x="777240" y="1920240"/>
-            <a:ext cx="731520" cy="731520"/>
+            <a:off x="822960" y="2194560"/>
+            <a:ext cx="777240" cy="777240"/>
           </a:xfrm>
           <a:prstGeom prst="ellipse">
             <a:avLst/>
@@ -9751,7 +9281,7 @@
       </p:sp>
       <p:pic>
         <p:nvPicPr>
-          <p:cNvPr id="8" name="Picture 7" descr="LuMessagesSquare_w.png"/>
+          <p:cNvPr id="8" name="Picture 7" descr="LuTrendingUp_w.png"/>
           <p:cNvPicPr>
             <a:picLocks noChangeAspect="1"/>
           </p:cNvPicPr>
@@ -9765,8 +9295,8 @@
         </p:blipFill>
         <p:spPr>
           <a:xfrm>
-            <a:off x="952804" y="2095804"/>
-            <a:ext cx="380390" cy="380390"/>
+            <a:off x="1009497" y="2381097"/>
+            <a:ext cx="404164" cy="404164"/>
           </a:xfrm>
           <a:prstGeom prst="rect">
             <a:avLst/>
@@ -9781,8 +9311,8 @@
         </p:nvSpPr>
         <p:spPr>
           <a:xfrm>
-            <a:off x="777240" y="2834640"/>
-            <a:ext cx="2926080" cy="274320"/>
+            <a:off x="822960" y="3200400"/>
+            <a:ext cx="2651760" cy="868680"/>
           </a:xfrm>
           <a:prstGeom prst="rect">
             <a:avLst/>
@@ -9797,13 +9327,13 @@
           <a:p>
             <a:pPr algn="l"/>
             <a:r>
-              <a:rPr sz="1200" b="1" i="0">
-                <a:solidFill>
-                  <a:srgbClr val="D31145"/>
-                </a:solidFill>
-                <a:latin typeface="Arial"/>
-              </a:rPr>
-              <a:t>WHAT IT IS</a:t>
+              <a:rPr sz="2400" b="1" i="0">
+                <a:solidFill>
+                  <a:srgbClr val="333D47"/>
+                </a:solidFill>
+                <a:latin typeface="Arial"/>
+              </a:rPr>
+              <a:t>AI keeps growing</a:t>
             </a:r>
           </a:p>
         </p:txBody>
@@ -9816,8 +9346,8 @@
         </p:nvSpPr>
         <p:spPr>
           <a:xfrm>
-            <a:off x="777240" y="3136391"/>
-            <a:ext cx="2926080" cy="685800"/>
+            <a:off x="822960" y="4114800"/>
+            <a:ext cx="2560320" cy="914400"/>
           </a:xfrm>
           <a:prstGeom prst="rect">
             <a:avLst/>
@@ -9832,50 +9362,42 @@
           <a:p>
             <a:pPr algn="l"/>
             <a:r>
-              <a:rPr sz="2000" b="1" i="0">
-                <a:solidFill>
-                  <a:srgbClr val="333D47"/>
-                </a:solidFill>
-                <a:latin typeface="Arial"/>
-              </a:rPr>
-              <a:t>A virtual coworker in Microsoft Teams</a:t>
-            </a:r>
-          </a:p>
-        </p:txBody>
-      </p:sp>
-      <p:sp>
-        <p:nvSpPr>
-          <p:cNvPr id="11" name="TextBox 10"/>
-          <p:cNvSpPr txBox="1"/>
-          <p:nvPr/>
-        </p:nvSpPr>
-        <p:spPr>
-          <a:xfrm>
-            <a:off x="777240" y="3813048"/>
-            <a:ext cx="2926080" cy="1005840"/>
-          </a:xfrm>
-          <a:prstGeom prst="rect">
-            <a:avLst/>
-          </a:prstGeom>
-          <a:noFill/>
-        </p:spPr>
-        <p:txBody>
-          <a:bodyPr wrap="square" lIns="0" rIns="0" tIns="0" bIns="0" anchor="t">
-            <a:noAutofit/>
-          </a:bodyPr>
-          <a:lstStyle/>
-          <a:p>
-            <a:pPr algn="l"/>
-            <a:r>
-              <a:rPr sz="1400" b="0" i="0">
+              <a:rPr sz="1700" b="0" i="0">
                 <a:solidFill>
                   <a:srgbClr val="5A6570"/>
                 </a:solidFill>
                 <a:latin typeface="Arial"/>
               </a:rPr>
-              <a:t>Employees describe the outcome they need. Riley does much of the work using approved AIA data, systems and AI.</a:t>
-            </a:r>
-          </a:p>
+              <a:t>More capabilities, from more AIA teams</a:t>
+            </a:r>
+          </a:p>
+        </p:txBody>
+      </p:sp>
+      <p:sp>
+        <p:nvSpPr>
+          <p:cNvPr id="11" name="Right Arrow 10"/>
+          <p:cNvSpPr/>
+          <p:nvPr/>
+        </p:nvSpPr>
+        <p:spPr>
+          <a:xfrm>
+            <a:off x="3931920" y="3291840"/>
+            <a:ext cx="347472" cy="365760"/>
+          </a:xfrm>
+          <a:prstGeom prst="rightArrow">
+            <a:avLst/>
+          </a:prstGeom>
+          <a:solidFill>
+            <a:srgbClr val="8A939B"/>
+          </a:solidFill>
+          <a:ln>
+            <a:noFill/>
+          </a:ln>
+        </p:spPr>
+        <p:txBody>
+          <a:bodyPr rtlCol="0" anchor="ctr"/>
+          <a:lstStyle/>
+          <a:p/>
         </p:txBody>
       </p:sp>
       <p:sp>
@@ -9886,8 +9408,8 @@
         </p:nvSpPr>
         <p:spPr>
           <a:xfrm>
-            <a:off x="4325112" y="1600200"/>
-            <a:ext cx="3566160" cy="3337560"/>
+            <a:off x="4457700" y="1828800"/>
+            <a:ext cx="3291840" cy="3291840"/>
           </a:xfrm>
           <a:prstGeom prst="roundRect">
             <a:avLst>
@@ -9915,8 +9437,8 @@
         </p:nvSpPr>
         <p:spPr>
           <a:xfrm>
-            <a:off x="4645151" y="1920240"/>
-            <a:ext cx="731520" cy="731520"/>
+            <a:off x="4823460" y="2194560"/>
+            <a:ext cx="777240" cy="777240"/>
           </a:xfrm>
           <a:prstGeom prst="ellipse">
             <a:avLst/>
@@ -9950,8 +9472,8 @@
         </p:blipFill>
         <p:spPr>
           <a:xfrm>
-            <a:off x="4820716" y="2095804"/>
-            <a:ext cx="380390" cy="380390"/>
+            <a:off x="5009997" y="2381097"/>
+            <a:ext cx="404164" cy="404164"/>
           </a:xfrm>
           <a:prstGeom prst="rect">
             <a:avLst/>
@@ -9966,8 +9488,8 @@
         </p:nvSpPr>
         <p:spPr>
           <a:xfrm>
-            <a:off x="4645151" y="2834640"/>
-            <a:ext cx="2926080" cy="274320"/>
+            <a:off x="4823460" y="3200400"/>
+            <a:ext cx="2651760" cy="868680"/>
           </a:xfrm>
           <a:prstGeom prst="rect">
             <a:avLst/>
@@ -9982,13 +9504,13 @@
           <a:p>
             <a:pPr algn="l"/>
             <a:r>
-              <a:rPr sz="1200" b="1" i="0">
-                <a:solidFill>
-                  <a:srgbClr val="D31145"/>
-                </a:solidFill>
-                <a:latin typeface="Arial"/>
-              </a:rPr>
-              <a:t>THE PROBLEM</a:t>
+              <a:rPr sz="2400" b="1" i="0">
+                <a:solidFill>
+                  <a:srgbClr val="333D47"/>
+                </a:solidFill>
+                <a:latin typeface="Arial"/>
+              </a:rPr>
+              <a:t>Without a common layer</a:t>
             </a:r>
           </a:p>
         </p:txBody>
@@ -10001,8 +9523,8 @@
         </p:nvSpPr>
         <p:spPr>
           <a:xfrm>
-            <a:off x="4645151" y="3136391"/>
-            <a:ext cx="2926080" cy="685800"/>
+            <a:off x="4823460" y="4114800"/>
+            <a:ext cx="2560320" cy="914400"/>
           </a:xfrm>
           <a:prstGeom prst="rect">
             <a:avLst/>
@@ -10017,50 +9539,42 @@
           <a:p>
             <a:pPr algn="l"/>
             <a:r>
-              <a:rPr sz="2000" b="1" i="0">
-                <a:solidFill>
-                  <a:srgbClr val="333D47"/>
-                </a:solidFill>
-                <a:latin typeface="Arial"/>
-              </a:rPr>
-              <a:t>Employees are the connector</a:t>
-            </a:r>
-          </a:p>
-        </p:txBody>
-      </p:sp>
-      <p:sp>
-        <p:nvSpPr>
-          <p:cNvPr id="17" name="TextBox 16"/>
-          <p:cNvSpPr txBox="1"/>
-          <p:nvPr/>
-        </p:nvSpPr>
-        <p:spPr>
-          <a:xfrm>
-            <a:off x="4645151" y="3813048"/>
-            <a:ext cx="2926080" cy="1005840"/>
-          </a:xfrm>
-          <a:prstGeom prst="rect">
-            <a:avLst/>
-          </a:prstGeom>
-          <a:noFill/>
-        </p:spPr>
-        <p:txBody>
-          <a:bodyPr wrap="square" lIns="0" rIns="0" tIns="0" bIns="0" anchor="t">
-            <a:noAutofit/>
-          </a:bodyPr>
-          <a:lstStyle/>
-          <a:p>
-            <a:pPr algn="l"/>
-            <a:r>
-              <a:rPr sz="1400" b="0" i="0">
+              <a:rPr sz="1700" b="0" i="0">
                 <a:solidFill>
                   <a:srgbClr val="5A6570"/>
                 </a:solidFill>
                 <a:latin typeface="Arial"/>
               </a:rPr>
-              <a:t>AI tools built separately by different teams leave employees to find, learn and combine them – a burden that grows with every new tool.</a:t>
-            </a:r>
-          </a:p>
+              <a:t>Every new tool is one more to find, learn and stitch together</a:t>
+            </a:r>
+          </a:p>
+        </p:txBody>
+      </p:sp>
+      <p:sp>
+        <p:nvSpPr>
+          <p:cNvPr id="17" name="Right Arrow 16"/>
+          <p:cNvSpPr/>
+          <p:nvPr/>
+        </p:nvSpPr>
+        <p:spPr>
+          <a:xfrm>
+            <a:off x="7932419" y="3291840"/>
+            <a:ext cx="347472" cy="365760"/>
+          </a:xfrm>
+          <a:prstGeom prst="rightArrow">
+            <a:avLst/>
+          </a:prstGeom>
+          <a:solidFill>
+            <a:srgbClr val="8A939B"/>
+          </a:solidFill>
+          <a:ln>
+            <a:noFill/>
+          </a:ln>
+        </p:spPr>
+        <p:txBody>
+          <a:bodyPr rtlCol="0" anchor="ctr"/>
+          <a:lstStyle/>
+          <a:p/>
         </p:txBody>
       </p:sp>
       <p:sp>
@@ -10071,40 +9585,13 @@
         </p:nvSpPr>
         <p:spPr>
           <a:xfrm>
-            <a:off x="8193023" y="1600200"/>
-            <a:ext cx="3566160" cy="3337560"/>
+            <a:off x="8458200" y="1828800"/>
+            <a:ext cx="3291840" cy="3291840"/>
           </a:xfrm>
           <a:prstGeom prst="roundRect">
             <a:avLst>
               <a:gd name="adj" fmla="val 5000"/>
             </a:avLst>
-          </a:prstGeom>
-          <a:solidFill>
-            <a:srgbClr val="F4F2F0"/>
-          </a:solidFill>
-          <a:ln>
-            <a:noFill/>
-          </a:ln>
-        </p:spPr>
-        <p:txBody>
-          <a:bodyPr rtlCol="0" anchor="ctr"/>
-          <a:lstStyle/>
-          <a:p/>
-        </p:txBody>
-      </p:sp>
-      <p:sp>
-        <p:nvSpPr>
-          <p:cNvPr id="19" name="Oval 18"/>
-          <p:cNvSpPr/>
-          <p:nvPr/>
-        </p:nvSpPr>
-        <p:spPr>
-          <a:xfrm>
-            <a:off x="8513063" y="1920240"/>
-            <a:ext cx="731520" cy="731520"/>
-          </a:xfrm>
-          <a:prstGeom prst="ellipse">
-            <a:avLst/>
           </a:prstGeom>
           <a:solidFill>
             <a:srgbClr val="D31145"/>
@@ -10119,9 +9606,36 @@
           <a:p/>
         </p:txBody>
       </p:sp>
+      <p:sp>
+        <p:nvSpPr>
+          <p:cNvPr id="19" name="Oval 18"/>
+          <p:cNvSpPr/>
+          <p:nvPr/>
+        </p:nvSpPr>
+        <p:spPr>
+          <a:xfrm>
+            <a:off x="8823960" y="2194560"/>
+            <a:ext cx="777240" cy="777240"/>
+          </a:xfrm>
+          <a:prstGeom prst="ellipse">
+            <a:avLst/>
+          </a:prstGeom>
+          <a:solidFill>
+            <a:srgbClr val="FFFFFF"/>
+          </a:solidFill>
+          <a:ln>
+            <a:noFill/>
+          </a:ln>
+        </p:spPr>
+        <p:txBody>
+          <a:bodyPr rtlCol="0" anchor="ctr"/>
+          <a:lstStyle/>
+          <a:p/>
+        </p:txBody>
+      </p:sp>
       <p:pic>
         <p:nvPicPr>
-          <p:cNvPr id="20" name="Picture 19" descr="LuTrendingUp_w.png"/>
+          <p:cNvPr id="20" name="Picture 19" descr="LuMessagesSquare_r.png"/>
           <p:cNvPicPr>
             <a:picLocks noChangeAspect="1"/>
           </p:cNvPicPr>
@@ -10135,8 +9649,8 @@
         </p:blipFill>
         <p:spPr>
           <a:xfrm>
-            <a:off x="8688628" y="2095804"/>
-            <a:ext cx="380390" cy="380390"/>
+            <a:off x="9010497" y="2381097"/>
+            <a:ext cx="404164" cy="404164"/>
           </a:xfrm>
           <a:prstGeom prst="rect">
             <a:avLst/>
@@ -10151,8 +9665,8 @@
         </p:nvSpPr>
         <p:spPr>
           <a:xfrm>
-            <a:off x="8513063" y="2834640"/>
-            <a:ext cx="2926080" cy="274320"/>
+            <a:off x="8823960" y="3200400"/>
+            <a:ext cx="2651760" cy="868680"/>
           </a:xfrm>
           <a:prstGeom prst="rect">
             <a:avLst/>
@@ -10167,13 +9681,13 @@
           <a:p>
             <a:pPr algn="l"/>
             <a:r>
-              <a:rPr sz="1200" b="1" i="0">
-                <a:solidFill>
-                  <a:srgbClr val="D31145"/>
-                </a:solidFill>
-                <a:latin typeface="Arial"/>
-              </a:rPr>
-              <a:t>WHY IT MATTERS</a:t>
+              <a:rPr sz="2400" b="1" i="0">
+                <a:solidFill>
+                  <a:srgbClr val="FFFFFF"/>
+                </a:solidFill>
+                <a:latin typeface="Arial"/>
+              </a:rPr>
+              <a:t>AIA needs one coworker layer</a:t>
             </a:r>
           </a:p>
         </p:txBody>
@@ -10186,8 +9700,8 @@
         </p:nvSpPr>
         <p:spPr>
           <a:xfrm>
-            <a:off x="8513063" y="3136391"/>
-            <a:ext cx="2926080" cy="685800"/>
+            <a:off x="8823960" y="4114800"/>
+            <a:ext cx="2560320" cy="914400"/>
           </a:xfrm>
           <a:prstGeom prst="rect">
             <a:avLst/>
@@ -10202,92 +9716,13 @@
           <a:p>
             <a:pPr algn="l"/>
             <a:r>
-              <a:rPr sz="2000" b="1" i="0">
-                <a:solidFill>
-                  <a:srgbClr val="333D47"/>
-                </a:solidFill>
-                <a:latin typeface="Arial"/>
-              </a:rPr>
-              <a:t>Capacity that compounds</a:t>
-            </a:r>
-          </a:p>
-        </p:txBody>
-      </p:sp>
-      <p:sp>
-        <p:nvSpPr>
-          <p:cNvPr id="23" name="TextBox 22"/>
-          <p:cNvSpPr txBox="1"/>
-          <p:nvPr/>
-        </p:nvSpPr>
-        <p:spPr>
-          <a:xfrm>
-            <a:off x="8513063" y="3813048"/>
-            <a:ext cx="2926080" cy="1005840"/>
-          </a:xfrm>
-          <a:prstGeom prst="rect">
-            <a:avLst/>
-          </a:prstGeom>
-          <a:noFill/>
-        </p:spPr>
-        <p:txBody>
-          <a:bodyPr wrap="square" lIns="0" rIns="0" tIns="0" bIns="0" anchor="t">
-            <a:noAutofit/>
-          </a:bodyPr>
-          <a:lstStyle/>
-          <a:p>
-            <a:pPr algn="l"/>
-            <a:r>
-              <a:rPr sz="1400" b="0" i="0">
-                <a:solidFill>
-                  <a:srgbClr val="5A6570"/>
-                </a:solidFill>
-                <a:latin typeface="Arial"/>
-              </a:rPr>
-              <a:t>Time moves from searching and switching to higher-value work, and every AI capability connected makes Riley more useful.</a:t>
-            </a:r>
-          </a:p>
-        </p:txBody>
-      </p:sp>
-      <p:sp>
-        <p:nvSpPr>
-          <p:cNvPr id="24" name="TextBox 23"/>
-          <p:cNvSpPr txBox="1"/>
-          <p:nvPr/>
-        </p:nvSpPr>
-        <p:spPr>
-          <a:xfrm>
-            <a:off x="457200" y="5074920"/>
-            <a:ext cx="11292840" cy="640080"/>
-          </a:xfrm>
-          <a:prstGeom prst="rect">
-            <a:avLst/>
-          </a:prstGeom>
-          <a:noFill/>
-        </p:spPr>
-        <p:txBody>
-          <a:bodyPr wrap="square" lIns="0" rIns="0" tIns="0" bIns="0" anchor="ctr">
-            <a:noAutofit/>
-          </a:bodyPr>
-          <a:lstStyle/>
-          <a:p>
-            <a:pPr algn="ctr"/>
-            <a:r>
-              <a:rPr sz="1800" b="1" i="0">
-                <a:solidFill>
-                  <a:srgbClr val="D31145"/>
-                </a:solidFill>
-                <a:latin typeface="Arial"/>
-              </a:rPr>
-              <a:t>Riley is not the AI model. </a:t>
-            </a:r>
-            <a:r>
-              <a:rPr sz="1800" b="0" i="0">
-                <a:solidFill>
-                  <a:srgbClr val="333D47"/>
-                </a:solidFill>
-                <a:latin typeface="Arial"/>
-              </a:rPr>
-              <a:t>Riley is the AIA layer that turns separate AI capabilities into one coworker employees can use.</a:t>
+              <a:rPr sz="2200" b="1" i="0">
+                <a:solidFill>
+                  <a:srgbClr val="FFFFFF"/>
+                </a:solidFill>
+                <a:latin typeface="Arial"/>
+              </a:rPr>
+              <a:t>Riley is that layer.</a:t>
             </a:r>
           </a:p>
         </p:txBody>
@@ -10342,7 +9777,7 @@
                 </a:solidFill>
                 <a:latin typeface="Arial"/>
               </a:rPr>
-              <a:t>Today, the employee is the connector</a:t>
+              <a:t>Who connects AIA’s AI?</a:t>
             </a:r>
           </a:p>
         </p:txBody>
@@ -10377,7 +9812,7 @@
                 </a:solidFill>
                 <a:latin typeface="Arial"/>
               </a:rPr>
-              <a:t>THE PROBLEM</a:t>
+              <a:t>THE PROBLEM  ·  THE IDEA</a:t>
             </a:r>
           </a:p>
         </p:txBody>
@@ -10412,7 +9847,7 @@
                 </a:solidFill>
                 <a:latin typeface="Arial"/>
               </a:rPr>
-              <a:t>From what I observe, AIA teams are building valuable AI tools separately, and employees are left to connect them.</a:t>
+              <a:t>From what I observe: valuable AI tools, built separately across AIA.</a:t>
             </a:r>
           </a:p>
         </p:txBody>
@@ -10455,8 +9890,8 @@
         </p:nvSpPr>
         <p:spPr>
           <a:xfrm>
-            <a:off x="457200" y="1783080"/>
-            <a:ext cx="5440680" cy="3246120"/>
+            <a:off x="457200" y="1691640"/>
+            <a:ext cx="5440680" cy="3886200"/>
           </a:xfrm>
           <a:prstGeom prst="roundRect">
             <a:avLst>
@@ -10484,8 +9919,8 @@
         </p:nvSpPr>
         <p:spPr>
           <a:xfrm>
-            <a:off x="731520" y="1984248"/>
-            <a:ext cx="2743200" cy="274320"/>
+            <a:off x="731520" y="1920240"/>
+            <a:ext cx="4892040" cy="411480"/>
           </a:xfrm>
           <a:prstGeom prst="rect">
             <a:avLst/>
@@ -10500,13 +9935,13 @@
           <a:p>
             <a:pPr algn="l"/>
             <a:r>
-              <a:rPr sz="1300" b="1" i="0">
-                <a:solidFill>
-                  <a:srgbClr val="5A6570"/>
-                </a:solidFill>
-                <a:latin typeface="Arial"/>
-              </a:rPr>
-              <a:t>TODAY</a:t>
+              <a:rPr sz="2000" b="1" i="0">
+                <a:solidFill>
+                  <a:srgbClr val="333D47"/>
+                </a:solidFill>
+                <a:latin typeface="Arial"/>
+              </a:rPr>
+              <a:t>Today, the employee is the connector</a:t>
             </a:r>
           </a:p>
         </p:txBody>
@@ -10519,7 +9954,7 @@
         </p:nvSpPr>
         <p:spPr>
           <a:xfrm>
-            <a:off x="2830068" y="2057400"/>
+            <a:off x="2830068" y="2560320"/>
             <a:ext cx="694944" cy="694944"/>
           </a:xfrm>
           <a:prstGeom prst="ellipse">
@@ -10554,7 +9989,7 @@
         </p:blipFill>
         <p:spPr>
           <a:xfrm>
-            <a:off x="2985516" y="2212848"/>
+            <a:off x="2985516" y="2715768"/>
             <a:ext cx="384048" cy="384048"/>
           </a:xfrm>
           <a:prstGeom prst="rect">
@@ -10570,7 +10005,7 @@
         </p:nvSpPr>
         <p:spPr>
           <a:xfrm>
-            <a:off x="589788" y="3886200"/>
+            <a:off x="589788" y="4434840"/>
             <a:ext cx="786384" cy="960120"/>
           </a:xfrm>
           <a:prstGeom prst="roundRect">
@@ -10609,7 +10044,7 @@
         </p:blipFill>
         <p:spPr>
           <a:xfrm>
-            <a:off x="827531" y="3977639"/>
+            <a:off x="827531" y="4526279"/>
             <a:ext cx="310896" cy="310896"/>
           </a:xfrm>
           <a:prstGeom prst="rect">
@@ -10625,7 +10060,7 @@
         </p:nvSpPr>
         <p:spPr>
           <a:xfrm>
-            <a:off x="589788" y="4343400"/>
+            <a:off x="589788" y="4892040"/>
             <a:ext cx="786384" cy="457200"/>
           </a:xfrm>
           <a:prstGeom prst="rect">
@@ -10672,8 +10107,8 @@
         </p:nvCxnSpPr>
         <p:spPr>
           <a:xfrm flipH="1">
-            <a:off x="982980" y="2752344"/>
-            <a:ext cx="2194560" cy="1133856"/>
+            <a:off x="982980" y="3255263"/>
+            <a:ext cx="2194560" cy="1179577"/>
           </a:xfrm>
           <a:prstGeom prst="line">
             <a:avLst/>
@@ -10707,7 +10142,7 @@
         </p:nvSpPr>
         <p:spPr>
           <a:xfrm>
-            <a:off x="1467612" y="3886200"/>
+            <a:off x="1467612" y="4434840"/>
             <a:ext cx="786384" cy="960120"/>
           </a:xfrm>
           <a:prstGeom prst="roundRect">
@@ -10746,7 +10181,7 @@
         </p:blipFill>
         <p:spPr>
           <a:xfrm>
-            <a:off x="1705356" y="3977639"/>
+            <a:off x="1705356" y="4526279"/>
             <a:ext cx="310896" cy="310896"/>
           </a:xfrm>
           <a:prstGeom prst="rect">
@@ -10762,7 +10197,7 @@
         </p:nvSpPr>
         <p:spPr>
           <a:xfrm>
-            <a:off x="1467612" y="4343400"/>
+            <a:off x="1467612" y="4892040"/>
             <a:ext cx="786384" cy="457200"/>
           </a:xfrm>
           <a:prstGeom prst="rect">
@@ -10809,8 +10244,8 @@
         </p:nvCxnSpPr>
         <p:spPr>
           <a:xfrm flipH="1">
-            <a:off x="1860804" y="2752344"/>
-            <a:ext cx="1316736" cy="1133856"/>
+            <a:off x="1860804" y="3255263"/>
+            <a:ext cx="1316736" cy="1179577"/>
           </a:xfrm>
           <a:prstGeom prst="line">
             <a:avLst/>
@@ -10844,7 +10279,7 @@
         </p:nvSpPr>
         <p:spPr>
           <a:xfrm>
-            <a:off x="2345436" y="3886200"/>
+            <a:off x="2345436" y="4434840"/>
             <a:ext cx="786384" cy="960120"/>
           </a:xfrm>
           <a:prstGeom prst="roundRect">
@@ -10883,7 +10318,7 @@
         </p:blipFill>
         <p:spPr>
           <a:xfrm>
-            <a:off x="2583180" y="3977639"/>
+            <a:off x="2583180" y="4526279"/>
             <a:ext cx="310896" cy="310896"/>
           </a:xfrm>
           <a:prstGeom prst="rect">
@@ -10899,7 +10334,7 @@
         </p:nvSpPr>
         <p:spPr>
           <a:xfrm>
-            <a:off x="2345436" y="4343400"/>
+            <a:off x="2345436" y="4892040"/>
             <a:ext cx="786384" cy="457200"/>
           </a:xfrm>
           <a:prstGeom prst="rect">
@@ -10946,8 +10381,8 @@
         </p:nvCxnSpPr>
         <p:spPr>
           <a:xfrm flipH="1">
-            <a:off x="2738628" y="2752344"/>
-            <a:ext cx="438912" cy="1133856"/>
+            <a:off x="2738628" y="3255263"/>
+            <a:ext cx="438912" cy="1179577"/>
           </a:xfrm>
           <a:prstGeom prst="line">
             <a:avLst/>
@@ -10981,7 +10416,7 @@
         </p:nvSpPr>
         <p:spPr>
           <a:xfrm>
-            <a:off x="3223260" y="3886200"/>
+            <a:off x="3223260" y="4434840"/>
             <a:ext cx="786384" cy="960120"/>
           </a:xfrm>
           <a:prstGeom prst="roundRect">
@@ -11020,7 +10455,7 @@
         </p:blipFill>
         <p:spPr>
           <a:xfrm>
-            <a:off x="3461004" y="3977639"/>
+            <a:off x="3461004" y="4526279"/>
             <a:ext cx="310896" cy="310896"/>
           </a:xfrm>
           <a:prstGeom prst="rect">
@@ -11036,7 +10471,7 @@
         </p:nvSpPr>
         <p:spPr>
           <a:xfrm>
-            <a:off x="3223260" y="4343400"/>
+            <a:off x="3223260" y="4892040"/>
             <a:ext cx="786384" cy="457200"/>
           </a:xfrm>
           <a:prstGeom prst="rect">
@@ -11083,8 +10518,8 @@
         </p:nvCxnSpPr>
         <p:spPr>
           <a:xfrm>
-            <a:off x="3177540" y="2752344"/>
-            <a:ext cx="438912" cy="1133856"/>
+            <a:off x="3177540" y="3255263"/>
+            <a:ext cx="438912" cy="1179577"/>
           </a:xfrm>
           <a:prstGeom prst="line">
             <a:avLst/>
@@ -11118,7 +10553,7 @@
         </p:nvSpPr>
         <p:spPr>
           <a:xfrm>
-            <a:off x="4101083" y="3886200"/>
+            <a:off x="4101083" y="4434840"/>
             <a:ext cx="786384" cy="960120"/>
           </a:xfrm>
           <a:prstGeom prst="roundRect">
@@ -11157,7 +10592,7 @@
         </p:blipFill>
         <p:spPr>
           <a:xfrm>
-            <a:off x="4338827" y="3977639"/>
+            <a:off x="4338827" y="4526279"/>
             <a:ext cx="310896" cy="310896"/>
           </a:xfrm>
           <a:prstGeom prst="rect">
@@ -11173,7 +10608,7 @@
         </p:nvSpPr>
         <p:spPr>
           <a:xfrm>
-            <a:off x="4101083" y="4343400"/>
+            <a:off x="4101083" y="4892040"/>
             <a:ext cx="786384" cy="457200"/>
           </a:xfrm>
           <a:prstGeom prst="rect">
@@ -11220,8 +10655,8 @@
         </p:nvCxnSpPr>
         <p:spPr>
           <a:xfrm>
-            <a:off x="3177540" y="2752344"/>
-            <a:ext cx="1316735" cy="1133856"/>
+            <a:off x="3177540" y="3255263"/>
+            <a:ext cx="1316735" cy="1179577"/>
           </a:xfrm>
           <a:prstGeom prst="line">
             <a:avLst/>
@@ -11255,7 +10690,7 @@
         </p:nvSpPr>
         <p:spPr>
           <a:xfrm>
-            <a:off x="4978908" y="3886200"/>
+            <a:off x="4978908" y="4434840"/>
             <a:ext cx="786384" cy="960120"/>
           </a:xfrm>
           <a:prstGeom prst="roundRect">
@@ -11294,7 +10729,7 @@
         </p:blipFill>
         <p:spPr>
           <a:xfrm>
-            <a:off x="5216652" y="3977639"/>
+            <a:off x="5216652" y="4526279"/>
             <a:ext cx="310896" cy="310896"/>
           </a:xfrm>
           <a:prstGeom prst="rect">
@@ -11310,7 +10745,7 @@
         </p:nvSpPr>
         <p:spPr>
           <a:xfrm>
-            <a:off x="4978908" y="4343400"/>
+            <a:off x="4978908" y="4892040"/>
             <a:ext cx="786384" cy="457200"/>
           </a:xfrm>
           <a:prstGeom prst="rect">
@@ -11357,8 +10792,8 @@
         </p:nvCxnSpPr>
         <p:spPr>
           <a:xfrm>
-            <a:off x="3177540" y="2752344"/>
-            <a:ext cx="2194560" cy="1133856"/>
+            <a:off x="3177540" y="3255263"/>
+            <a:ext cx="2194560" cy="1179577"/>
           </a:xfrm>
           <a:prstGeom prst="line">
             <a:avLst/>
@@ -11392,7 +10827,7 @@
         </p:nvSpPr>
         <p:spPr>
           <a:xfrm>
-            <a:off x="3634740" y="2258568"/>
+            <a:off x="3634740" y="2761488"/>
             <a:ext cx="2240280" cy="365760"/>
           </a:xfrm>
           <a:prstGeom prst="rect">
@@ -11427,8 +10862,8 @@
         </p:nvSpPr>
         <p:spPr>
           <a:xfrm>
-            <a:off x="6309360" y="1783080"/>
-            <a:ext cx="5440680" cy="3246120"/>
+            <a:off x="6309360" y="1691640"/>
+            <a:ext cx="5440680" cy="3886200"/>
           </a:xfrm>
           <a:prstGeom prst="roundRect">
             <a:avLst>
@@ -11456,8 +10891,8 @@
         </p:nvSpPr>
         <p:spPr>
           <a:xfrm>
-            <a:off x="6583680" y="1984248"/>
-            <a:ext cx="2743200" cy="274320"/>
+            <a:off x="6583680" y="1920240"/>
+            <a:ext cx="4892040" cy="411480"/>
           </a:xfrm>
           <a:prstGeom prst="rect">
             <a:avLst/>
@@ -11472,13 +10907,13 @@
           <a:p>
             <a:pPr algn="l"/>
             <a:r>
-              <a:rPr sz="1300" b="1" i="0">
+              <a:rPr sz="2000" b="1" i="0">
                 <a:solidFill>
                   <a:srgbClr val="D31145"/>
                 </a:solidFill>
                 <a:latin typeface="Arial"/>
               </a:rPr>
-              <a:t>WITH RILEY</a:t>
+              <a:t>Riley becomes the connector</a:t>
             </a:r>
           </a:p>
         </p:txBody>
@@ -11491,7 +10926,7 @@
         </p:nvSpPr>
         <p:spPr>
           <a:xfrm>
-            <a:off x="8682228" y="2057400"/>
+            <a:off x="8682228" y="2560320"/>
             <a:ext cx="694944" cy="694944"/>
           </a:xfrm>
           <a:prstGeom prst="ellipse">
@@ -11526,7 +10961,7 @@
         </p:blipFill>
         <p:spPr>
           <a:xfrm>
-            <a:off x="8837676" y="2212848"/>
+            <a:off x="8837676" y="2715768"/>
             <a:ext cx="384048" cy="384048"/>
           </a:xfrm>
           <a:prstGeom prst="rect">
@@ -11542,7 +10977,7 @@
         </p:nvSpPr>
         <p:spPr>
           <a:xfrm>
-            <a:off x="6441948" y="3886200"/>
+            <a:off x="6441948" y="4434840"/>
             <a:ext cx="786384" cy="960120"/>
           </a:xfrm>
           <a:prstGeom prst="roundRect">
@@ -11581,7 +11016,7 @@
         </p:blipFill>
         <p:spPr>
           <a:xfrm>
-            <a:off x="6679692" y="3977639"/>
+            <a:off x="6679692" y="4526279"/>
             <a:ext cx="310896" cy="310896"/>
           </a:xfrm>
           <a:prstGeom prst="rect">
@@ -11597,7 +11032,7 @@
         </p:nvSpPr>
         <p:spPr>
           <a:xfrm>
-            <a:off x="6441948" y="4343400"/>
+            <a:off x="6441948" y="4892040"/>
             <a:ext cx="786384" cy="457200"/>
           </a:xfrm>
           <a:prstGeom prst="rect">
@@ -11644,8 +11079,8 @@
         </p:nvCxnSpPr>
         <p:spPr>
           <a:xfrm>
-            <a:off x="6835140" y="3566160"/>
-            <a:ext cx="0" cy="320040"/>
+            <a:off x="6835140" y="4069080"/>
+            <a:ext cx="0" cy="365760"/>
           </a:xfrm>
           <a:prstGeom prst="line">
             <a:avLst/>
@@ -11679,7 +11114,7 @@
         </p:nvSpPr>
         <p:spPr>
           <a:xfrm>
-            <a:off x="7319771" y="3886200"/>
+            <a:off x="7319771" y="4434840"/>
             <a:ext cx="786384" cy="960120"/>
           </a:xfrm>
           <a:prstGeom prst="roundRect">
@@ -11718,7 +11153,7 @@
         </p:blipFill>
         <p:spPr>
           <a:xfrm>
-            <a:off x="7557515" y="3977639"/>
+            <a:off x="7557515" y="4526279"/>
             <a:ext cx="310896" cy="310896"/>
           </a:xfrm>
           <a:prstGeom prst="rect">
@@ -11734,7 +11169,7 @@
         </p:nvSpPr>
         <p:spPr>
           <a:xfrm>
-            <a:off x="7319771" y="4343400"/>
+            <a:off x="7319771" y="4892040"/>
             <a:ext cx="786384" cy="457200"/>
           </a:xfrm>
           <a:prstGeom prst="rect">
@@ -11781,8 +11216,8 @@
         </p:nvCxnSpPr>
         <p:spPr>
           <a:xfrm>
-            <a:off x="7712963" y="3566160"/>
-            <a:ext cx="0" cy="320040"/>
+            <a:off x="7712963" y="4069080"/>
+            <a:ext cx="0" cy="365760"/>
           </a:xfrm>
           <a:prstGeom prst="line">
             <a:avLst/>
@@ -11816,7 +11251,7 @@
         </p:nvSpPr>
         <p:spPr>
           <a:xfrm>
-            <a:off x="8197596" y="3886200"/>
+            <a:off x="8197596" y="4434840"/>
             <a:ext cx="786384" cy="960120"/>
           </a:xfrm>
           <a:prstGeom prst="roundRect">
@@ -11855,7 +11290,7 @@
         </p:blipFill>
         <p:spPr>
           <a:xfrm>
-            <a:off x="8435340" y="3977639"/>
+            <a:off x="8435340" y="4526279"/>
             <a:ext cx="310896" cy="310896"/>
           </a:xfrm>
           <a:prstGeom prst="rect">
@@ -11871,7 +11306,7 @@
         </p:nvSpPr>
         <p:spPr>
           <a:xfrm>
-            <a:off x="8197596" y="4343400"/>
+            <a:off x="8197596" y="4892040"/>
             <a:ext cx="786384" cy="457200"/>
           </a:xfrm>
           <a:prstGeom prst="rect">
@@ -11918,8 +11353,8 @@
         </p:nvCxnSpPr>
         <p:spPr>
           <a:xfrm>
-            <a:off x="8590788" y="3566160"/>
-            <a:ext cx="0" cy="320040"/>
+            <a:off x="8590788" y="4069080"/>
+            <a:ext cx="0" cy="365760"/>
           </a:xfrm>
           <a:prstGeom prst="line">
             <a:avLst/>
@@ -11953,7 +11388,7 @@
         </p:nvSpPr>
         <p:spPr>
           <a:xfrm>
-            <a:off x="9075420" y="3886200"/>
+            <a:off x="9075420" y="4434840"/>
             <a:ext cx="786384" cy="960120"/>
           </a:xfrm>
           <a:prstGeom prst="roundRect">
@@ -11992,7 +11427,7 @@
         </p:blipFill>
         <p:spPr>
           <a:xfrm>
-            <a:off x="9313164" y="3977639"/>
+            <a:off x="9313164" y="4526279"/>
             <a:ext cx="310896" cy="310896"/>
           </a:xfrm>
           <a:prstGeom prst="rect">
@@ -12008,7 +11443,7 @@
         </p:nvSpPr>
         <p:spPr>
           <a:xfrm>
-            <a:off x="9075420" y="4343400"/>
+            <a:off x="9075420" y="4892040"/>
             <a:ext cx="786384" cy="457200"/>
           </a:xfrm>
           <a:prstGeom prst="rect">
@@ -12055,8 +11490,8 @@
         </p:nvCxnSpPr>
         <p:spPr>
           <a:xfrm>
-            <a:off x="9468612" y="3566160"/>
-            <a:ext cx="0" cy="320040"/>
+            <a:off x="9468612" y="4069080"/>
+            <a:ext cx="0" cy="365760"/>
           </a:xfrm>
           <a:prstGeom prst="line">
             <a:avLst/>
@@ -12090,7 +11525,7 @@
         </p:nvSpPr>
         <p:spPr>
           <a:xfrm>
-            <a:off x="9953244" y="3886200"/>
+            <a:off x="9953244" y="4434840"/>
             <a:ext cx="786384" cy="960120"/>
           </a:xfrm>
           <a:prstGeom prst="roundRect">
@@ -12129,7 +11564,7 @@
         </p:blipFill>
         <p:spPr>
           <a:xfrm>
-            <a:off x="10190988" y="3977639"/>
+            <a:off x="10190988" y="4526279"/>
             <a:ext cx="310896" cy="310896"/>
           </a:xfrm>
           <a:prstGeom prst="rect">
@@ -12145,7 +11580,7 @@
         </p:nvSpPr>
         <p:spPr>
           <a:xfrm>
-            <a:off x="9953244" y="4343400"/>
+            <a:off x="9953244" y="4892040"/>
             <a:ext cx="786384" cy="457200"/>
           </a:xfrm>
           <a:prstGeom prst="rect">
@@ -12192,8 +11627,8 @@
         </p:nvCxnSpPr>
         <p:spPr>
           <a:xfrm>
-            <a:off x="10346436" y="3566160"/>
-            <a:ext cx="0" cy="320040"/>
+            <a:off x="10346436" y="4069080"/>
+            <a:ext cx="0" cy="365760"/>
           </a:xfrm>
           <a:prstGeom prst="line">
             <a:avLst/>
@@ -12227,7 +11662,7 @@
         </p:nvSpPr>
         <p:spPr>
           <a:xfrm>
-            <a:off x="10831067" y="3886200"/>
+            <a:off x="10831067" y="4434840"/>
             <a:ext cx="786384" cy="960120"/>
           </a:xfrm>
           <a:prstGeom prst="roundRect">
@@ -12266,7 +11701,7 @@
         </p:blipFill>
         <p:spPr>
           <a:xfrm>
-            <a:off x="11068811" y="3977639"/>
+            <a:off x="11068811" y="4526279"/>
             <a:ext cx="310896" cy="310896"/>
           </a:xfrm>
           <a:prstGeom prst="rect">
@@ -12282,7 +11717,7 @@
         </p:nvSpPr>
         <p:spPr>
           <a:xfrm>
-            <a:off x="10831067" y="4343400"/>
+            <a:off x="10831067" y="4892040"/>
             <a:ext cx="786384" cy="457200"/>
           </a:xfrm>
           <a:prstGeom prst="rect">
@@ -12329,8 +11764,8 @@
         </p:nvCxnSpPr>
         <p:spPr>
           <a:xfrm>
-            <a:off x="11224259" y="3566160"/>
-            <a:ext cx="0" cy="320040"/>
+            <a:off x="11224259" y="4069080"/>
+            <a:ext cx="0" cy="365760"/>
           </a:xfrm>
           <a:prstGeom prst="line">
             <a:avLst/>
@@ -12364,8 +11799,8 @@
         </p:nvCxnSpPr>
         <p:spPr>
           <a:xfrm>
-            <a:off x="9029700" y="2752344"/>
-            <a:ext cx="0" cy="219456"/>
+            <a:off x="9029700" y="3255263"/>
+            <a:ext cx="0" cy="219457"/>
           </a:xfrm>
           <a:prstGeom prst="line">
             <a:avLst/>
@@ -12399,7 +11834,7 @@
         </p:nvSpPr>
         <p:spPr>
           <a:xfrm>
-            <a:off x="6441948" y="2971800"/>
+            <a:off x="6441948" y="3474720"/>
             <a:ext cx="5175504" cy="594360"/>
           </a:xfrm>
           <a:prstGeom prst="roundRect">
@@ -12422,22 +11857,13 @@
           <a:p>
             <a:pPr algn="ctr"/>
             <a:r>
-              <a:rPr sz="1800" b="1" i="0">
+              <a:rPr sz="2000" b="1" i="0">
                 <a:solidFill>
                   <a:srgbClr val="FFFFFF"/>
                 </a:solidFill>
                 <a:latin typeface="Arial"/>
               </a:rPr>
               <a:t>Riley</a:t>
-            </a:r>
-            <a:r>
-              <a:rPr sz="1400" b="0" i="0">
-                <a:solidFill>
-                  <a:srgbClr val="FFFFFF"/>
-                </a:solidFill>
-                <a:latin typeface="Arial"/>
-              </a:rPr>
-              <a:t>   one coworker layer</a:t>
             </a:r>
           </a:p>
         </p:txBody>
@@ -12450,8 +11876,8 @@
         </p:nvSpPr>
         <p:spPr>
           <a:xfrm>
-            <a:off x="9532620" y="2240280"/>
-            <a:ext cx="2103120" cy="365760"/>
+            <a:off x="9486900" y="2761488"/>
+            <a:ext cx="2240280" cy="365760"/>
           </a:xfrm>
           <a:prstGeom prst="rect">
             <a:avLst/>
@@ -12473,111 +11899,6 @@
                 <a:latin typeface="Arial"/>
               </a:rPr>
               <a:t>one conversation</a:t>
-            </a:r>
-          </a:p>
-        </p:txBody>
-      </p:sp>
-      <p:sp>
-        <p:nvSpPr>
-          <p:cNvPr id="67" name="TextBox 66"/>
-          <p:cNvSpPr txBox="1"/>
-          <p:nvPr/>
-        </p:nvSpPr>
-        <p:spPr>
-          <a:xfrm>
-            <a:off x="457200" y="5138928"/>
-            <a:ext cx="5440680" cy="365760"/>
-          </a:xfrm>
-          <a:prstGeom prst="rect">
-            <a:avLst/>
-          </a:prstGeom>
-          <a:noFill/>
-        </p:spPr>
-        <p:txBody>
-          <a:bodyPr wrap="square" lIns="0" rIns="0" tIns="0" bIns="0" anchor="t">
-            <a:noAutofit/>
-          </a:bodyPr>
-          <a:lstStyle/>
-          <a:p>
-            <a:pPr algn="ctr"/>
-            <a:r>
-              <a:rPr sz="1500" b="1" i="0">
-                <a:solidFill>
-                  <a:srgbClr val="333D47"/>
-                </a:solidFill>
-                <a:latin typeface="Arial"/>
-              </a:rPr>
-              <a:t>Every new tool is one more to find, learn and combine.</a:t>
-            </a:r>
-          </a:p>
-        </p:txBody>
-      </p:sp>
-      <p:sp>
-        <p:nvSpPr>
-          <p:cNvPr id="68" name="TextBox 67"/>
-          <p:cNvSpPr txBox="1"/>
-          <p:nvPr/>
-        </p:nvSpPr>
-        <p:spPr>
-          <a:xfrm>
-            <a:off x="6309360" y="5138928"/>
-            <a:ext cx="5440680" cy="365760"/>
-          </a:xfrm>
-          <a:prstGeom prst="rect">
-            <a:avLst/>
-          </a:prstGeom>
-          <a:noFill/>
-        </p:spPr>
-        <p:txBody>
-          <a:bodyPr wrap="square" lIns="0" rIns="0" tIns="0" bIns="0" anchor="t">
-            <a:noAutofit/>
-          </a:bodyPr>
-          <a:lstStyle/>
-          <a:p>
-            <a:pPr algn="ctr"/>
-            <a:r>
-              <a:rPr sz="1500" b="1" i="0">
-                <a:solidFill>
-                  <a:srgbClr val="D31145"/>
-                </a:solidFill>
-                <a:latin typeface="Arial"/>
-              </a:rPr>
-              <a:t>Every new capability is reached through one conversation.</a:t>
-            </a:r>
-          </a:p>
-        </p:txBody>
-      </p:sp>
-      <p:sp>
-        <p:nvSpPr>
-          <p:cNvPr id="69" name="TextBox 68"/>
-          <p:cNvSpPr txBox="1"/>
-          <p:nvPr/>
-        </p:nvSpPr>
-        <p:spPr>
-          <a:xfrm>
-            <a:off x="457200" y="5623560"/>
-            <a:ext cx="10241280" cy="274320"/>
-          </a:xfrm>
-          <a:prstGeom prst="rect">
-            <a:avLst/>
-          </a:prstGeom>
-          <a:noFill/>
-        </p:spPr>
-        <p:txBody>
-          <a:bodyPr wrap="square" lIns="0" rIns="0" tIns="0" bIns="0" anchor="t">
-            <a:noAutofit/>
-          </a:bodyPr>
-          <a:lstStyle/>
-          <a:p>
-            <a:pPr algn="l"/>
-            <a:r>
-              <a:rPr sz="1200" b="0" i="0">
-                <a:solidFill>
-                  <a:srgbClr val="5A6570"/>
-                </a:solidFill>
-                <a:latin typeface="Arial"/>
-              </a:rPr>
-              <a:t>Context: interaction workers spend nearly 20% of the workweek looking for internal information or tracking down colleagues (McKinsey Global Institute, 2012).</a:t>
             </a:r>
           </a:p>
         </p:txBody>
@@ -12896,7 +12217,7 @@
                 </a:solidFill>
                 <a:latin typeface="Arial"/>
               </a:rPr>
-              <a:t>Microsoft Teams chat (illustrative)</a:t>
+              <a:t>Microsoft Teams (illustrative)</a:t>
             </a:r>
           </a:p>
         </p:txBody>
@@ -13853,42 +13174,7 @@
       </p:sp>
       <p:sp>
         <p:nvSpPr>
-          <p:cNvPr id="42" name="TextBox 41"/>
-          <p:cNvSpPr txBox="1"/>
-          <p:nvPr/>
-        </p:nvSpPr>
-        <p:spPr>
-          <a:xfrm>
-            <a:off x="4114800" y="5212080"/>
-            <a:ext cx="2560320" cy="329184"/>
-          </a:xfrm>
-          <a:prstGeom prst="rect">
-            <a:avLst/>
-          </a:prstGeom>
-          <a:noFill/>
-        </p:spPr>
-        <p:txBody>
-          <a:bodyPr wrap="square" lIns="0" rIns="0" tIns="0" bIns="0" anchor="ctr">
-            <a:noAutofit/>
-          </a:bodyPr>
-          <a:lstStyle/>
-          <a:p>
-            <a:pPr algn="l"/>
-            <a:r>
-              <a:rPr sz="1200" b="0" i="1">
-                <a:solidFill>
-                  <a:srgbClr val="5A6570"/>
-                </a:solidFill>
-                <a:latin typeface="Arial"/>
-              </a:rPr>
-              <a:t>Nothing goes out until you approve</a:t>
-            </a:r>
-          </a:p>
-        </p:txBody>
-      </p:sp>
-      <p:sp>
-        <p:nvSpPr>
-          <p:cNvPr id="43" name="Oval 42"/>
+          <p:cNvPr id="42" name="Oval 41"/>
           <p:cNvSpPr/>
           <p:nvPr/>
         </p:nvSpPr>
@@ -13915,7 +13201,7 @@
       </p:sp>
       <p:sp>
         <p:nvSpPr>
-          <p:cNvPr id="44" name="TextBox 43"/>
+          <p:cNvPr id="43" name="TextBox 42"/>
           <p:cNvSpPr txBox="1"/>
           <p:nvPr/>
         </p:nvSpPr>
@@ -13950,14 +13236,14 @@
       </p:sp>
       <p:sp>
         <p:nvSpPr>
-          <p:cNvPr id="45" name="Oval 44"/>
+          <p:cNvPr id="44" name="Oval 43"/>
           <p:cNvSpPr/>
           <p:nvPr/>
         </p:nvSpPr>
         <p:spPr>
           <a:xfrm>
-            <a:off x="7269480" y="1618488"/>
-            <a:ext cx="402336" cy="402336"/>
+            <a:off x="7269480" y="1664208"/>
+            <a:ext cx="420624" cy="420624"/>
           </a:xfrm>
           <a:prstGeom prst="ellipse">
             <a:avLst/>
@@ -13977,14 +13263,14 @@
       </p:sp>
       <p:sp>
         <p:nvSpPr>
-          <p:cNvPr id="46" name="TextBox 45"/>
+          <p:cNvPr id="45" name="TextBox 44"/>
           <p:cNvSpPr txBox="1"/>
           <p:nvPr/>
         </p:nvSpPr>
         <p:spPr>
           <a:xfrm>
-            <a:off x="7269480" y="1618488"/>
-            <a:ext cx="402336" cy="402336"/>
+            <a:off x="7269480" y="1664208"/>
+            <a:ext cx="420624" cy="420624"/>
           </a:xfrm>
           <a:prstGeom prst="rect">
             <a:avLst/>
@@ -13999,7 +13285,7 @@
           <a:p>
             <a:pPr algn="ctr"/>
             <a:r>
-              <a:rPr sz="1500" b="1" i="0">
+              <a:rPr sz="1600" b="1" i="0">
                 <a:solidFill>
                   <a:srgbClr val="FFFFFF"/>
                 </a:solidFill>
@@ -14012,14 +13298,14 @@
       </p:sp>
       <p:sp>
         <p:nvSpPr>
-          <p:cNvPr id="47" name="TextBox 46"/>
+          <p:cNvPr id="46" name="TextBox 45"/>
           <p:cNvSpPr txBox="1"/>
           <p:nvPr/>
         </p:nvSpPr>
         <p:spPr>
           <a:xfrm>
-            <a:off x="7863840" y="1600200"/>
-            <a:ext cx="3886200" cy="292608"/>
+            <a:off x="7882127" y="1645920"/>
+            <a:ext cx="3840480" cy="310896"/>
           </a:xfrm>
           <a:prstGeom prst="rect">
             <a:avLst/>
@@ -14034,7 +13320,7 @@
           <a:p>
             <a:pPr algn="l"/>
             <a:r>
-              <a:rPr sz="1700" b="1" i="0">
+              <a:rPr sz="1800" b="1" i="0">
                 <a:solidFill>
                   <a:srgbClr val="333D47"/>
                 </a:solidFill>
@@ -14047,14 +13333,14 @@
       </p:sp>
       <p:sp>
         <p:nvSpPr>
-          <p:cNvPr id="48" name="TextBox 47"/>
+          <p:cNvPr id="47" name="TextBox 46"/>
           <p:cNvSpPr txBox="1"/>
           <p:nvPr/>
         </p:nvSpPr>
         <p:spPr>
           <a:xfrm>
-            <a:off x="7863840" y="1911095"/>
-            <a:ext cx="3886200" cy="402336"/>
+            <a:off x="7882127" y="1975104"/>
+            <a:ext cx="3840480" cy="402336"/>
           </a:xfrm>
           <a:prstGeom prst="rect">
             <a:avLst/>
@@ -14075,21 +13361,21 @@
                 </a:solidFill>
                 <a:latin typeface="Arial"/>
               </a:rPr>
-              <a:t>Describe the outcome you need, in Teams.</a:t>
-            </a:r>
-          </a:p>
-        </p:txBody>
-      </p:sp>
-      <p:sp>
-        <p:nvSpPr>
-          <p:cNvPr id="49" name="Oval 48"/>
+              <a:t>The outcome, in Teams</a:t>
+            </a:r>
+          </a:p>
+        </p:txBody>
+      </p:sp>
+      <p:sp>
+        <p:nvSpPr>
+          <p:cNvPr id="48" name="Oval 47"/>
           <p:cNvSpPr/>
           <p:nvPr/>
         </p:nvSpPr>
         <p:spPr>
           <a:xfrm>
-            <a:off x="7269480" y="2331720"/>
-            <a:ext cx="402336" cy="402336"/>
+            <a:off x="7269480" y="2395728"/>
+            <a:ext cx="420624" cy="420624"/>
           </a:xfrm>
           <a:prstGeom prst="ellipse">
             <a:avLst/>
@@ -14109,14 +13395,14 @@
       </p:sp>
       <p:sp>
         <p:nvSpPr>
-          <p:cNvPr id="50" name="TextBox 49"/>
+          <p:cNvPr id="49" name="TextBox 48"/>
           <p:cNvSpPr txBox="1"/>
           <p:nvPr/>
         </p:nvSpPr>
         <p:spPr>
           <a:xfrm>
-            <a:off x="7269480" y="2331720"/>
-            <a:ext cx="402336" cy="402336"/>
+            <a:off x="7269480" y="2395728"/>
+            <a:ext cx="420624" cy="420624"/>
           </a:xfrm>
           <a:prstGeom prst="rect">
             <a:avLst/>
@@ -14131,7 +13417,7 @@
           <a:p>
             <a:pPr algn="ctr"/>
             <a:r>
-              <a:rPr sz="1500" b="1" i="0">
+              <a:rPr sz="1600" b="1" i="0">
                 <a:solidFill>
                   <a:srgbClr val="FFFFFF"/>
                 </a:solidFill>
@@ -14144,14 +13430,14 @@
       </p:sp>
       <p:sp>
         <p:nvSpPr>
-          <p:cNvPr id="51" name="TextBox 50"/>
+          <p:cNvPr id="50" name="TextBox 49"/>
           <p:cNvSpPr txBox="1"/>
           <p:nvPr/>
         </p:nvSpPr>
         <p:spPr>
           <a:xfrm>
-            <a:off x="7863840" y="2313432"/>
-            <a:ext cx="3886200" cy="292608"/>
+            <a:off x="7882127" y="2377440"/>
+            <a:ext cx="3840480" cy="310896"/>
           </a:xfrm>
           <a:prstGeom prst="rect">
             <a:avLst/>
@@ -14166,7 +13452,7 @@
           <a:p>
             <a:pPr algn="l"/>
             <a:r>
-              <a:rPr sz="1700" b="1" i="0">
+              <a:rPr sz="1800" b="1" i="0">
                 <a:solidFill>
                   <a:srgbClr val="333D47"/>
                 </a:solidFill>
@@ -14179,14 +13465,14 @@
       </p:sp>
       <p:sp>
         <p:nvSpPr>
-          <p:cNvPr id="52" name="TextBox 51"/>
+          <p:cNvPr id="51" name="TextBox 50"/>
           <p:cNvSpPr txBox="1"/>
           <p:nvPr/>
         </p:nvSpPr>
         <p:spPr>
           <a:xfrm>
-            <a:off x="7863840" y="2624328"/>
-            <a:ext cx="3886200" cy="402336"/>
+            <a:off x="7882127" y="2706624"/>
+            <a:ext cx="3840480" cy="402336"/>
           </a:xfrm>
           <a:prstGeom prst="rect">
             <a:avLst/>
@@ -14207,21 +13493,21 @@
                 </a:solidFill>
                 <a:latin typeface="Arial"/>
               </a:rPr>
-              <a:t>Riley decides which capabilities the task needs.</a:t>
-            </a:r>
-          </a:p>
-        </p:txBody>
-      </p:sp>
-      <p:sp>
-        <p:nvSpPr>
-          <p:cNvPr id="53" name="Oval 52"/>
+              <a:t>Riley picks the capabilities</a:t>
+            </a:r>
+          </a:p>
+        </p:txBody>
+      </p:sp>
+      <p:sp>
+        <p:nvSpPr>
+          <p:cNvPr id="52" name="Oval 51"/>
           <p:cNvSpPr/>
           <p:nvPr/>
         </p:nvSpPr>
         <p:spPr>
           <a:xfrm>
-            <a:off x="7269480" y="3044952"/>
-            <a:ext cx="402336" cy="402336"/>
+            <a:off x="7269480" y="3127248"/>
+            <a:ext cx="420624" cy="420624"/>
           </a:xfrm>
           <a:prstGeom prst="ellipse">
             <a:avLst/>
@@ -14241,14 +13527,14 @@
       </p:sp>
       <p:sp>
         <p:nvSpPr>
-          <p:cNvPr id="54" name="TextBox 53"/>
+          <p:cNvPr id="53" name="TextBox 52"/>
           <p:cNvSpPr txBox="1"/>
           <p:nvPr/>
         </p:nvSpPr>
         <p:spPr>
           <a:xfrm>
-            <a:off x="7269480" y="3044952"/>
-            <a:ext cx="402336" cy="402336"/>
+            <a:off x="7269480" y="3127248"/>
+            <a:ext cx="420624" cy="420624"/>
           </a:xfrm>
           <a:prstGeom prst="rect">
             <a:avLst/>
@@ -14263,7 +13549,7 @@
           <a:p>
             <a:pPr algn="ctr"/>
             <a:r>
-              <a:rPr sz="1500" b="1" i="0">
+              <a:rPr sz="1600" b="1" i="0">
                 <a:solidFill>
                   <a:srgbClr val="FFFFFF"/>
                 </a:solidFill>
@@ -14276,14 +13562,14 @@
       </p:sp>
       <p:sp>
         <p:nvSpPr>
-          <p:cNvPr id="55" name="TextBox 54"/>
+          <p:cNvPr id="54" name="TextBox 53"/>
           <p:cNvSpPr txBox="1"/>
           <p:nvPr/>
         </p:nvSpPr>
         <p:spPr>
           <a:xfrm>
-            <a:off x="7863840" y="3026664"/>
-            <a:ext cx="3886200" cy="292608"/>
+            <a:off x="7882127" y="3108960"/>
+            <a:ext cx="3840480" cy="310896"/>
           </a:xfrm>
           <a:prstGeom prst="rect">
             <a:avLst/>
@@ -14298,7 +13584,7 @@
           <a:p>
             <a:pPr algn="l"/>
             <a:r>
-              <a:rPr sz="1700" b="1" i="0">
+              <a:rPr sz="1800" b="1" i="0">
                 <a:solidFill>
                   <a:srgbClr val="333D47"/>
                 </a:solidFill>
@@ -14311,14 +13597,14 @@
       </p:sp>
       <p:sp>
         <p:nvSpPr>
-          <p:cNvPr id="56" name="TextBox 55"/>
+          <p:cNvPr id="55" name="TextBox 54"/>
           <p:cNvSpPr txBox="1"/>
           <p:nvPr/>
         </p:nvSpPr>
         <p:spPr>
           <a:xfrm>
-            <a:off x="7863840" y="3337560"/>
-            <a:ext cx="3886200" cy="603503"/>
+            <a:off x="7882127" y="3438144"/>
+            <a:ext cx="3840480" cy="603504"/>
           </a:xfrm>
           <a:prstGeom prst="rect">
             <a:avLst/>
@@ -14339,21 +13625,21 @@
                 </a:solidFill>
                 <a:latin typeface="Arial"/>
               </a:rPr>
-              <a:t>Uses approved AIA data, systems and AI capabilities, within your permissions.</a:t>
-            </a:r>
-          </a:p>
-        </p:txBody>
-      </p:sp>
-      <p:sp>
-        <p:nvSpPr>
-          <p:cNvPr id="57" name="Oval 56"/>
+              <a:t>AIA data, systems and AI, within your permissions</a:t>
+            </a:r>
+          </a:p>
+        </p:txBody>
+      </p:sp>
+      <p:sp>
+        <p:nvSpPr>
+          <p:cNvPr id="56" name="Oval 55"/>
           <p:cNvSpPr/>
           <p:nvPr/>
         </p:nvSpPr>
         <p:spPr>
           <a:xfrm>
-            <a:off x="7269480" y="3959352"/>
-            <a:ext cx="402336" cy="402336"/>
+            <a:off x="7269480" y="4059935"/>
+            <a:ext cx="420624" cy="420624"/>
           </a:xfrm>
           <a:prstGeom prst="ellipse">
             <a:avLst/>
@@ -14373,14 +13659,14 @@
       </p:sp>
       <p:sp>
         <p:nvSpPr>
-          <p:cNvPr id="58" name="TextBox 57"/>
+          <p:cNvPr id="57" name="TextBox 56"/>
           <p:cNvSpPr txBox="1"/>
           <p:nvPr/>
         </p:nvSpPr>
         <p:spPr>
           <a:xfrm>
-            <a:off x="7269480" y="3959352"/>
-            <a:ext cx="402336" cy="402336"/>
+            <a:off x="7269480" y="4059935"/>
+            <a:ext cx="420624" cy="420624"/>
           </a:xfrm>
           <a:prstGeom prst="rect">
             <a:avLst/>
@@ -14395,7 +13681,7 @@
           <a:p>
             <a:pPr algn="ctr"/>
             <a:r>
-              <a:rPr sz="1500" b="1" i="0">
+              <a:rPr sz="1600" b="1" i="0">
                 <a:solidFill>
                   <a:srgbClr val="FFFFFF"/>
                 </a:solidFill>
@@ -14408,14 +13694,14 @@
       </p:sp>
       <p:sp>
         <p:nvSpPr>
-          <p:cNvPr id="59" name="TextBox 58"/>
+          <p:cNvPr id="58" name="TextBox 57"/>
           <p:cNvSpPr txBox="1"/>
           <p:nvPr/>
         </p:nvSpPr>
         <p:spPr>
           <a:xfrm>
-            <a:off x="7863840" y="3941064"/>
-            <a:ext cx="3886200" cy="292608"/>
+            <a:off x="7882127" y="4041648"/>
+            <a:ext cx="3840480" cy="310896"/>
           </a:xfrm>
           <a:prstGeom prst="rect">
             <a:avLst/>
@@ -14430,7 +13716,7 @@
           <a:p>
             <a:pPr algn="l"/>
             <a:r>
-              <a:rPr sz="1700" b="1" i="0">
+              <a:rPr sz="1800" b="1" i="0">
                 <a:solidFill>
                   <a:srgbClr val="333D47"/>
                 </a:solidFill>
@@ -14443,14 +13729,14 @@
       </p:sp>
       <p:sp>
         <p:nvSpPr>
-          <p:cNvPr id="60" name="TextBox 59"/>
+          <p:cNvPr id="59" name="TextBox 58"/>
           <p:cNvSpPr txBox="1"/>
           <p:nvPr/>
         </p:nvSpPr>
         <p:spPr>
           <a:xfrm>
-            <a:off x="7863840" y="4251960"/>
-            <a:ext cx="3886200" cy="402336"/>
+            <a:off x="7882127" y="4370832"/>
+            <a:ext cx="3840480" cy="402336"/>
           </a:xfrm>
           <a:prstGeom prst="rect">
             <a:avLst/>
@@ -14471,21 +13757,21 @@
                 </a:solidFill>
                 <a:latin typeface="Arial"/>
               </a:rPr>
-              <a:t>Returns a finished piece of work.</a:t>
-            </a:r>
-          </a:p>
-        </p:txBody>
-      </p:sp>
-      <p:sp>
-        <p:nvSpPr>
-          <p:cNvPr id="61" name="Oval 60"/>
+              <a:t>Finished work, ready to review</a:t>
+            </a:r>
+          </a:p>
+        </p:txBody>
+      </p:sp>
+      <p:sp>
+        <p:nvSpPr>
+          <p:cNvPr id="60" name="Oval 59"/>
           <p:cNvSpPr/>
           <p:nvPr/>
         </p:nvSpPr>
         <p:spPr>
           <a:xfrm>
-            <a:off x="7269480" y="4672584"/>
-            <a:ext cx="402336" cy="402336"/>
+            <a:off x="7269480" y="4791455"/>
+            <a:ext cx="420624" cy="420624"/>
           </a:xfrm>
           <a:prstGeom prst="ellipse">
             <a:avLst/>
@@ -14505,14 +13791,14 @@
       </p:sp>
       <p:sp>
         <p:nvSpPr>
-          <p:cNvPr id="62" name="TextBox 61"/>
+          <p:cNvPr id="61" name="TextBox 60"/>
           <p:cNvSpPr txBox="1"/>
           <p:nvPr/>
         </p:nvSpPr>
         <p:spPr>
           <a:xfrm>
-            <a:off x="7269480" y="4672584"/>
-            <a:ext cx="402336" cy="402336"/>
+            <a:off x="7269480" y="4791455"/>
+            <a:ext cx="420624" cy="420624"/>
           </a:xfrm>
           <a:prstGeom prst="rect">
             <a:avLst/>
@@ -14527,7 +13813,7 @@
           <a:p>
             <a:pPr algn="ctr"/>
             <a:r>
-              <a:rPr sz="1500" b="1" i="0">
+              <a:rPr sz="1600" b="1" i="0">
                 <a:solidFill>
                   <a:srgbClr val="FFFFFF"/>
                 </a:solidFill>
@@ -14540,14 +13826,14 @@
       </p:sp>
       <p:sp>
         <p:nvSpPr>
-          <p:cNvPr id="63" name="TextBox 62"/>
+          <p:cNvPr id="62" name="TextBox 61"/>
           <p:cNvSpPr txBox="1"/>
           <p:nvPr/>
         </p:nvSpPr>
         <p:spPr>
           <a:xfrm>
-            <a:off x="7863840" y="4654296"/>
-            <a:ext cx="3886200" cy="292608"/>
+            <a:off x="7882127" y="4773168"/>
+            <a:ext cx="3840480" cy="310896"/>
           </a:xfrm>
           <a:prstGeom prst="rect">
             <a:avLst/>
@@ -14562,7 +13848,7 @@
           <a:p>
             <a:pPr algn="l"/>
             <a:r>
-              <a:rPr sz="1700" b="1" i="0">
+              <a:rPr sz="1800" b="1" i="0">
                 <a:solidFill>
                   <a:srgbClr val="D31145"/>
                 </a:solidFill>
@@ -14575,14 +13861,14 @@
       </p:sp>
       <p:sp>
         <p:nvSpPr>
-          <p:cNvPr id="64" name="TextBox 63"/>
+          <p:cNvPr id="63" name="TextBox 62"/>
           <p:cNvSpPr txBox="1"/>
           <p:nvPr/>
         </p:nvSpPr>
         <p:spPr>
           <a:xfrm>
-            <a:off x="7863840" y="4965192"/>
-            <a:ext cx="3886200" cy="786383"/>
+            <a:off x="7882127" y="5102352"/>
+            <a:ext cx="3840480" cy="603504"/>
           </a:xfrm>
           <a:prstGeom prst="rect">
             <a:avLst/>
@@ -14603,14 +13889,14 @@
                 </a:solidFill>
                 <a:latin typeface="Arial"/>
               </a:rPr>
-              <a:t>You review and approve before anything is finalized, sent to anyone, or entered into a business system.</a:t>
-            </a:r>
-          </a:p>
-        </p:txBody>
-      </p:sp>
-      <p:sp>
-        <p:nvSpPr>
-          <p:cNvPr id="65" name="TextBox 64"/>
+              <a:t>Nothing is finalized, sent or entered into a system until you approve</a:t>
+            </a:r>
+          </a:p>
+        </p:txBody>
+      </p:sp>
+      <p:sp>
+        <p:nvSpPr>
+          <p:cNvPr id="64" name="TextBox 63"/>
           <p:cNvSpPr txBox="1"/>
           <p:nvPr/>
         </p:nvSpPr>
@@ -14638,7 +13924,7 @@
                 </a:solidFill>
                 <a:latin typeface="Arial"/>
               </a:rPr>
-              <a:t>Illustrative example: a candidate first pilot, not the definition of Riley.</a:t>
+              <a:t>Illustrative: a candidate first pilot, not the definition of Riley.</a:t>
             </a:r>
           </a:p>
         </p:txBody>
@@ -14771,7 +14057,7 @@
         </p:nvSpPr>
         <p:spPr>
           <a:xfrm>
-            <a:off x="457200" y="1645920"/>
+            <a:off x="3995928" y="1600200"/>
             <a:ext cx="4206240" cy="347472"/>
           </a:xfrm>
           <a:prstGeom prst="roundRect">
@@ -14815,8 +14101,8 @@
         </p:nvSpPr>
         <p:spPr>
           <a:xfrm>
-            <a:off x="457200" y="2148840"/>
-            <a:ext cx="6766560" cy="914400"/>
+            <a:off x="612648" y="2148840"/>
+            <a:ext cx="10972800" cy="411480"/>
           </a:xfrm>
           <a:prstGeom prst="rect">
             <a:avLst/>
@@ -14829,51 +14115,15 @@
           </a:bodyPr>
           <a:lstStyle/>
           <a:p>
-            <a:pPr algn="l"/>
-            <a:r>
-              <a:rPr sz="2000" b="0" i="0">
-                <a:solidFill>
-                  <a:srgbClr val="333D47"/>
-                </a:solidFill>
-                <a:latin typeface="Arial"/>
-              </a:rPr>
-              <a:t>If Riley eventually served </a:t>
-            </a:r>
-            <a:r>
-              <a:rPr sz="2000" b="1" i="0">
-                <a:solidFill>
-                  <a:srgbClr val="333D47"/>
-                </a:solidFill>
-                <a:latin typeface="Arial"/>
-              </a:rPr>
-              <a:t>1,000 employees</a:t>
-            </a:r>
-            <a:r>
-              <a:rPr sz="2000" b="0" i="0">
-                <a:solidFill>
-                  <a:srgbClr val="333D47"/>
-                </a:solidFill>
-                <a:latin typeface="Arial"/>
-              </a:rPr>
-              <a:t> and saved each employee an average of </a:t>
-            </a:r>
-            <a:r>
-              <a:rPr sz="2000" b="1" i="0">
-                <a:solidFill>
-                  <a:srgbClr val="333D47"/>
-                </a:solidFill>
-                <a:latin typeface="Arial"/>
-              </a:rPr>
-              <a:t>1 hour per week</a:t>
-            </a:r>
-            <a:r>
-              <a:rPr sz="2000" b="0" i="0">
-                <a:solidFill>
-                  <a:srgbClr val="333D47"/>
-                </a:solidFill>
-                <a:latin typeface="Arial"/>
-              </a:rPr>
-              <a:t>, it would release approximately</a:t>
+            <a:pPr algn="ctr"/>
+            <a:r>
+              <a:rPr sz="1800" b="0" i="0">
+                <a:solidFill>
+                  <a:srgbClr val="5A6570"/>
+                </a:solidFill>
+                <a:latin typeface="Arial"/>
+              </a:rPr>
+              <a:t>If Riley eventually served 1,000 employees and saved each an average of 1 hour a week…</a:t>
             </a:r>
           </a:p>
         </p:txBody>
@@ -14886,8 +14136,43 @@
         </p:nvSpPr>
         <p:spPr>
           <a:xfrm>
-            <a:off x="457200" y="3108960"/>
-            <a:ext cx="6766560" cy="914400"/>
+            <a:off x="1158087" y="2743200"/>
+            <a:ext cx="2103120" cy="868680"/>
+          </a:xfrm>
+          <a:prstGeom prst="rect">
+            <a:avLst/>
+          </a:prstGeom>
+          <a:noFill/>
+        </p:spPr>
+        <p:txBody>
+          <a:bodyPr wrap="square" lIns="0" rIns="0" tIns="0" bIns="0" anchor="ctr">
+            <a:noAutofit/>
+          </a:bodyPr>
+          <a:lstStyle/>
+          <a:p>
+            <a:pPr algn="ctr"/>
+            <a:r>
+              <a:rPr sz="5400" b="1" i="0">
+                <a:solidFill>
+                  <a:srgbClr val="333D47"/>
+                </a:solidFill>
+                <a:latin typeface="Arial"/>
+              </a:rPr>
+              <a:t>1,000</a:t>
+            </a:r>
+          </a:p>
+        </p:txBody>
+      </p:sp>
+      <p:sp>
+        <p:nvSpPr>
+          <p:cNvPr id="9" name="TextBox 8"/>
+          <p:cNvSpPr txBox="1"/>
+          <p:nvPr/>
+        </p:nvSpPr>
+        <p:spPr>
+          <a:xfrm>
+            <a:off x="1158087" y="3639312"/>
+            <a:ext cx="2103120" cy="320040"/>
           </a:xfrm>
           <a:prstGeom prst="rect">
             <a:avLst/>
@@ -14900,29 +14185,99 @@
           </a:bodyPr>
           <a:lstStyle/>
           <a:p>
-            <a:pPr algn="l"/>
-            <a:r>
-              <a:rPr sz="6600" b="1" i="0">
-                <a:solidFill>
-                  <a:srgbClr val="D31145"/>
-                </a:solidFill>
-                <a:latin typeface="Arial"/>
-              </a:rPr>
-              <a:t>1,000 hours</a:t>
-            </a:r>
-          </a:p>
-        </p:txBody>
-      </p:sp>
-      <p:sp>
-        <p:nvSpPr>
-          <p:cNvPr id="9" name="TextBox 8"/>
+            <a:pPr algn="ctr"/>
+            <a:r>
+              <a:rPr sz="1600" b="0" i="0">
+                <a:solidFill>
+                  <a:srgbClr val="5A6570"/>
+                </a:solidFill>
+                <a:latin typeface="Arial"/>
+              </a:rPr>
+              <a:t>employees</a:t>
+            </a:r>
+          </a:p>
+        </p:txBody>
+      </p:sp>
+      <p:sp>
+        <p:nvSpPr>
+          <p:cNvPr id="10" name="TextBox 9"/>
           <p:cNvSpPr txBox="1"/>
           <p:nvPr/>
         </p:nvSpPr>
         <p:spPr>
           <a:xfrm>
-            <a:off x="457200" y="4069080"/>
-            <a:ext cx="6766560" cy="365760"/>
+            <a:off x="3261207" y="2743200"/>
+            <a:ext cx="548640" cy="868680"/>
+          </a:xfrm>
+          <a:prstGeom prst="rect">
+            <a:avLst/>
+          </a:prstGeom>
+          <a:noFill/>
+        </p:spPr>
+        <p:txBody>
+          <a:bodyPr wrap="square" lIns="0" rIns="0" tIns="0" bIns="0" anchor="ctr">
+            <a:noAutofit/>
+          </a:bodyPr>
+          <a:lstStyle/>
+          <a:p>
+            <a:pPr algn="ctr"/>
+            <a:r>
+              <a:rPr sz="4400" b="0" i="0">
+                <a:solidFill>
+                  <a:srgbClr val="8A939B"/>
+                </a:solidFill>
+                <a:latin typeface="Arial"/>
+              </a:rPr>
+              <a:t>×</a:t>
+            </a:r>
+          </a:p>
+        </p:txBody>
+      </p:sp>
+      <p:sp>
+        <p:nvSpPr>
+          <p:cNvPr id="11" name="TextBox 10"/>
+          <p:cNvSpPr txBox="1"/>
+          <p:nvPr/>
+        </p:nvSpPr>
+        <p:spPr>
+          <a:xfrm>
+            <a:off x="3809847" y="2743200"/>
+            <a:ext cx="2377440" cy="868680"/>
+          </a:xfrm>
+          <a:prstGeom prst="rect">
+            <a:avLst/>
+          </a:prstGeom>
+          <a:noFill/>
+        </p:spPr>
+        <p:txBody>
+          <a:bodyPr wrap="square" lIns="0" rIns="0" tIns="0" bIns="0" anchor="ctr">
+            <a:noAutofit/>
+          </a:bodyPr>
+          <a:lstStyle/>
+          <a:p>
+            <a:pPr algn="ctr"/>
+            <a:r>
+              <a:rPr sz="5400" b="1" i="0">
+                <a:solidFill>
+                  <a:srgbClr val="333D47"/>
+                </a:solidFill>
+                <a:latin typeface="Arial"/>
+              </a:rPr>
+              <a:t>1 hour</a:t>
+            </a:r>
+          </a:p>
+        </p:txBody>
+      </p:sp>
+      <p:sp>
+        <p:nvSpPr>
+          <p:cNvPr id="12" name="TextBox 11"/>
+          <p:cNvSpPr txBox="1"/>
+          <p:nvPr/>
+        </p:nvSpPr>
+        <p:spPr>
+          <a:xfrm>
+            <a:off x="3809847" y="3639312"/>
+            <a:ext cx="2377440" cy="320040"/>
           </a:xfrm>
           <a:prstGeom prst="rect">
             <a:avLst/>
@@ -14935,98 +14290,17 @@
           </a:bodyPr>
           <a:lstStyle/>
           <a:p>
-            <a:pPr algn="l"/>
-            <a:r>
-              <a:rPr sz="1800" b="1" i="0">
-                <a:solidFill>
-                  <a:srgbClr val="333D47"/>
-                </a:solidFill>
-                <a:latin typeface="Arial"/>
-              </a:rPr>
-              <a:t>of employee capacity every week, for higher-value work</a:t>
-            </a:r>
-          </a:p>
-        </p:txBody>
-      </p:sp>
-      <p:sp>
-        <p:nvSpPr>
-          <p:cNvPr id="10" name="Rectangle 9"/>
-          <p:cNvSpPr/>
-          <p:nvPr/>
-        </p:nvSpPr>
-        <p:spPr>
-          <a:xfrm>
-            <a:off x="457200" y="4681728"/>
-            <a:ext cx="6675120" cy="237744"/>
-          </a:xfrm>
-          <a:prstGeom prst="rect">
-            <a:avLst/>
-          </a:prstGeom>
-          <a:solidFill>
-            <a:srgbClr val="F0F1F2"/>
-          </a:solidFill>
-          <a:ln>
-            <a:noFill/>
-          </a:ln>
-        </p:spPr>
-        <p:txBody>
-          <a:bodyPr rtlCol="0" anchor="ctr"/>
-          <a:lstStyle/>
-          <a:p/>
-        </p:txBody>
-      </p:sp>
-      <p:sp>
-        <p:nvSpPr>
-          <p:cNvPr id="11" name="Rectangle 10"/>
-          <p:cNvSpPr/>
-          <p:nvPr/>
-        </p:nvSpPr>
-        <p:spPr>
-          <a:xfrm>
-            <a:off x="457200" y="4681728"/>
-            <a:ext cx="1335024" cy="237744"/>
-          </a:xfrm>
-          <a:prstGeom prst="rect">
-            <a:avLst/>
-          </a:prstGeom>
-          <a:solidFill>
-            <a:srgbClr val="D3CAC3"/>
-          </a:solidFill>
-          <a:ln>
-            <a:noFill/>
-          </a:ln>
-        </p:spPr>
-        <p:txBody>
-          <a:bodyPr rtlCol="0" anchor="ctr"/>
-          <a:lstStyle/>
-          <a:p/>
-        </p:txBody>
-      </p:sp>
-      <p:sp>
-        <p:nvSpPr>
-          <p:cNvPr id="12" name="Rectangle 11"/>
-          <p:cNvSpPr/>
-          <p:nvPr/>
-        </p:nvSpPr>
-        <p:spPr>
-          <a:xfrm>
-            <a:off x="457200" y="4681728"/>
-            <a:ext cx="166878" cy="237744"/>
-          </a:xfrm>
-          <a:prstGeom prst="rect">
-            <a:avLst/>
-          </a:prstGeom>
-          <a:solidFill>
-            <a:srgbClr val="D31145"/>
-          </a:solidFill>
-          <a:ln>
-            <a:noFill/>
-          </a:ln>
-        </p:spPr>
-        <p:txBody>
-          <a:bodyPr rtlCol="0" anchor="ctr"/>
-          <a:lstStyle/>
-          <a:p/>
+            <a:pPr algn="ctr"/>
+            <a:r>
+              <a:rPr sz="1600" b="0" i="0">
+                <a:solidFill>
+                  <a:srgbClr val="5A6570"/>
+                </a:solidFill>
+                <a:latin typeface="Arial"/>
+              </a:rPr>
+              <a:t>per employee, per week</a:t>
+            </a:r>
+          </a:p>
         </p:txBody>
       </p:sp>
       <p:sp>
@@ -15037,8 +14311,78 @@
         </p:nvSpPr>
         <p:spPr>
           <a:xfrm>
-            <a:off x="457200" y="4956048"/>
-            <a:ext cx="6675120" cy="502920"/>
+            <a:off x="6187287" y="2743200"/>
+            <a:ext cx="548640" cy="868680"/>
+          </a:xfrm>
+          <a:prstGeom prst="rect">
+            <a:avLst/>
+          </a:prstGeom>
+          <a:noFill/>
+        </p:spPr>
+        <p:txBody>
+          <a:bodyPr wrap="square" lIns="0" rIns="0" tIns="0" bIns="0" anchor="ctr">
+            <a:noAutofit/>
+          </a:bodyPr>
+          <a:lstStyle/>
+          <a:p>
+            <a:pPr algn="ctr"/>
+            <a:r>
+              <a:rPr sz="4400" b="0" i="0">
+                <a:solidFill>
+                  <a:srgbClr val="8A939B"/>
+                </a:solidFill>
+                <a:latin typeface="Arial"/>
+              </a:rPr>
+              <a:t>=</a:t>
+            </a:r>
+          </a:p>
+        </p:txBody>
+      </p:sp>
+      <p:sp>
+        <p:nvSpPr>
+          <p:cNvPr id="14" name="TextBox 13"/>
+          <p:cNvSpPr txBox="1"/>
+          <p:nvPr/>
+        </p:nvSpPr>
+        <p:spPr>
+          <a:xfrm>
+            <a:off x="6735927" y="2743200"/>
+            <a:ext cx="4297680" cy="868680"/>
+          </a:xfrm>
+          <a:prstGeom prst="rect">
+            <a:avLst/>
+          </a:prstGeom>
+          <a:noFill/>
+        </p:spPr>
+        <p:txBody>
+          <a:bodyPr wrap="square" lIns="0" rIns="0" tIns="0" bIns="0" anchor="ctr">
+            <a:noAutofit/>
+          </a:bodyPr>
+          <a:lstStyle/>
+          <a:p>
+            <a:pPr algn="ctr"/>
+            <a:r>
+              <a:rPr sz="5400" b="1" i="0">
+                <a:solidFill>
+                  <a:srgbClr val="D31145"/>
+                </a:solidFill>
+                <a:latin typeface="Arial"/>
+              </a:rPr>
+              <a:t>1,000 hours</a:t>
+            </a:r>
+          </a:p>
+        </p:txBody>
+      </p:sp>
+      <p:sp>
+        <p:nvSpPr>
+          <p:cNvPr id="15" name="TextBox 14"/>
+          <p:cNvSpPr txBox="1"/>
+          <p:nvPr/>
+        </p:nvSpPr>
+        <p:spPr>
+          <a:xfrm>
+            <a:off x="6735927" y="3639312"/>
+            <a:ext cx="4297680" cy="320040"/>
           </a:xfrm>
           <a:prstGeom prst="rect">
             <a:avLst/>
@@ -15051,69 +14395,33 @@
           </a:bodyPr>
           <a:lstStyle/>
           <a:p>
-            <a:pPr algn="l"/>
-            <a:r>
-              <a:rPr sz="1200" b="1" i="0">
-                <a:solidFill>
-                  <a:srgbClr val="5A6570"/>
-                </a:solidFill>
-                <a:latin typeface="Arial"/>
-              </a:rPr>
-              <a:t>A 40-hour week.  </a:t>
-            </a:r>
-            <a:r>
-              <a:rPr sz="1200" b="1" i="0">
+            <a:pPr algn="ctr"/>
+            <a:r>
+              <a:rPr sz="1600" b="1" i="0">
                 <a:solidFill>
                   <a:srgbClr val="D31145"/>
                 </a:solidFill>
                 <a:latin typeface="Arial"/>
               </a:rPr>
-              <a:t>1 h</a:t>
-            </a:r>
-            <a:r>
-              <a:rPr sz="1200" b="0" i="0">
-                <a:solidFill>
-                  <a:srgbClr val="5A6570"/>
-                </a:solidFill>
-                <a:latin typeface="Arial"/>
-              </a:rPr>
-              <a:t> = the scenario.  </a:t>
-            </a:r>
-            <a:r>
-              <a:rPr sz="1200" b="1" i="0">
-                <a:solidFill>
-                  <a:srgbClr val="5A6570"/>
-                </a:solidFill>
-                <a:latin typeface="Arial"/>
-              </a:rPr>
-              <a:t>~8 h</a:t>
-            </a:r>
-            <a:r>
-              <a:rPr sz="1200" b="0" i="0">
-                <a:solidFill>
-                  <a:srgbClr val="5A6570"/>
-                </a:solidFill>
-                <a:latin typeface="Arial"/>
-              </a:rPr>
-              <a:t> = nearly 20% of the week spent looking for internal information or tracking down colleagues (McKinsey, 2012).</a:t>
-            </a:r>
-          </a:p>
-        </p:txBody>
-      </p:sp>
-      <p:sp>
-        <p:nvSpPr>
-          <p:cNvPr id="14" name="Rounded Rectangle 13"/>
+              <a:t>released every week</a:t>
+            </a:r>
+          </a:p>
+        </p:txBody>
+      </p:sp>
+      <p:sp>
+        <p:nvSpPr>
+          <p:cNvPr id="16" name="Rounded Rectangle 15"/>
           <p:cNvSpPr/>
           <p:nvPr/>
         </p:nvSpPr>
         <p:spPr>
           <a:xfrm>
-            <a:off x="7589520" y="1645920"/>
-            <a:ext cx="4160520" cy="3977639"/>
+            <a:off x="1463040" y="4343400"/>
+            <a:ext cx="9262872" cy="777240"/>
           </a:xfrm>
           <a:prstGeom prst="roundRect">
             <a:avLst>
-              <a:gd name="adj" fmla="val 4000"/>
+              <a:gd name="adj" fmla="val 20000"/>
             </a:avLst>
           </a:prstGeom>
           <a:solidFill>
@@ -15131,14 +14439,76 @@
       </p:sp>
       <p:sp>
         <p:nvSpPr>
-          <p:cNvPr id="15" name="TextBox 14"/>
+          <p:cNvPr id="17" name="TextBox 16"/>
           <p:cNvSpPr txBox="1"/>
           <p:nvPr/>
         </p:nvSpPr>
         <p:spPr>
           <a:xfrm>
-            <a:off x="7909560" y="1874519"/>
-            <a:ext cx="3520439" cy="274320"/>
+            <a:off x="1463040" y="4343400"/>
+            <a:ext cx="9262872" cy="777240"/>
+          </a:xfrm>
+          <a:prstGeom prst="rect">
+            <a:avLst/>
+          </a:prstGeom>
+          <a:noFill/>
+        </p:spPr>
+        <p:txBody>
+          <a:bodyPr wrap="square" lIns="0" rIns="0" tIns="0" bIns="0" anchor="ctr">
+            <a:noAutofit/>
+          </a:bodyPr>
+          <a:lstStyle/>
+          <a:p>
+            <a:pPr algn="ctr"/>
+            <a:r>
+              <a:rPr sz="1200" b="1" i="0">
+                <a:solidFill>
+                  <a:srgbClr val="D31145"/>
+                </a:solidFill>
+                <a:latin typeface="Arial"/>
+              </a:rPr>
+              <a:t>DOUBLE EMPLOYEE VALUE     </a:t>
+            </a:r>
+            <a:r>
+              <a:rPr sz="1600" b="0" i="0">
+                <a:solidFill>
+                  <a:srgbClr val="5A6570"/>
+                </a:solidFill>
+                <a:latin typeface="Arial"/>
+              </a:rPr>
+              <a:t>Less searching and switching  </a:t>
+            </a:r>
+            <a:r>
+              <a:rPr sz="1600" b="1" i="0">
+                <a:solidFill>
+                  <a:srgbClr val="D31145"/>
+                </a:solidFill>
+                <a:latin typeface="Arial"/>
+              </a:rPr>
+              <a:t>→  </a:t>
+            </a:r>
+            <a:r>
+              <a:rPr sz="1600" b="1" i="0">
+                <a:solidFill>
+                  <a:srgbClr val="333D47"/>
+                </a:solidFill>
+                <a:latin typeface="Arial"/>
+              </a:rPr>
+              <a:t>more time for customers and judgment</a:t>
+            </a:r>
+          </a:p>
+        </p:txBody>
+      </p:sp>
+      <p:sp>
+        <p:nvSpPr>
+          <p:cNvPr id="18" name="TextBox 17"/>
+          <p:cNvSpPr txBox="1"/>
+          <p:nvPr/>
+        </p:nvSpPr>
+        <p:spPr>
+          <a:xfrm>
+            <a:off x="1097280" y="5394960"/>
+            <a:ext cx="10012680" cy="274320"/>
           </a:xfrm>
           <a:prstGeom prst="rect">
             <a:avLst/>
@@ -15151,337 +14521,15 @@
           </a:bodyPr>
           <a:lstStyle/>
           <a:p>
-            <a:pPr algn="l"/>
-            <a:r>
-              <a:rPr sz="1200" b="1" i="0">
-                <a:solidFill>
-                  <a:srgbClr val="D31145"/>
-                </a:solidFill>
-                <a:latin typeface="Arial"/>
-              </a:rPr>
-              <a:t>DOUBLE EMPLOYEE VALUE</a:t>
-            </a:r>
-          </a:p>
-        </p:txBody>
-      </p:sp>
-      <p:sp>
-        <p:nvSpPr>
-          <p:cNvPr id="16" name="TextBox 15"/>
-          <p:cNvSpPr txBox="1"/>
-          <p:nvPr/>
-        </p:nvSpPr>
-        <p:spPr>
-          <a:xfrm>
-            <a:off x="7909560" y="2148840"/>
-            <a:ext cx="3520439" cy="411480"/>
-          </a:xfrm>
-          <a:prstGeom prst="rect">
-            <a:avLst/>
-          </a:prstGeom>
-          <a:noFill/>
-        </p:spPr>
-        <p:txBody>
-          <a:bodyPr wrap="square" lIns="0" rIns="0" tIns="0" bIns="0" anchor="t">
-            <a:noAutofit/>
-          </a:bodyPr>
-          <a:lstStyle/>
-          <a:p>
-            <a:pPr algn="l"/>
-            <a:r>
-              <a:rPr sz="2000" b="1" i="0">
-                <a:solidFill>
-                  <a:srgbClr val="333D47"/>
-                </a:solidFill>
-                <a:latin typeface="Arial"/>
-              </a:rPr>
-              <a:t>Where the time goes</a:t>
-            </a:r>
-          </a:p>
-        </p:txBody>
-      </p:sp>
-      <p:sp>
-        <p:nvSpPr>
-          <p:cNvPr id="17" name="TextBox 16"/>
-          <p:cNvSpPr txBox="1"/>
-          <p:nvPr/>
-        </p:nvSpPr>
-        <p:spPr>
-          <a:xfrm>
-            <a:off x="7909560" y="2670048"/>
-            <a:ext cx="3520439" cy="274320"/>
-          </a:xfrm>
-          <a:prstGeom prst="rect">
-            <a:avLst/>
-          </a:prstGeom>
-          <a:noFill/>
-        </p:spPr>
-        <p:txBody>
-          <a:bodyPr wrap="square" lIns="0" rIns="0" tIns="0" bIns="0" anchor="t">
-            <a:noAutofit/>
-          </a:bodyPr>
-          <a:lstStyle/>
-          <a:p>
-            <a:pPr algn="l"/>
-            <a:r>
-              <a:rPr sz="1200" b="1" i="0">
+            <a:pPr algn="ctr"/>
+            <a:r>
+              <a:rPr sz="1200" b="0" i="1">
                 <a:solidFill>
                   <a:srgbClr val="5A6570"/>
                 </a:solidFill>
                 <a:latin typeface="Arial"/>
               </a:rPr>
-              <a:t>LESS TIME ON</a:t>
-            </a:r>
-          </a:p>
-        </p:txBody>
-      </p:sp>
-      <p:sp>
-        <p:nvSpPr>
-          <p:cNvPr id="18" name="TextBox 17"/>
-          <p:cNvSpPr txBox="1"/>
-          <p:nvPr/>
-        </p:nvSpPr>
-        <p:spPr>
-          <a:xfrm>
-            <a:off x="7909560" y="2944368"/>
-            <a:ext cx="3520439" cy="1097280"/>
-          </a:xfrm>
-          <a:prstGeom prst="rect">
-            <a:avLst/>
-          </a:prstGeom>
-          <a:noFill/>
-        </p:spPr>
-        <p:txBody>
-          <a:bodyPr wrap="square" lIns="0" rIns="0" tIns="0" bIns="0" anchor="t">
-            <a:noAutofit/>
-          </a:bodyPr>
-          <a:lstStyle/>
-          <a:p>
-            <a:pPr algn="l">
-              <a:spcAft>
-                <a:spcPts val="200"/>
-              </a:spcAft>
-            </a:pPr>
-            <a:r>
-              <a:rPr sz="1100" b="0" i="0">
-                <a:solidFill>
-                  <a:srgbClr val="8A939B"/>
-                </a:solidFill>
-                <a:latin typeface="Arial"/>
-              </a:rPr>
-              <a:t>●  </a:t>
-            </a:r>
-            <a:r>
-              <a:rPr sz="1500" b="0" i="0">
-                <a:solidFill>
-                  <a:srgbClr val="5A6570"/>
-                </a:solidFill>
-                <a:latin typeface="Arial"/>
-              </a:rPr>
-              <a:t>Searching for information</a:t>
-            </a:r>
-          </a:p>
-          <a:p>
-            <a:pPr algn="l">
-              <a:spcAft>
-                <a:spcPts val="200"/>
-              </a:spcAft>
-            </a:pPr>
-            <a:r>
-              <a:rPr sz="1100" b="0" i="0">
-                <a:solidFill>
-                  <a:srgbClr val="8A939B"/>
-                </a:solidFill>
-                <a:latin typeface="Arial"/>
-              </a:rPr>
-              <a:t>●  </a:t>
-            </a:r>
-            <a:r>
-              <a:rPr sz="1500" b="0" i="0">
-                <a:solidFill>
-                  <a:srgbClr val="5A6570"/>
-                </a:solidFill>
-                <a:latin typeface="Arial"/>
-              </a:rPr>
-              <a:t>Switching between systems</a:t>
-            </a:r>
-          </a:p>
-          <a:p>
-            <a:pPr algn="l">
-              <a:spcAft>
-                <a:spcPts val="200"/>
-              </a:spcAft>
-            </a:pPr>
-            <a:r>
-              <a:rPr sz="1100" b="0" i="0">
-                <a:solidFill>
-                  <a:srgbClr val="8A939B"/>
-                </a:solidFill>
-                <a:latin typeface="Arial"/>
-              </a:rPr>
-              <a:t>●  </a:t>
-            </a:r>
-            <a:r>
-              <a:rPr sz="1500" b="0" i="0">
-                <a:solidFill>
-                  <a:srgbClr val="5A6570"/>
-                </a:solidFill>
-                <a:latin typeface="Arial"/>
-              </a:rPr>
-              <a:t>Chasing and coordinating</a:t>
-            </a:r>
-          </a:p>
-          <a:p>
-            <a:pPr algn="l">
-              <a:spcAft>
-                <a:spcPts val="200"/>
-              </a:spcAft>
-            </a:pPr>
-            <a:r>
-              <a:rPr sz="1100" b="0" i="0">
-                <a:solidFill>
-                  <a:srgbClr val="8A939B"/>
-                </a:solidFill>
-                <a:latin typeface="Arial"/>
-              </a:rPr>
-              <a:t>●  </a:t>
-            </a:r>
-            <a:r>
-              <a:rPr sz="1500" b="0" i="0">
-                <a:solidFill>
-                  <a:srgbClr val="5A6570"/>
-                </a:solidFill>
-                <a:latin typeface="Arial"/>
-              </a:rPr>
-              <a:t>Repetitive assembly</a:t>
-            </a:r>
-          </a:p>
-        </p:txBody>
-      </p:sp>
-      <p:pic>
-        <p:nvPicPr>
-          <p:cNvPr id="19" name="Picture 18" descr="LuArrowRight_r.png"/>
-          <p:cNvPicPr>
-            <a:picLocks noChangeAspect="1"/>
-          </p:cNvPicPr>
-          <p:nvPr/>
-        </p:nvPicPr>
-        <p:blipFill>
-          <a:blip r:embed="rId3"/>
-          <a:stretch>
-            <a:fillRect/>
-          </a:stretch>
-        </p:blipFill>
-        <p:spPr>
-          <a:xfrm rot="5400000">
-            <a:off x="9486900" y="4041648"/>
-            <a:ext cx="365760" cy="365760"/>
-          </a:xfrm>
-          <a:prstGeom prst="rect">
-            <a:avLst/>
-          </a:prstGeom>
-        </p:spPr>
-      </p:pic>
-      <p:sp>
-        <p:nvSpPr>
-          <p:cNvPr id="20" name="TextBox 19"/>
-          <p:cNvSpPr txBox="1"/>
-          <p:nvPr/>
-        </p:nvSpPr>
-        <p:spPr>
-          <a:xfrm>
-            <a:off x="7909560" y="4407408"/>
-            <a:ext cx="3520439" cy="274320"/>
-          </a:xfrm>
-          <a:prstGeom prst="rect">
-            <a:avLst/>
-          </a:prstGeom>
-          <a:noFill/>
-        </p:spPr>
-        <p:txBody>
-          <a:bodyPr wrap="square" lIns="0" rIns="0" tIns="0" bIns="0" anchor="t">
-            <a:noAutofit/>
-          </a:bodyPr>
-          <a:lstStyle/>
-          <a:p>
-            <a:pPr algn="l"/>
-            <a:r>
-              <a:rPr sz="1200" b="1" i="0">
-                <a:solidFill>
-                  <a:srgbClr val="D31145"/>
-                </a:solidFill>
-                <a:latin typeface="Arial"/>
-              </a:rPr>
-              <a:t>MORE TIME FOR</a:t>
-            </a:r>
-          </a:p>
-        </p:txBody>
-      </p:sp>
-      <p:sp>
-        <p:nvSpPr>
-          <p:cNvPr id="21" name="TextBox 20"/>
-          <p:cNvSpPr txBox="1"/>
-          <p:nvPr/>
-        </p:nvSpPr>
-        <p:spPr>
-          <a:xfrm>
-            <a:off x="7909560" y="4681728"/>
-            <a:ext cx="3520439" cy="822960"/>
-          </a:xfrm>
-          <a:prstGeom prst="rect">
-            <a:avLst/>
-          </a:prstGeom>
-          <a:noFill/>
-        </p:spPr>
-        <p:txBody>
-          <a:bodyPr wrap="square" lIns="0" rIns="0" tIns="0" bIns="0" anchor="t">
-            <a:noAutofit/>
-          </a:bodyPr>
-          <a:lstStyle/>
-          <a:p>
-            <a:pPr algn="l"/>
-            <a:r>
-              <a:rPr sz="1600" b="1" i="0">
-                <a:solidFill>
-                  <a:srgbClr val="333D47"/>
-                </a:solidFill>
-                <a:latin typeface="Arial"/>
-              </a:rPr>
-              <a:t>Customers, judgment and decisions, problem-solving and innovation</a:t>
-            </a:r>
-          </a:p>
-        </p:txBody>
-      </p:sp>
-      <p:sp>
-        <p:nvSpPr>
-          <p:cNvPr id="22" name="TextBox 21"/>
-          <p:cNvSpPr txBox="1"/>
-          <p:nvPr/>
-        </p:nvSpPr>
-        <p:spPr>
-          <a:xfrm>
-            <a:off x="457200" y="5532120"/>
-            <a:ext cx="6766560" cy="274320"/>
-          </a:xfrm>
-          <a:prstGeom prst="rect">
-            <a:avLst/>
-          </a:prstGeom>
-          <a:noFill/>
-        </p:spPr>
-        <p:txBody>
-          <a:bodyPr wrap="square" lIns="0" rIns="0" tIns="0" bIns="0" anchor="t">
-            <a:noAutofit/>
-          </a:bodyPr>
-          <a:lstStyle/>
-          <a:p>
-            <a:pPr algn="l"/>
-            <a:r>
-              <a:rPr sz="1200" b="0" i="1">
-                <a:solidFill>
-                  <a:srgbClr val="5A6570"/>
-                </a:solidFill>
-                <a:latin typeface="Arial"/>
-              </a:rPr>
-              <a:t>1,000 is not a pilot size or an AIA employee count. 1 hour is not yet proven: the pilot exists to test it.</a:t>
+              <a:t>1,000 is not a pilot size or an AIA employee count. The pilot tests whether 1 hour is achievable.</a:t>
             </a:r>
           </a:p>
         </p:txBody>
@@ -15578,41 +14626,6 @@
       </p:sp>
       <p:sp>
         <p:nvSpPr>
-          <p:cNvPr id="6" name="TextBox 5"/>
-          <p:cNvSpPr txBox="1"/>
-          <p:nvPr/>
-        </p:nvSpPr>
-        <p:spPr>
-          <a:xfrm>
-            <a:off x="448056" y="1133856"/>
-            <a:ext cx="11155680" cy="457200"/>
-          </a:xfrm>
-          <a:prstGeom prst="rect">
-            <a:avLst/>
-          </a:prstGeom>
-          <a:noFill/>
-        </p:spPr>
-        <p:txBody>
-          <a:bodyPr wrap="square" lIns="0" rIns="0" tIns="0" bIns="0" anchor="t">
-            <a:noAutofit/>
-          </a:bodyPr>
-          <a:lstStyle/>
-          <a:p>
-            <a:pPr algn="l"/>
-            <a:r>
-              <a:rPr sz="1600" b="0" i="0">
-                <a:solidFill>
-                  <a:srgbClr val="5A6570"/>
-                </a:solidFill>
-                <a:latin typeface="Arial"/>
-              </a:rPr>
-              <a:t>Measured on the real Phase 1 team, against a Phase 0 baseline.</a:t>
-            </a:r>
-          </a:p>
-        </p:txBody>
-      </p:sp>
-      <p:sp>
-        <p:nvSpPr>
           <p:cNvPr id="5" name="Slide Number Placeholder 4">
             <a:extLst>
               <a:ext uri="{FF2B5EF4-FFF2-40B4-BE49-F238E27FC236}">
@@ -15643,14 +14656,14 @@
       </p:sp>
       <p:sp>
         <p:nvSpPr>
-          <p:cNvPr id="7" name="Oval 6"/>
+          <p:cNvPr id="6" name="Oval 5"/>
           <p:cNvSpPr/>
           <p:nvPr/>
         </p:nvSpPr>
         <p:spPr>
           <a:xfrm>
-            <a:off x="457200" y="1783080"/>
-            <a:ext cx="640080" cy="640080"/>
+            <a:off x="457200" y="1737360"/>
+            <a:ext cx="731520" cy="731520"/>
           </a:xfrm>
           <a:prstGeom prst="ellipse">
             <a:avLst/>
@@ -15670,7 +14683,7 @@
       </p:sp>
       <p:pic>
         <p:nvPicPr>
-          <p:cNvPr id="8" name="Picture 7" descr="LuTimer_w.png"/>
+          <p:cNvPr id="7" name="Picture 6" descr="LuTimer_w.png"/>
           <p:cNvPicPr>
             <a:picLocks noChangeAspect="1"/>
           </p:cNvPicPr>
@@ -15684,8 +14697,8 @@
         </p:blipFill>
         <p:spPr>
           <a:xfrm>
-            <a:off x="610819" y="1936699"/>
-            <a:ext cx="332841" cy="332841"/>
+            <a:off x="632764" y="1912924"/>
+            <a:ext cx="380390" cy="380390"/>
           </a:xfrm>
           <a:prstGeom prst="rect">
             <a:avLst/>
@@ -15694,14 +14707,14 @@
       </p:pic>
       <p:sp>
         <p:nvSpPr>
-          <p:cNvPr id="9" name="TextBox 8"/>
+          <p:cNvPr id="8" name="TextBox 7"/>
           <p:cNvSpPr txBox="1"/>
           <p:nvPr/>
         </p:nvSpPr>
         <p:spPr>
           <a:xfrm>
-            <a:off x="1234440" y="1783080"/>
-            <a:ext cx="2788920" cy="640080"/>
+            <a:off x="1353312" y="1737360"/>
+            <a:ext cx="2670048" cy="731520"/>
           </a:xfrm>
           <a:prstGeom prst="rect">
             <a:avLst/>
@@ -15716,26 +14729,26 @@
           <a:p>
             <a:pPr algn="l"/>
             <a:r>
-              <a:rPr sz="1900" b="1" i="0">
+              <a:rPr sz="2400" b="1" i="0">
                 <a:solidFill>
                   <a:srgbClr val="333D47"/>
                 </a:solidFill>
                 <a:latin typeface="Arial"/>
               </a:rPr>
-              <a:t>Does it save effort?</a:t>
+              <a:t>Faster?</a:t>
             </a:r>
           </a:p>
         </p:txBody>
       </p:sp>
       <p:cxnSp>
         <p:nvCxnSpPr>
-          <p:cNvPr id="10" name="Connector 9"/>
+          <p:cNvPr id="9" name="Connector 8"/>
           <p:cNvCxnSpPr/>
           <p:nvPr/>
         </p:nvCxnSpPr>
         <p:spPr>
           <a:xfrm>
-            <a:off x="457200" y="2587752"/>
+            <a:off x="457200" y="2651760"/>
             <a:ext cx="3566160" cy="0"/>
           </a:xfrm>
           <a:prstGeom prst="line">
@@ -15764,14 +14777,14 @@
       </p:cxnSp>
       <p:sp>
         <p:nvSpPr>
-          <p:cNvPr id="11" name="TextBox 10"/>
+          <p:cNvPr id="10" name="TextBox 9"/>
           <p:cNvSpPr txBox="1"/>
           <p:nvPr/>
         </p:nvSpPr>
         <p:spPr>
           <a:xfrm>
-            <a:off x="457200" y="2697480"/>
-            <a:ext cx="3566160" cy="292608"/>
+            <a:off x="457200" y="2788920"/>
+            <a:ext cx="3566160" cy="685800"/>
           </a:xfrm>
           <a:prstGeom prst="rect">
             <a:avLst/>
@@ -15786,61 +14799,26 @@
           <a:p>
             <a:pPr algn="l"/>
             <a:r>
-              <a:rPr sz="1600" b="1" i="0">
+              <a:rPr sz="1800" b="1" i="0">
                 <a:solidFill>
                   <a:srgbClr val="333D47"/>
                 </a:solidFill>
                 <a:latin typeface="Arial"/>
               </a:rPr>
               <a:t>Active employee effort</a:t>
-            </a:r>
-          </a:p>
-        </p:txBody>
-      </p:sp>
-      <p:sp>
-        <p:nvSpPr>
-          <p:cNvPr id="12" name="TextBox 11"/>
-          <p:cNvSpPr txBox="1"/>
-          <p:nvPr/>
-        </p:nvSpPr>
-        <p:spPr>
-          <a:xfrm>
-            <a:off x="457200" y="3026664"/>
-            <a:ext cx="3566160" cy="685800"/>
-          </a:xfrm>
-          <a:prstGeom prst="rect">
-            <a:avLst/>
-          </a:prstGeom>
-          <a:noFill/>
-        </p:spPr>
-        <p:txBody>
-          <a:bodyPr wrap="square" lIns="0" rIns="0" tIns="0" bIns="0" anchor="t">
-            <a:noAutofit/>
-          </a:bodyPr>
-          <a:lstStyle/>
-          <a:p>
-            <a:pPr algn="l"/>
-            <a:r>
-              <a:rPr sz="1400" b="0" i="0">
-                <a:solidFill>
-                  <a:srgbClr val="5A6570"/>
-                </a:solidFill>
-                <a:latin typeface="Arial"/>
-              </a:rPr>
-              <a:t>Time spent per completed task, before vs. after</a:t>
             </a:r>
           </a:p>
         </p:txBody>
       </p:sp>
       <p:cxnSp>
         <p:nvCxnSpPr>
-          <p:cNvPr id="13" name="Connector 12"/>
+          <p:cNvPr id="11" name="Connector 10"/>
           <p:cNvCxnSpPr/>
           <p:nvPr/>
         </p:nvCxnSpPr>
         <p:spPr>
           <a:xfrm>
-            <a:off x="457200" y="3685032"/>
+            <a:off x="457200" y="3520440"/>
             <a:ext cx="3566160" cy="0"/>
           </a:xfrm>
           <a:prstGeom prst="line">
@@ -15869,14 +14847,14 @@
       </p:cxnSp>
       <p:sp>
         <p:nvSpPr>
-          <p:cNvPr id="14" name="TextBox 13"/>
+          <p:cNvPr id="12" name="TextBox 11"/>
           <p:cNvSpPr txBox="1"/>
           <p:nvPr/>
         </p:nvSpPr>
         <p:spPr>
           <a:xfrm>
-            <a:off x="457200" y="3794760"/>
-            <a:ext cx="3566160" cy="292608"/>
+            <a:off x="457200" y="3657600"/>
+            <a:ext cx="3566160" cy="685800"/>
           </a:xfrm>
           <a:prstGeom prst="rect">
             <a:avLst/>
@@ -15891,62 +14869,27 @@
           <a:p>
             <a:pPr algn="l"/>
             <a:r>
-              <a:rPr sz="1600" b="1" i="0">
+              <a:rPr sz="1800" b="1" i="0">
                 <a:solidFill>
                   <a:srgbClr val="333D47"/>
                 </a:solidFill>
                 <a:latin typeface="Arial"/>
               </a:rPr>
-              <a:t>End-to-end completion time</a:t>
-            </a:r>
-          </a:p>
-        </p:txBody>
-      </p:sp>
-      <p:sp>
-        <p:nvSpPr>
-          <p:cNvPr id="15" name="TextBox 14"/>
-          <p:cNvSpPr txBox="1"/>
-          <p:nvPr/>
-        </p:nvSpPr>
-        <p:spPr>
-          <a:xfrm>
-            <a:off x="457200" y="4123944"/>
-            <a:ext cx="3566160" cy="685800"/>
-          </a:xfrm>
-          <a:prstGeom prst="rect">
-            <a:avLst/>
-          </a:prstGeom>
-          <a:noFill/>
-        </p:spPr>
-        <p:txBody>
-          <a:bodyPr wrap="square" lIns="0" rIns="0" tIns="0" bIns="0" anchor="t">
-            <a:noAutofit/>
-          </a:bodyPr>
-          <a:lstStyle/>
-          <a:p>
-            <a:pPr algn="l"/>
-            <a:r>
-              <a:rPr sz="1400" b="0" i="0">
-                <a:solidFill>
-                  <a:srgbClr val="5A6570"/>
-                </a:solidFill>
-                <a:latin typeface="Arial"/>
-              </a:rPr>
-              <a:t>From request to finished, approved output</a:t>
-            </a:r>
-          </a:p>
-        </p:txBody>
-      </p:sp>
-      <p:sp>
-        <p:nvSpPr>
-          <p:cNvPr id="16" name="Oval 15"/>
+              <a:t>End-to-end time</a:t>
+            </a:r>
+          </a:p>
+        </p:txBody>
+      </p:sp>
+      <p:sp>
+        <p:nvSpPr>
+          <p:cNvPr id="13" name="Oval 12"/>
           <p:cNvSpPr/>
           <p:nvPr/>
         </p:nvSpPr>
         <p:spPr>
           <a:xfrm>
-            <a:off x="4325112" y="1783080"/>
-            <a:ext cx="640080" cy="640080"/>
+            <a:off x="4325112" y="1737360"/>
+            <a:ext cx="731520" cy="731520"/>
           </a:xfrm>
           <a:prstGeom prst="ellipse">
             <a:avLst/>
@@ -15966,7 +14909,7 @@
       </p:sp>
       <p:pic>
         <p:nvPicPr>
-          <p:cNvPr id="17" name="Picture 16" descr="LuBadgeCheck_w.png"/>
+          <p:cNvPr id="14" name="Picture 13" descr="LuBadgeCheck_w.png"/>
           <p:cNvPicPr>
             <a:picLocks noChangeAspect="1"/>
           </p:cNvPicPr>
@@ -15980,8 +14923,8 @@
         </p:blipFill>
         <p:spPr>
           <a:xfrm>
-            <a:off x="4478731" y="1936699"/>
-            <a:ext cx="332841" cy="332841"/>
+            <a:off x="4500676" y="1912924"/>
+            <a:ext cx="380390" cy="380390"/>
           </a:xfrm>
           <a:prstGeom prst="rect">
             <a:avLst/>
@@ -15990,14 +14933,14 @@
       </p:pic>
       <p:sp>
         <p:nvSpPr>
-          <p:cNvPr id="18" name="TextBox 17"/>
+          <p:cNvPr id="15" name="TextBox 14"/>
           <p:cNvSpPr txBox="1"/>
           <p:nvPr/>
         </p:nvSpPr>
         <p:spPr>
           <a:xfrm>
-            <a:off x="5102351" y="1783080"/>
-            <a:ext cx="2788920" cy="640080"/>
+            <a:off x="5221223" y="1737360"/>
+            <a:ext cx="2670048" cy="731520"/>
           </a:xfrm>
           <a:prstGeom prst="rect">
             <a:avLst/>
@@ -16012,26 +14955,26 @@
           <a:p>
             <a:pPr algn="l"/>
             <a:r>
-              <a:rPr sz="1900" b="1" i="0">
+              <a:rPr sz="2400" b="1" i="0">
                 <a:solidFill>
                   <a:srgbClr val="333D47"/>
                 </a:solidFill>
                 <a:latin typeface="Arial"/>
               </a:rPr>
-              <a:t>Is the work good?</a:t>
+              <a:t>Better?</a:t>
             </a:r>
           </a:p>
         </p:txBody>
       </p:sp>
       <p:cxnSp>
         <p:nvCxnSpPr>
-          <p:cNvPr id="19" name="Connector 18"/>
+          <p:cNvPr id="16" name="Connector 15"/>
           <p:cNvCxnSpPr/>
           <p:nvPr/>
         </p:nvCxnSpPr>
         <p:spPr>
           <a:xfrm>
-            <a:off x="4325112" y="2587752"/>
+            <a:off x="4325112" y="2651760"/>
             <a:ext cx="3566159" cy="0"/>
           </a:xfrm>
           <a:prstGeom prst="line">
@@ -16060,14 +15003,14 @@
       </p:cxnSp>
       <p:sp>
         <p:nvSpPr>
-          <p:cNvPr id="20" name="TextBox 19"/>
+          <p:cNvPr id="17" name="TextBox 16"/>
           <p:cNvSpPr txBox="1"/>
           <p:nvPr/>
         </p:nvSpPr>
         <p:spPr>
           <a:xfrm>
-            <a:off x="4325112" y="2697480"/>
-            <a:ext cx="3566160" cy="292608"/>
+            <a:off x="4325112" y="2788920"/>
+            <a:ext cx="3566160" cy="685800"/>
           </a:xfrm>
           <a:prstGeom prst="rect">
             <a:avLst/>
@@ -16082,61 +15025,38 @@
           <a:p>
             <a:pPr algn="l"/>
             <a:r>
-              <a:rPr sz="1600" b="1" i="0">
+              <a:rPr sz="1800" b="1" i="0">
+                <a:solidFill>
+                  <a:srgbClr val="333D47"/>
+                </a:solidFill>
+                <a:latin typeface="Arial"/>
+              </a:rPr>
+              <a:t>Quality</a:t>
+            </a:r>
+          </a:p>
+          <a:p>
+            <a:pPr algn="l"/>
+            <a:r>
+              <a:rPr sz="1400" b="1" i="0">
                 <a:solidFill>
                   <a:srgbClr val="D31145"/>
                 </a:solidFill>
                 <a:latin typeface="Arial"/>
               </a:rPr>
-              <a:t>Quality</a:t>
-            </a:r>
-          </a:p>
-        </p:txBody>
-      </p:sp>
-      <p:sp>
-        <p:nvSpPr>
-          <p:cNvPr id="21" name="TextBox 20"/>
-          <p:cNvSpPr txBox="1"/>
-          <p:nvPr/>
-        </p:nvSpPr>
-        <p:spPr>
-          <a:xfrm>
-            <a:off x="4325112" y="3026664"/>
-            <a:ext cx="3566160" cy="685800"/>
-          </a:xfrm>
-          <a:prstGeom prst="rect">
-            <a:avLst/>
-          </a:prstGeom>
-          <a:noFill/>
-        </p:spPr>
-        <p:txBody>
-          <a:bodyPr wrap="square" lIns="0" rIns="0" tIns="0" bIns="0" anchor="t">
-            <a:noAutofit/>
-          </a:bodyPr>
-          <a:lstStyle/>
-          <a:p>
-            <a:pPr algn="l"/>
-            <a:r>
-              <a:rPr sz="1400" b="0" i="0">
-                <a:solidFill>
-                  <a:srgbClr val="5A6570"/>
-                </a:solidFill>
-                <a:latin typeface="Arial"/>
-              </a:rPr>
-              <a:t>Against a human-only baseline, confirmed by periodic independent sample reviews</a:t>
+              <a:t>with independent sample reviews</a:t>
             </a:r>
           </a:p>
         </p:txBody>
       </p:sp>
       <p:cxnSp>
         <p:nvCxnSpPr>
-          <p:cNvPr id="22" name="Connector 21"/>
+          <p:cNvPr id="18" name="Connector 17"/>
           <p:cNvCxnSpPr/>
           <p:nvPr/>
         </p:nvCxnSpPr>
         <p:spPr>
           <a:xfrm>
-            <a:off x="4325112" y="3685032"/>
+            <a:off x="4325112" y="3520440"/>
             <a:ext cx="3566159" cy="0"/>
           </a:xfrm>
           <a:prstGeom prst="line">
@@ -16165,14 +15085,14 @@
       </p:cxnSp>
       <p:sp>
         <p:nvSpPr>
-          <p:cNvPr id="23" name="TextBox 22"/>
+          <p:cNvPr id="19" name="TextBox 18"/>
           <p:cNvSpPr txBox="1"/>
           <p:nvPr/>
         </p:nvSpPr>
         <p:spPr>
           <a:xfrm>
-            <a:off x="4325112" y="3794760"/>
-            <a:ext cx="3566160" cy="292608"/>
+            <a:off x="4325112" y="3657600"/>
+            <a:ext cx="3566160" cy="685800"/>
           </a:xfrm>
           <a:prstGeom prst="rect">
             <a:avLst/>
@@ -16187,7 +15107,7 @@
           <a:p>
             <a:pPr algn="l"/>
             <a:r>
-              <a:rPr sz="1600" b="1" i="0">
+              <a:rPr sz="1800" b="1" i="0">
                 <a:solidFill>
                   <a:srgbClr val="333D47"/>
                 </a:solidFill>
@@ -16200,49 +15120,14 @@
       </p:sp>
       <p:sp>
         <p:nvSpPr>
-          <p:cNvPr id="24" name="TextBox 23"/>
-          <p:cNvSpPr txBox="1"/>
-          <p:nvPr/>
-        </p:nvSpPr>
-        <p:spPr>
-          <a:xfrm>
-            <a:off x="4325112" y="4123944"/>
-            <a:ext cx="3566160" cy="685800"/>
-          </a:xfrm>
-          <a:prstGeom prst="rect">
-            <a:avLst/>
-          </a:prstGeom>
-          <a:noFill/>
-        </p:spPr>
-        <p:txBody>
-          <a:bodyPr wrap="square" lIns="0" rIns="0" tIns="0" bIns="0" anchor="t">
-            <a:noAutofit/>
-          </a:bodyPr>
-          <a:lstStyle/>
-          <a:p>
-            <a:pPr algn="l"/>
-            <a:r>
-              <a:rPr sz="1400" b="0" i="0">
-                <a:solidFill>
-                  <a:srgbClr val="5A6570"/>
-                </a:solidFill>
-                <a:latin typeface="Arial"/>
-              </a:rPr>
-              <a:t>Outputs needing real correction, and how fast it falls</a:t>
-            </a:r>
-          </a:p>
-        </p:txBody>
-      </p:sp>
-      <p:sp>
-        <p:nvSpPr>
-          <p:cNvPr id="25" name="Oval 24"/>
+          <p:cNvPr id="20" name="Oval 19"/>
           <p:cNvSpPr/>
           <p:nvPr/>
         </p:nvSpPr>
         <p:spPr>
           <a:xfrm>
-            <a:off x="8193023" y="1783080"/>
-            <a:ext cx="640080" cy="640080"/>
+            <a:off x="8193023" y="1737360"/>
+            <a:ext cx="731520" cy="731520"/>
           </a:xfrm>
           <a:prstGeom prst="ellipse">
             <a:avLst/>
@@ -16262,7 +15147,7 @@
       </p:sp>
       <p:pic>
         <p:nvPicPr>
-          <p:cNvPr id="26" name="Picture 25" descr="LuLayers_w.png"/>
+          <p:cNvPr id="21" name="Picture 20" descr="LuLayers_w.png"/>
           <p:cNvPicPr>
             <a:picLocks noChangeAspect="1"/>
           </p:cNvPicPr>
@@ -16276,8 +15161,8 @@
         </p:blipFill>
         <p:spPr>
           <a:xfrm>
-            <a:off x="8346643" y="1936699"/>
-            <a:ext cx="332841" cy="332841"/>
+            <a:off x="8368588" y="1912924"/>
+            <a:ext cx="380390" cy="380390"/>
           </a:xfrm>
           <a:prstGeom prst="rect">
             <a:avLst/>
@@ -16286,14 +15171,14 @@
       </p:pic>
       <p:sp>
         <p:nvSpPr>
-          <p:cNvPr id="27" name="TextBox 26"/>
+          <p:cNvPr id="22" name="TextBox 21"/>
           <p:cNvSpPr txBox="1"/>
           <p:nvPr/>
         </p:nvSpPr>
         <p:spPr>
           <a:xfrm>
-            <a:off x="8970263" y="1783080"/>
-            <a:ext cx="2788920" cy="640080"/>
+            <a:off x="9089136" y="1737360"/>
+            <a:ext cx="2670048" cy="731520"/>
           </a:xfrm>
           <a:prstGeom prst="rect">
             <a:avLst/>
@@ -16308,26 +15193,26 @@
           <a:p>
             <a:pPr algn="l"/>
             <a:r>
-              <a:rPr sz="1900" b="1" i="0">
+              <a:rPr sz="2400" b="1" i="0">
                 <a:solidFill>
                   <a:srgbClr val="333D47"/>
                 </a:solidFill>
                 <a:latin typeface="Arial"/>
               </a:rPr>
-              <a:t>Does it fix fragmentation?</a:t>
+              <a:t>Simpler and adopted?</a:t>
             </a:r>
           </a:p>
         </p:txBody>
       </p:sp>
       <p:cxnSp>
         <p:nvCxnSpPr>
-          <p:cNvPr id="28" name="Connector 27"/>
+          <p:cNvPr id="23" name="Connector 22"/>
           <p:cNvCxnSpPr/>
           <p:nvPr/>
         </p:nvCxnSpPr>
         <p:spPr>
           <a:xfrm>
-            <a:off x="8193023" y="2587752"/>
+            <a:off x="8193023" y="2651760"/>
             <a:ext cx="3566161" cy="0"/>
           </a:xfrm>
           <a:prstGeom prst="line">
@@ -16356,14 +15241,14 @@
       </p:cxnSp>
       <p:sp>
         <p:nvSpPr>
-          <p:cNvPr id="29" name="TextBox 28"/>
+          <p:cNvPr id="24" name="TextBox 23"/>
           <p:cNvSpPr txBox="1"/>
           <p:nvPr/>
         </p:nvSpPr>
         <p:spPr>
           <a:xfrm>
-            <a:off x="8193023" y="2697480"/>
-            <a:ext cx="3566160" cy="292608"/>
+            <a:off x="8193023" y="2788920"/>
+            <a:ext cx="3566160" cy="685800"/>
           </a:xfrm>
           <a:prstGeom prst="rect">
             <a:avLst/>
@@ -16378,61 +15263,26 @@
           <a:p>
             <a:pPr algn="l"/>
             <a:r>
-              <a:rPr sz="1600" b="1" i="0">
+              <a:rPr sz="1800" b="1" i="0">
                 <a:solidFill>
                   <a:srgbClr val="333D47"/>
                 </a:solidFill>
                 <a:latin typeface="Arial"/>
               </a:rPr>
               <a:t>Manual steps and systems touched</a:t>
-            </a:r>
-          </a:p>
-        </p:txBody>
-      </p:sp>
-      <p:sp>
-        <p:nvSpPr>
-          <p:cNvPr id="30" name="TextBox 29"/>
-          <p:cNvSpPr txBox="1"/>
-          <p:nvPr/>
-        </p:nvSpPr>
-        <p:spPr>
-          <a:xfrm>
-            <a:off x="8193023" y="3026664"/>
-            <a:ext cx="3566160" cy="685800"/>
-          </a:xfrm>
-          <a:prstGeom prst="rect">
-            <a:avLst/>
-          </a:prstGeom>
-          <a:noFill/>
-        </p:spPr>
-        <p:txBody>
-          <a:bodyPr wrap="square" lIns="0" rIns="0" tIns="0" bIns="0" anchor="t">
-            <a:noAutofit/>
-          </a:bodyPr>
-          <a:lstStyle/>
-          <a:p>
-            <a:pPr algn="l"/>
-            <a:r>
-              <a:rPr sz="1400" b="0" i="0">
-                <a:solidFill>
-                  <a:srgbClr val="5A6570"/>
-                </a:solidFill>
-                <a:latin typeface="Arial"/>
-              </a:rPr>
-              <a:t>Tools used by hand before vs. handled by Riley</a:t>
             </a:r>
           </a:p>
         </p:txBody>
       </p:sp>
       <p:cxnSp>
         <p:nvCxnSpPr>
-          <p:cNvPr id="31" name="Connector 30"/>
+          <p:cNvPr id="25" name="Connector 24"/>
           <p:cNvCxnSpPr/>
           <p:nvPr/>
         </p:nvCxnSpPr>
         <p:spPr>
           <a:xfrm>
-            <a:off x="8193023" y="3685032"/>
+            <a:off x="8193023" y="3520440"/>
             <a:ext cx="3566161" cy="0"/>
           </a:xfrm>
           <a:prstGeom prst="line">
@@ -16461,14 +15311,14 @@
       </p:cxnSp>
       <p:sp>
         <p:nvSpPr>
-          <p:cNvPr id="32" name="TextBox 31"/>
+          <p:cNvPr id="26" name="TextBox 25"/>
           <p:cNvSpPr txBox="1"/>
           <p:nvPr/>
         </p:nvSpPr>
         <p:spPr>
           <a:xfrm>
-            <a:off x="8193023" y="3794760"/>
-            <a:ext cx="3566160" cy="292608"/>
+            <a:off x="8193023" y="3657600"/>
+            <a:ext cx="3566160" cy="685800"/>
           </a:xfrm>
           <a:prstGeom prst="rect">
             <a:avLst/>
@@ -16483,62 +15333,27 @@
           <a:p>
             <a:pPr algn="l"/>
             <a:r>
-              <a:rPr sz="1600" b="1" i="0">
+              <a:rPr sz="1800" b="1" i="0">
                 <a:solidFill>
                   <a:srgbClr val="333D47"/>
                 </a:solidFill>
                 <a:latin typeface="Arial"/>
               </a:rPr>
-              <a:t>Adoption</a:t>
-            </a:r>
-          </a:p>
-        </p:txBody>
-      </p:sp>
-      <p:sp>
-        <p:nvSpPr>
-          <p:cNvPr id="33" name="TextBox 32"/>
-          <p:cNvSpPr txBox="1"/>
-          <p:nvPr/>
-        </p:nvSpPr>
-        <p:spPr>
-          <a:xfrm>
-            <a:off x="8193023" y="4123944"/>
-            <a:ext cx="3566160" cy="685800"/>
-          </a:xfrm>
-          <a:prstGeom prst="rect">
-            <a:avLst/>
-          </a:prstGeom>
-          <a:noFill/>
-        </p:spPr>
-        <p:txBody>
-          <a:bodyPr wrap="square" lIns="0" rIns="0" tIns="0" bIns="0" anchor="t">
-            <a:noAutofit/>
-          </a:bodyPr>
-          <a:lstStyle/>
-          <a:p>
-            <a:pPr algn="l"/>
-            <a:r>
-              <a:rPr sz="1400" b="0" i="0">
-                <a:solidFill>
-                  <a:srgbClr val="5A6570"/>
-                </a:solidFill>
-                <a:latin typeface="Arial"/>
-              </a:rPr>
-              <a:t>Employees choosing to use Riley, week after week</a:t>
-            </a:r>
-          </a:p>
-        </p:txBody>
-      </p:sp>
-      <p:sp>
-        <p:nvSpPr>
-          <p:cNvPr id="34" name="Pentagon 33"/>
+              <a:t>Adoption and repeat use</a:t>
+            </a:r>
+          </a:p>
+        </p:txBody>
+      </p:sp>
+      <p:sp>
+        <p:nvSpPr>
+          <p:cNvPr id="27" name="Pentagon 26"/>
           <p:cNvSpPr/>
           <p:nvPr/>
         </p:nvSpPr>
         <p:spPr>
           <a:xfrm>
-            <a:off x="457200" y="4937760"/>
-            <a:ext cx="3840479" cy="658368"/>
+            <a:off x="457200" y="4754880"/>
+            <a:ext cx="3840479" cy="685800"/>
           </a:xfrm>
           <a:prstGeom prst="homePlate">
             <a:avLst/>
@@ -16558,36 +15373,36 @@
           <a:p>
             <a:pPr algn="ctr"/>
             <a:r>
-              <a:rPr sz="1300" b="1" i="0">
+              <a:rPr sz="1500" b="1" i="0">
                 <a:solidFill>
                   <a:srgbClr val="333D47"/>
                 </a:solidFill>
                 <a:latin typeface="Arial"/>
               </a:rPr>
-              <a:t>Phase 0  </a:t>
-            </a:r>
-            <a:r>
-              <a:rPr sz="1300" b="0" i="0">
+              <a:t>Phase 0   </a:t>
+            </a:r>
+            <a:r>
+              <a:rPr sz="1500" b="0" i="0">
                 <a:solidFill>
                   <a:srgbClr val="333D47"/>
                 </a:solidFill>
                 <a:latin typeface="Arial"/>
               </a:rPr>
-              <a:t>Baseline today’s effort, time and steps</a:t>
-            </a:r>
-          </a:p>
-        </p:txBody>
-      </p:sp>
-      <p:sp>
-        <p:nvSpPr>
-          <p:cNvPr id="35" name="Chevron 34"/>
+              <a:t>Baseline</a:t>
+            </a:r>
+          </a:p>
+        </p:txBody>
+      </p:sp>
+      <p:sp>
+        <p:nvSpPr>
+          <p:cNvPr id="28" name="Chevron 27"/>
           <p:cNvSpPr/>
           <p:nvPr/>
         </p:nvSpPr>
         <p:spPr>
           <a:xfrm>
-            <a:off x="4224527" y="4937760"/>
-            <a:ext cx="3840479" cy="658368"/>
+            <a:off x="4224527" y="4754880"/>
+            <a:ext cx="3840479" cy="685800"/>
           </a:xfrm>
           <a:prstGeom prst="chevron">
             <a:avLst/>
@@ -16607,36 +15422,36 @@
           <a:p>
             <a:pPr algn="ctr"/>
             <a:r>
-              <a:rPr sz="1300" b="1" i="0">
+              <a:rPr sz="1500" b="1" i="0">
                 <a:solidFill>
                   <a:srgbClr val="333D47"/>
                 </a:solidFill>
                 <a:latin typeface="Arial"/>
               </a:rPr>
-              <a:t>Phase 1  </a:t>
-            </a:r>
-            <a:r>
-              <a:rPr sz="1300" b="0" i="0">
+              <a:t>Phase 1   </a:t>
+            </a:r>
+            <a:r>
+              <a:rPr sz="1500" b="0" i="0">
                 <a:solidFill>
                   <a:srgbClr val="333D47"/>
                 </a:solidFill>
                 <a:latin typeface="Arial"/>
               </a:rPr>
-              <a:t>Measure the same work with Riley</a:t>
-            </a:r>
-          </a:p>
-        </p:txBody>
-      </p:sp>
-      <p:sp>
-        <p:nvSpPr>
-          <p:cNvPr id="36" name="Chevron 35"/>
+              <a:t>Measure</a:t>
+            </a:r>
+          </a:p>
+        </p:txBody>
+      </p:sp>
+      <p:sp>
+        <p:nvSpPr>
+          <p:cNvPr id="29" name="Chevron 28"/>
           <p:cNvSpPr/>
           <p:nvPr/>
         </p:nvSpPr>
         <p:spPr>
           <a:xfrm>
-            <a:off x="7991855" y="4937760"/>
-            <a:ext cx="3840479" cy="658368"/>
+            <a:off x="7991855" y="4754880"/>
+            <a:ext cx="3840479" cy="685800"/>
           </a:xfrm>
           <a:prstGeom prst="chevron">
             <a:avLst/>
@@ -16656,22 +15471,22 @@
           <a:p>
             <a:pPr algn="ctr"/>
             <a:r>
-              <a:rPr sz="1300" b="1" i="0">
+              <a:rPr sz="1500" b="1" i="0">
                 <a:solidFill>
                   <a:srgbClr val="FFFFFF"/>
                 </a:solidFill>
                 <a:latin typeface="Arial"/>
               </a:rPr>
-              <a:t>Phase 3  </a:t>
-            </a:r>
-            <a:r>
-              <a:rPr sz="1300" b="0" i="0">
+              <a:t>Phase 3   </a:t>
+            </a:r>
+            <a:r>
+              <a:rPr sz="1500" b="0" i="0">
                 <a:solidFill>
                   <a:srgbClr val="FFFFFF"/>
                 </a:solidFill>
                 <a:latin typeface="Arial"/>
               </a:rPr>
-              <a:t>Replace the scenario with a projection from real data</a:t>
+              <a:t>Replace the scenario with real data</a:t>
             </a:r>
           </a:p>
         </p:txBody>
@@ -16804,8 +15619,8 @@
         </p:nvSpPr>
         <p:spPr>
           <a:xfrm>
-            <a:off x="457200" y="1737360"/>
-            <a:ext cx="4023360" cy="3108960"/>
+            <a:off x="457200" y="1828800"/>
+            <a:ext cx="4023360" cy="3291840"/>
           </a:xfrm>
           <a:prstGeom prst="rect">
             <a:avLst/>
@@ -16817,22 +15632,6 @@
             <a:noAutofit/>
           </a:bodyPr>
           <a:lstStyle/>
-          <a:p>
-            <a:pPr algn="l">
-              <a:spcAft>
-                <a:spcPts val="1000"/>
-              </a:spcAft>
-            </a:pPr>
-            <a:r>
-              <a:rPr sz="2600" b="1" i="0">
-                <a:solidFill>
-                  <a:srgbClr val="D31145"/>
-                </a:solidFill>
-                <a:latin typeface="Arial"/>
-              </a:rPr>
-              <a:t>Riley is not the AI model.</a:t>
-            </a:r>
-          </a:p>
           <a:p>
             <a:pPr algn="l">
               <a:spcAft>
@@ -16840,6 +15639,18 @@
               </a:spcAft>
             </a:pPr>
             <a:r>
+              <a:rPr sz="3000" b="1" i="0">
+                <a:solidFill>
+                  <a:srgbClr val="D31145"/>
+                </a:solidFill>
+                <a:latin typeface="Arial"/>
+              </a:rPr>
+              <a:t>Not the AI model.</a:t>
+            </a:r>
+          </a:p>
+          <a:p>
+            <a:pPr algn="l"/>
+            <a:r>
               <a:rPr sz="2200" b="1" i="0">
                 <a:solidFill>
                   <a:srgbClr val="333D47"/>
@@ -16849,58 +15660,11 @@
               <a:t>Riley is the AIA layer that turns separate AI capabilities into one coworker employees can use.</a:t>
             </a:r>
           </a:p>
-          <a:p>
-            <a:pPr algn="l"/>
-            <a:r>
-              <a:rPr sz="1500" b="0" i="0">
-                <a:solidFill>
-                  <a:srgbClr val="5A6570"/>
-                </a:solidFill>
-                <a:latin typeface="Arial"/>
-              </a:rPr>
-              <a:t>Copilot Studio, another enterprise agent platform, or future technology could be the engine. That is a build decision, not the innovation.</a:t>
-            </a:r>
-          </a:p>
-        </p:txBody>
-      </p:sp>
-      <p:sp>
-        <p:nvSpPr>
-          <p:cNvPr id="7" name="TextBox 6"/>
-          <p:cNvSpPr txBox="1"/>
-          <p:nvPr/>
-        </p:nvSpPr>
-        <p:spPr>
-          <a:xfrm>
-            <a:off x="457200" y="4983480"/>
-            <a:ext cx="4023360" cy="640080"/>
-          </a:xfrm>
-          <a:prstGeom prst="rect">
-            <a:avLst/>
-          </a:prstGeom>
-          <a:noFill/>
-        </p:spPr>
-        <p:txBody>
-          <a:bodyPr wrap="square" lIns="0" rIns="0" tIns="0" bIns="0" anchor="t">
-            <a:noAutofit/>
-          </a:bodyPr>
-          <a:lstStyle/>
-          <a:p>
-            <a:pPr algn="l"/>
-            <a:r>
-              <a:rPr sz="1500" b="1" i="1">
-                <a:solidFill>
-                  <a:srgbClr val="333D47"/>
-                </a:solidFill>
-                <a:latin typeface="Arial"/>
-              </a:rPr>
-              <a:t>The platform is the engine. Riley is the AIA coworker built on top of it.</a:t>
-            </a:r>
-          </a:p>
-        </p:txBody>
-      </p:sp>
-      <p:sp>
-        <p:nvSpPr>
-          <p:cNvPr id="8" name="Rounded Rectangle 7"/>
+        </p:txBody>
+      </p:sp>
+      <p:sp>
+        <p:nvSpPr>
+          <p:cNvPr id="7" name="Rounded Rectangle 6"/>
           <p:cNvSpPr/>
           <p:nvPr/>
         </p:nvSpPr>
@@ -16931,7 +15695,7 @@
       </p:sp>
       <p:pic>
         <p:nvPicPr>
-          <p:cNvPr id="9" name="Picture 8" descr="LuMessagesSquare_c.png"/>
+          <p:cNvPr id="8" name="Picture 7" descr="LuMessagesSquare_c.png"/>
           <p:cNvPicPr>
             <a:picLocks noChangeAspect="1"/>
           </p:cNvPicPr>
@@ -16955,14 +15719,14 @@
       </p:pic>
       <p:sp>
         <p:nvSpPr>
-          <p:cNvPr id="10" name="TextBox 9"/>
+          <p:cNvPr id="9" name="TextBox 8"/>
           <p:cNvSpPr txBox="1"/>
           <p:nvPr/>
         </p:nvSpPr>
         <p:spPr>
           <a:xfrm>
             <a:off x="5669280" y="1691640"/>
-            <a:ext cx="4389120" cy="731520"/>
+            <a:ext cx="5852160" cy="731520"/>
           </a:xfrm>
           <a:prstGeom prst="rect">
             <a:avLst/>
@@ -16977,7 +15741,7 @@
           <a:p>
             <a:pPr algn="l"/>
             <a:r>
-              <a:rPr sz="1500" b="1" i="0">
+              <a:rPr sz="1700" b="1" i="0">
                 <a:solidFill>
                   <a:srgbClr val="333D47"/>
                 </a:solidFill>
@@ -16990,49 +15754,14 @@
       </p:sp>
       <p:sp>
         <p:nvSpPr>
-          <p:cNvPr id="11" name="TextBox 10"/>
-          <p:cNvSpPr txBox="1"/>
-          <p:nvPr/>
-        </p:nvSpPr>
-        <p:spPr>
-          <a:xfrm>
-            <a:off x="9875520" y="1691640"/>
-            <a:ext cx="1691640" cy="731520"/>
-          </a:xfrm>
-          <a:prstGeom prst="rect">
-            <a:avLst/>
-          </a:prstGeom>
-          <a:noFill/>
-        </p:spPr>
-        <p:txBody>
-          <a:bodyPr wrap="square" lIns="0" rIns="0" tIns="0" bIns="0" anchor="ctr">
-            <a:noAutofit/>
-          </a:bodyPr>
-          <a:lstStyle/>
-          <a:p>
-            <a:pPr algn="r"/>
-            <a:r>
-              <a:rPr sz="1200" b="1" i="0">
-                <a:solidFill>
-                  <a:srgbClr val="5A6570"/>
-                </a:solidFill>
-                <a:latin typeface="Arial"/>
-              </a:rPr>
-              <a:t>WHAT EMPLOYEES SEE</a:t>
-            </a:r>
-          </a:p>
-        </p:txBody>
-      </p:sp>
-      <p:sp>
-        <p:nvSpPr>
-          <p:cNvPr id="12" name="Rounded Rectangle 11"/>
+          <p:cNvPr id="10" name="Rounded Rectangle 9"/>
           <p:cNvSpPr/>
           <p:nvPr/>
         </p:nvSpPr>
         <p:spPr>
           <a:xfrm>
             <a:off x="4846320" y="2560320"/>
-            <a:ext cx="6903720" cy="2148840"/>
+            <a:ext cx="6903720" cy="2194560"/>
           </a:xfrm>
           <a:prstGeom prst="roundRect">
             <a:avLst>
@@ -17054,14 +15783,14 @@
       </p:sp>
       <p:sp>
         <p:nvSpPr>
-          <p:cNvPr id="13" name="TextBox 12"/>
+          <p:cNvPr id="11" name="TextBox 10"/>
           <p:cNvSpPr txBox="1"/>
           <p:nvPr/>
         </p:nvSpPr>
         <p:spPr>
           <a:xfrm>
             <a:off x="5120640" y="2670048"/>
-            <a:ext cx="3657600" cy="320040"/>
+            <a:ext cx="4572000" cy="365760"/>
           </a:xfrm>
           <a:prstGeom prst="rect">
             <a:avLst/>
@@ -17076,7 +15805,7 @@
           <a:p>
             <a:pPr algn="l"/>
             <a:r>
-              <a:rPr sz="1500" b="1" i="0">
+              <a:rPr sz="1600" b="1" i="0">
                 <a:solidFill>
                   <a:srgbClr val="FFFFFF"/>
                 </a:solidFill>
@@ -17089,49 +15818,14 @@
       </p:sp>
       <p:sp>
         <p:nvSpPr>
-          <p:cNvPr id="14" name="TextBox 13"/>
-          <p:cNvSpPr txBox="1"/>
-          <p:nvPr/>
-        </p:nvSpPr>
-        <p:spPr>
-          <a:xfrm>
-            <a:off x="9646920" y="2670048"/>
-            <a:ext cx="1920240" cy="320040"/>
-          </a:xfrm>
-          <a:prstGeom prst="rect">
-            <a:avLst/>
-          </a:prstGeom>
-          <a:noFill/>
-        </p:spPr>
-        <p:txBody>
-          <a:bodyPr wrap="square" lIns="0" rIns="0" tIns="0" bIns="0" anchor="t">
-            <a:noAutofit/>
-          </a:bodyPr>
-          <a:lstStyle/>
-          <a:p>
-            <a:pPr algn="r"/>
-            <a:r>
-              <a:rPr sz="1200" b="1" i="0">
-                <a:solidFill>
-                  <a:srgbClr val="FFFFFF"/>
-                </a:solidFill>
-                <a:latin typeface="Arial"/>
-              </a:rPr>
-              <a:t>THE INNOVATION</a:t>
-            </a:r>
-          </a:p>
-        </p:txBody>
-      </p:sp>
-      <p:sp>
-        <p:nvSpPr>
-          <p:cNvPr id="15" name="Rounded Rectangle 14"/>
+          <p:cNvPr id="12" name="Rounded Rectangle 11"/>
           <p:cNvSpPr/>
           <p:nvPr/>
         </p:nvSpPr>
         <p:spPr>
           <a:xfrm>
-            <a:off x="4974336" y="3108960"/>
-            <a:ext cx="1572768" cy="658368"/>
+            <a:off x="5052059" y="3127248"/>
+            <a:ext cx="3154680" cy="640080"/>
           </a:xfrm>
           <a:prstGeom prst="roundRect">
             <a:avLst>
@@ -17146,34 +15840,34 @@
           </a:ln>
         </p:spPr>
         <p:txBody>
-          <a:bodyPr rtlCol="0" anchor="ctr" wrap="square" lIns="54864" rIns="54864" tIns="54864" bIns="54864">
+          <a:bodyPr rtlCol="0" anchor="ctr" wrap="square" lIns="73152" rIns="73152" tIns="73152" bIns="73152">
             <a:noAutofit/>
           </a:bodyPr>
           <a:lstStyle/>
           <a:p>
             <a:pPr algn="ctr"/>
             <a:r>
-              <a:rPr sz="1300" b="1" i="0">
+              <a:rPr sz="1500" b="1" i="0">
                 <a:solidFill>
                   <a:srgbClr val="D31145"/>
                 </a:solidFill>
                 <a:latin typeface="Arial"/>
               </a:rPr>
-              <a:t>AIA data</a:t>
-            </a:r>
-          </a:p>
-        </p:txBody>
-      </p:sp>
-      <p:sp>
-        <p:nvSpPr>
-          <p:cNvPr id="16" name="Rounded Rectangle 15"/>
+              <a:t>AIA data, systems and processes</a:t>
+            </a:r>
+          </a:p>
+        </p:txBody>
+      </p:sp>
+      <p:sp>
+        <p:nvSpPr>
+          <p:cNvPr id="13" name="Rounded Rectangle 12"/>
           <p:cNvSpPr/>
           <p:nvPr/>
         </p:nvSpPr>
         <p:spPr>
           <a:xfrm>
-            <a:off x="6665975" y="3108960"/>
-            <a:ext cx="1572768" cy="658368"/>
+            <a:off x="8389620" y="3127248"/>
+            <a:ext cx="3154680" cy="640080"/>
           </a:xfrm>
           <a:prstGeom prst="roundRect">
             <a:avLst>
@@ -17188,34 +15882,34 @@
           </a:ln>
         </p:spPr>
         <p:txBody>
-          <a:bodyPr rtlCol="0" anchor="ctr" wrap="square" lIns="54864" rIns="54864" tIns="54864" bIns="54864">
+          <a:bodyPr rtlCol="0" anchor="ctr" wrap="square" lIns="73152" rIns="73152" tIns="73152" bIns="73152">
             <a:noAutofit/>
           </a:bodyPr>
           <a:lstStyle/>
           <a:p>
             <a:pPr algn="ctr"/>
             <a:r>
-              <a:rPr sz="1300" b="1" i="0">
+              <a:rPr sz="1500" b="1" i="0">
                 <a:solidFill>
                   <a:srgbClr val="D31145"/>
                 </a:solidFill>
                 <a:latin typeface="Arial"/>
               </a:rPr>
-              <a:t>AIA systems</a:t>
-            </a:r>
-          </a:p>
-        </p:txBody>
-      </p:sp>
-      <p:sp>
-        <p:nvSpPr>
-          <p:cNvPr id="17" name="Rounded Rectangle 16"/>
+              <a:t>AI capabilities from AIA teams</a:t>
+            </a:r>
+          </a:p>
+        </p:txBody>
+      </p:sp>
+      <p:sp>
+        <p:nvSpPr>
+          <p:cNvPr id="14" name="Rounded Rectangle 13"/>
           <p:cNvSpPr/>
           <p:nvPr/>
         </p:nvSpPr>
         <p:spPr>
           <a:xfrm>
-            <a:off x="8357616" y="3108960"/>
-            <a:ext cx="1572768" cy="658368"/>
+            <a:off x="5052059" y="3904487"/>
+            <a:ext cx="3154680" cy="640080"/>
           </a:xfrm>
           <a:prstGeom prst="roundRect">
             <a:avLst>
@@ -17230,34 +15924,34 @@
           </a:ln>
         </p:spPr>
         <p:txBody>
-          <a:bodyPr rtlCol="0" anchor="ctr" wrap="square" lIns="54864" rIns="54864" tIns="54864" bIns="54864">
+          <a:bodyPr rtlCol="0" anchor="ctr" wrap="square" lIns="73152" rIns="73152" tIns="73152" bIns="73152">
             <a:noAutofit/>
           </a:bodyPr>
           <a:lstStyle/>
           <a:p>
             <a:pPr algn="ctr"/>
             <a:r>
-              <a:rPr sz="1300" b="1" i="0">
+              <a:rPr sz="1500" b="1" i="0">
                 <a:solidFill>
                   <a:srgbClr val="D31145"/>
                 </a:solidFill>
                 <a:latin typeface="Arial"/>
               </a:rPr>
-              <a:t>AI capabilities from different teams</a:t>
-            </a:r>
-          </a:p>
-        </p:txBody>
-      </p:sp>
-      <p:sp>
-        <p:nvSpPr>
-          <p:cNvPr id="18" name="Rounded Rectangle 17"/>
+              <a:t>Permissions, governance and audit</a:t>
+            </a:r>
+          </a:p>
+        </p:txBody>
+      </p:sp>
+      <p:sp>
+        <p:nvSpPr>
+          <p:cNvPr id="15" name="Rounded Rectangle 14"/>
           <p:cNvSpPr/>
           <p:nvPr/>
         </p:nvSpPr>
         <p:spPr>
           <a:xfrm>
-            <a:off x="10049256" y="3108960"/>
-            <a:ext cx="1572768" cy="658368"/>
+            <a:off x="8389620" y="3904487"/>
+            <a:ext cx="3154680" cy="640080"/>
           </a:xfrm>
           <a:prstGeom prst="roundRect">
             <a:avLst>
@@ -17272,160 +15966,34 @@
           </a:ln>
         </p:spPr>
         <p:txBody>
-          <a:bodyPr rtlCol="0" anchor="ctr" wrap="square" lIns="54864" rIns="54864" tIns="54864" bIns="54864">
+          <a:bodyPr rtlCol="0" anchor="ctr" wrap="square" lIns="73152" rIns="73152" tIns="73152" bIns="73152">
             <a:noAutofit/>
           </a:bodyPr>
           <a:lstStyle/>
           <a:p>
             <a:pPr algn="ctr"/>
             <a:r>
-              <a:rPr sz="1300" b="1" i="0">
+              <a:rPr sz="1500" b="1" i="0">
                 <a:solidFill>
                   <a:srgbClr val="D31145"/>
                 </a:solidFill>
                 <a:latin typeface="Arial"/>
               </a:rPr>
-              <a:t>Business processes</a:t>
-            </a:r>
-          </a:p>
-        </p:txBody>
-      </p:sp>
-      <p:sp>
-        <p:nvSpPr>
-          <p:cNvPr id="19" name="Rounded Rectangle 18"/>
+              <a:t>Learning from employee feedback</a:t>
+            </a:r>
+          </a:p>
+        </p:txBody>
+      </p:sp>
+      <p:sp>
+        <p:nvSpPr>
+          <p:cNvPr id="16" name="Rounded Rectangle 15"/>
           <p:cNvSpPr/>
           <p:nvPr/>
         </p:nvSpPr>
         <p:spPr>
           <a:xfrm>
-            <a:off x="5820155" y="3886200"/>
-            <a:ext cx="1572768" cy="658368"/>
-          </a:xfrm>
-          <a:prstGeom prst="roundRect">
-            <a:avLst>
-              <a:gd name="adj" fmla="val 12000"/>
-            </a:avLst>
-          </a:prstGeom>
-          <a:solidFill>
-            <a:srgbClr val="FFFFFF"/>
-          </a:solidFill>
-          <a:ln>
-            <a:noFill/>
-          </a:ln>
-        </p:spPr>
-        <p:txBody>
-          <a:bodyPr rtlCol="0" anchor="ctr" wrap="square" lIns="54864" rIns="54864" tIns="54864" bIns="54864">
-            <a:noAutofit/>
-          </a:bodyPr>
-          <a:lstStyle/>
-          <a:p>
-            <a:pPr algn="ctr"/>
-            <a:r>
-              <a:rPr sz="1300" b="1" i="0">
-                <a:solidFill>
-                  <a:srgbClr val="D31145"/>
-                </a:solidFill>
-                <a:latin typeface="Arial"/>
-              </a:rPr>
-              <a:t>Permissions and governance</a:t>
-            </a:r>
-          </a:p>
-        </p:txBody>
-      </p:sp>
-      <p:sp>
-        <p:nvSpPr>
-          <p:cNvPr id="20" name="Rounded Rectangle 19"/>
-          <p:cNvSpPr/>
-          <p:nvPr/>
-        </p:nvSpPr>
-        <p:spPr>
-          <a:xfrm>
-            <a:off x="7511796" y="3886200"/>
-            <a:ext cx="1572768" cy="658368"/>
-          </a:xfrm>
-          <a:prstGeom prst="roundRect">
-            <a:avLst>
-              <a:gd name="adj" fmla="val 12000"/>
-            </a:avLst>
-          </a:prstGeom>
-          <a:solidFill>
-            <a:srgbClr val="FFFFFF"/>
-          </a:solidFill>
-          <a:ln>
-            <a:noFill/>
-          </a:ln>
-        </p:spPr>
-        <p:txBody>
-          <a:bodyPr rtlCol="0" anchor="ctr" wrap="square" lIns="54864" rIns="54864" tIns="54864" bIns="54864">
-            <a:noAutofit/>
-          </a:bodyPr>
-          <a:lstStyle/>
-          <a:p>
-            <a:pPr algn="ctr"/>
-            <a:r>
-              <a:rPr sz="1300" b="1" i="0">
-                <a:solidFill>
-                  <a:srgbClr val="D31145"/>
-                </a:solidFill>
-                <a:latin typeface="Arial"/>
-              </a:rPr>
-              <a:t>Employee feedback</a:t>
-            </a:r>
-          </a:p>
-        </p:txBody>
-      </p:sp>
-      <p:sp>
-        <p:nvSpPr>
-          <p:cNvPr id="21" name="Rounded Rectangle 20"/>
-          <p:cNvSpPr/>
-          <p:nvPr/>
-        </p:nvSpPr>
-        <p:spPr>
-          <a:xfrm>
-            <a:off x="9203436" y="3886200"/>
-            <a:ext cx="1572768" cy="658368"/>
-          </a:xfrm>
-          <a:prstGeom prst="roundRect">
-            <a:avLst>
-              <a:gd name="adj" fmla="val 12000"/>
-            </a:avLst>
-          </a:prstGeom>
-          <a:solidFill>
-            <a:srgbClr val="FFFFFF"/>
-          </a:solidFill>
-          <a:ln>
-            <a:noFill/>
-          </a:ln>
-        </p:spPr>
-        <p:txBody>
-          <a:bodyPr rtlCol="0" anchor="ctr" wrap="square" lIns="54864" rIns="54864" tIns="54864" bIns="54864">
-            <a:noAutofit/>
-          </a:bodyPr>
-          <a:lstStyle/>
-          <a:p>
-            <a:pPr algn="ctr"/>
-            <a:r>
-              <a:rPr sz="1300" b="1" i="0">
-                <a:solidFill>
-                  <a:srgbClr val="D31145"/>
-                </a:solidFill>
-                <a:latin typeface="Arial"/>
-              </a:rPr>
-              <a:t>Auditability</a:t>
-            </a:r>
-          </a:p>
-        </p:txBody>
-      </p:sp>
-      <p:sp>
-        <p:nvSpPr>
-          <p:cNvPr id="22" name="Rounded Rectangle 21"/>
-          <p:cNvSpPr/>
-          <p:nvPr/>
-        </p:nvSpPr>
-        <p:spPr>
-          <a:xfrm>
-            <a:off x="4846320" y="4846320"/>
-            <a:ext cx="6903720" cy="749808"/>
+            <a:off x="4846320" y="4892040"/>
+            <a:ext cx="6903720" cy="731520"/>
           </a:xfrm>
           <a:prstGeom prst="roundRect">
             <a:avLst>
@@ -17447,7 +16015,7 @@
       </p:sp>
       <p:pic>
         <p:nvPicPr>
-          <p:cNvPr id="23" name="Picture 22" descr="LuCpu_g.png"/>
+          <p:cNvPr id="17" name="Picture 16" descr="LuCpu_g.png"/>
           <p:cNvPicPr>
             <a:picLocks noChangeAspect="1"/>
           </p:cNvPicPr>
@@ -17461,7 +16029,7 @@
         </p:blipFill>
         <p:spPr>
           <a:xfrm>
-            <a:off x="5120640" y="5029200"/>
+            <a:off x="5120640" y="5065776"/>
             <a:ext cx="384048" cy="384048"/>
           </a:xfrm>
           <a:prstGeom prst="rect">
@@ -17471,14 +16039,14 @@
       </p:pic>
       <p:sp>
         <p:nvSpPr>
-          <p:cNvPr id="24" name="TextBox 23"/>
+          <p:cNvPr id="18" name="TextBox 17"/>
           <p:cNvSpPr txBox="1"/>
           <p:nvPr/>
         </p:nvSpPr>
         <p:spPr>
           <a:xfrm>
-            <a:off x="5669280" y="4846320"/>
-            <a:ext cx="4114800" cy="749808"/>
+            <a:off x="5669280" y="4892040"/>
+            <a:ext cx="4297680" cy="731520"/>
           </a:xfrm>
           <a:prstGeom prst="rect">
             <a:avLst/>
@@ -17493,27 +16061,27 @@
           <a:p>
             <a:pPr algn="l"/>
             <a:r>
-              <a:rPr sz="1400" b="0" i="0">
+              <a:rPr sz="1600" b="0" i="0">
                 <a:solidFill>
                   <a:srgbClr val="333D47"/>
                 </a:solidFill>
                 <a:latin typeface="Arial"/>
               </a:rPr>
-              <a:t>Engine: Copilot Studio, another enterprise agent platform, or future technology</a:t>
-            </a:r>
-          </a:p>
-        </p:txBody>
-      </p:sp>
-      <p:sp>
-        <p:nvSpPr>
-          <p:cNvPr id="25" name="TextBox 24"/>
+              <a:t>Engine: Copilot Studio or another platform</a:t>
+            </a:r>
+          </a:p>
+        </p:txBody>
+      </p:sp>
+      <p:sp>
+        <p:nvSpPr>
+          <p:cNvPr id="19" name="TextBox 18"/>
           <p:cNvSpPr txBox="1"/>
           <p:nvPr/>
         </p:nvSpPr>
         <p:spPr>
           <a:xfrm>
-            <a:off x="9829800" y="4846320"/>
-            <a:ext cx="1737360" cy="749808"/>
+            <a:off x="9829800" y="4892040"/>
+            <a:ext cx="1737360" cy="731520"/>
           </a:xfrm>
           <a:prstGeom prst="rect">
             <a:avLst/>
@@ -17589,7 +16157,7 @@
                 </a:solidFill>
                 <a:latin typeface="Arial"/>
               </a:rPr>
-              <a:t>The multiplier: more AI, not more tools</a:t>
+              <a:t>More AI, a stronger Riley. Not more tools.</a:t>
             </a:r>
           </a:p>
         </p:txBody>
@@ -17625,41 +16193,6 @@
                 <a:latin typeface="Arial"/>
               </a:rPr>
               <a:t>CREATIVITY  ·  THE MULTIPLIER</a:t>
-            </a:r>
-          </a:p>
-        </p:txBody>
-      </p:sp>
-      <p:sp>
-        <p:nvSpPr>
-          <p:cNvPr id="6" name="TextBox 5"/>
-          <p:cNvSpPr txBox="1"/>
-          <p:nvPr/>
-        </p:nvSpPr>
-        <p:spPr>
-          <a:xfrm>
-            <a:off x="448056" y="1133856"/>
-            <a:ext cx="11155680" cy="457200"/>
-          </a:xfrm>
-          <a:prstGeom prst="rect">
-            <a:avLst/>
-          </a:prstGeom>
-          <a:noFill/>
-        </p:spPr>
-        <p:txBody>
-          <a:bodyPr wrap="square" lIns="0" rIns="0" tIns="0" bIns="0" anchor="t">
-            <a:noAutofit/>
-          </a:bodyPr>
-          <a:lstStyle/>
-          <a:p>
-            <a:pPr algn="l"/>
-            <a:r>
-              <a:rPr sz="1600" b="0" i="0">
-                <a:solidFill>
-                  <a:srgbClr val="5A6570"/>
-                </a:solidFill>
-                <a:latin typeface="Arial"/>
-              </a:rPr>
-              <a:t>As AIA creates or adopts new AI capabilities, what matters is how employees reach them.</a:t>
             </a:r>
           </a:p>
         </p:txBody>
@@ -17696,13 +16229,13 @@
       </p:sp>
       <p:sp>
         <p:nvSpPr>
-          <p:cNvPr id="7" name="TextBox 6"/>
+          <p:cNvPr id="6" name="TextBox 5"/>
           <p:cNvSpPr txBox="1"/>
           <p:nvPr/>
         </p:nvSpPr>
         <p:spPr>
           <a:xfrm>
-            <a:off x="2788920" y="1691640"/>
+            <a:off x="2788920" y="1645920"/>
             <a:ext cx="2103120" cy="292608"/>
           </a:xfrm>
           <a:prstGeom prst="rect">
@@ -17718,26 +16251,26 @@
           <a:p>
             <a:pPr algn="ctr"/>
             <a:r>
-              <a:rPr sz="1300" b="1" i="0">
+              <a:rPr sz="1400" b="1" i="0">
                 <a:solidFill>
                   <a:srgbClr val="5A6570"/>
                 </a:solidFill>
                 <a:latin typeface="Arial"/>
               </a:rPr>
-              <a:t>Capability 1</a:t>
-            </a:r>
-          </a:p>
-        </p:txBody>
-      </p:sp>
-      <p:sp>
-        <p:nvSpPr>
-          <p:cNvPr id="8" name="TextBox 7"/>
+              <a:t>1 capability</a:t>
+            </a:r>
+          </a:p>
+        </p:txBody>
+      </p:sp>
+      <p:sp>
+        <p:nvSpPr>
+          <p:cNvPr id="7" name="TextBox 6"/>
           <p:cNvSpPr txBox="1"/>
           <p:nvPr/>
         </p:nvSpPr>
         <p:spPr>
           <a:xfrm>
-            <a:off x="5029200" y="1691640"/>
+            <a:off x="5029200" y="1645920"/>
             <a:ext cx="2103120" cy="292608"/>
           </a:xfrm>
           <a:prstGeom prst="rect">
@@ -17753,26 +16286,26 @@
           <a:p>
             <a:pPr algn="ctr"/>
             <a:r>
-              <a:rPr sz="1300" b="1" i="0">
+              <a:rPr sz="1400" b="1" i="0">
                 <a:solidFill>
                   <a:srgbClr val="5A6570"/>
                 </a:solidFill>
                 <a:latin typeface="Arial"/>
               </a:rPr>
-              <a:t>+ Capability 2</a:t>
-            </a:r>
-          </a:p>
-        </p:txBody>
-      </p:sp>
-      <p:sp>
-        <p:nvSpPr>
-          <p:cNvPr id="9" name="TextBox 8"/>
+              <a:t>2 capabilities</a:t>
+            </a:r>
+          </a:p>
+        </p:txBody>
+      </p:sp>
+      <p:sp>
+        <p:nvSpPr>
+          <p:cNvPr id="8" name="TextBox 7"/>
           <p:cNvSpPr txBox="1"/>
           <p:nvPr/>
         </p:nvSpPr>
         <p:spPr>
           <a:xfrm>
-            <a:off x="7269480" y="1691640"/>
+            <a:off x="7269480" y="1645920"/>
             <a:ext cx="2103120" cy="292608"/>
           </a:xfrm>
           <a:prstGeom prst="rect">
@@ -17788,26 +16321,26 @@
           <a:p>
             <a:pPr algn="ctr"/>
             <a:r>
-              <a:rPr sz="1300" b="1" i="0">
+              <a:rPr sz="1400" b="1" i="0">
                 <a:solidFill>
                   <a:srgbClr val="5A6570"/>
                 </a:solidFill>
                 <a:latin typeface="Arial"/>
               </a:rPr>
-              <a:t>+ Capability 3</a:t>
-            </a:r>
-          </a:p>
-        </p:txBody>
-      </p:sp>
-      <p:sp>
-        <p:nvSpPr>
-          <p:cNvPr id="10" name="TextBox 9"/>
+              <a:t>3 capabilities</a:t>
+            </a:r>
+          </a:p>
+        </p:txBody>
+      </p:sp>
+      <p:sp>
+        <p:nvSpPr>
+          <p:cNvPr id="9" name="TextBox 8"/>
           <p:cNvSpPr txBox="1"/>
           <p:nvPr/>
         </p:nvSpPr>
         <p:spPr>
           <a:xfrm>
-            <a:off x="9509760" y="1691640"/>
+            <a:off x="9509760" y="1645920"/>
             <a:ext cx="2103120" cy="292608"/>
           </a:xfrm>
           <a:prstGeom prst="rect">
@@ -17823,27 +16356,27 @@
           <a:p>
             <a:pPr algn="ctr"/>
             <a:r>
-              <a:rPr sz="1300" b="1" i="0">
+              <a:rPr sz="1400" b="1" i="0">
                 <a:solidFill>
                   <a:srgbClr val="5A6570"/>
                 </a:solidFill>
                 <a:latin typeface="Arial"/>
               </a:rPr>
-              <a:t>+ Capability 4</a:t>
-            </a:r>
-          </a:p>
-        </p:txBody>
-      </p:sp>
-      <p:sp>
-        <p:nvSpPr>
-          <p:cNvPr id="11" name="Rounded Rectangle 10"/>
+              <a:t>4 capabilities</a:t>
+            </a:r>
+          </a:p>
+        </p:txBody>
+      </p:sp>
+      <p:sp>
+        <p:nvSpPr>
+          <p:cNvPr id="10" name="Rounded Rectangle 9"/>
           <p:cNvSpPr/>
           <p:nvPr/>
         </p:nvSpPr>
         <p:spPr>
           <a:xfrm>
-            <a:off x="457200" y="2057400"/>
-            <a:ext cx="11292840" cy="1298448"/>
+            <a:off x="457200" y="2011680"/>
+            <a:ext cx="11292840" cy="1325880"/>
           </a:xfrm>
           <a:prstGeom prst="roundRect">
             <a:avLst>
@@ -17865,13 +16398,13 @@
       </p:sp>
       <p:sp>
         <p:nvSpPr>
-          <p:cNvPr id="12" name="TextBox 11"/>
+          <p:cNvPr id="11" name="TextBox 10"/>
           <p:cNvSpPr txBox="1"/>
           <p:nvPr/>
         </p:nvSpPr>
         <p:spPr>
           <a:xfrm>
-            <a:off x="685800" y="2286000"/>
+            <a:off x="685800" y="2267712"/>
             <a:ext cx="2103120" cy="274320"/>
           </a:xfrm>
           <a:prstGeom prst="rect">
@@ -17887,7 +16420,7 @@
           <a:p>
             <a:pPr algn="l"/>
             <a:r>
-              <a:rPr sz="1300" b="1" i="0">
+              <a:rPr sz="1200" b="1" i="0">
                 <a:solidFill>
                   <a:srgbClr val="5A6570"/>
                 </a:solidFill>
@@ -17900,14 +16433,14 @@
       </p:sp>
       <p:sp>
         <p:nvSpPr>
-          <p:cNvPr id="13" name="TextBox 12"/>
+          <p:cNvPr id="12" name="TextBox 11"/>
           <p:cNvSpPr txBox="1"/>
           <p:nvPr/>
         </p:nvSpPr>
         <p:spPr>
           <a:xfrm>
-            <a:off x="685800" y="2560320"/>
-            <a:ext cx="2011680" cy="731520"/>
+            <a:off x="685800" y="2542032"/>
+            <a:ext cx="2103120" cy="685800"/>
           </a:xfrm>
           <a:prstGeom prst="rect">
             <a:avLst/>
@@ -17922,27 +16455,27 @@
           <a:p>
             <a:pPr algn="l"/>
             <a:r>
-              <a:rPr sz="1400" b="0" i="0">
+              <a:rPr sz="1900" b="1" i="0">
                 <a:solidFill>
                   <a:srgbClr val="333D47"/>
                 </a:solidFill>
                 <a:latin typeface="Arial"/>
               </a:rPr>
-              <a:t>Each one becomes another tool to find and learn</a:t>
-            </a:r>
-          </a:p>
-        </p:txBody>
-      </p:sp>
-      <p:sp>
-        <p:nvSpPr>
-          <p:cNvPr id="14" name="Rounded Rectangle 13"/>
+              <a:t>More tools to learn</a:t>
+            </a:r>
+          </a:p>
+        </p:txBody>
+      </p:sp>
+      <p:sp>
+        <p:nvSpPr>
+          <p:cNvPr id="13" name="Rounded Rectangle 12"/>
           <p:cNvSpPr/>
           <p:nvPr/>
         </p:nvSpPr>
         <p:spPr>
           <a:xfrm>
-            <a:off x="3639311" y="2286000"/>
-            <a:ext cx="402336" cy="402336"/>
+            <a:off x="3630167" y="2258568"/>
+            <a:ext cx="420624" cy="420624"/>
           </a:xfrm>
           <a:prstGeom prst="roundRect">
             <a:avLst>
@@ -17966,7 +16499,7 @@
       </p:sp>
       <p:pic>
         <p:nvPicPr>
-          <p:cNvPr id="15" name="Picture 14" descr="LuAppWindow_c.png"/>
+          <p:cNvPr id="14" name="Picture 13" descr="LuAppWindow_c.png"/>
           <p:cNvPicPr>
             <a:picLocks noChangeAspect="1"/>
           </p:cNvPicPr>
@@ -17980,8 +16513,8 @@
         </p:blipFill>
         <p:spPr>
           <a:xfrm>
-            <a:off x="3712463" y="2359152"/>
-            <a:ext cx="256032" cy="256032"/>
+            <a:off x="3703319" y="2331720"/>
+            <a:ext cx="274320" cy="274320"/>
           </a:xfrm>
           <a:prstGeom prst="rect">
             <a:avLst/>
@@ -17990,13 +16523,13 @@
       </p:pic>
       <p:sp>
         <p:nvSpPr>
-          <p:cNvPr id="16" name="TextBox 15"/>
+          <p:cNvPr id="15" name="TextBox 14"/>
           <p:cNvSpPr txBox="1"/>
           <p:nvPr/>
         </p:nvSpPr>
         <p:spPr>
           <a:xfrm>
-            <a:off x="2788919" y="2834640"/>
+            <a:off x="2788919" y="2852928"/>
             <a:ext cx="2103120" cy="320040"/>
           </a:xfrm>
           <a:prstGeom prst="rect">
@@ -18012,27 +16545,27 @@
           <a:p>
             <a:pPr algn="ctr"/>
             <a:r>
-              <a:rPr sz="1300" b="1" i="0">
+              <a:rPr sz="1500" b="1" i="0">
                 <a:solidFill>
                   <a:srgbClr val="333D47"/>
                 </a:solidFill>
                 <a:latin typeface="Arial"/>
               </a:rPr>
-              <a:t>1 tool to learn</a:t>
-            </a:r>
-          </a:p>
-        </p:txBody>
-      </p:sp>
-      <p:sp>
-        <p:nvSpPr>
-          <p:cNvPr id="17" name="Rounded Rectangle 16"/>
+              <a:t>1 tool</a:t>
+            </a:r>
+          </a:p>
+        </p:txBody>
+      </p:sp>
+      <p:sp>
+        <p:nvSpPr>
+          <p:cNvPr id="16" name="Rounded Rectangle 15"/>
           <p:cNvSpPr/>
           <p:nvPr/>
         </p:nvSpPr>
         <p:spPr>
           <a:xfrm>
-            <a:off x="5632704" y="2286000"/>
-            <a:ext cx="402336" cy="402336"/>
+            <a:off x="5614416" y="2258568"/>
+            <a:ext cx="420624" cy="420624"/>
           </a:xfrm>
           <a:prstGeom prst="roundRect">
             <a:avLst>
@@ -18056,7 +16589,7 @@
       </p:sp>
       <p:pic>
         <p:nvPicPr>
-          <p:cNvPr id="18" name="Picture 17" descr="LuAppWindow_c.png"/>
+          <p:cNvPr id="17" name="Picture 16" descr="LuAppWindow_c.png"/>
           <p:cNvPicPr>
             <a:picLocks noChangeAspect="1"/>
           </p:cNvPicPr>
@@ -18070,8 +16603,8 @@
         </p:blipFill>
         <p:spPr>
           <a:xfrm>
-            <a:off x="5705856" y="2359152"/>
-            <a:ext cx="256032" cy="256032"/>
+            <a:off x="5687568" y="2331720"/>
+            <a:ext cx="274320" cy="274320"/>
           </a:xfrm>
           <a:prstGeom prst="rect">
             <a:avLst/>
@@ -18080,14 +16613,14 @@
       </p:pic>
       <p:sp>
         <p:nvSpPr>
-          <p:cNvPr id="19" name="Rounded Rectangle 18"/>
+          <p:cNvPr id="18" name="Rounded Rectangle 17"/>
           <p:cNvSpPr/>
           <p:nvPr/>
         </p:nvSpPr>
         <p:spPr>
           <a:xfrm>
-            <a:off x="6126480" y="2286000"/>
-            <a:ext cx="402336" cy="402336"/>
+            <a:off x="6126480" y="2258568"/>
+            <a:ext cx="420624" cy="420624"/>
           </a:xfrm>
           <a:prstGeom prst="roundRect">
             <a:avLst>
@@ -18111,7 +16644,7 @@
       </p:sp>
       <p:pic>
         <p:nvPicPr>
-          <p:cNvPr id="20" name="Picture 19" descr="LuAppWindow_c.png"/>
+          <p:cNvPr id="19" name="Picture 18" descr="LuAppWindow_c.png"/>
           <p:cNvPicPr>
             <a:picLocks noChangeAspect="1"/>
           </p:cNvPicPr>
@@ -18125,8 +16658,8 @@
         </p:blipFill>
         <p:spPr>
           <a:xfrm>
-            <a:off x="6199632" y="2359152"/>
-            <a:ext cx="256032" cy="256032"/>
+            <a:off x="6199632" y="2331720"/>
+            <a:ext cx="274320" cy="274320"/>
           </a:xfrm>
           <a:prstGeom prst="rect">
             <a:avLst/>
@@ -18135,13 +16668,13 @@
       </p:pic>
       <p:sp>
         <p:nvSpPr>
-          <p:cNvPr id="21" name="TextBox 20"/>
+          <p:cNvPr id="20" name="TextBox 19"/>
           <p:cNvSpPr txBox="1"/>
           <p:nvPr/>
         </p:nvSpPr>
         <p:spPr>
           <a:xfrm>
-            <a:off x="5029200" y="2834640"/>
+            <a:off x="5029200" y="2852928"/>
             <a:ext cx="2103120" cy="320040"/>
           </a:xfrm>
           <a:prstGeom prst="rect">
@@ -18157,27 +16690,27 @@
           <a:p>
             <a:pPr algn="ctr"/>
             <a:r>
-              <a:rPr sz="1300" b="1" i="0">
+              <a:rPr sz="1500" b="1" i="0">
                 <a:solidFill>
                   <a:srgbClr val="333D47"/>
                 </a:solidFill>
                 <a:latin typeface="Arial"/>
               </a:rPr>
-              <a:t>2 tools to learn</a:t>
-            </a:r>
-          </a:p>
-        </p:txBody>
-      </p:sp>
-      <p:sp>
-        <p:nvSpPr>
-          <p:cNvPr id="22" name="Rounded Rectangle 21"/>
+              <a:t>2 tools</a:t>
+            </a:r>
+          </a:p>
+        </p:txBody>
+      </p:sp>
+      <p:sp>
+        <p:nvSpPr>
+          <p:cNvPr id="21" name="Rounded Rectangle 20"/>
           <p:cNvSpPr/>
           <p:nvPr/>
         </p:nvSpPr>
         <p:spPr>
           <a:xfrm>
-            <a:off x="7626096" y="2286000"/>
-            <a:ext cx="402336" cy="402336"/>
+            <a:off x="7598663" y="2258568"/>
+            <a:ext cx="420624" cy="420624"/>
           </a:xfrm>
           <a:prstGeom prst="roundRect">
             <a:avLst>
@@ -18201,7 +16734,7 @@
       </p:sp>
       <p:pic>
         <p:nvPicPr>
-          <p:cNvPr id="23" name="Picture 22" descr="LuAppWindow_c.png"/>
+          <p:cNvPr id="22" name="Picture 21" descr="LuAppWindow_c.png"/>
           <p:cNvPicPr>
             <a:picLocks noChangeAspect="1"/>
           </p:cNvPicPr>
@@ -18215,8 +16748,8 @@
         </p:blipFill>
         <p:spPr>
           <a:xfrm>
-            <a:off x="7699248" y="2359152"/>
-            <a:ext cx="256032" cy="256032"/>
+            <a:off x="7671815" y="2331720"/>
+            <a:ext cx="274320" cy="274320"/>
           </a:xfrm>
           <a:prstGeom prst="rect">
             <a:avLst/>
@@ -18225,14 +16758,14 @@
       </p:pic>
       <p:sp>
         <p:nvSpPr>
-          <p:cNvPr id="24" name="Rounded Rectangle 23"/>
+          <p:cNvPr id="23" name="Rounded Rectangle 22"/>
           <p:cNvSpPr/>
           <p:nvPr/>
         </p:nvSpPr>
         <p:spPr>
           <a:xfrm>
-            <a:off x="8119871" y="2286000"/>
-            <a:ext cx="402336" cy="402336"/>
+            <a:off x="8110727" y="2258568"/>
+            <a:ext cx="420624" cy="420624"/>
           </a:xfrm>
           <a:prstGeom prst="roundRect">
             <a:avLst>
@@ -18256,7 +16789,7 @@
       </p:sp>
       <p:pic>
         <p:nvPicPr>
-          <p:cNvPr id="25" name="Picture 24" descr="LuAppWindow_c.png"/>
+          <p:cNvPr id="24" name="Picture 23" descr="LuAppWindow_c.png"/>
           <p:cNvPicPr>
             <a:picLocks noChangeAspect="1"/>
           </p:cNvPicPr>
@@ -18270,8 +16803,8 @@
         </p:blipFill>
         <p:spPr>
           <a:xfrm>
-            <a:off x="8193023" y="2359152"/>
-            <a:ext cx="256032" cy="256032"/>
+            <a:off x="8183879" y="2331720"/>
+            <a:ext cx="274320" cy="274320"/>
           </a:xfrm>
           <a:prstGeom prst="rect">
             <a:avLst/>
@@ -18280,14 +16813,14 @@
       </p:pic>
       <p:sp>
         <p:nvSpPr>
-          <p:cNvPr id="26" name="Rounded Rectangle 25"/>
+          <p:cNvPr id="25" name="Rounded Rectangle 24"/>
           <p:cNvSpPr/>
           <p:nvPr/>
         </p:nvSpPr>
         <p:spPr>
           <a:xfrm>
-            <a:off x="8613648" y="2286000"/>
-            <a:ext cx="402336" cy="402336"/>
+            <a:off x="8622792" y="2258568"/>
+            <a:ext cx="420624" cy="420624"/>
           </a:xfrm>
           <a:prstGeom prst="roundRect">
             <a:avLst>
@@ -18311,7 +16844,7 @@
       </p:sp>
       <p:pic>
         <p:nvPicPr>
-          <p:cNvPr id="27" name="Picture 26" descr="LuAppWindow_c.png"/>
+          <p:cNvPr id="26" name="Picture 25" descr="LuAppWindow_c.png"/>
           <p:cNvPicPr>
             <a:picLocks noChangeAspect="1"/>
           </p:cNvPicPr>
@@ -18325,8 +16858,8 @@
         </p:blipFill>
         <p:spPr>
           <a:xfrm>
-            <a:off x="8686800" y="2359152"/>
-            <a:ext cx="256032" cy="256032"/>
+            <a:off x="8695944" y="2331720"/>
+            <a:ext cx="274320" cy="274320"/>
           </a:xfrm>
           <a:prstGeom prst="rect">
             <a:avLst/>
@@ -18335,13 +16868,13 @@
       </p:pic>
       <p:sp>
         <p:nvSpPr>
-          <p:cNvPr id="28" name="TextBox 27"/>
+          <p:cNvPr id="27" name="TextBox 26"/>
           <p:cNvSpPr txBox="1"/>
           <p:nvPr/>
         </p:nvSpPr>
         <p:spPr>
           <a:xfrm>
-            <a:off x="7269479" y="2834640"/>
+            <a:off x="7269479" y="2852928"/>
             <a:ext cx="2103120" cy="320040"/>
           </a:xfrm>
           <a:prstGeom prst="rect">
@@ -18357,27 +16890,27 @@
           <a:p>
             <a:pPr algn="ctr"/>
             <a:r>
-              <a:rPr sz="1300" b="1" i="0">
+              <a:rPr sz="1500" b="1" i="0">
                 <a:solidFill>
                   <a:srgbClr val="333D47"/>
                 </a:solidFill>
                 <a:latin typeface="Arial"/>
               </a:rPr>
-              <a:t>3 tools to learn</a:t>
-            </a:r>
-          </a:p>
-        </p:txBody>
-      </p:sp>
-      <p:sp>
-        <p:nvSpPr>
-          <p:cNvPr id="29" name="Rounded Rectangle 28"/>
+              <a:t>3 tools</a:t>
+            </a:r>
+          </a:p>
+        </p:txBody>
+      </p:sp>
+      <p:sp>
+        <p:nvSpPr>
+          <p:cNvPr id="28" name="Rounded Rectangle 27"/>
           <p:cNvSpPr/>
           <p:nvPr/>
         </p:nvSpPr>
         <p:spPr>
           <a:xfrm>
-            <a:off x="9619488" y="2286000"/>
-            <a:ext cx="402336" cy="402336"/>
+            <a:off x="9582912" y="2258568"/>
+            <a:ext cx="420624" cy="420624"/>
           </a:xfrm>
           <a:prstGeom prst="roundRect">
             <a:avLst>
@@ -18401,7 +16934,7 @@
       </p:sp>
       <p:pic>
         <p:nvPicPr>
-          <p:cNvPr id="30" name="Picture 29" descr="LuAppWindow_c.png"/>
+          <p:cNvPr id="29" name="Picture 28" descr="LuAppWindow_c.png"/>
           <p:cNvPicPr>
             <a:picLocks noChangeAspect="1"/>
           </p:cNvPicPr>
@@ -18415,8 +16948,8 @@
         </p:blipFill>
         <p:spPr>
           <a:xfrm>
-            <a:off x="9692640" y="2359152"/>
-            <a:ext cx="256032" cy="256032"/>
+            <a:off x="9656064" y="2331720"/>
+            <a:ext cx="274320" cy="274320"/>
           </a:xfrm>
           <a:prstGeom prst="rect">
             <a:avLst/>
@@ -18425,14 +16958,14 @@
       </p:pic>
       <p:sp>
         <p:nvSpPr>
-          <p:cNvPr id="31" name="Rounded Rectangle 30"/>
+          <p:cNvPr id="30" name="Rounded Rectangle 29"/>
           <p:cNvSpPr/>
           <p:nvPr/>
         </p:nvSpPr>
         <p:spPr>
           <a:xfrm>
-            <a:off x="10113264" y="2286000"/>
-            <a:ext cx="402336" cy="402336"/>
+            <a:off x="10094976" y="2258568"/>
+            <a:ext cx="420624" cy="420624"/>
           </a:xfrm>
           <a:prstGeom prst="roundRect">
             <a:avLst>
@@ -18456,7 +16989,7 @@
       </p:sp>
       <p:pic>
         <p:nvPicPr>
-          <p:cNvPr id="32" name="Picture 31" descr="LuAppWindow_c.png"/>
+          <p:cNvPr id="31" name="Picture 30" descr="LuAppWindow_c.png"/>
           <p:cNvPicPr>
             <a:picLocks noChangeAspect="1"/>
           </p:cNvPicPr>
@@ -18470,8 +17003,8 @@
         </p:blipFill>
         <p:spPr>
           <a:xfrm>
-            <a:off x="10186416" y="2359152"/>
-            <a:ext cx="256032" cy="256032"/>
+            <a:off x="10168128" y="2331720"/>
+            <a:ext cx="274320" cy="274320"/>
           </a:xfrm>
           <a:prstGeom prst="rect">
             <a:avLst/>
@@ -18480,14 +17013,14 @@
       </p:pic>
       <p:sp>
         <p:nvSpPr>
-          <p:cNvPr id="33" name="Rounded Rectangle 32"/>
+          <p:cNvPr id="32" name="Rounded Rectangle 31"/>
           <p:cNvSpPr/>
           <p:nvPr/>
         </p:nvSpPr>
         <p:spPr>
           <a:xfrm>
-            <a:off x="10607040" y="2286000"/>
-            <a:ext cx="402336" cy="402336"/>
+            <a:off x="10607040" y="2258568"/>
+            <a:ext cx="420624" cy="420624"/>
           </a:xfrm>
           <a:prstGeom prst="roundRect">
             <a:avLst>
@@ -18511,7 +17044,7 @@
       </p:sp>
       <p:pic>
         <p:nvPicPr>
-          <p:cNvPr id="34" name="Picture 33" descr="LuAppWindow_c.png"/>
+          <p:cNvPr id="33" name="Picture 32" descr="LuAppWindow_c.png"/>
           <p:cNvPicPr>
             <a:picLocks noChangeAspect="1"/>
           </p:cNvPicPr>
@@ -18525,8 +17058,8 @@
         </p:blipFill>
         <p:spPr>
           <a:xfrm>
-            <a:off x="10680192" y="2359152"/>
-            <a:ext cx="256032" cy="256032"/>
+            <a:off x="10680192" y="2331720"/>
+            <a:ext cx="274320" cy="274320"/>
           </a:xfrm>
           <a:prstGeom prst="rect">
             <a:avLst/>
@@ -18535,14 +17068,14 @@
       </p:pic>
       <p:sp>
         <p:nvSpPr>
-          <p:cNvPr id="35" name="Rounded Rectangle 34"/>
+          <p:cNvPr id="34" name="Rounded Rectangle 33"/>
           <p:cNvSpPr/>
           <p:nvPr/>
         </p:nvSpPr>
         <p:spPr>
           <a:xfrm>
-            <a:off x="11100816" y="2286000"/>
-            <a:ext cx="402336" cy="402336"/>
+            <a:off x="11119104" y="2258568"/>
+            <a:ext cx="420624" cy="420624"/>
           </a:xfrm>
           <a:prstGeom prst="roundRect">
             <a:avLst>
@@ -18566,7 +17099,7 @@
       </p:sp>
       <p:pic>
         <p:nvPicPr>
-          <p:cNvPr id="36" name="Picture 35" descr="LuAppWindow_c.png"/>
+          <p:cNvPr id="35" name="Picture 34" descr="LuAppWindow_c.png"/>
           <p:cNvPicPr>
             <a:picLocks noChangeAspect="1"/>
           </p:cNvPicPr>
@@ -18580,8 +17113,8 @@
         </p:blipFill>
         <p:spPr>
           <a:xfrm>
-            <a:off x="11173968" y="2359152"/>
-            <a:ext cx="256032" cy="256032"/>
+            <a:off x="11192256" y="2331720"/>
+            <a:ext cx="274320" cy="274320"/>
           </a:xfrm>
           <a:prstGeom prst="rect">
             <a:avLst/>
@@ -18590,13 +17123,13 @@
       </p:pic>
       <p:sp>
         <p:nvSpPr>
-          <p:cNvPr id="37" name="TextBox 36"/>
+          <p:cNvPr id="36" name="TextBox 35"/>
           <p:cNvSpPr txBox="1"/>
           <p:nvPr/>
         </p:nvSpPr>
         <p:spPr>
           <a:xfrm>
-            <a:off x="9509760" y="2834640"/>
+            <a:off x="9509760" y="2852928"/>
             <a:ext cx="2103120" cy="320040"/>
           </a:xfrm>
           <a:prstGeom prst="rect">
@@ -18612,27 +17145,27 @@
           <a:p>
             <a:pPr algn="ctr"/>
             <a:r>
-              <a:rPr sz="1300" b="1" i="0">
+              <a:rPr sz="1500" b="1" i="0">
                 <a:solidFill>
                   <a:srgbClr val="333D47"/>
                 </a:solidFill>
                 <a:latin typeface="Arial"/>
               </a:rPr>
-              <a:t>4 tools to learn</a:t>
-            </a:r>
-          </a:p>
-        </p:txBody>
-      </p:sp>
-      <p:sp>
-        <p:nvSpPr>
-          <p:cNvPr id="38" name="Rounded Rectangle 37"/>
+              <a:t>4 tools</a:t>
+            </a:r>
+          </a:p>
+        </p:txBody>
+      </p:sp>
+      <p:sp>
+        <p:nvSpPr>
+          <p:cNvPr id="37" name="Rounded Rectangle 36"/>
           <p:cNvSpPr/>
           <p:nvPr/>
         </p:nvSpPr>
         <p:spPr>
           <a:xfrm>
             <a:off x="457200" y="3474720"/>
-            <a:ext cx="11292840" cy="1298448"/>
+            <a:ext cx="11292840" cy="1325880"/>
           </a:xfrm>
           <a:prstGeom prst="roundRect">
             <a:avLst>
@@ -18654,13 +17187,13 @@
       </p:sp>
       <p:sp>
         <p:nvSpPr>
-          <p:cNvPr id="39" name="TextBox 38"/>
+          <p:cNvPr id="38" name="TextBox 37"/>
           <p:cNvSpPr txBox="1"/>
           <p:nvPr/>
         </p:nvSpPr>
         <p:spPr>
           <a:xfrm>
-            <a:off x="685800" y="3703320"/>
+            <a:off x="685800" y="3730752"/>
             <a:ext cx="2103120" cy="274320"/>
           </a:xfrm>
           <a:prstGeom prst="rect">
@@ -18676,7 +17209,7 @@
           <a:p>
             <a:pPr algn="l"/>
             <a:r>
-              <a:rPr sz="1300" b="1" i="0">
+              <a:rPr sz="1200" b="1" i="0">
                 <a:solidFill>
                   <a:srgbClr val="D31145"/>
                 </a:solidFill>
@@ -18689,14 +17222,14 @@
       </p:sp>
       <p:sp>
         <p:nvSpPr>
-          <p:cNvPr id="40" name="TextBox 39"/>
+          <p:cNvPr id="39" name="TextBox 38"/>
           <p:cNvSpPr txBox="1"/>
           <p:nvPr/>
         </p:nvSpPr>
         <p:spPr>
           <a:xfrm>
-            <a:off x="685800" y="3977639"/>
-            <a:ext cx="2011680" cy="731520"/>
+            <a:off x="685800" y="4005072"/>
+            <a:ext cx="2103120" cy="685800"/>
           </a:xfrm>
           <a:prstGeom prst="rect">
             <a:avLst/>
@@ -18711,26 +17244,26 @@
           <a:p>
             <a:pPr algn="l"/>
             <a:r>
-              <a:rPr sz="1400" b="0" i="0">
-                <a:solidFill>
-                  <a:srgbClr val="333D47"/>
-                </a:solidFill>
-                <a:latin typeface="Arial"/>
-              </a:rPr>
-              <a:t>Each one extends the same coworker</a:t>
+              <a:rPr sz="1900" b="1" i="0">
+                <a:solidFill>
+                  <a:srgbClr val="D31145"/>
+                </a:solidFill>
+                <a:latin typeface="Arial"/>
+              </a:rPr>
+              <a:t>A more capable Riley</a:t>
             </a:r>
           </a:p>
         </p:txBody>
       </p:sp>
       <p:cxnSp>
         <p:nvCxnSpPr>
-          <p:cNvPr id="41" name="Connector 40"/>
+          <p:cNvPr id="40" name="Connector 39"/>
           <p:cNvCxnSpPr/>
           <p:nvPr/>
         </p:nvCxnSpPr>
         <p:spPr>
           <a:xfrm flipV="1">
-            <a:off x="3840479" y="3739896"/>
+            <a:off x="3840479" y="3767328"/>
             <a:ext cx="566928" cy="155448"/>
           </a:xfrm>
           <a:prstGeom prst="line">
@@ -18759,13 +17292,13 @@
       </p:cxnSp>
       <p:sp>
         <p:nvSpPr>
-          <p:cNvPr id="42" name="Oval 41"/>
+          <p:cNvPr id="41" name="Oval 40"/>
           <p:cNvSpPr/>
           <p:nvPr/>
         </p:nvSpPr>
         <p:spPr>
           <a:xfrm>
-            <a:off x="4306823" y="3639312"/>
+            <a:off x="4306823" y="3666744"/>
             <a:ext cx="201168" cy="201168"/>
           </a:xfrm>
           <a:prstGeom prst="ellipse">
@@ -18788,14 +17321,14 @@
       </p:sp>
       <p:sp>
         <p:nvSpPr>
-          <p:cNvPr id="43" name="Oval 42"/>
+          <p:cNvPr id="42" name="Oval 41"/>
           <p:cNvSpPr/>
           <p:nvPr/>
         </p:nvSpPr>
         <p:spPr>
           <a:xfrm>
-            <a:off x="3602735" y="3657600"/>
-            <a:ext cx="475488" cy="475488"/>
+            <a:off x="3593591" y="3675888"/>
+            <a:ext cx="493776" cy="493776"/>
           </a:xfrm>
           <a:prstGeom prst="ellipse">
             <a:avLst/>
@@ -18815,14 +17348,14 @@
       </p:sp>
       <p:sp>
         <p:nvSpPr>
-          <p:cNvPr id="44" name="TextBox 43"/>
+          <p:cNvPr id="43" name="TextBox 42"/>
           <p:cNvSpPr txBox="1"/>
           <p:nvPr/>
         </p:nvSpPr>
         <p:spPr>
           <a:xfrm>
-            <a:off x="3602735" y="3657600"/>
-            <a:ext cx="475488" cy="475488"/>
+            <a:off x="3593591" y="3675888"/>
+            <a:ext cx="493776" cy="493776"/>
           </a:xfrm>
           <a:prstGeom prst="rect">
             <a:avLst/>
@@ -18850,14 +17383,14 @@
       </p:sp>
       <p:sp>
         <p:nvSpPr>
-          <p:cNvPr id="45" name="TextBox 44"/>
+          <p:cNvPr id="44" name="TextBox 43"/>
           <p:cNvSpPr txBox="1"/>
           <p:nvPr/>
         </p:nvSpPr>
         <p:spPr>
           <a:xfrm>
-            <a:off x="2788919" y="4224528"/>
-            <a:ext cx="2103120" cy="457200"/>
+            <a:off x="2788919" y="4315968"/>
+            <a:ext cx="2103120" cy="320040"/>
           </a:xfrm>
           <a:prstGeom prst="rect">
             <a:avLst/>
@@ -18872,35 +17405,26 @@
           <a:p>
             <a:pPr algn="ctr"/>
             <a:r>
-              <a:rPr sz="1300" b="1" i="0">
+              <a:rPr sz="1500" b="1" i="0">
                 <a:solidFill>
                   <a:srgbClr val="D31145"/>
                 </a:solidFill>
                 <a:latin typeface="Arial"/>
               </a:rPr>
               <a:t>1 interface</a:t>
-            </a:r>
-            <a:r>
-              <a:rPr sz="1300" b="0" i="0">
-                <a:solidFill>
-                  <a:srgbClr val="D31145"/>
-                </a:solidFill>
-                <a:latin typeface="Arial"/>
-              </a:rPr>
-              <a:t>  ·  1 capability</a:t>
             </a:r>
           </a:p>
         </p:txBody>
       </p:sp>
       <p:cxnSp>
         <p:nvCxnSpPr>
-          <p:cNvPr id="46" name="Connector 45"/>
+          <p:cNvPr id="45" name="Connector 44"/>
           <p:cNvCxnSpPr/>
           <p:nvPr/>
         </p:nvCxnSpPr>
         <p:spPr>
           <a:xfrm flipV="1">
-            <a:off x="6080760" y="3739896"/>
+            <a:off x="6080760" y="3767328"/>
             <a:ext cx="566928" cy="155448"/>
           </a:xfrm>
           <a:prstGeom prst="line">
@@ -18929,13 +17453,13 @@
       </p:cxnSp>
       <p:sp>
         <p:nvSpPr>
-          <p:cNvPr id="47" name="Oval 46"/>
+          <p:cNvPr id="46" name="Oval 45"/>
           <p:cNvSpPr/>
           <p:nvPr/>
         </p:nvSpPr>
         <p:spPr>
           <a:xfrm>
-            <a:off x="6547104" y="3639312"/>
+            <a:off x="6547104" y="3666744"/>
             <a:ext cx="201168" cy="201168"/>
           </a:xfrm>
           <a:prstGeom prst="ellipse">
@@ -18958,14 +17482,14 @@
       </p:sp>
       <p:cxnSp>
         <p:nvCxnSpPr>
-          <p:cNvPr id="48" name="Connector 47"/>
+          <p:cNvPr id="47" name="Connector 46"/>
           <p:cNvCxnSpPr/>
           <p:nvPr/>
         </p:nvCxnSpPr>
         <p:spPr>
           <a:xfrm>
-            <a:off x="6080760" y="3895344"/>
-            <a:ext cx="566928" cy="155447"/>
+            <a:off x="6080760" y="3922776"/>
+            <a:ext cx="566928" cy="155448"/>
           </a:xfrm>
           <a:prstGeom prst="line">
             <a:avLst/>
@@ -18993,13 +17517,13 @@
       </p:cxnSp>
       <p:sp>
         <p:nvSpPr>
-          <p:cNvPr id="49" name="Oval 48"/>
+          <p:cNvPr id="48" name="Oval 47"/>
           <p:cNvSpPr/>
           <p:nvPr/>
         </p:nvSpPr>
         <p:spPr>
           <a:xfrm>
-            <a:off x="6547104" y="3950207"/>
+            <a:off x="6547104" y="3977640"/>
             <a:ext cx="201168" cy="201168"/>
           </a:xfrm>
           <a:prstGeom prst="ellipse">
@@ -19022,14 +17546,14 @@
       </p:sp>
       <p:sp>
         <p:nvSpPr>
-          <p:cNvPr id="50" name="Oval 49"/>
+          <p:cNvPr id="49" name="Oval 48"/>
           <p:cNvSpPr/>
           <p:nvPr/>
         </p:nvSpPr>
         <p:spPr>
           <a:xfrm>
-            <a:off x="5843016" y="3657600"/>
-            <a:ext cx="475488" cy="475488"/>
+            <a:off x="5833872" y="3675888"/>
+            <a:ext cx="493776" cy="493776"/>
           </a:xfrm>
           <a:prstGeom prst="ellipse">
             <a:avLst/>
@@ -19049,14 +17573,14 @@
       </p:sp>
       <p:sp>
         <p:nvSpPr>
-          <p:cNvPr id="51" name="TextBox 50"/>
+          <p:cNvPr id="50" name="TextBox 49"/>
           <p:cNvSpPr txBox="1"/>
           <p:nvPr/>
         </p:nvSpPr>
         <p:spPr>
           <a:xfrm>
-            <a:off x="5843016" y="3657600"/>
-            <a:ext cx="475488" cy="475488"/>
+            <a:off x="5833872" y="3675888"/>
+            <a:ext cx="493776" cy="493776"/>
           </a:xfrm>
           <a:prstGeom prst="rect">
             <a:avLst/>
@@ -19084,14 +17608,14 @@
       </p:sp>
       <p:sp>
         <p:nvSpPr>
-          <p:cNvPr id="52" name="TextBox 51"/>
+          <p:cNvPr id="51" name="TextBox 50"/>
           <p:cNvSpPr txBox="1"/>
           <p:nvPr/>
         </p:nvSpPr>
         <p:spPr>
           <a:xfrm>
-            <a:off x="5029200" y="4224528"/>
-            <a:ext cx="2103120" cy="457200"/>
+            <a:off x="5029200" y="4315968"/>
+            <a:ext cx="2103120" cy="320040"/>
           </a:xfrm>
           <a:prstGeom prst="rect">
             <a:avLst/>
@@ -19106,35 +17630,26 @@
           <a:p>
             <a:pPr algn="ctr"/>
             <a:r>
-              <a:rPr sz="1300" b="1" i="0">
+              <a:rPr sz="1500" b="1" i="0">
                 <a:solidFill>
                   <a:srgbClr val="D31145"/>
                 </a:solidFill>
                 <a:latin typeface="Arial"/>
               </a:rPr>
               <a:t>1 interface</a:t>
-            </a:r>
-            <a:r>
-              <a:rPr sz="1300" b="0" i="0">
-                <a:solidFill>
-                  <a:srgbClr val="D31145"/>
-                </a:solidFill>
-                <a:latin typeface="Arial"/>
-              </a:rPr>
-              <a:t>  ·  2 capabilities</a:t>
             </a:r>
           </a:p>
         </p:txBody>
       </p:sp>
       <p:cxnSp>
         <p:nvCxnSpPr>
-          <p:cNvPr id="53" name="Connector 52"/>
+          <p:cNvPr id="52" name="Connector 51"/>
           <p:cNvCxnSpPr/>
           <p:nvPr/>
         </p:nvCxnSpPr>
         <p:spPr>
           <a:xfrm flipV="1">
-            <a:off x="8321040" y="3739896"/>
+            <a:off x="8321040" y="3767328"/>
             <a:ext cx="566927" cy="155448"/>
           </a:xfrm>
           <a:prstGeom prst="line">
@@ -19163,13 +17678,13 @@
       </p:cxnSp>
       <p:sp>
         <p:nvSpPr>
-          <p:cNvPr id="54" name="Oval 53"/>
+          <p:cNvPr id="53" name="Oval 52"/>
           <p:cNvSpPr/>
           <p:nvPr/>
         </p:nvSpPr>
         <p:spPr>
           <a:xfrm>
-            <a:off x="8787384" y="3639312"/>
+            <a:off x="8787384" y="3666744"/>
             <a:ext cx="201168" cy="201168"/>
           </a:xfrm>
           <a:prstGeom prst="ellipse">
@@ -19192,14 +17707,14 @@
       </p:sp>
       <p:cxnSp>
         <p:nvCxnSpPr>
-          <p:cNvPr id="55" name="Connector 54"/>
+          <p:cNvPr id="54" name="Connector 53"/>
           <p:cNvCxnSpPr/>
           <p:nvPr/>
         </p:nvCxnSpPr>
         <p:spPr>
           <a:xfrm>
-            <a:off x="8321040" y="3895344"/>
-            <a:ext cx="566927" cy="155447"/>
+            <a:off x="8321040" y="3922776"/>
+            <a:ext cx="566927" cy="155448"/>
           </a:xfrm>
           <a:prstGeom prst="line">
             <a:avLst/>
@@ -19227,13 +17742,13 @@
       </p:cxnSp>
       <p:sp>
         <p:nvSpPr>
-          <p:cNvPr id="56" name="Oval 55"/>
+          <p:cNvPr id="55" name="Oval 54"/>
           <p:cNvSpPr/>
           <p:nvPr/>
         </p:nvSpPr>
         <p:spPr>
           <a:xfrm>
-            <a:off x="8787384" y="3950207"/>
+            <a:off x="8787384" y="3977640"/>
             <a:ext cx="201168" cy="201168"/>
           </a:xfrm>
           <a:prstGeom prst="ellipse">
@@ -19256,13 +17771,13 @@
       </p:sp>
       <p:cxnSp>
         <p:nvCxnSpPr>
-          <p:cNvPr id="57" name="Connector 56"/>
+          <p:cNvPr id="56" name="Connector 55"/>
           <p:cNvCxnSpPr/>
           <p:nvPr/>
         </p:nvCxnSpPr>
         <p:spPr>
           <a:xfrm flipH="1" flipV="1">
-            <a:off x="7754112" y="3739896"/>
+            <a:off x="7754112" y="3767328"/>
             <a:ext cx="566928" cy="155448"/>
           </a:xfrm>
           <a:prstGeom prst="line">
@@ -19291,13 +17806,13 @@
       </p:cxnSp>
       <p:sp>
         <p:nvSpPr>
-          <p:cNvPr id="58" name="Oval 57"/>
+          <p:cNvPr id="57" name="Oval 56"/>
           <p:cNvSpPr/>
           <p:nvPr/>
         </p:nvSpPr>
         <p:spPr>
           <a:xfrm>
-            <a:off x="7653528" y="3639312"/>
+            <a:off x="7653528" y="3666744"/>
             <a:ext cx="201168" cy="201168"/>
           </a:xfrm>
           <a:prstGeom prst="ellipse">
@@ -19320,14 +17835,14 @@
       </p:sp>
       <p:sp>
         <p:nvSpPr>
-          <p:cNvPr id="59" name="Oval 58"/>
+          <p:cNvPr id="58" name="Oval 57"/>
           <p:cNvSpPr/>
           <p:nvPr/>
         </p:nvSpPr>
         <p:spPr>
           <a:xfrm>
-            <a:off x="8083296" y="3657600"/>
-            <a:ext cx="475488" cy="475488"/>
+            <a:off x="8074152" y="3675888"/>
+            <a:ext cx="493776" cy="493776"/>
           </a:xfrm>
           <a:prstGeom prst="ellipse">
             <a:avLst/>
@@ -19347,14 +17862,14 @@
       </p:sp>
       <p:sp>
         <p:nvSpPr>
-          <p:cNvPr id="60" name="TextBox 59"/>
+          <p:cNvPr id="59" name="TextBox 58"/>
           <p:cNvSpPr txBox="1"/>
           <p:nvPr/>
         </p:nvSpPr>
         <p:spPr>
           <a:xfrm>
-            <a:off x="8083296" y="3657600"/>
-            <a:ext cx="475488" cy="475488"/>
+            <a:off x="8074152" y="3675888"/>
+            <a:ext cx="493776" cy="493776"/>
           </a:xfrm>
           <a:prstGeom prst="rect">
             <a:avLst/>
@@ -19382,14 +17897,14 @@
       </p:sp>
       <p:sp>
         <p:nvSpPr>
-          <p:cNvPr id="61" name="TextBox 60"/>
+          <p:cNvPr id="60" name="TextBox 59"/>
           <p:cNvSpPr txBox="1"/>
           <p:nvPr/>
         </p:nvSpPr>
         <p:spPr>
           <a:xfrm>
-            <a:off x="7269479" y="4224528"/>
-            <a:ext cx="2103120" cy="457200"/>
+            <a:off x="7269479" y="4315968"/>
+            <a:ext cx="2103120" cy="320040"/>
           </a:xfrm>
           <a:prstGeom prst="rect">
             <a:avLst/>
@@ -19404,35 +17919,26 @@
           <a:p>
             <a:pPr algn="ctr"/>
             <a:r>
-              <a:rPr sz="1300" b="1" i="0">
+              <a:rPr sz="1500" b="1" i="0">
                 <a:solidFill>
                   <a:srgbClr val="D31145"/>
                 </a:solidFill>
                 <a:latin typeface="Arial"/>
               </a:rPr>
               <a:t>1 interface</a:t>
-            </a:r>
-            <a:r>
-              <a:rPr sz="1300" b="0" i="0">
-                <a:solidFill>
-                  <a:srgbClr val="D31145"/>
-                </a:solidFill>
-                <a:latin typeface="Arial"/>
-              </a:rPr>
-              <a:t>  ·  3 capabilities</a:t>
             </a:r>
           </a:p>
         </p:txBody>
       </p:sp>
       <p:cxnSp>
         <p:nvCxnSpPr>
-          <p:cNvPr id="62" name="Connector 61"/>
+          <p:cNvPr id="61" name="Connector 60"/>
           <p:cNvCxnSpPr/>
           <p:nvPr/>
         </p:nvCxnSpPr>
         <p:spPr>
           <a:xfrm flipV="1">
-            <a:off x="10561320" y="3739896"/>
+            <a:off x="10561320" y="3767328"/>
             <a:ext cx="566928" cy="155448"/>
           </a:xfrm>
           <a:prstGeom prst="line">
@@ -19461,13 +17967,13 @@
       </p:cxnSp>
       <p:sp>
         <p:nvSpPr>
-          <p:cNvPr id="63" name="Oval 62"/>
+          <p:cNvPr id="62" name="Oval 61"/>
           <p:cNvSpPr/>
           <p:nvPr/>
         </p:nvSpPr>
         <p:spPr>
           <a:xfrm>
-            <a:off x="11027664" y="3639312"/>
+            <a:off x="11027664" y="3666744"/>
             <a:ext cx="201168" cy="201168"/>
           </a:xfrm>
           <a:prstGeom prst="ellipse">
@@ -19490,14 +17996,14 @@
       </p:sp>
       <p:cxnSp>
         <p:nvCxnSpPr>
-          <p:cNvPr id="64" name="Connector 63"/>
+          <p:cNvPr id="63" name="Connector 62"/>
           <p:cNvCxnSpPr/>
           <p:nvPr/>
         </p:nvCxnSpPr>
         <p:spPr>
           <a:xfrm>
-            <a:off x="10561320" y="3895344"/>
-            <a:ext cx="566928" cy="155447"/>
+            <a:off x="10561320" y="3922776"/>
+            <a:ext cx="566928" cy="155448"/>
           </a:xfrm>
           <a:prstGeom prst="line">
             <a:avLst/>
@@ -19525,13 +18031,13 @@
       </p:cxnSp>
       <p:sp>
         <p:nvSpPr>
-          <p:cNvPr id="65" name="Oval 64"/>
+          <p:cNvPr id="64" name="Oval 63"/>
           <p:cNvSpPr/>
           <p:nvPr/>
         </p:nvSpPr>
         <p:spPr>
           <a:xfrm>
-            <a:off x="11027664" y="3950207"/>
+            <a:off x="11027664" y="3977640"/>
             <a:ext cx="201168" cy="201168"/>
           </a:xfrm>
           <a:prstGeom prst="ellipse">
@@ -19554,13 +18060,13 @@
       </p:sp>
       <p:cxnSp>
         <p:nvCxnSpPr>
-          <p:cNvPr id="66" name="Connector 65"/>
+          <p:cNvPr id="65" name="Connector 64"/>
           <p:cNvCxnSpPr/>
           <p:nvPr/>
         </p:nvCxnSpPr>
         <p:spPr>
           <a:xfrm flipH="1" flipV="1">
-            <a:off x="9994392" y="3739896"/>
+            <a:off x="9994392" y="3767328"/>
             <a:ext cx="566928" cy="155448"/>
           </a:xfrm>
           <a:prstGeom prst="line">
@@ -19589,13 +18095,13 @@
       </p:cxnSp>
       <p:sp>
         <p:nvSpPr>
-          <p:cNvPr id="67" name="Oval 66"/>
+          <p:cNvPr id="66" name="Oval 65"/>
           <p:cNvSpPr/>
           <p:nvPr/>
         </p:nvSpPr>
         <p:spPr>
           <a:xfrm>
-            <a:off x="9893808" y="3639312"/>
+            <a:off x="9893808" y="3666744"/>
             <a:ext cx="201168" cy="201168"/>
           </a:xfrm>
           <a:prstGeom prst="ellipse">
@@ -19618,14 +18124,14 @@
       </p:sp>
       <p:cxnSp>
         <p:nvCxnSpPr>
-          <p:cNvPr id="68" name="Connector 67"/>
+          <p:cNvPr id="67" name="Connector 66"/>
           <p:cNvCxnSpPr/>
           <p:nvPr/>
         </p:nvCxnSpPr>
         <p:spPr>
           <a:xfrm flipH="1">
-            <a:off x="9994392" y="3895344"/>
-            <a:ext cx="566928" cy="155447"/>
+            <a:off x="9994392" y="3922776"/>
+            <a:ext cx="566928" cy="155448"/>
           </a:xfrm>
           <a:prstGeom prst="line">
             <a:avLst/>
@@ -19653,13 +18159,13 @@
       </p:cxnSp>
       <p:sp>
         <p:nvSpPr>
-          <p:cNvPr id="69" name="Oval 68"/>
+          <p:cNvPr id="68" name="Oval 67"/>
           <p:cNvSpPr/>
           <p:nvPr/>
         </p:nvSpPr>
         <p:spPr>
           <a:xfrm>
-            <a:off x="9893808" y="3950207"/>
+            <a:off x="9893808" y="3977640"/>
             <a:ext cx="201168" cy="201168"/>
           </a:xfrm>
           <a:prstGeom prst="ellipse">
@@ -19682,14 +18188,14 @@
       </p:sp>
       <p:sp>
         <p:nvSpPr>
-          <p:cNvPr id="70" name="Oval 69"/>
+          <p:cNvPr id="69" name="Oval 68"/>
           <p:cNvSpPr/>
           <p:nvPr/>
         </p:nvSpPr>
         <p:spPr>
           <a:xfrm>
-            <a:off x="10323576" y="3657600"/>
-            <a:ext cx="475488" cy="475488"/>
+            <a:off x="10314432" y="3675888"/>
+            <a:ext cx="493776" cy="493776"/>
           </a:xfrm>
           <a:prstGeom prst="ellipse">
             <a:avLst/>
@@ -19709,14 +18215,14 @@
       </p:sp>
       <p:sp>
         <p:nvSpPr>
-          <p:cNvPr id="71" name="TextBox 70"/>
+          <p:cNvPr id="70" name="TextBox 69"/>
           <p:cNvSpPr txBox="1"/>
           <p:nvPr/>
         </p:nvSpPr>
         <p:spPr>
           <a:xfrm>
-            <a:off x="10323576" y="3657600"/>
-            <a:ext cx="475488" cy="475488"/>
+            <a:off x="10314432" y="3675888"/>
+            <a:ext cx="493776" cy="493776"/>
           </a:xfrm>
           <a:prstGeom prst="rect">
             <a:avLst/>
@@ -19744,14 +18250,14 @@
       </p:sp>
       <p:sp>
         <p:nvSpPr>
-          <p:cNvPr id="72" name="TextBox 71"/>
+          <p:cNvPr id="71" name="TextBox 70"/>
           <p:cNvSpPr txBox="1"/>
           <p:nvPr/>
         </p:nvSpPr>
         <p:spPr>
           <a:xfrm>
-            <a:off x="9509760" y="4224528"/>
-            <a:ext cx="2103120" cy="457200"/>
+            <a:off x="9509760" y="4315968"/>
+            <a:ext cx="2103120" cy="320040"/>
           </a:xfrm>
           <a:prstGeom prst="rect">
             <a:avLst/>
@@ -19766,7 +18272,7 @@
           <a:p>
             <a:pPr algn="ctr"/>
             <a:r>
-              <a:rPr sz="1300" b="1" i="0">
+              <a:rPr sz="1500" b="1" i="0">
                 <a:solidFill>
                   <a:srgbClr val="D31145"/>
                 </a:solidFill>
@@ -19774,52 +18280,12 @@
               </a:rPr>
               <a:t>1 interface</a:t>
             </a:r>
-            <a:r>
-              <a:rPr sz="1300" b="0" i="0">
-                <a:solidFill>
-                  <a:srgbClr val="D31145"/>
-                </a:solidFill>
-                <a:latin typeface="Arial"/>
-              </a:rPr>
-              <a:t>  ·  4 capabilities</a:t>
-            </a:r>
-          </a:p>
-        </p:txBody>
-      </p:sp>
-      <p:sp>
-        <p:nvSpPr>
-          <p:cNvPr id="73" name="Rounded Rectangle 72"/>
-          <p:cNvSpPr/>
-          <p:nvPr/>
-        </p:nvSpPr>
-        <p:spPr>
-          <a:xfrm>
-            <a:off x="457200" y="4983480"/>
-            <a:ext cx="5577840" cy="685800"/>
-          </a:xfrm>
-          <a:prstGeom prst="roundRect">
-            <a:avLst>
-              <a:gd name="adj" fmla="val 10000"/>
-            </a:avLst>
-          </a:prstGeom>
-          <a:solidFill>
-            <a:srgbClr val="FFFFFF"/>
-          </a:solidFill>
-          <a:ln w="15875">
-            <a:solidFill>
-              <a:srgbClr val="D9D6D3"/>
-            </a:solidFill>
-          </a:ln>
-        </p:spPr>
-        <p:txBody>
-          <a:bodyPr rtlCol="0" anchor="ctr"/>
-          <a:lstStyle/>
-          <a:p/>
+          </a:p>
         </p:txBody>
       </p:sp>
       <p:pic>
         <p:nvPicPr>
-          <p:cNvPr id="74" name="Picture 73" descr="LuPlug_c.png"/>
+          <p:cNvPr id="72" name="Picture 71" descr="LuPlug_g.png"/>
           <p:cNvPicPr>
             <a:picLocks noChangeAspect="1"/>
           </p:cNvPicPr>
@@ -19833,8 +18299,8 @@
         </p:blipFill>
         <p:spPr>
           <a:xfrm>
-            <a:off x="658368" y="5138928"/>
-            <a:ext cx="365760" cy="365760"/>
+            <a:off x="502920" y="5047488"/>
+            <a:ext cx="310896" cy="310896"/>
           </a:xfrm>
           <a:prstGeom prst="rect">
             <a:avLst/>
@@ -19843,14 +18309,14 @@
       </p:pic>
       <p:sp>
         <p:nvSpPr>
-          <p:cNvPr id="75" name="TextBox 74"/>
+          <p:cNvPr id="73" name="TextBox 72"/>
           <p:cNvSpPr txBox="1"/>
           <p:nvPr/>
         </p:nvSpPr>
         <p:spPr>
           <a:xfrm>
-            <a:off x="1188720" y="4983480"/>
-            <a:ext cx="4709160" cy="685800"/>
+            <a:off x="932688" y="4983480"/>
+            <a:ext cx="10607040" cy="457200"/>
           </a:xfrm>
           <a:prstGeom prst="rect">
             <a:avLst/>
@@ -19865,121 +18331,22 @@
           <a:p>
             <a:pPr algn="l"/>
             <a:r>
-              <a:rPr sz="1300" b="1" i="0">
-                <a:solidFill>
-                  <a:srgbClr val="333D47"/>
-                </a:solidFill>
-                <a:latin typeface="Arial"/>
-              </a:rPr>
-              <a:t>Not free or automatic. </a:t>
-            </a:r>
-            <a:r>
-              <a:rPr sz="1300" b="0" i="0">
-                <a:solidFill>
-                  <a:srgbClr val="333D47"/>
-                </a:solidFill>
-                <a:latin typeface="Arial"/>
-              </a:rPr>
-              <a:t>Each connection needs technical and governance work, done once per capability, then available to every authorized employee.</a:t>
-            </a:r>
-          </a:p>
-        </p:txBody>
-      </p:sp>
-      <p:sp>
-        <p:nvSpPr>
-          <p:cNvPr id="76" name="Rounded Rectangle 75"/>
-          <p:cNvSpPr/>
-          <p:nvPr/>
-        </p:nvSpPr>
-        <p:spPr>
-          <a:xfrm>
-            <a:off x="6172200" y="4983480"/>
-            <a:ext cx="5577840" cy="685800"/>
-          </a:xfrm>
-          <a:prstGeom prst="roundRect">
-            <a:avLst>
-              <a:gd name="adj" fmla="val 10000"/>
-            </a:avLst>
-          </a:prstGeom>
-          <a:solidFill>
-            <a:srgbClr val="FFFFFF"/>
-          </a:solidFill>
-          <a:ln w="15875">
-            <a:solidFill>
-              <a:srgbClr val="D31145"/>
-            </a:solidFill>
-          </a:ln>
-        </p:spPr>
-        <p:txBody>
-          <a:bodyPr rtlCol="0" anchor="ctr"/>
-          <a:lstStyle/>
-          <a:p/>
-        </p:txBody>
-      </p:sp>
-      <p:pic>
-        <p:nvPicPr>
-          <p:cNvPr id="77" name="Picture 76" descr="LuFlaskConical_r.png"/>
-          <p:cNvPicPr>
-            <a:picLocks noChangeAspect="1"/>
-          </p:cNvPicPr>
-          <p:nvPr/>
-        </p:nvPicPr>
-        <p:blipFill>
-          <a:blip r:embed="rId5"/>
-          <a:stretch>
-            <a:fillRect/>
-          </a:stretch>
-        </p:blipFill>
-        <p:spPr>
-          <a:xfrm>
-            <a:off x="6373368" y="5138928"/>
-            <a:ext cx="365760" cy="365760"/>
-          </a:xfrm>
-          <a:prstGeom prst="rect">
-            <a:avLst/>
-          </a:prstGeom>
-        </p:spPr>
-      </p:pic>
-      <p:sp>
-        <p:nvSpPr>
-          <p:cNvPr id="78" name="TextBox 77"/>
-          <p:cNvSpPr txBox="1"/>
-          <p:nvPr/>
-        </p:nvSpPr>
-        <p:spPr>
-          <a:xfrm>
-            <a:off x="6903720" y="4983480"/>
-            <a:ext cx="4709160" cy="685800"/>
-          </a:xfrm>
-          <a:prstGeom prst="rect">
-            <a:avLst/>
-          </a:prstGeom>
-          <a:noFill/>
-        </p:spPr>
-        <p:txBody>
-          <a:bodyPr wrap="square" lIns="0" rIns="0" tIns="0" bIns="0" anchor="ctr">
-            <a:noAutofit/>
-          </a:bodyPr>
-          <a:lstStyle/>
-          <a:p>
-            <a:pPr algn="l"/>
-            <a:r>
-              <a:rPr sz="1300" b="1" i="0">
+              <a:rPr sz="1500" b="0" i="0">
+                <a:solidFill>
+                  <a:srgbClr val="5A6570"/>
+                </a:solidFill>
+                <a:latin typeface="Arial"/>
+              </a:rPr>
+              <a:t>Each connection still needs technical and governance work.  </a:t>
+            </a:r>
+            <a:r>
+              <a:rPr sz="1500" b="1" i="0">
                 <a:solidFill>
                   <a:srgbClr val="D31145"/>
                 </a:solidFill>
                 <a:latin typeface="Arial"/>
               </a:rPr>
-              <a:t>Phase 2 tests this. </a:t>
-            </a:r>
-            <a:r>
-              <a:rPr sz="1300" b="0" i="0">
-                <a:solidFill>
-                  <a:srgbClr val="333D47"/>
-                </a:solidFill>
-                <a:latin typeface="Arial"/>
-              </a:rPr>
-              <a:t>Connect an AI tool built by a different AIA team into Riley, with no new tool for employees to learn.</a:t>
+              <a:t>Phase 2 proves the model.</a:t>
             </a:r>
           </a:p>
         </p:txBody>
@@ -20034,7 +18401,7 @@
                 </a:solidFill>
                 <a:latin typeface="Arial"/>
               </a:rPr>
-              <a:t>Value that compounds over time</a:t>
+              <a:t>From one team to every AIA employee</a:t>
             </a:r>
           </a:p>
         </p:txBody>
@@ -20070,41 +18437,6 @@
                 <a:latin typeface="Arial"/>
               </a:rPr>
               <a:t>SCALABILITY  ·  INNOVATION FOR ENDURING VALUE</a:t>
-            </a:r>
-          </a:p>
-        </p:txBody>
-      </p:sp>
-      <p:sp>
-        <p:nvSpPr>
-          <p:cNvPr id="6" name="TextBox 5"/>
-          <p:cNvSpPr txBox="1"/>
-          <p:nvPr/>
-        </p:nvSpPr>
-        <p:spPr>
-          <a:xfrm>
-            <a:off x="448056" y="1133856"/>
-            <a:ext cx="11155680" cy="457200"/>
-          </a:xfrm>
-          <a:prstGeom prst="rect">
-            <a:avLst/>
-          </a:prstGeom>
-          <a:noFill/>
-        </p:spPr>
-        <p:txBody>
-          <a:bodyPr wrap="square" lIns="0" rIns="0" tIns="0" bIns="0" anchor="t">
-            <a:noAutofit/>
-          </a:bodyPr>
-          <a:lstStyle/>
-          <a:p>
-            <a:pPr algn="l"/>
-            <a:r>
-              <a:rPr sz="1600" b="0" i="0">
-                <a:solidFill>
-                  <a:srgbClr val="5A6570"/>
-                </a:solidFill>
-                <a:latin typeface="Arial"/>
-              </a:rPr>
-              <a:t>Riley’s usefulness can grow as more capabilities, workflows and employee feedback are added, rather than delivering a one-time gain.</a:t>
             </a:r>
           </a:p>
         </p:txBody>
@@ -20141,14 +18473,14 @@
       </p:sp>
       <p:sp>
         <p:nvSpPr>
-          <p:cNvPr id="7" name="Rounded Rectangle 6"/>
+          <p:cNvPr id="6" name="Rounded Rectangle 5"/>
           <p:cNvSpPr/>
           <p:nvPr/>
         </p:nvSpPr>
         <p:spPr>
           <a:xfrm>
-            <a:off x="457200" y="4069079"/>
-            <a:ext cx="2148840" cy="1280160"/>
+            <a:off x="457200" y="4069080"/>
+            <a:ext cx="2148840" cy="1371600"/>
           </a:xfrm>
           <a:prstGeom prst="roundRect">
             <a:avLst>
@@ -20170,14 +18502,14 @@
       </p:sp>
       <p:sp>
         <p:nvSpPr>
-          <p:cNvPr id="8" name="TextBox 7"/>
+          <p:cNvPr id="7" name="TextBox 6"/>
           <p:cNvSpPr txBox="1"/>
           <p:nvPr/>
         </p:nvSpPr>
         <p:spPr>
           <a:xfrm>
-            <a:off x="640080" y="4251959"/>
-            <a:ext cx="1783080" cy="1005839"/>
+            <a:off x="658368" y="4270248"/>
+            <a:ext cx="1746504" cy="1097280"/>
           </a:xfrm>
           <a:prstGeom prst="rect">
             <a:avLst/>
@@ -20196,7 +18528,7 @@
               </a:spcAft>
             </a:pPr>
             <a:r>
-              <a:rPr sz="1800" b="1" i="0">
+              <a:rPr sz="1900" b="1" i="0">
                 <a:solidFill>
                   <a:srgbClr val="333D47"/>
                 </a:solidFill>
@@ -20206,32 +18538,28 @@
             </a:r>
           </a:p>
           <a:p>
-            <a:pPr algn="l">
-              <a:spcAft>
-                <a:spcPts val="600"/>
-              </a:spcAft>
-            </a:pPr>
-            <a:r>
-              <a:rPr sz="1300" b="0" i="0">
+            <a:pPr algn="l"/>
+            <a:r>
+              <a:rPr sz="1500" b="0" i="0">
                 <a:solidFill>
                   <a:srgbClr val="333D47"/>
                 </a:solidFill>
                 <a:latin typeface="Arial"/>
               </a:rPr>
-              <a:t>One team, one workflow</a:t>
-            </a:r>
-          </a:p>
-        </p:txBody>
-      </p:sp>
-      <p:sp>
-        <p:nvSpPr>
-          <p:cNvPr id="9" name="TextBox 8"/>
+              <a:t>One team</a:t>
+            </a:r>
+          </a:p>
+        </p:txBody>
+      </p:sp>
+      <p:sp>
+        <p:nvSpPr>
+          <p:cNvPr id="8" name="TextBox 7"/>
           <p:cNvSpPr txBox="1"/>
           <p:nvPr/>
         </p:nvSpPr>
         <p:spPr>
           <a:xfrm>
-            <a:off x="457200" y="5422392"/>
+            <a:off x="457200" y="5513832"/>
             <a:ext cx="2148840" cy="274320"/>
           </a:xfrm>
           <a:prstGeom prst="rect">
@@ -20247,7 +18575,7 @@
           <a:p>
             <a:pPr algn="ctr"/>
             <a:r>
-              <a:rPr sz="1200" b="1" i="0">
+              <a:rPr sz="1300" b="1" i="0">
                 <a:solidFill>
                   <a:srgbClr val="5A6570"/>
                 </a:solidFill>
@@ -20260,14 +18588,14 @@
       </p:sp>
       <p:sp>
         <p:nvSpPr>
-          <p:cNvPr id="10" name="Rounded Rectangle 9"/>
+          <p:cNvPr id="9" name="Rounded Rectangle 8"/>
           <p:cNvSpPr/>
           <p:nvPr/>
         </p:nvSpPr>
         <p:spPr>
           <a:xfrm>
-            <a:off x="2788920" y="3063239"/>
-            <a:ext cx="2148840" cy="2286000"/>
+            <a:off x="2788920" y="3017520"/>
+            <a:ext cx="2148840" cy="2423160"/>
           </a:xfrm>
           <a:prstGeom prst="roundRect">
             <a:avLst>
@@ -20289,14 +18617,14 @@
       </p:sp>
       <p:sp>
         <p:nvSpPr>
-          <p:cNvPr id="11" name="TextBox 10"/>
+          <p:cNvPr id="10" name="TextBox 9"/>
           <p:cNvSpPr txBox="1"/>
           <p:nvPr/>
         </p:nvSpPr>
         <p:spPr>
           <a:xfrm>
-            <a:off x="2971800" y="3246120"/>
-            <a:ext cx="1783080" cy="2011680"/>
+            <a:off x="2990088" y="3218688"/>
+            <a:ext cx="1746504" cy="2148840"/>
           </a:xfrm>
           <a:prstGeom prst="rect">
             <a:avLst/>
@@ -20315,7 +18643,7 @@
               </a:spcAft>
             </a:pPr>
             <a:r>
-              <a:rPr sz="1800" b="1" i="0">
+              <a:rPr sz="1900" b="1" i="0">
                 <a:solidFill>
                   <a:srgbClr val="333D47"/>
                 </a:solidFill>
@@ -20325,32 +18653,28 @@
             </a:r>
           </a:p>
           <a:p>
-            <a:pPr algn="l">
-              <a:spcAft>
-                <a:spcPts val="600"/>
-              </a:spcAft>
-            </a:pPr>
-            <a:r>
-              <a:rPr sz="1300" b="0" i="0">
+            <a:pPr algn="l"/>
+            <a:r>
+              <a:rPr sz="1500" b="0" i="0">
                 <a:solidFill>
                   <a:srgbClr val="333D47"/>
                 </a:solidFill>
                 <a:latin typeface="Arial"/>
               </a:rPr>
-              <a:t>Teams across many functions</a:t>
-            </a:r>
-          </a:p>
-        </p:txBody>
-      </p:sp>
-      <p:sp>
-        <p:nvSpPr>
-          <p:cNvPr id="12" name="TextBox 11"/>
+              <a:t>Many functions</a:t>
+            </a:r>
+          </a:p>
+        </p:txBody>
+      </p:sp>
+      <p:sp>
+        <p:nvSpPr>
+          <p:cNvPr id="11" name="TextBox 10"/>
           <p:cNvSpPr txBox="1"/>
           <p:nvPr/>
         </p:nvSpPr>
         <p:spPr>
           <a:xfrm>
-            <a:off x="2788920" y="5422392"/>
+            <a:off x="2788920" y="5513832"/>
             <a:ext cx="2148840" cy="274320"/>
           </a:xfrm>
           <a:prstGeom prst="rect">
@@ -20366,7 +18690,7 @@
           <a:p>
             <a:pPr algn="ctr"/>
             <a:r>
-              <a:rPr sz="1200" b="1" i="0">
+              <a:rPr sz="1300" b="1" i="0">
                 <a:solidFill>
                   <a:srgbClr val="5A6570"/>
                 </a:solidFill>
@@ -20379,14 +18703,14 @@
       </p:sp>
       <p:sp>
         <p:nvSpPr>
-          <p:cNvPr id="13" name="Rounded Rectangle 12"/>
+          <p:cNvPr id="12" name="Rounded Rectangle 11"/>
           <p:cNvSpPr/>
           <p:nvPr/>
         </p:nvSpPr>
         <p:spPr>
           <a:xfrm>
-            <a:off x="5120640" y="1737359"/>
-            <a:ext cx="2148840" cy="3611880"/>
+            <a:off x="5120640" y="1737360"/>
+            <a:ext cx="2148840" cy="3703320"/>
           </a:xfrm>
           <a:prstGeom prst="roundRect">
             <a:avLst>
@@ -20408,14 +18732,14 @@
       </p:sp>
       <p:sp>
         <p:nvSpPr>
-          <p:cNvPr id="14" name="TextBox 13"/>
+          <p:cNvPr id="13" name="TextBox 12"/>
           <p:cNvSpPr txBox="1"/>
           <p:nvPr/>
         </p:nvSpPr>
         <p:spPr>
           <a:xfrm>
-            <a:off x="5303520" y="1920239"/>
-            <a:ext cx="1783080" cy="3337560"/>
+            <a:off x="5321808" y="1938528"/>
+            <a:ext cx="1746504" cy="3429000"/>
           </a:xfrm>
           <a:prstGeom prst="rect">
             <a:avLst/>
@@ -20427,22 +18751,6 @@
             <a:noAutofit/>
           </a:bodyPr>
           <a:lstStyle/>
-          <a:p>
-            <a:pPr algn="l">
-              <a:spcAft>
-                <a:spcPts val="400"/>
-              </a:spcAft>
-            </a:pPr>
-            <a:r>
-              <a:rPr sz="1200" b="1" i="0">
-                <a:solidFill>
-                  <a:srgbClr val="FFFFFF"/>
-                </a:solidFill>
-                <a:latin typeface="Arial"/>
-              </a:rPr>
-              <a:t>THE VISION</a:t>
-            </a:r>
-          </a:p>
           <a:p>
             <a:pPr algn="l">
               <a:spcAft>
@@ -20450,7 +18758,7 @@
               </a:spcAft>
             </a:pPr>
             <a:r>
-              <a:rPr sz="2000" b="1" i="0">
+              <a:rPr sz="2200" b="1" i="0">
                 <a:solidFill>
                   <a:srgbClr val="FFFFFF"/>
                 </a:solidFill>
@@ -20460,48 +18768,28 @@
             </a:r>
           </a:p>
           <a:p>
-            <a:pPr algn="l">
-              <a:spcAft>
-                <a:spcPts val="600"/>
-              </a:spcAft>
-            </a:pPr>
-            <a:r>
-              <a:rPr sz="1300" b="0" i="0">
+            <a:pPr algn="l"/>
+            <a:r>
+              <a:rPr sz="1500" b="0" i="0">
                 <a:solidFill>
                   <a:srgbClr val="FFFFFF"/>
                 </a:solidFill>
                 <a:latin typeface="Arial"/>
               </a:rPr>
-              <a:t>A virtual coworker that understands the outcome they need and coordinates AIA’s capabilities to complete much of the work.</a:t>
-            </a:r>
-          </a:p>
-          <a:p>
-            <a:pPr algn="l">
-              <a:spcAft>
-                <a:spcPts val="600"/>
-              </a:spcAft>
-            </a:pPr>
-            <a:r>
-              <a:rPr sz="1300" b="0" i="0">
-                <a:solidFill>
-                  <a:srgbClr val="FFFFFF"/>
-                </a:solidFill>
-                <a:latin typeface="Arial"/>
-              </a:rPr>
-              <a:t>The employee stays accountable for every decision.</a:t>
-            </a:r>
-          </a:p>
-        </p:txBody>
-      </p:sp>
-      <p:sp>
-        <p:nvSpPr>
-          <p:cNvPr id="15" name="TextBox 14"/>
+              <a:t>A virtual coworker on demand. The employee stays accountable.</a:t>
+            </a:r>
+          </a:p>
+        </p:txBody>
+      </p:sp>
+      <p:sp>
+        <p:nvSpPr>
+          <p:cNvPr id="14" name="TextBox 13"/>
           <p:cNvSpPr txBox="1"/>
           <p:nvPr/>
         </p:nvSpPr>
         <p:spPr>
           <a:xfrm>
-            <a:off x="5120640" y="5422392"/>
+            <a:off x="5120640" y="5513832"/>
             <a:ext cx="2148840" cy="274320"/>
           </a:xfrm>
           <a:prstGeom prst="rect">
@@ -20517,27 +18805,27 @@
           <a:p>
             <a:pPr algn="ctr"/>
             <a:r>
-              <a:rPr sz="1200" b="1" i="0">
+              <a:rPr sz="1300" b="1" i="0">
                 <a:solidFill>
                   <a:srgbClr val="D31145"/>
                 </a:solidFill>
                 <a:latin typeface="Arial"/>
               </a:rPr>
-              <a:t>Long-term vision</a:t>
-            </a:r>
-          </a:p>
-        </p:txBody>
-      </p:sp>
-      <p:sp>
-        <p:nvSpPr>
-          <p:cNvPr id="16" name="Rounded Rectangle 15"/>
+              <a:t>The vision</a:t>
+            </a:r>
+          </a:p>
+        </p:txBody>
+      </p:sp>
+      <p:sp>
+        <p:nvSpPr>
+          <p:cNvPr id="15" name="Rounded Rectangle 14"/>
           <p:cNvSpPr/>
           <p:nvPr/>
         </p:nvSpPr>
         <p:spPr>
           <a:xfrm>
             <a:off x="7498079" y="1737360"/>
-            <a:ext cx="4251960" cy="3886200"/>
+            <a:ext cx="4251960" cy="3703320"/>
           </a:xfrm>
           <a:prstGeom prst="roundRect">
             <a:avLst>
@@ -20559,14 +18847,14 @@
       </p:sp>
       <p:sp>
         <p:nvSpPr>
-          <p:cNvPr id="17" name="TextBox 16"/>
+          <p:cNvPr id="16" name="TextBox 15"/>
           <p:cNvSpPr txBox="1"/>
           <p:nvPr/>
         </p:nvSpPr>
         <p:spPr>
           <a:xfrm>
             <a:off x="7818119" y="1920240"/>
-            <a:ext cx="3611880" cy="365760"/>
+            <a:ext cx="3611880" cy="411480"/>
           </a:xfrm>
           <a:prstGeom prst="rect">
             <a:avLst/>
@@ -20581,27 +18869,27 @@
           <a:p>
             <a:pPr algn="l"/>
             <a:r>
-              <a:rPr sz="2000" b="1" i="0">
+              <a:rPr sz="2200" b="1" i="0">
                 <a:solidFill>
                   <a:srgbClr val="333D47"/>
                 </a:solidFill>
                 <a:latin typeface="Arial"/>
               </a:rPr>
-              <a:t>Why the value endures</a:t>
-            </a:r>
-          </a:p>
-        </p:txBody>
-      </p:sp>
-      <p:sp>
-        <p:nvSpPr>
-          <p:cNvPr id="18" name="Oval 17"/>
+              <a:t>Value that compounds</a:t>
+            </a:r>
+          </a:p>
+        </p:txBody>
+      </p:sp>
+      <p:sp>
+        <p:nvSpPr>
+          <p:cNvPr id="17" name="Oval 16"/>
           <p:cNvSpPr/>
           <p:nvPr/>
         </p:nvSpPr>
         <p:spPr>
           <a:xfrm>
-            <a:off x="7818119" y="2514600"/>
-            <a:ext cx="502920" cy="502920"/>
+            <a:off x="7818119" y="2606040"/>
+            <a:ext cx="548640" cy="548640"/>
           </a:xfrm>
           <a:prstGeom prst="ellipse">
             <a:avLst/>
@@ -20621,7 +18909,7 @@
       </p:sp>
       <p:pic>
         <p:nvPicPr>
-          <p:cNvPr id="19" name="Picture 18" descr="LuPlug_w.png"/>
+          <p:cNvPr id="18" name="Picture 17" descr="LuPlug_w.png"/>
           <p:cNvPicPr>
             <a:picLocks noChangeAspect="1"/>
           </p:cNvPicPr>
@@ -20635,8 +18923,8 @@
         </p:blipFill>
         <p:spPr>
           <a:xfrm>
-            <a:off x="7938820" y="2635300"/>
-            <a:ext cx="261518" cy="261518"/>
+            <a:off x="7949793" y="2737713"/>
+            <a:ext cx="285292" cy="285292"/>
           </a:xfrm>
           <a:prstGeom prst="rect">
             <a:avLst/>
@@ -20645,14 +18933,14 @@
       </p:pic>
       <p:sp>
         <p:nvSpPr>
-          <p:cNvPr id="20" name="TextBox 19"/>
+          <p:cNvPr id="19" name="TextBox 18"/>
           <p:cNvSpPr txBox="1"/>
           <p:nvPr/>
         </p:nvSpPr>
         <p:spPr>
           <a:xfrm>
-            <a:off x="8485632" y="2478024"/>
-            <a:ext cx="2971800" cy="274320"/>
+            <a:off x="8549640" y="2606040"/>
+            <a:ext cx="2971800" cy="548640"/>
           </a:xfrm>
           <a:prstGeom prst="rect">
             <a:avLst/>
@@ -20660,14 +18948,14 @@
           <a:noFill/>
         </p:spPr>
         <p:txBody>
-          <a:bodyPr wrap="square" lIns="0" rIns="0" tIns="0" bIns="0" anchor="t">
+          <a:bodyPr wrap="square" lIns="0" rIns="0" tIns="0" bIns="0" anchor="ctr">
             <a:noAutofit/>
           </a:bodyPr>
           <a:lstStyle/>
           <a:p>
             <a:pPr algn="l"/>
             <a:r>
-              <a:rPr sz="1500" b="1" i="0">
+              <a:rPr sz="1700" b="1" i="0">
                 <a:solidFill>
                   <a:srgbClr val="333D47"/>
                 </a:solidFill>
@@ -20680,49 +18968,14 @@
       </p:sp>
       <p:sp>
         <p:nvSpPr>
-          <p:cNvPr id="21" name="TextBox 20"/>
-          <p:cNvSpPr txBox="1"/>
-          <p:nvPr/>
-        </p:nvSpPr>
-        <p:spPr>
-          <a:xfrm>
-            <a:off x="8485632" y="2752344"/>
-            <a:ext cx="2971800" cy="457200"/>
-          </a:xfrm>
-          <a:prstGeom prst="rect">
-            <a:avLst/>
-          </a:prstGeom>
-          <a:noFill/>
-        </p:spPr>
-        <p:txBody>
-          <a:bodyPr wrap="square" lIns="0" rIns="0" tIns="0" bIns="0" anchor="t">
-            <a:noAutofit/>
-          </a:bodyPr>
-          <a:lstStyle/>
-          <a:p>
-            <a:pPr algn="l"/>
-            <a:r>
-              <a:rPr sz="1300" b="0" i="0">
-                <a:solidFill>
-                  <a:srgbClr val="5A6570"/>
-                </a:solidFill>
-                <a:latin typeface="Arial"/>
-              </a:rPr>
-              <a:t>Each AI capability AIA builds or adopts can extend Riley.</a:t>
-            </a:r>
-          </a:p>
-        </p:txBody>
-      </p:sp>
-      <p:sp>
-        <p:nvSpPr>
-          <p:cNvPr id="22" name="Oval 21"/>
+          <p:cNvPr id="20" name="Oval 19"/>
           <p:cNvSpPr/>
           <p:nvPr/>
         </p:nvSpPr>
         <p:spPr>
           <a:xfrm>
-            <a:off x="7818119" y="3337560"/>
-            <a:ext cx="502920" cy="502920"/>
+            <a:off x="7818119" y="3383280"/>
+            <a:ext cx="548640" cy="548640"/>
           </a:xfrm>
           <a:prstGeom prst="ellipse">
             <a:avLst/>
@@ -20742,7 +18995,7 @@
       </p:sp>
       <p:pic>
         <p:nvPicPr>
-          <p:cNvPr id="23" name="Picture 22" descr="LuWorkflow_w.png"/>
+          <p:cNvPr id="21" name="Picture 20" descr="LuWorkflow_w.png"/>
           <p:cNvPicPr>
             <a:picLocks noChangeAspect="1"/>
           </p:cNvPicPr>
@@ -20756,8 +19009,8 @@
         </p:blipFill>
         <p:spPr>
           <a:xfrm>
-            <a:off x="7938820" y="3458260"/>
-            <a:ext cx="261518" cy="261518"/>
+            <a:off x="7949793" y="3514953"/>
+            <a:ext cx="285292" cy="285292"/>
           </a:xfrm>
           <a:prstGeom prst="rect">
             <a:avLst/>
@@ -20766,14 +19019,14 @@
       </p:pic>
       <p:sp>
         <p:nvSpPr>
-          <p:cNvPr id="24" name="TextBox 23"/>
+          <p:cNvPr id="22" name="TextBox 21"/>
           <p:cNvSpPr txBox="1"/>
           <p:nvPr/>
         </p:nvSpPr>
         <p:spPr>
           <a:xfrm>
-            <a:off x="8485632" y="3300984"/>
-            <a:ext cx="2971800" cy="274320"/>
+            <a:off x="8549640" y="3383280"/>
+            <a:ext cx="2971800" cy="548640"/>
           </a:xfrm>
           <a:prstGeom prst="rect">
             <a:avLst/>
@@ -20781,14 +19034,14 @@
           <a:noFill/>
         </p:spPr>
         <p:txBody>
-          <a:bodyPr wrap="square" lIns="0" rIns="0" tIns="0" bIns="0" anchor="t">
+          <a:bodyPr wrap="square" lIns="0" rIns="0" tIns="0" bIns="0" anchor="ctr">
             <a:noAutofit/>
           </a:bodyPr>
           <a:lstStyle/>
           <a:p>
             <a:pPr algn="l"/>
             <a:r>
-              <a:rPr sz="1500" b="1" i="0">
+              <a:rPr sz="1700" b="1" i="0">
                 <a:solidFill>
                   <a:srgbClr val="333D47"/>
                 </a:solidFill>
@@ -20801,49 +19054,14 @@
       </p:sp>
       <p:sp>
         <p:nvSpPr>
-          <p:cNvPr id="25" name="TextBox 24"/>
-          <p:cNvSpPr txBox="1"/>
-          <p:nvPr/>
-        </p:nvSpPr>
-        <p:spPr>
-          <a:xfrm>
-            <a:off x="8485632" y="3575304"/>
-            <a:ext cx="2971800" cy="457200"/>
-          </a:xfrm>
-          <a:prstGeom prst="rect">
-            <a:avLst/>
-          </a:prstGeom>
-          <a:noFill/>
-        </p:spPr>
-        <p:txBody>
-          <a:bodyPr wrap="square" lIns="0" rIns="0" tIns="0" bIns="0" anchor="t">
-            <a:noAutofit/>
-          </a:bodyPr>
-          <a:lstStyle/>
-          <a:p>
-            <a:pPr algn="l"/>
-            <a:r>
-              <a:rPr sz="1300" b="0" i="0">
-                <a:solidFill>
-                  <a:srgbClr val="5A6570"/>
-                </a:solidFill>
-                <a:latin typeface="Arial"/>
-              </a:rPr>
-              <a:t>The same layer expands to new teams, with no new tool.</a:t>
-            </a:r>
-          </a:p>
-        </p:txBody>
-      </p:sp>
-      <p:sp>
-        <p:nvSpPr>
-          <p:cNvPr id="26" name="Oval 25"/>
+          <p:cNvPr id="23" name="Oval 22"/>
           <p:cNvSpPr/>
           <p:nvPr/>
         </p:nvSpPr>
         <p:spPr>
           <a:xfrm>
             <a:off x="7818119" y="4160520"/>
-            <a:ext cx="502920" cy="502920"/>
+            <a:ext cx="548640" cy="548640"/>
           </a:xfrm>
           <a:prstGeom prst="ellipse">
             <a:avLst/>
@@ -20863,7 +19081,7 @@
       </p:sp>
       <p:pic>
         <p:nvPicPr>
-          <p:cNvPr id="27" name="Picture 26" descr="LuRefreshCw_w.png"/>
+          <p:cNvPr id="24" name="Picture 23" descr="LuRefreshCw_w.png"/>
           <p:cNvPicPr>
             <a:picLocks noChangeAspect="1"/>
           </p:cNvPicPr>
@@ -20877,8 +19095,8 @@
         </p:blipFill>
         <p:spPr>
           <a:xfrm>
-            <a:off x="7938820" y="4281220"/>
-            <a:ext cx="261518" cy="261518"/>
+            <a:off x="7949793" y="4292193"/>
+            <a:ext cx="285292" cy="285292"/>
           </a:xfrm>
           <a:prstGeom prst="rect">
             <a:avLst/>
@@ -20887,14 +19105,49 @@
       </p:pic>
       <p:sp>
         <p:nvSpPr>
-          <p:cNvPr id="28" name="TextBox 27"/>
+          <p:cNvPr id="25" name="TextBox 24"/>
           <p:cNvSpPr txBox="1"/>
           <p:nvPr/>
         </p:nvSpPr>
         <p:spPr>
           <a:xfrm>
-            <a:off x="8485632" y="4123944"/>
-            <a:ext cx="2971800" cy="274320"/>
+            <a:off x="8549640" y="4160520"/>
+            <a:ext cx="2971800" cy="548640"/>
+          </a:xfrm>
+          <a:prstGeom prst="rect">
+            <a:avLst/>
+          </a:prstGeom>
+          <a:noFill/>
+        </p:spPr>
+        <p:txBody>
+          <a:bodyPr wrap="square" lIns="0" rIns="0" tIns="0" bIns="0" anchor="ctr">
+            <a:noAutofit/>
+          </a:bodyPr>
+          <a:lstStyle/>
+          <a:p>
+            <a:pPr algn="l"/>
+            <a:r>
+              <a:rPr sz="1700" b="1" i="0">
+                <a:solidFill>
+                  <a:srgbClr val="333D47"/>
+                </a:solidFill>
+                <a:latin typeface="Arial"/>
+              </a:rPr>
+              <a:t>More feedback learned</a:t>
+            </a:r>
+          </a:p>
+        </p:txBody>
+      </p:sp>
+      <p:sp>
+        <p:nvSpPr>
+          <p:cNvPr id="26" name="TextBox 25"/>
+          <p:cNvSpPr txBox="1"/>
+          <p:nvPr/>
+        </p:nvSpPr>
+        <p:spPr>
+          <a:xfrm>
+            <a:off x="7818119" y="4892040"/>
+            <a:ext cx="3611880" cy="411480"/>
           </a:xfrm>
           <a:prstGeom prst="rect">
             <a:avLst/>
@@ -20909,83 +19162,13 @@
           <a:p>
             <a:pPr algn="l"/>
             <a:r>
-              <a:rPr sz="1500" b="1" i="0">
-                <a:solidFill>
-                  <a:srgbClr val="333D47"/>
-                </a:solidFill>
-                <a:latin typeface="Arial"/>
-              </a:rPr>
-              <a:t>More feedback learned</a:t>
-            </a:r>
-          </a:p>
-        </p:txBody>
-      </p:sp>
-      <p:sp>
-        <p:nvSpPr>
-          <p:cNvPr id="29" name="TextBox 28"/>
-          <p:cNvSpPr txBox="1"/>
-          <p:nvPr/>
-        </p:nvSpPr>
-        <p:spPr>
-          <a:xfrm>
-            <a:off x="8485632" y="4398264"/>
-            <a:ext cx="2971800" cy="457200"/>
-          </a:xfrm>
-          <a:prstGeom prst="rect">
-            <a:avLst/>
-          </a:prstGeom>
-          <a:noFill/>
-        </p:spPr>
-        <p:txBody>
-          <a:bodyPr wrap="square" lIns="0" rIns="0" tIns="0" bIns="0" anchor="t">
-            <a:noAutofit/>
-          </a:bodyPr>
-          <a:lstStyle/>
-          <a:p>
-            <a:pPr algn="l"/>
-            <a:r>
-              <a:rPr sz="1300" b="0" i="0">
+              <a:rPr sz="1300" b="0" i="1">
                 <a:solidFill>
                   <a:srgbClr val="5A6570"/>
                 </a:solidFill>
                 <a:latin typeface="Arial"/>
               </a:rPr>
-              <a:t>Governed employee feedback improves how Riley handles AIA work.</a:t>
-            </a:r>
-          </a:p>
-        </p:txBody>
-      </p:sp>
-      <p:sp>
-        <p:nvSpPr>
-          <p:cNvPr id="30" name="TextBox 29"/>
-          <p:cNvSpPr txBox="1"/>
-          <p:nvPr/>
-        </p:nvSpPr>
-        <p:spPr>
-          <a:xfrm>
-            <a:off x="7818119" y="5029200"/>
-            <a:ext cx="3611880" cy="502920"/>
-          </a:xfrm>
-          <a:prstGeom prst="rect">
-            <a:avLst/>
-          </a:prstGeom>
-          <a:noFill/>
-        </p:spPr>
-        <p:txBody>
-          <a:bodyPr wrap="square" lIns="0" rIns="0" tIns="0" bIns="0" anchor="t">
-            <a:noAutofit/>
-          </a:bodyPr>
-          <a:lstStyle/>
-          <a:p>
-            <a:pPr algn="l"/>
-            <a:r>
-              <a:rPr sz="1200" b="0" i="1">
-                <a:solidFill>
-                  <a:srgbClr val="5A6570"/>
-                </a:solidFill>
-                <a:latin typeface="Arial"/>
-              </a:rPr>
-              <a:t>Across markets: a reusable core, with each market adding its own integrations, data controls and governance.</a:t>
+              <a:t>Reusable across markets, with local integrations and controls.</a:t>
             </a:r>
           </a:p>
         </p:txBody>

--- a/ppt/group_inno_award/Riley_Submission_Deck_Opus.pptx
+++ b/ppt/group_inno_award/Riley_Submission_Deck_Opus.pptx
@@ -1264,7 +1264,7 @@
           <a:lstStyle/>
           <a:p>
             <a:r>
-              <a:t>Six measures on the real Phase 1 team against a Phase 0 baseline: active employee effort per task, end-to-end completion time, output quality (rated by the employee and confirmed by periodic independent sample reviews from a business reviewer or subject-matter expert), rework rate, manual steps and systems touched, and adoption and repeat use. In Phase 3 the illustrative scenario is replaced with a projection from real data.</a:t>
+              <a:t>Six measures on the real Phase 1 team against a Phase 0 baseline: active employee effort per task, end-to-end completion time, output quality (rated by the employee and confirmed by periodic independent sample reviews from a business reviewer or subject-matter expert), rework rate, manual steps and systems touched, and adoption and repeat use. Phase 2 is the core test: connect another AIA team's AI capability or add a second workflow, with no new tool for employees. In Phase 3 the illustrative scenario is replaced with a measured projection.</a:t>
             </a:r>
           </a:p>
         </p:txBody>
@@ -12279,7 +12279,7 @@
             <a:avLst/>
           </a:prstGeom>
           <a:solidFill>
-            <a:srgbClr val="D31145"/>
+            <a:srgbClr val="333D47"/>
           </a:solidFill>
           <a:ln>
             <a:noFill/>
@@ -13187,7 +13187,7 @@
             <a:avLst/>
           </a:prstGeom>
           <a:solidFill>
-            <a:srgbClr val="D31145"/>
+            <a:srgbClr val="333D47"/>
           </a:solidFill>
           <a:ln>
             <a:noFill/>
@@ -13236,17 +13236,48 @@
       </p:sp>
       <p:sp>
         <p:nvSpPr>
-          <p:cNvPr id="44" name="Oval 43"/>
+          <p:cNvPr id="44" name="Rounded Rectangle 43"/>
           <p:cNvSpPr/>
           <p:nvPr/>
         </p:nvSpPr>
         <p:spPr>
           <a:xfrm>
-            <a:off x="7269480" y="1664208"/>
-            <a:ext cx="420624" cy="420624"/>
-          </a:xfrm>
-          <a:prstGeom prst="ellipse">
-            <a:avLst/>
+            <a:off x="7178040" y="1600200"/>
+            <a:ext cx="4572000" cy="749808"/>
+          </a:xfrm>
+          <a:prstGeom prst="roundRect">
+            <a:avLst>
+              <a:gd name="adj" fmla="val 6000"/>
+            </a:avLst>
+          </a:prstGeom>
+          <a:solidFill>
+            <a:srgbClr val="F4F2F0"/>
+          </a:solidFill>
+          <a:ln>
+            <a:noFill/>
+          </a:ln>
+        </p:spPr>
+        <p:txBody>
+          <a:bodyPr rtlCol="0" anchor="ctr"/>
+          <a:lstStyle/>
+          <a:p/>
+        </p:txBody>
+      </p:sp>
+      <p:sp>
+        <p:nvSpPr>
+          <p:cNvPr id="45" name="Rounded Rectangle 44"/>
+          <p:cNvSpPr/>
+          <p:nvPr/>
+        </p:nvSpPr>
+        <p:spPr>
+          <a:xfrm>
+            <a:off x="10424160" y="1709928"/>
+            <a:ext cx="1188720" cy="310896"/>
+          </a:xfrm>
+          <a:prstGeom prst="roundRect">
+            <a:avLst>
+              <a:gd name="adj" fmla="val 50000"/>
+            </a:avLst>
           </a:prstGeom>
           <a:solidFill>
             <a:srgbClr val="333D47"/>
@@ -13256,126 +13287,34 @@
           </a:ln>
         </p:spPr>
         <p:txBody>
-          <a:bodyPr rtlCol="0" anchor="ctr"/>
-          <a:lstStyle/>
-          <a:p/>
-        </p:txBody>
-      </p:sp>
-      <p:sp>
-        <p:nvSpPr>
-          <p:cNvPr id="45" name="TextBox 44"/>
-          <p:cNvSpPr txBox="1"/>
-          <p:nvPr/>
-        </p:nvSpPr>
-        <p:spPr>
-          <a:xfrm>
-            <a:off x="7269480" y="1664208"/>
-            <a:ext cx="420624" cy="420624"/>
-          </a:xfrm>
-          <a:prstGeom prst="rect">
-            <a:avLst/>
-          </a:prstGeom>
-          <a:noFill/>
-        </p:spPr>
-        <p:txBody>
-          <a:bodyPr wrap="square" lIns="0" rIns="0" tIns="0" bIns="0" anchor="ctr">
+          <a:bodyPr rtlCol="0" anchor="ctr" wrap="square" lIns="0" rIns="0" tIns="0" bIns="0">
             <a:noAutofit/>
           </a:bodyPr>
           <a:lstStyle/>
           <a:p>
             <a:pPr algn="ctr"/>
             <a:r>
-              <a:rPr sz="1600" b="1" i="0">
+              <a:rPr sz="1200" b="1" i="0">
                 <a:solidFill>
                   <a:srgbClr val="FFFFFF"/>
                 </a:solidFill>
                 <a:latin typeface="Arial"/>
               </a:rPr>
-              <a:t>1</a:t>
-            </a:r>
-          </a:p>
-        </p:txBody>
-      </p:sp>
-      <p:sp>
-        <p:nvSpPr>
-          <p:cNvPr id="46" name="TextBox 45"/>
-          <p:cNvSpPr txBox="1"/>
-          <p:nvPr/>
-        </p:nvSpPr>
-        <p:spPr>
-          <a:xfrm>
-            <a:off x="7882127" y="1645920"/>
-            <a:ext cx="3840480" cy="310896"/>
-          </a:xfrm>
-          <a:prstGeom prst="rect">
-            <a:avLst/>
-          </a:prstGeom>
-          <a:noFill/>
-        </p:spPr>
-        <p:txBody>
-          <a:bodyPr wrap="square" lIns="0" rIns="0" tIns="0" bIns="0" anchor="t">
-            <a:noAutofit/>
-          </a:bodyPr>
-          <a:lstStyle/>
-          <a:p>
-            <a:pPr algn="l"/>
-            <a:r>
-              <a:rPr sz="1800" b="1" i="0">
-                <a:solidFill>
-                  <a:srgbClr val="333D47"/>
-                </a:solidFill>
-                <a:latin typeface="Arial"/>
-              </a:rPr>
-              <a:t>Ask</a:t>
-            </a:r>
-          </a:p>
-        </p:txBody>
-      </p:sp>
-      <p:sp>
-        <p:nvSpPr>
-          <p:cNvPr id="47" name="TextBox 46"/>
-          <p:cNvSpPr txBox="1"/>
-          <p:nvPr/>
-        </p:nvSpPr>
-        <p:spPr>
-          <a:xfrm>
-            <a:off x="7882127" y="1975104"/>
-            <a:ext cx="3840480" cy="402336"/>
-          </a:xfrm>
-          <a:prstGeom prst="rect">
-            <a:avLst/>
-          </a:prstGeom>
-          <a:noFill/>
-        </p:spPr>
-        <p:txBody>
-          <a:bodyPr wrap="square" lIns="0" rIns="0" tIns="0" bIns="0" anchor="t">
-            <a:noAutofit/>
-          </a:bodyPr>
-          <a:lstStyle/>
-          <a:p>
-            <a:pPr algn="l"/>
-            <a:r>
-              <a:rPr sz="1400" b="0" i="0">
-                <a:solidFill>
-                  <a:srgbClr val="5A6570"/>
-                </a:solidFill>
-                <a:latin typeface="Arial"/>
-              </a:rPr>
-              <a:t>The outcome, in Teams</a:t>
-            </a:r>
-          </a:p>
-        </p:txBody>
-      </p:sp>
-      <p:sp>
-        <p:nvSpPr>
-          <p:cNvPr id="48" name="Oval 47"/>
+              <a:t>EMPLOYEE</a:t>
+            </a:r>
+          </a:p>
+        </p:txBody>
+      </p:sp>
+      <p:sp>
+        <p:nvSpPr>
+          <p:cNvPr id="46" name="Oval 45"/>
           <p:cNvSpPr/>
           <p:nvPr/>
         </p:nvSpPr>
         <p:spPr>
           <a:xfrm>
-            <a:off x="7269480" y="2395728"/>
-            <a:ext cx="420624" cy="420624"/>
+            <a:off x="7342631" y="1709928"/>
+            <a:ext cx="402336" cy="402336"/>
           </a:xfrm>
           <a:prstGeom prst="ellipse">
             <a:avLst/>
@@ -13395,14 +13334,14 @@
       </p:sp>
       <p:sp>
         <p:nvSpPr>
-          <p:cNvPr id="49" name="TextBox 48"/>
+          <p:cNvPr id="47" name="TextBox 46"/>
           <p:cNvSpPr txBox="1"/>
           <p:nvPr/>
         </p:nvSpPr>
         <p:spPr>
           <a:xfrm>
-            <a:off x="7269480" y="2395728"/>
-            <a:ext cx="420624" cy="420624"/>
+            <a:off x="7342631" y="1709928"/>
+            <a:ext cx="402336" cy="402336"/>
           </a:xfrm>
           <a:prstGeom prst="rect">
             <a:avLst/>
@@ -13423,21 +13362,21 @@
                 </a:solidFill>
                 <a:latin typeface="Arial"/>
               </a:rPr>
-              <a:t>2</a:t>
-            </a:r>
-          </a:p>
-        </p:txBody>
-      </p:sp>
-      <p:sp>
-        <p:nvSpPr>
-          <p:cNvPr id="50" name="TextBox 49"/>
+              <a:t>1</a:t>
+            </a:r>
+          </a:p>
+        </p:txBody>
+      </p:sp>
+      <p:sp>
+        <p:nvSpPr>
+          <p:cNvPr id="48" name="TextBox 47"/>
           <p:cNvSpPr txBox="1"/>
           <p:nvPr/>
         </p:nvSpPr>
         <p:spPr>
           <a:xfrm>
-            <a:off x="7882127" y="2377440"/>
-            <a:ext cx="3840480" cy="310896"/>
+            <a:off x="7909560" y="1691640"/>
+            <a:ext cx="2377440" cy="310896"/>
           </a:xfrm>
           <a:prstGeom prst="rect">
             <a:avLst/>
@@ -13458,21 +13397,21 @@
                 </a:solidFill>
                 <a:latin typeface="Arial"/>
               </a:rPr>
-              <a:t>Plan</a:t>
-            </a:r>
-          </a:p>
-        </p:txBody>
-      </p:sp>
-      <p:sp>
-        <p:nvSpPr>
-          <p:cNvPr id="51" name="TextBox 50"/>
+              <a:t>Ask</a:t>
+            </a:r>
+          </a:p>
+        </p:txBody>
+      </p:sp>
+      <p:sp>
+        <p:nvSpPr>
+          <p:cNvPr id="49" name="TextBox 48"/>
           <p:cNvSpPr txBox="1"/>
           <p:nvPr/>
         </p:nvSpPr>
         <p:spPr>
           <a:xfrm>
-            <a:off x="7882127" y="2706624"/>
-            <a:ext cx="3840480" cy="402336"/>
+            <a:off x="7909560" y="2020824"/>
+            <a:ext cx="3657600" cy="274320"/>
           </a:xfrm>
           <a:prstGeom prst="rect">
             <a:avLst/>
@@ -13493,7 +13432,78 @@
                 </a:solidFill>
                 <a:latin typeface="Arial"/>
               </a:rPr>
-              <a:t>Riley picks the capabilities</a:t>
+              <a:t>The outcome, in Teams</a:t>
+            </a:r>
+          </a:p>
+        </p:txBody>
+      </p:sp>
+      <p:sp>
+        <p:nvSpPr>
+          <p:cNvPr id="50" name="Rounded Rectangle 49"/>
+          <p:cNvSpPr/>
+          <p:nvPr/>
+        </p:nvSpPr>
+        <p:spPr>
+          <a:xfrm>
+            <a:off x="7178040" y="2459736"/>
+            <a:ext cx="4572000" cy="2103120"/>
+          </a:xfrm>
+          <a:prstGeom prst="roundRect">
+            <a:avLst>
+              <a:gd name="adj" fmla="val 6000"/>
+            </a:avLst>
+          </a:prstGeom>
+          <a:solidFill>
+            <a:srgbClr val="FBE7EC"/>
+          </a:solidFill>
+          <a:ln>
+            <a:noFill/>
+          </a:ln>
+        </p:spPr>
+        <p:txBody>
+          <a:bodyPr rtlCol="0" anchor="ctr"/>
+          <a:lstStyle/>
+          <a:p/>
+        </p:txBody>
+      </p:sp>
+      <p:sp>
+        <p:nvSpPr>
+          <p:cNvPr id="51" name="Rounded Rectangle 50"/>
+          <p:cNvSpPr/>
+          <p:nvPr/>
+        </p:nvSpPr>
+        <p:spPr>
+          <a:xfrm>
+            <a:off x="10424160" y="2569464"/>
+            <a:ext cx="1188720" cy="310896"/>
+          </a:xfrm>
+          <a:prstGeom prst="roundRect">
+            <a:avLst>
+              <a:gd name="adj" fmla="val 50000"/>
+            </a:avLst>
+          </a:prstGeom>
+          <a:solidFill>
+            <a:srgbClr val="D31145"/>
+          </a:solidFill>
+          <a:ln>
+            <a:noFill/>
+          </a:ln>
+        </p:spPr>
+        <p:txBody>
+          <a:bodyPr rtlCol="0" anchor="ctr" wrap="square" lIns="0" rIns="0" tIns="0" bIns="0">
+            <a:noAutofit/>
+          </a:bodyPr>
+          <a:lstStyle/>
+          <a:p>
+            <a:pPr algn="ctr"/>
+            <a:r>
+              <a:rPr sz="1200" b="1" i="0">
+                <a:solidFill>
+                  <a:srgbClr val="FFFFFF"/>
+                </a:solidFill>
+                <a:latin typeface="Arial"/>
+              </a:rPr>
+              <a:t>RILEY</a:t>
             </a:r>
           </a:p>
         </p:txBody>
@@ -13506,11 +13516,438 @@
         </p:nvSpPr>
         <p:spPr>
           <a:xfrm>
-            <a:off x="7269480" y="3127248"/>
-            <a:ext cx="420624" cy="420624"/>
+            <a:off x="7342631" y="2569464"/>
+            <a:ext cx="402336" cy="402336"/>
           </a:xfrm>
           <a:prstGeom prst="ellipse">
             <a:avLst/>
+          </a:prstGeom>
+          <a:solidFill>
+            <a:srgbClr val="D31145"/>
+          </a:solidFill>
+          <a:ln>
+            <a:noFill/>
+          </a:ln>
+        </p:spPr>
+        <p:txBody>
+          <a:bodyPr rtlCol="0" anchor="ctr"/>
+          <a:lstStyle/>
+          <a:p/>
+        </p:txBody>
+      </p:sp>
+      <p:sp>
+        <p:nvSpPr>
+          <p:cNvPr id="53" name="TextBox 52"/>
+          <p:cNvSpPr txBox="1"/>
+          <p:nvPr/>
+        </p:nvSpPr>
+        <p:spPr>
+          <a:xfrm>
+            <a:off x="7342631" y="2569464"/>
+            <a:ext cx="402336" cy="402336"/>
+          </a:xfrm>
+          <a:prstGeom prst="rect">
+            <a:avLst/>
+          </a:prstGeom>
+          <a:noFill/>
+        </p:spPr>
+        <p:txBody>
+          <a:bodyPr wrap="square" lIns="0" rIns="0" tIns="0" bIns="0" anchor="ctr">
+            <a:noAutofit/>
+          </a:bodyPr>
+          <a:lstStyle/>
+          <a:p>
+            <a:pPr algn="ctr"/>
+            <a:r>
+              <a:rPr sz="1600" b="1" i="0">
+                <a:solidFill>
+                  <a:srgbClr val="FFFFFF"/>
+                </a:solidFill>
+                <a:latin typeface="Arial"/>
+              </a:rPr>
+              <a:t>2</a:t>
+            </a:r>
+          </a:p>
+        </p:txBody>
+      </p:sp>
+      <p:sp>
+        <p:nvSpPr>
+          <p:cNvPr id="54" name="TextBox 53"/>
+          <p:cNvSpPr txBox="1"/>
+          <p:nvPr/>
+        </p:nvSpPr>
+        <p:spPr>
+          <a:xfrm>
+            <a:off x="7909560" y="2551176"/>
+            <a:ext cx="2377440" cy="310896"/>
+          </a:xfrm>
+          <a:prstGeom prst="rect">
+            <a:avLst/>
+          </a:prstGeom>
+          <a:noFill/>
+        </p:spPr>
+        <p:txBody>
+          <a:bodyPr wrap="square" lIns="0" rIns="0" tIns="0" bIns="0" anchor="t">
+            <a:noAutofit/>
+          </a:bodyPr>
+          <a:lstStyle/>
+          <a:p>
+            <a:pPr algn="l"/>
+            <a:r>
+              <a:rPr sz="1800" b="1" i="0">
+                <a:solidFill>
+                  <a:srgbClr val="D31145"/>
+                </a:solidFill>
+                <a:latin typeface="Arial"/>
+              </a:rPr>
+              <a:t>Plan</a:t>
+            </a:r>
+          </a:p>
+        </p:txBody>
+      </p:sp>
+      <p:sp>
+        <p:nvSpPr>
+          <p:cNvPr id="55" name="TextBox 54"/>
+          <p:cNvSpPr txBox="1"/>
+          <p:nvPr/>
+        </p:nvSpPr>
+        <p:spPr>
+          <a:xfrm>
+            <a:off x="7909560" y="2880360"/>
+            <a:ext cx="3657600" cy="274320"/>
+          </a:xfrm>
+          <a:prstGeom prst="rect">
+            <a:avLst/>
+          </a:prstGeom>
+          <a:noFill/>
+        </p:spPr>
+        <p:txBody>
+          <a:bodyPr wrap="square" lIns="0" rIns="0" tIns="0" bIns="0" anchor="t">
+            <a:noAutofit/>
+          </a:bodyPr>
+          <a:lstStyle/>
+          <a:p>
+            <a:pPr algn="l"/>
+            <a:r>
+              <a:rPr sz="1400" b="0" i="0">
+                <a:solidFill>
+                  <a:srgbClr val="5A6570"/>
+                </a:solidFill>
+                <a:latin typeface="Arial"/>
+              </a:rPr>
+              <a:t>Picks capabilities, within your permissions</a:t>
+            </a:r>
+          </a:p>
+        </p:txBody>
+      </p:sp>
+      <p:sp>
+        <p:nvSpPr>
+          <p:cNvPr id="56" name="Oval 55"/>
+          <p:cNvSpPr/>
+          <p:nvPr/>
+        </p:nvSpPr>
+        <p:spPr>
+          <a:xfrm>
+            <a:off x="7342631" y="3227832"/>
+            <a:ext cx="402336" cy="402336"/>
+          </a:xfrm>
+          <a:prstGeom prst="ellipse">
+            <a:avLst/>
+          </a:prstGeom>
+          <a:solidFill>
+            <a:srgbClr val="D31145"/>
+          </a:solidFill>
+          <a:ln>
+            <a:noFill/>
+          </a:ln>
+        </p:spPr>
+        <p:txBody>
+          <a:bodyPr rtlCol="0" anchor="ctr"/>
+          <a:lstStyle/>
+          <a:p/>
+        </p:txBody>
+      </p:sp>
+      <p:sp>
+        <p:nvSpPr>
+          <p:cNvPr id="57" name="TextBox 56"/>
+          <p:cNvSpPr txBox="1"/>
+          <p:nvPr/>
+        </p:nvSpPr>
+        <p:spPr>
+          <a:xfrm>
+            <a:off x="7342631" y="3227832"/>
+            <a:ext cx="402336" cy="402336"/>
+          </a:xfrm>
+          <a:prstGeom prst="rect">
+            <a:avLst/>
+          </a:prstGeom>
+          <a:noFill/>
+        </p:spPr>
+        <p:txBody>
+          <a:bodyPr wrap="square" lIns="0" rIns="0" tIns="0" bIns="0" anchor="ctr">
+            <a:noAutofit/>
+          </a:bodyPr>
+          <a:lstStyle/>
+          <a:p>
+            <a:pPr algn="ctr"/>
+            <a:r>
+              <a:rPr sz="1600" b="1" i="0">
+                <a:solidFill>
+                  <a:srgbClr val="FFFFFF"/>
+                </a:solidFill>
+                <a:latin typeface="Arial"/>
+              </a:rPr>
+              <a:t>3</a:t>
+            </a:r>
+          </a:p>
+        </p:txBody>
+      </p:sp>
+      <p:sp>
+        <p:nvSpPr>
+          <p:cNvPr id="58" name="TextBox 57"/>
+          <p:cNvSpPr txBox="1"/>
+          <p:nvPr/>
+        </p:nvSpPr>
+        <p:spPr>
+          <a:xfrm>
+            <a:off x="7909560" y="3209544"/>
+            <a:ext cx="2377440" cy="310896"/>
+          </a:xfrm>
+          <a:prstGeom prst="rect">
+            <a:avLst/>
+          </a:prstGeom>
+          <a:noFill/>
+        </p:spPr>
+        <p:txBody>
+          <a:bodyPr wrap="square" lIns="0" rIns="0" tIns="0" bIns="0" anchor="t">
+            <a:noAutofit/>
+          </a:bodyPr>
+          <a:lstStyle/>
+          <a:p>
+            <a:pPr algn="l"/>
+            <a:r>
+              <a:rPr sz="1800" b="1" i="0">
+                <a:solidFill>
+                  <a:srgbClr val="D31145"/>
+                </a:solidFill>
+                <a:latin typeface="Arial"/>
+              </a:rPr>
+              <a:t>Do</a:t>
+            </a:r>
+          </a:p>
+        </p:txBody>
+      </p:sp>
+      <p:sp>
+        <p:nvSpPr>
+          <p:cNvPr id="59" name="TextBox 58"/>
+          <p:cNvSpPr txBox="1"/>
+          <p:nvPr/>
+        </p:nvSpPr>
+        <p:spPr>
+          <a:xfrm>
+            <a:off x="7909560" y="3538727"/>
+            <a:ext cx="3657600" cy="274320"/>
+          </a:xfrm>
+          <a:prstGeom prst="rect">
+            <a:avLst/>
+          </a:prstGeom>
+          <a:noFill/>
+        </p:spPr>
+        <p:txBody>
+          <a:bodyPr wrap="square" lIns="0" rIns="0" tIns="0" bIns="0" anchor="t">
+            <a:noAutofit/>
+          </a:bodyPr>
+          <a:lstStyle/>
+          <a:p>
+            <a:pPr algn="l"/>
+            <a:r>
+              <a:rPr sz="1400" b="0" i="0">
+                <a:solidFill>
+                  <a:srgbClr val="5A6570"/>
+                </a:solidFill>
+                <a:latin typeface="Arial"/>
+              </a:rPr>
+              <a:t>Uses AIA data, systems and AI</a:t>
+            </a:r>
+          </a:p>
+        </p:txBody>
+      </p:sp>
+      <p:sp>
+        <p:nvSpPr>
+          <p:cNvPr id="60" name="Oval 59"/>
+          <p:cNvSpPr/>
+          <p:nvPr/>
+        </p:nvSpPr>
+        <p:spPr>
+          <a:xfrm>
+            <a:off x="7342631" y="3886199"/>
+            <a:ext cx="402336" cy="402336"/>
+          </a:xfrm>
+          <a:prstGeom prst="ellipse">
+            <a:avLst/>
+          </a:prstGeom>
+          <a:solidFill>
+            <a:srgbClr val="D31145"/>
+          </a:solidFill>
+          <a:ln>
+            <a:noFill/>
+          </a:ln>
+        </p:spPr>
+        <p:txBody>
+          <a:bodyPr rtlCol="0" anchor="ctr"/>
+          <a:lstStyle/>
+          <a:p/>
+        </p:txBody>
+      </p:sp>
+      <p:sp>
+        <p:nvSpPr>
+          <p:cNvPr id="61" name="TextBox 60"/>
+          <p:cNvSpPr txBox="1"/>
+          <p:nvPr/>
+        </p:nvSpPr>
+        <p:spPr>
+          <a:xfrm>
+            <a:off x="7342631" y="3886199"/>
+            <a:ext cx="402336" cy="402336"/>
+          </a:xfrm>
+          <a:prstGeom prst="rect">
+            <a:avLst/>
+          </a:prstGeom>
+          <a:noFill/>
+        </p:spPr>
+        <p:txBody>
+          <a:bodyPr wrap="square" lIns="0" rIns="0" tIns="0" bIns="0" anchor="ctr">
+            <a:noAutofit/>
+          </a:bodyPr>
+          <a:lstStyle/>
+          <a:p>
+            <a:pPr algn="ctr"/>
+            <a:r>
+              <a:rPr sz="1600" b="1" i="0">
+                <a:solidFill>
+                  <a:srgbClr val="FFFFFF"/>
+                </a:solidFill>
+                <a:latin typeface="Arial"/>
+              </a:rPr>
+              <a:t>4</a:t>
+            </a:r>
+          </a:p>
+        </p:txBody>
+      </p:sp>
+      <p:sp>
+        <p:nvSpPr>
+          <p:cNvPr id="62" name="TextBox 61"/>
+          <p:cNvSpPr txBox="1"/>
+          <p:nvPr/>
+        </p:nvSpPr>
+        <p:spPr>
+          <a:xfrm>
+            <a:off x="7909560" y="3867911"/>
+            <a:ext cx="2377440" cy="310896"/>
+          </a:xfrm>
+          <a:prstGeom prst="rect">
+            <a:avLst/>
+          </a:prstGeom>
+          <a:noFill/>
+        </p:spPr>
+        <p:txBody>
+          <a:bodyPr wrap="square" lIns="0" rIns="0" tIns="0" bIns="0" anchor="t">
+            <a:noAutofit/>
+          </a:bodyPr>
+          <a:lstStyle/>
+          <a:p>
+            <a:pPr algn="l"/>
+            <a:r>
+              <a:rPr sz="1800" b="1" i="0">
+                <a:solidFill>
+                  <a:srgbClr val="D31145"/>
+                </a:solidFill>
+                <a:latin typeface="Arial"/>
+              </a:rPr>
+              <a:t>Deliver</a:t>
+            </a:r>
+          </a:p>
+        </p:txBody>
+      </p:sp>
+      <p:sp>
+        <p:nvSpPr>
+          <p:cNvPr id="63" name="TextBox 62"/>
+          <p:cNvSpPr txBox="1"/>
+          <p:nvPr/>
+        </p:nvSpPr>
+        <p:spPr>
+          <a:xfrm>
+            <a:off x="7909560" y="4197096"/>
+            <a:ext cx="3657600" cy="274320"/>
+          </a:xfrm>
+          <a:prstGeom prst="rect">
+            <a:avLst/>
+          </a:prstGeom>
+          <a:noFill/>
+        </p:spPr>
+        <p:txBody>
+          <a:bodyPr wrap="square" lIns="0" rIns="0" tIns="0" bIns="0" anchor="t">
+            <a:noAutofit/>
+          </a:bodyPr>
+          <a:lstStyle/>
+          <a:p>
+            <a:pPr algn="l"/>
+            <a:r>
+              <a:rPr sz="1400" b="0" i="0">
+                <a:solidFill>
+                  <a:srgbClr val="5A6570"/>
+                </a:solidFill>
+                <a:latin typeface="Arial"/>
+              </a:rPr>
+              <a:t>Finished work, ready to review</a:t>
+            </a:r>
+          </a:p>
+        </p:txBody>
+      </p:sp>
+      <p:sp>
+        <p:nvSpPr>
+          <p:cNvPr id="64" name="Rounded Rectangle 63"/>
+          <p:cNvSpPr/>
+          <p:nvPr/>
+        </p:nvSpPr>
+        <p:spPr>
+          <a:xfrm>
+            <a:off x="7178040" y="4672584"/>
+            <a:ext cx="4572000" cy="960120"/>
+          </a:xfrm>
+          <a:prstGeom prst="roundRect">
+            <a:avLst>
+              <a:gd name="adj" fmla="val 6000"/>
+            </a:avLst>
+          </a:prstGeom>
+          <a:solidFill>
+            <a:srgbClr val="F4F2F0"/>
+          </a:solidFill>
+          <a:ln>
+            <a:noFill/>
+          </a:ln>
+        </p:spPr>
+        <p:txBody>
+          <a:bodyPr rtlCol="0" anchor="ctr"/>
+          <a:lstStyle/>
+          <a:p/>
+        </p:txBody>
+      </p:sp>
+      <p:sp>
+        <p:nvSpPr>
+          <p:cNvPr id="65" name="Rounded Rectangle 64"/>
+          <p:cNvSpPr/>
+          <p:nvPr/>
+        </p:nvSpPr>
+        <p:spPr>
+          <a:xfrm>
+            <a:off x="10424160" y="4782312"/>
+            <a:ext cx="1188720" cy="310896"/>
+          </a:xfrm>
+          <a:prstGeom prst="roundRect">
+            <a:avLst>
+              <a:gd name="adj" fmla="val 50000"/>
+            </a:avLst>
           </a:prstGeom>
           <a:solidFill>
             <a:srgbClr val="333D47"/>
@@ -13520,126 +13957,34 @@
           </a:ln>
         </p:spPr>
         <p:txBody>
-          <a:bodyPr rtlCol="0" anchor="ctr"/>
-          <a:lstStyle/>
-          <a:p/>
-        </p:txBody>
-      </p:sp>
-      <p:sp>
-        <p:nvSpPr>
-          <p:cNvPr id="53" name="TextBox 52"/>
-          <p:cNvSpPr txBox="1"/>
-          <p:nvPr/>
-        </p:nvSpPr>
-        <p:spPr>
-          <a:xfrm>
-            <a:off x="7269480" y="3127248"/>
-            <a:ext cx="420624" cy="420624"/>
-          </a:xfrm>
-          <a:prstGeom prst="rect">
-            <a:avLst/>
-          </a:prstGeom>
-          <a:noFill/>
-        </p:spPr>
-        <p:txBody>
-          <a:bodyPr wrap="square" lIns="0" rIns="0" tIns="0" bIns="0" anchor="ctr">
+          <a:bodyPr rtlCol="0" anchor="ctr" wrap="square" lIns="0" rIns="0" tIns="0" bIns="0">
             <a:noAutofit/>
           </a:bodyPr>
           <a:lstStyle/>
           <a:p>
             <a:pPr algn="ctr"/>
             <a:r>
-              <a:rPr sz="1600" b="1" i="0">
+              <a:rPr sz="1200" b="1" i="0">
                 <a:solidFill>
                   <a:srgbClr val="FFFFFF"/>
                 </a:solidFill>
                 <a:latin typeface="Arial"/>
               </a:rPr>
-              <a:t>3</a:t>
-            </a:r>
-          </a:p>
-        </p:txBody>
-      </p:sp>
-      <p:sp>
-        <p:nvSpPr>
-          <p:cNvPr id="54" name="TextBox 53"/>
-          <p:cNvSpPr txBox="1"/>
-          <p:nvPr/>
-        </p:nvSpPr>
-        <p:spPr>
-          <a:xfrm>
-            <a:off x="7882127" y="3108960"/>
-            <a:ext cx="3840480" cy="310896"/>
-          </a:xfrm>
-          <a:prstGeom prst="rect">
-            <a:avLst/>
-          </a:prstGeom>
-          <a:noFill/>
-        </p:spPr>
-        <p:txBody>
-          <a:bodyPr wrap="square" lIns="0" rIns="0" tIns="0" bIns="0" anchor="t">
-            <a:noAutofit/>
-          </a:bodyPr>
-          <a:lstStyle/>
-          <a:p>
-            <a:pPr algn="l"/>
-            <a:r>
-              <a:rPr sz="1800" b="1" i="0">
-                <a:solidFill>
-                  <a:srgbClr val="333D47"/>
-                </a:solidFill>
-                <a:latin typeface="Arial"/>
-              </a:rPr>
-              <a:t>Do</a:t>
-            </a:r>
-          </a:p>
-        </p:txBody>
-      </p:sp>
-      <p:sp>
-        <p:nvSpPr>
-          <p:cNvPr id="55" name="TextBox 54"/>
-          <p:cNvSpPr txBox="1"/>
-          <p:nvPr/>
-        </p:nvSpPr>
-        <p:spPr>
-          <a:xfrm>
-            <a:off x="7882127" y="3438144"/>
-            <a:ext cx="3840480" cy="603504"/>
-          </a:xfrm>
-          <a:prstGeom prst="rect">
-            <a:avLst/>
-          </a:prstGeom>
-          <a:noFill/>
-        </p:spPr>
-        <p:txBody>
-          <a:bodyPr wrap="square" lIns="0" rIns="0" tIns="0" bIns="0" anchor="t">
-            <a:noAutofit/>
-          </a:bodyPr>
-          <a:lstStyle/>
-          <a:p>
-            <a:pPr algn="l"/>
-            <a:r>
-              <a:rPr sz="1400" b="0" i="0">
-                <a:solidFill>
-                  <a:srgbClr val="5A6570"/>
-                </a:solidFill>
-                <a:latin typeface="Arial"/>
-              </a:rPr>
-              <a:t>AIA data, systems and AI, within your permissions</a:t>
-            </a:r>
-          </a:p>
-        </p:txBody>
-      </p:sp>
-      <p:sp>
-        <p:nvSpPr>
-          <p:cNvPr id="56" name="Oval 55"/>
+              <a:t>EMPLOYEE</a:t>
+            </a:r>
+          </a:p>
+        </p:txBody>
+      </p:sp>
+      <p:sp>
+        <p:nvSpPr>
+          <p:cNvPr id="66" name="Oval 65"/>
           <p:cNvSpPr/>
           <p:nvPr/>
         </p:nvSpPr>
         <p:spPr>
           <a:xfrm>
-            <a:off x="7269480" y="4059935"/>
-            <a:ext cx="420624" cy="420624"/>
+            <a:off x="7342631" y="4782312"/>
+            <a:ext cx="402336" cy="402336"/>
           </a:xfrm>
           <a:prstGeom prst="ellipse">
             <a:avLst/>
@@ -13659,14 +14004,14 @@
       </p:sp>
       <p:sp>
         <p:nvSpPr>
-          <p:cNvPr id="57" name="TextBox 56"/>
+          <p:cNvPr id="67" name="TextBox 66"/>
           <p:cNvSpPr txBox="1"/>
           <p:nvPr/>
         </p:nvSpPr>
         <p:spPr>
           <a:xfrm>
-            <a:off x="7269480" y="4059935"/>
-            <a:ext cx="420624" cy="420624"/>
+            <a:off x="7342631" y="4782312"/>
+            <a:ext cx="402336" cy="402336"/>
           </a:xfrm>
           <a:prstGeom prst="rect">
             <a:avLst/>
@@ -13687,21 +14032,21 @@
                 </a:solidFill>
                 <a:latin typeface="Arial"/>
               </a:rPr>
-              <a:t>4</a:t>
-            </a:r>
-          </a:p>
-        </p:txBody>
-      </p:sp>
-      <p:sp>
-        <p:nvSpPr>
-          <p:cNvPr id="58" name="TextBox 57"/>
+              <a:t>5</a:t>
+            </a:r>
+          </a:p>
+        </p:txBody>
+      </p:sp>
+      <p:sp>
+        <p:nvSpPr>
+          <p:cNvPr id="68" name="TextBox 67"/>
           <p:cNvSpPr txBox="1"/>
           <p:nvPr/>
         </p:nvSpPr>
         <p:spPr>
           <a:xfrm>
-            <a:off x="7882127" y="4041648"/>
-            <a:ext cx="3840480" cy="310896"/>
+            <a:off x="7909560" y="4764024"/>
+            <a:ext cx="2377440" cy="310896"/>
           </a:xfrm>
           <a:prstGeom prst="rect">
             <a:avLst/>
@@ -13722,21 +14067,21 @@
                 </a:solidFill>
                 <a:latin typeface="Arial"/>
               </a:rPr>
-              <a:t>Deliver</a:t>
-            </a:r>
-          </a:p>
-        </p:txBody>
-      </p:sp>
-      <p:sp>
-        <p:nvSpPr>
-          <p:cNvPr id="59" name="TextBox 58"/>
+              <a:t>Approve</a:t>
+            </a:r>
+          </a:p>
+        </p:txBody>
+      </p:sp>
+      <p:sp>
+        <p:nvSpPr>
+          <p:cNvPr id="69" name="TextBox 68"/>
           <p:cNvSpPr txBox="1"/>
           <p:nvPr/>
         </p:nvSpPr>
         <p:spPr>
           <a:xfrm>
-            <a:off x="7882127" y="4370832"/>
-            <a:ext cx="3840480" cy="402336"/>
+            <a:off x="7909560" y="5093208"/>
+            <a:ext cx="3657600" cy="502920"/>
           </a:xfrm>
           <a:prstGeom prst="rect">
             <a:avLst/>
@@ -13757,138 +14102,6 @@
                 </a:solidFill>
                 <a:latin typeface="Arial"/>
               </a:rPr>
-              <a:t>Finished work, ready to review</a:t>
-            </a:r>
-          </a:p>
-        </p:txBody>
-      </p:sp>
-      <p:sp>
-        <p:nvSpPr>
-          <p:cNvPr id="60" name="Oval 59"/>
-          <p:cNvSpPr/>
-          <p:nvPr/>
-        </p:nvSpPr>
-        <p:spPr>
-          <a:xfrm>
-            <a:off x="7269480" y="4791455"/>
-            <a:ext cx="420624" cy="420624"/>
-          </a:xfrm>
-          <a:prstGeom prst="ellipse">
-            <a:avLst/>
-          </a:prstGeom>
-          <a:solidFill>
-            <a:srgbClr val="D31145"/>
-          </a:solidFill>
-          <a:ln>
-            <a:noFill/>
-          </a:ln>
-        </p:spPr>
-        <p:txBody>
-          <a:bodyPr rtlCol="0" anchor="ctr"/>
-          <a:lstStyle/>
-          <a:p/>
-        </p:txBody>
-      </p:sp>
-      <p:sp>
-        <p:nvSpPr>
-          <p:cNvPr id="61" name="TextBox 60"/>
-          <p:cNvSpPr txBox="1"/>
-          <p:nvPr/>
-        </p:nvSpPr>
-        <p:spPr>
-          <a:xfrm>
-            <a:off x="7269480" y="4791455"/>
-            <a:ext cx="420624" cy="420624"/>
-          </a:xfrm>
-          <a:prstGeom prst="rect">
-            <a:avLst/>
-          </a:prstGeom>
-          <a:noFill/>
-        </p:spPr>
-        <p:txBody>
-          <a:bodyPr wrap="square" lIns="0" rIns="0" tIns="0" bIns="0" anchor="ctr">
-            <a:noAutofit/>
-          </a:bodyPr>
-          <a:lstStyle/>
-          <a:p>
-            <a:pPr algn="ctr"/>
-            <a:r>
-              <a:rPr sz="1600" b="1" i="0">
-                <a:solidFill>
-                  <a:srgbClr val="FFFFFF"/>
-                </a:solidFill>
-                <a:latin typeface="Arial"/>
-              </a:rPr>
-              <a:t>5</a:t>
-            </a:r>
-          </a:p>
-        </p:txBody>
-      </p:sp>
-      <p:sp>
-        <p:nvSpPr>
-          <p:cNvPr id="62" name="TextBox 61"/>
-          <p:cNvSpPr txBox="1"/>
-          <p:nvPr/>
-        </p:nvSpPr>
-        <p:spPr>
-          <a:xfrm>
-            <a:off x="7882127" y="4773168"/>
-            <a:ext cx="3840480" cy="310896"/>
-          </a:xfrm>
-          <a:prstGeom prst="rect">
-            <a:avLst/>
-          </a:prstGeom>
-          <a:noFill/>
-        </p:spPr>
-        <p:txBody>
-          <a:bodyPr wrap="square" lIns="0" rIns="0" tIns="0" bIns="0" anchor="t">
-            <a:noAutofit/>
-          </a:bodyPr>
-          <a:lstStyle/>
-          <a:p>
-            <a:pPr algn="l"/>
-            <a:r>
-              <a:rPr sz="1800" b="1" i="0">
-                <a:solidFill>
-                  <a:srgbClr val="D31145"/>
-                </a:solidFill>
-                <a:latin typeface="Arial"/>
-              </a:rPr>
-              <a:t>Approve</a:t>
-            </a:r>
-          </a:p>
-        </p:txBody>
-      </p:sp>
-      <p:sp>
-        <p:nvSpPr>
-          <p:cNvPr id="63" name="TextBox 62"/>
-          <p:cNvSpPr txBox="1"/>
-          <p:nvPr/>
-        </p:nvSpPr>
-        <p:spPr>
-          <a:xfrm>
-            <a:off x="7882127" y="5102352"/>
-            <a:ext cx="3840480" cy="603504"/>
-          </a:xfrm>
-          <a:prstGeom prst="rect">
-            <a:avLst/>
-          </a:prstGeom>
-          <a:noFill/>
-        </p:spPr>
-        <p:txBody>
-          <a:bodyPr wrap="square" lIns="0" rIns="0" tIns="0" bIns="0" anchor="t">
-            <a:noAutofit/>
-          </a:bodyPr>
-          <a:lstStyle/>
-          <a:p>
-            <a:pPr algn="l"/>
-            <a:r>
-              <a:rPr sz="1400" b="0" i="0">
-                <a:solidFill>
-                  <a:srgbClr val="5A6570"/>
-                </a:solidFill>
-                <a:latin typeface="Arial"/>
-              </a:rPr>
               <a:t>Nothing is finalized, sent or entered into a system until you approve</a:t>
             </a:r>
           </a:p>
@@ -13896,7 +14109,7 @@
       </p:sp>
       <p:sp>
         <p:nvSpPr>
-          <p:cNvPr id="64" name="TextBox 63"/>
+          <p:cNvPr id="70" name="TextBox 69"/>
           <p:cNvSpPr txBox="1"/>
           <p:nvPr/>
         </p:nvSpPr>
@@ -14057,7 +14270,7 @@
         </p:nvSpPr>
         <p:spPr>
           <a:xfrm>
-            <a:off x="3995928" y="1600200"/>
+            <a:off x="3995928" y="1536192"/>
             <a:ext cx="4206240" cy="347472"/>
           </a:xfrm>
           <a:prstGeom prst="roundRect">
@@ -14101,7 +14314,7 @@
         </p:nvSpPr>
         <p:spPr>
           <a:xfrm>
-            <a:off x="612648" y="2148840"/>
+            <a:off x="612648" y="1993392"/>
             <a:ext cx="10972800" cy="411480"/>
           </a:xfrm>
           <a:prstGeom prst="rect">
@@ -14136,7 +14349,7 @@
         </p:nvSpPr>
         <p:spPr>
           <a:xfrm>
-            <a:off x="1158087" y="2743200"/>
+            <a:off x="1158087" y="2450592"/>
             <a:ext cx="2103120" cy="868680"/>
           </a:xfrm>
           <a:prstGeom prst="rect">
@@ -14171,7 +14384,7 @@
         </p:nvSpPr>
         <p:spPr>
           <a:xfrm>
-            <a:off x="1158087" y="3639312"/>
+            <a:off x="1158087" y="3319272"/>
             <a:ext cx="2103120" cy="320040"/>
           </a:xfrm>
           <a:prstGeom prst="rect">
@@ -14206,7 +14419,7 @@
         </p:nvSpPr>
         <p:spPr>
           <a:xfrm>
-            <a:off x="3261207" y="2743200"/>
+            <a:off x="3261207" y="2450592"/>
             <a:ext cx="548640" cy="868680"/>
           </a:xfrm>
           <a:prstGeom prst="rect">
@@ -14241,7 +14454,7 @@
         </p:nvSpPr>
         <p:spPr>
           <a:xfrm>
-            <a:off x="3809847" y="2743200"/>
+            <a:off x="3809847" y="2450592"/>
             <a:ext cx="2377440" cy="868680"/>
           </a:xfrm>
           <a:prstGeom prst="rect">
@@ -14276,7 +14489,7 @@
         </p:nvSpPr>
         <p:spPr>
           <a:xfrm>
-            <a:off x="3809847" y="3639312"/>
+            <a:off x="3809847" y="3319272"/>
             <a:ext cx="2377440" cy="320040"/>
           </a:xfrm>
           <a:prstGeom prst="rect">
@@ -14311,7 +14524,7 @@
         </p:nvSpPr>
         <p:spPr>
           <a:xfrm>
-            <a:off x="6187287" y="2743200"/>
+            <a:off x="6187287" y="2450592"/>
             <a:ext cx="548640" cy="868680"/>
           </a:xfrm>
           <a:prstGeom prst="rect">
@@ -14346,7 +14559,7 @@
         </p:nvSpPr>
         <p:spPr>
           <a:xfrm>
-            <a:off x="6735927" y="2743200"/>
+            <a:off x="6735927" y="2450592"/>
             <a:ext cx="4297680" cy="868680"/>
           </a:xfrm>
           <a:prstGeom prst="rect">
@@ -14381,7 +14594,7 @@
         </p:nvSpPr>
         <p:spPr>
           <a:xfrm>
-            <a:off x="6735927" y="3639312"/>
+            <a:off x="6735927" y="3319272"/>
             <a:ext cx="4297680" cy="320040"/>
           </a:xfrm>
           <a:prstGeom prst="rect">
@@ -14410,18 +14623,345 @@
       </p:sp>
       <p:sp>
         <p:nvSpPr>
-          <p:cNvPr id="16" name="Rounded Rectangle 15"/>
+          <p:cNvPr id="16" name="Rectangle 15"/>
           <p:cNvSpPr/>
           <p:nvPr/>
         </p:nvSpPr>
         <p:spPr>
           <a:xfrm>
-            <a:off x="1463040" y="4343400"/>
-            <a:ext cx="9262872" cy="777240"/>
+            <a:off x="1984248" y="3931920"/>
+            <a:ext cx="8229600" cy="310896"/>
+          </a:xfrm>
+          <a:prstGeom prst="rect">
+            <a:avLst/>
+          </a:prstGeom>
+          <a:solidFill>
+            <a:srgbClr val="F0F1F2"/>
+          </a:solidFill>
+          <a:ln>
+            <a:noFill/>
+          </a:ln>
+        </p:spPr>
+        <p:txBody>
+          <a:bodyPr rtlCol="0" anchor="ctr"/>
+          <a:lstStyle/>
+          <a:p/>
+        </p:txBody>
+      </p:sp>
+      <p:sp>
+        <p:nvSpPr>
+          <p:cNvPr id="17" name="Rectangle 16"/>
+          <p:cNvSpPr/>
+          <p:nvPr/>
+        </p:nvSpPr>
+        <p:spPr>
+          <a:xfrm>
+            <a:off x="1984248" y="3931920"/>
+            <a:ext cx="1645920" cy="310896"/>
+          </a:xfrm>
+          <a:prstGeom prst="rect">
+            <a:avLst/>
+          </a:prstGeom>
+          <a:solidFill>
+            <a:srgbClr val="D3CAC3"/>
+          </a:solidFill>
+          <a:ln>
+            <a:noFill/>
+          </a:ln>
+        </p:spPr>
+        <p:txBody>
+          <a:bodyPr rtlCol="0" anchor="ctr"/>
+          <a:lstStyle/>
+          <a:p/>
+        </p:txBody>
+      </p:sp>
+      <p:sp>
+        <p:nvSpPr>
+          <p:cNvPr id="18" name="Rectangle 17"/>
+          <p:cNvSpPr/>
+          <p:nvPr/>
+        </p:nvSpPr>
+        <p:spPr>
+          <a:xfrm>
+            <a:off x="1984248" y="3931920"/>
+            <a:ext cx="205740" cy="310896"/>
+          </a:xfrm>
+          <a:prstGeom prst="rect">
+            <a:avLst/>
+          </a:prstGeom>
+          <a:solidFill>
+            <a:srgbClr val="D31145"/>
+          </a:solidFill>
+          <a:ln>
+            <a:noFill/>
+          </a:ln>
+        </p:spPr>
+        <p:txBody>
+          <a:bodyPr rtlCol="0" anchor="ctr"/>
+          <a:lstStyle/>
+          <a:p/>
+        </p:txBody>
+      </p:sp>
+      <p:cxnSp>
+        <p:nvCxnSpPr>
+          <p:cNvPr id="19" name="Connector 18"/>
+          <p:cNvCxnSpPr/>
+          <p:nvPr/>
+        </p:nvCxnSpPr>
+        <p:spPr>
+          <a:xfrm>
+            <a:off x="2189988" y="3931920"/>
+            <a:ext cx="0" cy="457200"/>
+          </a:xfrm>
+          <a:prstGeom prst="line">
+            <a:avLst/>
+          </a:prstGeom>
+          <a:ln w="15875">
+            <a:solidFill>
+              <a:srgbClr val="D31145"/>
+            </a:solidFill>
+          </a:ln>
+        </p:spPr>
+        <p:style>
+          <a:lnRef idx="2">
+            <a:schemeClr val="accent1"/>
+          </a:lnRef>
+          <a:fillRef idx="0">
+            <a:schemeClr val="accent1"/>
+          </a:fillRef>
+          <a:effectRef idx="1">
+            <a:schemeClr val="accent1"/>
+          </a:effectRef>
+          <a:fontRef idx="minor">
+            <a:schemeClr val="tx1"/>
+          </a:fontRef>
+        </p:style>
+      </p:cxnSp>
+      <p:cxnSp>
+        <p:nvCxnSpPr>
+          <p:cNvPr id="20" name="Connector 19"/>
+          <p:cNvCxnSpPr/>
+          <p:nvPr/>
+        </p:nvCxnSpPr>
+        <p:spPr>
+          <a:xfrm>
+            <a:off x="3630168" y="3931920"/>
+            <a:ext cx="0" cy="457200"/>
+          </a:xfrm>
+          <a:prstGeom prst="line">
+            <a:avLst/>
+          </a:prstGeom>
+          <a:ln w="15875">
+            <a:solidFill>
+              <a:srgbClr val="333D47"/>
+            </a:solidFill>
+          </a:ln>
+        </p:spPr>
+        <p:style>
+          <a:lnRef idx="2">
+            <a:schemeClr val="accent1"/>
+          </a:lnRef>
+          <a:fillRef idx="0">
+            <a:schemeClr val="accent1"/>
+          </a:fillRef>
+          <a:effectRef idx="1">
+            <a:schemeClr val="accent1"/>
+          </a:effectRef>
+          <a:fontRef idx="minor">
+            <a:schemeClr val="tx1"/>
+          </a:fontRef>
+        </p:style>
+      </p:cxnSp>
+      <p:cxnSp>
+        <p:nvCxnSpPr>
+          <p:cNvPr id="21" name="Connector 20"/>
+          <p:cNvCxnSpPr/>
+          <p:nvPr/>
+        </p:nvCxnSpPr>
+        <p:spPr>
+          <a:xfrm>
+            <a:off x="10213848" y="3931920"/>
+            <a:ext cx="0" cy="457200"/>
+          </a:xfrm>
+          <a:prstGeom prst="line">
+            <a:avLst/>
+          </a:prstGeom>
+          <a:ln w="15875">
+            <a:solidFill>
+              <a:srgbClr val="333D47"/>
+            </a:solidFill>
+          </a:ln>
+        </p:spPr>
+        <p:style>
+          <a:lnRef idx="2">
+            <a:schemeClr val="accent1"/>
+          </a:lnRef>
+          <a:fillRef idx="0">
+            <a:schemeClr val="accent1"/>
+          </a:fillRef>
+          <a:effectRef idx="1">
+            <a:schemeClr val="accent1"/>
+          </a:effectRef>
+          <a:fontRef idx="minor">
+            <a:schemeClr val="tx1"/>
+          </a:fontRef>
+        </p:style>
+      </p:cxnSp>
+      <p:sp>
+        <p:nvSpPr>
+          <p:cNvPr id="22" name="TextBox 21"/>
+          <p:cNvSpPr txBox="1"/>
+          <p:nvPr/>
+        </p:nvSpPr>
+        <p:spPr>
+          <a:xfrm>
+            <a:off x="1984248" y="4407408"/>
+            <a:ext cx="1554480" cy="457200"/>
+          </a:xfrm>
+          <a:prstGeom prst="rect">
+            <a:avLst/>
+          </a:prstGeom>
+          <a:noFill/>
+        </p:spPr>
+        <p:txBody>
+          <a:bodyPr wrap="square" lIns="0" rIns="0" tIns="0" bIns="0" anchor="t">
+            <a:noAutofit/>
+          </a:bodyPr>
+          <a:lstStyle/>
+          <a:p>
+            <a:pPr algn="l"/>
+            <a:r>
+              <a:rPr sz="1500" b="1" i="0">
+                <a:solidFill>
+                  <a:srgbClr val="D31145"/>
+                </a:solidFill>
+                <a:latin typeface="Arial"/>
+              </a:rPr>
+              <a:t>1 hour</a:t>
+            </a:r>
+          </a:p>
+          <a:p>
+            <a:pPr algn="l"/>
+            <a:r>
+              <a:rPr sz="1200" b="0" i="0">
+                <a:solidFill>
+                  <a:srgbClr val="5A6570"/>
+                </a:solidFill>
+                <a:latin typeface="Arial"/>
+              </a:rPr>
+              <a:t>the scenario</a:t>
+            </a:r>
+          </a:p>
+        </p:txBody>
+      </p:sp>
+      <p:sp>
+        <p:nvSpPr>
+          <p:cNvPr id="23" name="TextBox 22"/>
+          <p:cNvSpPr txBox="1"/>
+          <p:nvPr/>
+        </p:nvSpPr>
+        <p:spPr>
+          <a:xfrm>
+            <a:off x="3703320" y="4407408"/>
+            <a:ext cx="4206240" cy="457200"/>
+          </a:xfrm>
+          <a:prstGeom prst="rect">
+            <a:avLst/>
+          </a:prstGeom>
+          <a:noFill/>
+        </p:spPr>
+        <p:txBody>
+          <a:bodyPr wrap="square" lIns="0" rIns="0" tIns="0" bIns="0" anchor="t">
+            <a:noAutofit/>
+          </a:bodyPr>
+          <a:lstStyle/>
+          <a:p>
+            <a:pPr algn="l"/>
+            <a:r>
+              <a:rPr sz="1500" b="1" i="0">
+                <a:solidFill>
+                  <a:srgbClr val="333D47"/>
+                </a:solidFill>
+                <a:latin typeface="Arial"/>
+              </a:rPr>
+              <a:t>~8 hours</a:t>
+            </a:r>
+          </a:p>
+          <a:p>
+            <a:pPr algn="l"/>
+            <a:r>
+              <a:rPr sz="1200" b="0" i="0">
+                <a:solidFill>
+                  <a:srgbClr val="5A6570"/>
+                </a:solidFill>
+                <a:latin typeface="Arial"/>
+              </a:rPr>
+              <a:t>nearly 20% of the week (McKinsey, 2012)</a:t>
+            </a:r>
+          </a:p>
+        </p:txBody>
+      </p:sp>
+      <p:sp>
+        <p:nvSpPr>
+          <p:cNvPr id="24" name="TextBox 23"/>
+          <p:cNvSpPr txBox="1"/>
+          <p:nvPr/>
+        </p:nvSpPr>
+        <p:spPr>
+          <a:xfrm>
+            <a:off x="8202167" y="4407408"/>
+            <a:ext cx="2011680" cy="457200"/>
+          </a:xfrm>
+          <a:prstGeom prst="rect">
+            <a:avLst/>
+          </a:prstGeom>
+          <a:noFill/>
+        </p:spPr>
+        <p:txBody>
+          <a:bodyPr wrap="square" lIns="0" rIns="0" tIns="0" bIns="0" anchor="t">
+            <a:noAutofit/>
+          </a:bodyPr>
+          <a:lstStyle/>
+          <a:p>
+            <a:pPr algn="r"/>
+            <a:r>
+              <a:rPr sz="1500" b="1" i="0">
+                <a:solidFill>
+                  <a:srgbClr val="333D47"/>
+                </a:solidFill>
+                <a:latin typeface="Arial"/>
+              </a:rPr>
+              <a:t>40 hours</a:t>
+            </a:r>
+          </a:p>
+          <a:p>
+            <a:pPr algn="r"/>
+            <a:r>
+              <a:rPr sz="1200" b="0" i="0">
+                <a:solidFill>
+                  <a:srgbClr val="5A6570"/>
+                </a:solidFill>
+                <a:latin typeface="Arial"/>
+              </a:rPr>
+              <a:t>a working week</a:t>
+            </a:r>
+          </a:p>
+        </p:txBody>
+      </p:sp>
+      <p:sp>
+        <p:nvSpPr>
+          <p:cNvPr id="25" name="Rounded Rectangle 24"/>
+          <p:cNvSpPr/>
+          <p:nvPr/>
+        </p:nvSpPr>
+        <p:spPr>
+          <a:xfrm>
+            <a:off x="1463040" y="4956048"/>
+            <a:ext cx="9262872" cy="548640"/>
           </a:xfrm>
           <a:prstGeom prst="roundRect">
             <a:avLst>
-              <a:gd name="adj" fmla="val 20000"/>
+              <a:gd name="adj" fmla="val 30000"/>
             </a:avLst>
           </a:prstGeom>
           <a:solidFill>
@@ -14439,14 +14979,14 @@
       </p:sp>
       <p:sp>
         <p:nvSpPr>
-          <p:cNvPr id="17" name="TextBox 16"/>
+          <p:cNvPr id="26" name="TextBox 25"/>
           <p:cNvSpPr txBox="1"/>
           <p:nvPr/>
         </p:nvSpPr>
         <p:spPr>
           <a:xfrm>
-            <a:off x="1463040" y="4343400"/>
-            <a:ext cx="9262872" cy="777240"/>
+            <a:off x="1463040" y="4956048"/>
+            <a:ext cx="9262872" cy="548640"/>
           </a:xfrm>
           <a:prstGeom prst="rect">
             <a:avLst/>
@@ -14501,13 +15041,13 @@
       </p:sp>
       <p:sp>
         <p:nvSpPr>
-          <p:cNvPr id="18" name="TextBox 17"/>
+          <p:cNvPr id="27" name="TextBox 26"/>
           <p:cNvSpPr txBox="1"/>
           <p:nvPr/>
         </p:nvSpPr>
         <p:spPr>
           <a:xfrm>
-            <a:off x="1097280" y="5394960"/>
+            <a:off x="1097280" y="5577840"/>
             <a:ext cx="10012680" cy="274320"/>
           </a:xfrm>
           <a:prstGeom prst="rect">
@@ -15352,11 +15892,13 @@
         </p:nvSpPr>
         <p:spPr>
           <a:xfrm>
-            <a:off x="457200" y="4754880"/>
-            <a:ext cx="3840479" cy="685800"/>
+            <a:off x="457200" y="4498848"/>
+            <a:ext cx="2916936" cy="1051560"/>
           </a:xfrm>
           <a:prstGeom prst="homePlate">
-            <a:avLst/>
+            <a:avLst>
+              <a:gd name="adj" fmla="val 30000"/>
+            </a:avLst>
           </a:prstGeom>
           <a:solidFill>
             <a:srgbClr val="E9E4E1"/>
@@ -15366,23 +15908,26 @@
           </a:ln>
         </p:spPr>
         <p:txBody>
-          <a:bodyPr rtlCol="0" anchor="ctr" wrap="square" lIns="137160" rIns="320040">
+          <a:bodyPr rtlCol="0" anchor="ctr" wrap="square" lIns="137160" rIns="292608" tIns="36576" bIns="36576">
             <a:noAutofit/>
           </a:bodyPr>
           <a:lstStyle/>
           <a:p>
             <a:pPr algn="ctr"/>
             <a:r>
-              <a:rPr sz="1500" b="1" i="0">
+              <a:rPr sz="1400" b="1" i="0">
                 <a:solidFill>
                   <a:srgbClr val="333D47"/>
                 </a:solidFill>
                 <a:latin typeface="Arial"/>
               </a:rPr>
-              <a:t>Phase 0   </a:t>
-            </a:r>
-            <a:r>
-              <a:rPr sz="1500" b="0" i="0">
+              <a:t>Phase 0</a:t>
+            </a:r>
+          </a:p>
+          <a:p>
+            <a:pPr algn="ctr"/>
+            <a:r>
+              <a:rPr sz="1300" b="0" i="0">
                 <a:solidFill>
                   <a:srgbClr val="333D47"/>
                 </a:solidFill>
@@ -15401,11 +15946,13 @@
         </p:nvSpPr>
         <p:spPr>
           <a:xfrm>
-            <a:off x="4224527" y="4754880"/>
-            <a:ext cx="3840479" cy="685800"/>
+            <a:off x="3282696" y="4498848"/>
+            <a:ext cx="2916936" cy="1051560"/>
           </a:xfrm>
           <a:prstGeom prst="chevron">
-            <a:avLst/>
+            <a:avLst>
+              <a:gd name="adj" fmla="val 30000"/>
+            </a:avLst>
           </a:prstGeom>
           <a:solidFill>
             <a:srgbClr val="F4C4D1"/>
@@ -15415,29 +15962,32 @@
           </a:ln>
         </p:spPr>
         <p:txBody>
-          <a:bodyPr rtlCol="0" anchor="ctr" wrap="square" lIns="411480" rIns="320040">
+          <a:bodyPr rtlCol="0" anchor="ctr" wrap="square" lIns="384048" rIns="292608" tIns="36576" bIns="36576">
             <a:noAutofit/>
           </a:bodyPr>
           <a:lstStyle/>
           <a:p>
             <a:pPr algn="ctr"/>
             <a:r>
-              <a:rPr sz="1500" b="1" i="0">
+              <a:rPr sz="1400" b="1" i="0">
                 <a:solidFill>
                   <a:srgbClr val="333D47"/>
                 </a:solidFill>
                 <a:latin typeface="Arial"/>
               </a:rPr>
-              <a:t>Phase 1   </a:t>
-            </a:r>
-            <a:r>
-              <a:rPr sz="1500" b="0" i="0">
+              <a:t>Phase 1</a:t>
+            </a:r>
+          </a:p>
+          <a:p>
+            <a:pPr algn="ctr"/>
+            <a:r>
+              <a:rPr sz="1300" b="0" i="0">
                 <a:solidFill>
                   <a:srgbClr val="333D47"/>
                 </a:solidFill>
                 <a:latin typeface="Arial"/>
               </a:rPr>
-              <a:t>Measure</a:t>
+              <a:t>Measure the first workflow</a:t>
             </a:r>
           </a:p>
         </p:txBody>
@@ -15450,11 +16000,13 @@
         </p:nvSpPr>
         <p:spPr>
           <a:xfrm>
-            <a:off x="7991855" y="4754880"/>
-            <a:ext cx="3840479" cy="685800"/>
+            <a:off x="6108192" y="4498848"/>
+            <a:ext cx="2916936" cy="1051560"/>
           </a:xfrm>
           <a:prstGeom prst="chevron">
-            <a:avLst/>
+            <a:avLst>
+              <a:gd name="adj" fmla="val 30000"/>
+            </a:avLst>
           </a:prstGeom>
           <a:solidFill>
             <a:srgbClr val="D31145"/>
@@ -15464,29 +16016,121 @@
           </a:ln>
         </p:spPr>
         <p:txBody>
-          <a:bodyPr rtlCol="0" anchor="ctr" wrap="square" lIns="411480" rIns="320040">
+          <a:bodyPr rtlCol="0" anchor="ctr" wrap="square" lIns="384048" rIns="292608" tIns="36576" bIns="36576">
             <a:noAutofit/>
           </a:bodyPr>
           <a:lstStyle/>
           <a:p>
             <a:pPr algn="ctr"/>
             <a:r>
-              <a:rPr sz="1500" b="1" i="0">
+              <a:rPr sz="1400" b="1" i="0">
                 <a:solidFill>
                   <a:srgbClr val="FFFFFF"/>
                 </a:solidFill>
                 <a:latin typeface="Arial"/>
               </a:rPr>
-              <a:t>Phase 3   </a:t>
-            </a:r>
-            <a:r>
-              <a:rPr sz="1500" b="0" i="0">
+              <a:t>Phase 2</a:t>
+            </a:r>
+          </a:p>
+          <a:p>
+            <a:pPr algn="ctr"/>
+            <a:r>
+              <a:rPr sz="1300" b="0" i="0">
                 <a:solidFill>
                   <a:srgbClr val="FFFFFF"/>
                 </a:solidFill>
                 <a:latin typeface="Arial"/>
               </a:rPr>
-              <a:t>Replace the scenario with real data</a:t>
+              <a:t>Prove the multiplier: add a capability or workflow</a:t>
+            </a:r>
+          </a:p>
+        </p:txBody>
+      </p:sp>
+      <p:sp>
+        <p:nvSpPr>
+          <p:cNvPr id="30" name="Chevron 29"/>
+          <p:cNvSpPr/>
+          <p:nvPr/>
+        </p:nvSpPr>
+        <p:spPr>
+          <a:xfrm>
+            <a:off x="8933688" y="4498848"/>
+            <a:ext cx="2916936" cy="1051560"/>
+          </a:xfrm>
+          <a:prstGeom prst="chevron">
+            <a:avLst>
+              <a:gd name="adj" fmla="val 30000"/>
+            </a:avLst>
+          </a:prstGeom>
+          <a:solidFill>
+            <a:srgbClr val="F4C4D1"/>
+          </a:solidFill>
+          <a:ln>
+            <a:noFill/>
+          </a:ln>
+        </p:spPr>
+        <p:txBody>
+          <a:bodyPr rtlCol="0" anchor="ctr" wrap="square" lIns="384048" rIns="292608" tIns="36576" bIns="36576">
+            <a:noAutofit/>
+          </a:bodyPr>
+          <a:lstStyle/>
+          <a:p>
+            <a:pPr algn="ctr"/>
+            <a:r>
+              <a:rPr sz="1400" b="1" i="0">
+                <a:solidFill>
+                  <a:srgbClr val="333D47"/>
+                </a:solidFill>
+                <a:latin typeface="Arial"/>
+              </a:rPr>
+              <a:t>Phase 3</a:t>
+            </a:r>
+          </a:p>
+          <a:p>
+            <a:pPr algn="ctr"/>
+            <a:r>
+              <a:rPr sz="1300" b="0" i="0">
+                <a:solidFill>
+                  <a:srgbClr val="333D47"/>
+                </a:solidFill>
+                <a:latin typeface="Arial"/>
+              </a:rPr>
+              <a:t>Replace the scenario with a measured projection</a:t>
+            </a:r>
+          </a:p>
+        </p:txBody>
+      </p:sp>
+      <p:sp>
+        <p:nvSpPr>
+          <p:cNvPr id="31" name="TextBox 30"/>
+          <p:cNvSpPr txBox="1"/>
+          <p:nvPr/>
+        </p:nvSpPr>
+        <p:spPr>
+          <a:xfrm>
+            <a:off x="6108192" y="4187952"/>
+            <a:ext cx="2807208" cy="274320"/>
+          </a:xfrm>
+          <a:prstGeom prst="rect">
+            <a:avLst/>
+          </a:prstGeom>
+          <a:noFill/>
+        </p:spPr>
+        <p:txBody>
+          <a:bodyPr wrap="square" lIns="0" rIns="0" tIns="0" bIns="0" anchor="t">
+            <a:noAutofit/>
+          </a:bodyPr>
+          <a:lstStyle/>
+          <a:p>
+            <a:pPr algn="ctr"/>
+            <a:r>
+              <a:rPr sz="1200" b="1" i="0">
+                <a:solidFill>
+                  <a:srgbClr val="D31145"/>
+                </a:solidFill>
+                <a:latin typeface="Arial"/>
+              </a:rPr>
+              <a:t>THE CORE TEST</a:t>
             </a:r>
           </a:p>
         </p:txBody>

--- a/ppt/group_inno_award/Riley_Submission_Deck_Opus.pptx
+++ b/ppt/group_inno_award/Riley_Submission_Deck_Opus.pptx
@@ -6188,13 +6188,13 @@
               </a:spcBef>
             </a:pPr>
             <a:r>
-              <a:rPr sz="3000" b="0" i="0">
+              <a:rPr sz="2600" b="0" i="0">
                 <a:solidFill>
                   <a:srgbClr val="FFFFFF"/>
                 </a:solidFill>
                 <a:latin typeface="Arial"/>
               </a:rPr>
-              <a:t>AIA’s virtual coworker</a:t>
+              <a:t>AIA’s AI coworker in Microsoft Teams</a:t>
             </a:r>
           </a:p>
         </p:txBody>
@@ -6379,7 +6379,7 @@
         <p:spPr>
           <a:xfrm>
             <a:off x="457200" y="2011680"/>
-            <a:ext cx="2514600" cy="1783080"/>
+            <a:ext cx="2514600" cy="1938528"/>
           </a:xfrm>
           <a:prstGeom prst="roundRect">
             <a:avLst>
@@ -6417,7 +6417,7 @@
         </p:blipFill>
         <p:spPr>
           <a:xfrm>
-            <a:off x="685800" y="2212848"/>
+            <a:off x="685800" y="2139696"/>
             <a:ext cx="457200" cy="457200"/>
           </a:xfrm>
           <a:prstGeom prst="rect">
@@ -6433,7 +6433,7 @@
         </p:nvSpPr>
         <p:spPr>
           <a:xfrm>
-            <a:off x="685800" y="2788920"/>
+            <a:off x="685800" y="2679192"/>
             <a:ext cx="2103120" cy="347472"/>
           </a:xfrm>
           <a:prstGeom prst="rect">
@@ -6468,8 +6468,8 @@
         </p:nvSpPr>
         <p:spPr>
           <a:xfrm>
-            <a:off x="685800" y="3172968"/>
-            <a:ext cx="2103120" cy="566928"/>
+            <a:off x="685800" y="3063240"/>
+            <a:ext cx="2103120" cy="777240"/>
           </a:xfrm>
           <a:prstGeom prst="rect">
             <a:avLst/>
@@ -6531,7 +6531,7 @@
         <p:spPr>
           <a:xfrm>
             <a:off x="3383280" y="2011680"/>
-            <a:ext cx="2514600" cy="1783080"/>
+            <a:ext cx="2514600" cy="1938528"/>
           </a:xfrm>
           <a:prstGeom prst="roundRect">
             <a:avLst>
@@ -6569,7 +6569,7 @@
         </p:blipFill>
         <p:spPr>
           <a:xfrm>
-            <a:off x="3611880" y="2212848"/>
+            <a:off x="3611880" y="2139696"/>
             <a:ext cx="457200" cy="457200"/>
           </a:xfrm>
           <a:prstGeom prst="rect">
@@ -6585,7 +6585,7 @@
         </p:nvSpPr>
         <p:spPr>
           <a:xfrm>
-            <a:off x="3611880" y="2788920"/>
+            <a:off x="3611880" y="2679192"/>
             <a:ext cx="2103120" cy="347472"/>
           </a:xfrm>
           <a:prstGeom prst="rect">
@@ -6620,8 +6620,8 @@
         </p:nvSpPr>
         <p:spPr>
           <a:xfrm>
-            <a:off x="3611880" y="3172968"/>
-            <a:ext cx="2103120" cy="566928"/>
+            <a:off x="3611880" y="3063240"/>
+            <a:ext cx="2103120" cy="777240"/>
           </a:xfrm>
           <a:prstGeom prst="rect">
             <a:avLst/>
@@ -6642,7 +6642,7 @@
                 </a:solidFill>
                 <a:latin typeface="Arial"/>
               </a:rPr>
-              <a:t>On an enterprise AI engine</a:t>
+              <a:t>Built on an existing AI platform, not from scratch</a:t>
             </a:r>
           </a:p>
         </p:txBody>
@@ -6683,7 +6683,7 @@
         <p:spPr>
           <a:xfrm>
             <a:off x="6309360" y="2011680"/>
-            <a:ext cx="2514600" cy="1783080"/>
+            <a:ext cx="2514600" cy="1938528"/>
           </a:xfrm>
           <a:prstGeom prst="roundRect">
             <a:avLst>
@@ -6719,7 +6719,7 @@
         </p:blipFill>
         <p:spPr>
           <a:xfrm>
-            <a:off x="6537960" y="2212848"/>
+            <a:off x="6537960" y="2139696"/>
             <a:ext cx="457200" cy="457200"/>
           </a:xfrm>
           <a:prstGeom prst="rect">
@@ -6735,7 +6735,7 @@
         </p:nvSpPr>
         <p:spPr>
           <a:xfrm>
-            <a:off x="6537960" y="2788920"/>
+            <a:off x="6537960" y="2679192"/>
             <a:ext cx="2103120" cy="347472"/>
           </a:xfrm>
           <a:prstGeom prst="rect">
@@ -6770,8 +6770,8 @@
         </p:nvSpPr>
         <p:spPr>
           <a:xfrm>
-            <a:off x="6537960" y="3172968"/>
-            <a:ext cx="2103120" cy="566928"/>
+            <a:off x="6537960" y="3063240"/>
+            <a:ext cx="2103120" cy="777240"/>
           </a:xfrm>
           <a:prstGeom prst="rect">
             <a:avLst/>
@@ -6833,7 +6833,7 @@
         <p:spPr>
           <a:xfrm>
             <a:off x="9235440" y="2011680"/>
-            <a:ext cx="2514600" cy="1783080"/>
+            <a:ext cx="2514600" cy="1938528"/>
           </a:xfrm>
           <a:prstGeom prst="roundRect">
             <a:avLst>
@@ -6871,7 +6871,7 @@
         </p:blipFill>
         <p:spPr>
           <a:xfrm>
-            <a:off x="9464040" y="2212848"/>
+            <a:off x="9464040" y="2139696"/>
             <a:ext cx="457200" cy="457200"/>
           </a:xfrm>
           <a:prstGeom prst="rect">
@@ -6887,7 +6887,7 @@
         </p:nvSpPr>
         <p:spPr>
           <a:xfrm>
-            <a:off x="9464040" y="2788920"/>
+            <a:off x="9464040" y="2679192"/>
             <a:ext cx="2103120" cy="347472"/>
           </a:xfrm>
           <a:prstGeom prst="rect">
@@ -6922,8 +6922,8 @@
         </p:nvSpPr>
         <p:spPr>
           <a:xfrm>
-            <a:off x="9464040" y="3172968"/>
-            <a:ext cx="2103120" cy="566928"/>
+            <a:off x="9464040" y="3063240"/>
+            <a:ext cx="2103120" cy="777240"/>
           </a:xfrm>
           <a:prstGeom prst="rect">
             <a:avLst/>
@@ -7053,7 +7053,7 @@
           <a:p>
             <a:pPr algn="l"/>
             <a:r>
-              <a:rPr sz="1500" b="1" i="0">
+              <a:rPr sz="1400" b="1" i="0">
                 <a:solidFill>
                   <a:srgbClr val="333D47"/>
                 </a:solidFill>
@@ -7168,7 +7168,7 @@
           <a:p>
             <a:pPr algn="l"/>
             <a:r>
-              <a:rPr sz="1500" b="1" i="0">
+              <a:rPr sz="1400" b="1" i="0">
                 <a:solidFill>
                   <a:srgbClr val="333D47"/>
                 </a:solidFill>
@@ -7283,13 +7283,13 @@
           <a:p>
             <a:pPr algn="l"/>
             <a:r>
-              <a:rPr sz="1500" b="1" i="0">
+              <a:rPr sz="1400" b="1" i="0">
                 <a:solidFill>
                   <a:srgbClr val="333D47"/>
                 </a:solidFill>
                 <a:latin typeface="Arial"/>
               </a:rPr>
-              <a:t>Governed learning</a:t>
+              <a:t>Learning rules agreed with risk and IT</a:t>
             </a:r>
           </a:p>
         </p:txBody>
@@ -7398,13 +7398,13 @@
           <a:p>
             <a:pPr algn="l"/>
             <a:r>
-              <a:rPr sz="1500" b="1" i="0">
+              <a:rPr sz="1400" b="1" i="0">
                 <a:solidFill>
                   <a:srgbClr val="333D47"/>
                 </a:solidFill>
                 <a:latin typeface="Arial"/>
               </a:rPr>
-              <a:t>Independent quality review</a:t>
+              <a:t>Independent quality spot-checks</a:t>
             </a:r>
           </a:p>
         </p:txBody>
@@ -9333,7 +9333,7 @@
                 </a:solidFill>
                 <a:latin typeface="Arial"/>
               </a:rPr>
-              <a:t>AI keeps growing</a:t>
+              <a:t>As AIA builds and adopts more AI</a:t>
             </a:r>
           </a:p>
         </p:txBody>
@@ -9368,7 +9368,7 @@
                 </a:solidFill>
                 <a:latin typeface="Arial"/>
               </a:rPr>
-              <a:t>More capabilities, from more AIA teams</a:t>
+              <a:t>Each team can add new capabilities</a:t>
             </a:r>
           </a:p>
         </p:txBody>
@@ -9716,13 +9716,13 @@
           <a:p>
             <a:pPr algn="l"/>
             <a:r>
-              <a:rPr sz="2200" b="1" i="0">
+              <a:rPr sz="1800" b="1" i="0">
                 <a:solidFill>
                   <a:srgbClr val="FFFFFF"/>
                 </a:solidFill>
                 <a:latin typeface="Arial"/>
               </a:rPr>
-              <a:t>Riley is that layer.</a:t>
+              <a:t>Riley is that layer: one AI coworker that uses the tools for you.</a:t>
             </a:r>
           </a:p>
         </p:txBody>
@@ -12457,8 +12457,8 @@
         </p:nvSpPr>
         <p:spPr>
           <a:xfrm>
-            <a:off x="4800600" y="3730752"/>
-            <a:ext cx="1645920" cy="237744"/>
+            <a:off x="4526280" y="3730752"/>
+            <a:ext cx="1920240" cy="237744"/>
           </a:xfrm>
           <a:prstGeom prst="rect">
             <a:avLst/>
@@ -12551,8 +12551,8 @@
         </p:nvSpPr>
         <p:spPr>
           <a:xfrm>
-            <a:off x="4800600" y="3973068"/>
-            <a:ext cx="1645920" cy="237744"/>
+            <a:off x="4526280" y="3973068"/>
+            <a:ext cx="1920240" cy="237744"/>
           </a:xfrm>
           <a:prstGeom prst="rect">
             <a:avLst/>
@@ -12573,7 +12573,7 @@
                 </a:solidFill>
                 <a:latin typeface="Arial"/>
               </a:rPr>
-              <a:t>AIA AI capability</a:t>
+              <a:t>Another team’s AI tool</a:t>
             </a:r>
           </a:p>
         </p:txBody>
@@ -12645,8 +12645,8 @@
         </p:nvSpPr>
         <p:spPr>
           <a:xfrm>
-            <a:off x="4800600" y="4215384"/>
-            <a:ext cx="1645920" cy="237744"/>
+            <a:off x="4526280" y="4215384"/>
+            <a:ext cx="1920240" cy="237744"/>
           </a:xfrm>
           <a:prstGeom prst="rect">
             <a:avLst/>
@@ -12739,8 +12739,8 @@
         </p:nvSpPr>
         <p:spPr>
           <a:xfrm>
-            <a:off x="4800600" y="4457700"/>
-            <a:ext cx="1645920" cy="237744"/>
+            <a:off x="4526280" y="4457700"/>
+            <a:ext cx="1920240" cy="237744"/>
           </a:xfrm>
           <a:prstGeom prst="rect">
             <a:avLst/>
@@ -13411,7 +13411,7 @@
         <p:spPr>
           <a:xfrm>
             <a:off x="7909560" y="2020824"/>
-            <a:ext cx="3657600" cy="274320"/>
+            <a:ext cx="3794760" cy="274320"/>
           </a:xfrm>
           <a:prstGeom prst="rect">
             <a:avLst/>
@@ -13426,7 +13426,7 @@
           <a:p>
             <a:pPr algn="l"/>
             <a:r>
-              <a:rPr sz="1400" b="0" i="0">
+              <a:rPr sz="1300" b="0" i="0">
                 <a:solidFill>
                   <a:srgbClr val="5A6570"/>
                 </a:solidFill>
@@ -13614,7 +13614,7 @@
         <p:spPr>
           <a:xfrm>
             <a:off x="7909560" y="2880360"/>
-            <a:ext cx="3657600" cy="274320"/>
+            <a:ext cx="3794760" cy="274320"/>
           </a:xfrm>
           <a:prstGeom prst="rect">
             <a:avLst/>
@@ -13629,13 +13629,13 @@
           <a:p>
             <a:pPr algn="l"/>
             <a:r>
-              <a:rPr sz="1400" b="0" i="0">
+              <a:rPr sz="1300" b="0" i="0">
                 <a:solidFill>
                   <a:srgbClr val="5A6570"/>
                 </a:solidFill>
                 <a:latin typeface="Arial"/>
               </a:rPr>
-              <a:t>Picks capabilities, within your permissions</a:t>
+              <a:t>Decides which data, systems and AI tools to use</a:t>
             </a:r>
           </a:p>
         </p:txBody>
@@ -13746,7 +13746,7 @@
         <p:spPr>
           <a:xfrm>
             <a:off x="7909560" y="3538727"/>
-            <a:ext cx="3657600" cy="274320"/>
+            <a:ext cx="3794760" cy="274320"/>
           </a:xfrm>
           <a:prstGeom prst="rect">
             <a:avLst/>
@@ -13761,7 +13761,7 @@
           <a:p>
             <a:pPr algn="l"/>
             <a:r>
-              <a:rPr sz="1400" b="0" i="0">
+              <a:rPr sz="1300" b="0" i="0">
                 <a:solidFill>
                   <a:srgbClr val="5A6570"/>
                 </a:solidFill>
@@ -13878,7 +13878,7 @@
         <p:spPr>
           <a:xfrm>
             <a:off x="7909560" y="4197096"/>
-            <a:ext cx="3657600" cy="274320"/>
+            <a:ext cx="3794760" cy="274320"/>
           </a:xfrm>
           <a:prstGeom prst="rect">
             <a:avLst/>
@@ -13893,7 +13893,7 @@
           <a:p>
             <a:pPr algn="l"/>
             <a:r>
-              <a:rPr sz="1400" b="0" i="0">
+              <a:rPr sz="1300" b="0" i="0">
                 <a:solidFill>
                   <a:srgbClr val="5A6570"/>
                 </a:solidFill>
@@ -14081,7 +14081,7 @@
         <p:spPr>
           <a:xfrm>
             <a:off x="7909560" y="5093208"/>
-            <a:ext cx="3657600" cy="502920"/>
+            <a:ext cx="3794760" cy="502920"/>
           </a:xfrm>
           <a:prstGeom prst="rect">
             <a:avLst/>
@@ -14096,7 +14096,7 @@
           <a:p>
             <a:pPr algn="l"/>
             <a:r>
-              <a:rPr sz="1400" b="0" i="0">
+              <a:rPr sz="1300" b="0" i="0">
                 <a:solidFill>
                   <a:srgbClr val="5A6570"/>
                 </a:solidFill>
@@ -14896,7 +14896,7 @@
                 </a:solidFill>
                 <a:latin typeface="Arial"/>
               </a:rPr>
-              <a:t>nearly 20% of the week (McKinsey, 2012)</a:t>
+              <a:t>looking for information or colleagues (McKinsey, 2012)</a:t>
             </a:r>
           </a:p>
         </p:txBody>
@@ -15345,7 +15345,7 @@
                 </a:solidFill>
                 <a:latin typeface="Arial"/>
               </a:rPr>
-              <a:t>Active employee effort</a:t>
+              <a:t>Employee time per task</a:t>
             </a:r>
           </a:p>
         </p:txBody>
@@ -15415,7 +15415,7 @@
                 </a:solidFill>
                 <a:latin typeface="Arial"/>
               </a:rPr>
-              <a:t>End-to-end time</a:t>
+              <a:t>Time to finished work</a:t>
             </a:r>
           </a:p>
         </p:txBody>
@@ -15892,8 +15892,8 @@
         </p:nvSpPr>
         <p:spPr>
           <a:xfrm>
-            <a:off x="457200" y="4498848"/>
-            <a:ext cx="2916936" cy="1051560"/>
+            <a:off x="457200" y="4462272"/>
+            <a:ext cx="2916936" cy="1170432"/>
           </a:xfrm>
           <a:prstGeom prst="homePlate">
             <a:avLst>
@@ -15946,8 +15946,8 @@
         </p:nvSpPr>
         <p:spPr>
           <a:xfrm>
-            <a:off x="3282696" y="4498848"/>
-            <a:ext cx="2916936" cy="1051560"/>
+            <a:off x="3282696" y="4462272"/>
+            <a:ext cx="2916936" cy="1170432"/>
           </a:xfrm>
           <a:prstGeom prst="chevron">
             <a:avLst>
@@ -16000,8 +16000,8 @@
         </p:nvSpPr>
         <p:spPr>
           <a:xfrm>
-            <a:off x="6108192" y="4498848"/>
-            <a:ext cx="2916936" cy="1051560"/>
+            <a:off x="6108192" y="4462272"/>
+            <a:ext cx="2916936" cy="1170432"/>
           </a:xfrm>
           <a:prstGeom prst="chevron">
             <a:avLst>
@@ -16041,7 +16041,7 @@
                 </a:solidFill>
                 <a:latin typeface="Arial"/>
               </a:rPr>
-              <a:t>Prove the multiplier: add a capability or workflow</a:t>
+              <a:t>Add another team’s AI tool or a second workflow</a:t>
             </a:r>
           </a:p>
         </p:txBody>
@@ -16054,8 +16054,8 @@
         </p:nvSpPr>
         <p:spPr>
           <a:xfrm>
-            <a:off x="8933688" y="4498848"/>
-            <a:ext cx="2916936" cy="1051560"/>
+            <a:off x="8933688" y="4462272"/>
+            <a:ext cx="2916936" cy="1170432"/>
           </a:xfrm>
           <a:prstGeom prst="chevron">
             <a:avLst>
@@ -16108,7 +16108,7 @@
         </p:nvSpPr>
         <p:spPr>
           <a:xfrm>
-            <a:off x="6108192" y="4187952"/>
+            <a:off x="6108192" y="4151376"/>
             <a:ext cx="2807208" cy="274320"/>
           </a:xfrm>
           <a:prstGeom prst="rect">
@@ -16289,19 +16289,19 @@
                 </a:solidFill>
                 <a:latin typeface="Arial"/>
               </a:rPr>
-              <a:t>Not the AI model.</a:t>
+              <a:t>Copilot could be the engine.</a:t>
             </a:r>
           </a:p>
           <a:p>
             <a:pPr algn="l"/>
             <a:r>
-              <a:rPr sz="2200" b="1" i="0">
+              <a:rPr sz="2000" b="1" i="0">
                 <a:solidFill>
                   <a:srgbClr val="333D47"/>
                 </a:solidFill>
                 <a:latin typeface="Arial"/>
               </a:rPr>
-              <a:t>Riley is the AIA layer that turns separate AI capabilities into one coworker employees can use.</a:t>
+              <a:t>Riley is not the AI model. It is the AIA layer that turns separate AI capabilities into one coworker employees can use.</a:t>
             </a:r>
           </a:p>
         </p:txBody>
@@ -16746,7 +16746,7 @@
                 </a:solidFill>
                 <a:latin typeface="Arial"/>
               </a:rPr>
-              <a:t>BUILD DECISION</a:t>
+              <a:t>CHOSEN LATER</a:t>
             </a:r>
           </a:p>
         </p:txBody>
@@ -16879,8 +16879,8 @@
         </p:nvSpPr>
         <p:spPr>
           <a:xfrm>
-            <a:off x="2788920" y="1645920"/>
-            <a:ext cx="2103120" cy="292608"/>
+            <a:off x="2788920" y="1261872"/>
+            <a:ext cx="8823960" cy="310896"/>
           </a:xfrm>
           <a:prstGeom prst="rect">
             <a:avLst/>
@@ -16895,13 +16895,13 @@
           <a:p>
             <a:pPr algn="ctr"/>
             <a:r>
-              <a:rPr sz="1400" b="1" i="0">
-                <a:solidFill>
-                  <a:srgbClr val="5A6570"/>
-                </a:solidFill>
-                <a:latin typeface="Arial"/>
-              </a:rPr>
-              <a:t>1 capability</a:t>
+              <a:rPr sz="1500" b="1" i="0">
+                <a:solidFill>
+                  <a:srgbClr val="D31145"/>
+                </a:solidFill>
+                <a:latin typeface="Arial"/>
+              </a:rPr>
+              <a:t>AI capabilities AIA adds  →</a:t>
             </a:r>
           </a:p>
         </p:txBody>
@@ -16914,7 +16914,7 @@
         </p:nvSpPr>
         <p:spPr>
           <a:xfrm>
-            <a:off x="5029200" y="1645920"/>
+            <a:off x="2788920" y="1645920"/>
             <a:ext cx="2103120" cy="292608"/>
           </a:xfrm>
           <a:prstGeom prst="rect">
@@ -16936,7 +16936,7 @@
                 </a:solidFill>
                 <a:latin typeface="Arial"/>
               </a:rPr>
-              <a:t>2 capabilities</a:t>
+              <a:t>1 capability</a:t>
             </a:r>
           </a:p>
         </p:txBody>
@@ -16949,7 +16949,7 @@
         </p:nvSpPr>
         <p:spPr>
           <a:xfrm>
-            <a:off x="7269480" y="1645920"/>
+            <a:off x="5029200" y="1645920"/>
             <a:ext cx="2103120" cy="292608"/>
           </a:xfrm>
           <a:prstGeom prst="rect">
@@ -16971,7 +16971,7 @@
                 </a:solidFill>
                 <a:latin typeface="Arial"/>
               </a:rPr>
-              <a:t>3 capabilities</a:t>
+              <a:t>2 capabilities</a:t>
             </a:r>
           </a:p>
         </p:txBody>
@@ -16984,7 +16984,7 @@
         </p:nvSpPr>
         <p:spPr>
           <a:xfrm>
-            <a:off x="9509760" y="1645920"/>
+            <a:off x="7269480" y="1645920"/>
             <a:ext cx="2103120" cy="292608"/>
           </a:xfrm>
           <a:prstGeom prst="rect">
@@ -17006,6 +17006,41 @@
                 </a:solidFill>
                 <a:latin typeface="Arial"/>
               </a:rPr>
+              <a:t>3 capabilities</a:t>
+            </a:r>
+          </a:p>
+        </p:txBody>
+      </p:sp>
+      <p:sp>
+        <p:nvSpPr>
+          <p:cNvPr id="10" name="TextBox 9"/>
+          <p:cNvSpPr txBox="1"/>
+          <p:nvPr/>
+        </p:nvSpPr>
+        <p:spPr>
+          <a:xfrm>
+            <a:off x="9509760" y="1645920"/>
+            <a:ext cx="2103120" cy="292608"/>
+          </a:xfrm>
+          <a:prstGeom prst="rect">
+            <a:avLst/>
+          </a:prstGeom>
+          <a:noFill/>
+        </p:spPr>
+        <p:txBody>
+          <a:bodyPr wrap="square" lIns="0" rIns="0" tIns="0" bIns="0" anchor="t">
+            <a:noAutofit/>
+          </a:bodyPr>
+          <a:lstStyle/>
+          <a:p>
+            <a:pPr algn="ctr"/>
+            <a:r>
+              <a:rPr sz="1400" b="1" i="0">
+                <a:solidFill>
+                  <a:srgbClr val="5A6570"/>
+                </a:solidFill>
+                <a:latin typeface="Arial"/>
+              </a:rPr>
               <a:t>4 capabilities</a:t>
             </a:r>
           </a:p>
@@ -17013,7 +17048,7 @@
       </p:sp>
       <p:sp>
         <p:nvSpPr>
-          <p:cNvPr id="10" name="Rounded Rectangle 9"/>
+          <p:cNvPr id="11" name="Rounded Rectangle 10"/>
           <p:cNvSpPr/>
           <p:nvPr/>
         </p:nvSpPr>
@@ -17042,7 +17077,7 @@
       </p:sp>
       <p:sp>
         <p:nvSpPr>
-          <p:cNvPr id="11" name="TextBox 10"/>
+          <p:cNvPr id="12" name="TextBox 11"/>
           <p:cNvSpPr txBox="1"/>
           <p:nvPr/>
         </p:nvSpPr>
@@ -17077,7 +17112,7 @@
       </p:sp>
       <p:sp>
         <p:nvSpPr>
-          <p:cNvPr id="12" name="TextBox 11"/>
+          <p:cNvPr id="13" name="TextBox 12"/>
           <p:cNvSpPr txBox="1"/>
           <p:nvPr/>
         </p:nvSpPr>
@@ -17112,7 +17147,7 @@
       </p:sp>
       <p:sp>
         <p:nvSpPr>
-          <p:cNvPr id="13" name="Rounded Rectangle 12"/>
+          <p:cNvPr id="14" name="Rounded Rectangle 13"/>
           <p:cNvSpPr/>
           <p:nvPr/>
         </p:nvSpPr>
@@ -17143,7 +17178,7 @@
       </p:sp>
       <p:pic>
         <p:nvPicPr>
-          <p:cNvPr id="14" name="Picture 13" descr="LuAppWindow_c.png"/>
+          <p:cNvPr id="15" name="Picture 14" descr="LuAppWindow_c.png"/>
           <p:cNvPicPr>
             <a:picLocks noChangeAspect="1"/>
           </p:cNvPicPr>
@@ -17167,7 +17202,7 @@
       </p:pic>
       <p:sp>
         <p:nvSpPr>
-          <p:cNvPr id="15" name="TextBox 14"/>
+          <p:cNvPr id="16" name="TextBox 15"/>
           <p:cNvSpPr txBox="1"/>
           <p:nvPr/>
         </p:nvSpPr>
@@ -17202,7 +17237,7 @@
       </p:sp>
       <p:sp>
         <p:nvSpPr>
-          <p:cNvPr id="16" name="Rounded Rectangle 15"/>
+          <p:cNvPr id="17" name="Rounded Rectangle 16"/>
           <p:cNvSpPr/>
           <p:nvPr/>
         </p:nvSpPr>
@@ -17233,7 +17268,7 @@
       </p:sp>
       <p:pic>
         <p:nvPicPr>
-          <p:cNvPr id="17" name="Picture 16" descr="LuAppWindow_c.png"/>
+          <p:cNvPr id="18" name="Picture 17" descr="LuAppWindow_c.png"/>
           <p:cNvPicPr>
             <a:picLocks noChangeAspect="1"/>
           </p:cNvPicPr>
@@ -17257,7 +17292,7 @@
       </p:pic>
       <p:sp>
         <p:nvSpPr>
-          <p:cNvPr id="18" name="Rounded Rectangle 17"/>
+          <p:cNvPr id="19" name="Rounded Rectangle 18"/>
           <p:cNvSpPr/>
           <p:nvPr/>
         </p:nvSpPr>
@@ -17288,7 +17323,7 @@
       </p:sp>
       <p:pic>
         <p:nvPicPr>
-          <p:cNvPr id="19" name="Picture 18" descr="LuAppWindow_c.png"/>
+          <p:cNvPr id="20" name="Picture 19" descr="LuAppWindow_c.png"/>
           <p:cNvPicPr>
             <a:picLocks noChangeAspect="1"/>
           </p:cNvPicPr>
@@ -17312,7 +17347,7 @@
       </p:pic>
       <p:sp>
         <p:nvSpPr>
-          <p:cNvPr id="20" name="TextBox 19"/>
+          <p:cNvPr id="21" name="TextBox 20"/>
           <p:cNvSpPr txBox="1"/>
           <p:nvPr/>
         </p:nvSpPr>
@@ -17347,7 +17382,7 @@
       </p:sp>
       <p:sp>
         <p:nvSpPr>
-          <p:cNvPr id="21" name="Rounded Rectangle 20"/>
+          <p:cNvPr id="22" name="Rounded Rectangle 21"/>
           <p:cNvSpPr/>
           <p:nvPr/>
         </p:nvSpPr>
@@ -17378,7 +17413,7 @@
       </p:sp>
       <p:pic>
         <p:nvPicPr>
-          <p:cNvPr id="22" name="Picture 21" descr="LuAppWindow_c.png"/>
+          <p:cNvPr id="23" name="Picture 22" descr="LuAppWindow_c.png"/>
           <p:cNvPicPr>
             <a:picLocks noChangeAspect="1"/>
           </p:cNvPicPr>
@@ -17402,7 +17437,7 @@
       </p:pic>
       <p:sp>
         <p:nvSpPr>
-          <p:cNvPr id="23" name="Rounded Rectangle 22"/>
+          <p:cNvPr id="24" name="Rounded Rectangle 23"/>
           <p:cNvSpPr/>
           <p:nvPr/>
         </p:nvSpPr>
@@ -17433,7 +17468,7 @@
       </p:sp>
       <p:pic>
         <p:nvPicPr>
-          <p:cNvPr id="24" name="Picture 23" descr="LuAppWindow_c.png"/>
+          <p:cNvPr id="25" name="Picture 24" descr="LuAppWindow_c.png"/>
           <p:cNvPicPr>
             <a:picLocks noChangeAspect="1"/>
           </p:cNvPicPr>
@@ -17457,7 +17492,7 @@
       </p:pic>
       <p:sp>
         <p:nvSpPr>
-          <p:cNvPr id="25" name="Rounded Rectangle 24"/>
+          <p:cNvPr id="26" name="Rounded Rectangle 25"/>
           <p:cNvSpPr/>
           <p:nvPr/>
         </p:nvSpPr>
@@ -17488,7 +17523,7 @@
       </p:sp>
       <p:pic>
         <p:nvPicPr>
-          <p:cNvPr id="26" name="Picture 25" descr="LuAppWindow_c.png"/>
+          <p:cNvPr id="27" name="Picture 26" descr="LuAppWindow_c.png"/>
           <p:cNvPicPr>
             <a:picLocks noChangeAspect="1"/>
           </p:cNvPicPr>
@@ -17512,7 +17547,7 @@
       </p:pic>
       <p:sp>
         <p:nvSpPr>
-          <p:cNvPr id="27" name="TextBox 26"/>
+          <p:cNvPr id="28" name="TextBox 27"/>
           <p:cNvSpPr txBox="1"/>
           <p:nvPr/>
         </p:nvSpPr>
@@ -17547,7 +17582,7 @@
       </p:sp>
       <p:sp>
         <p:nvSpPr>
-          <p:cNvPr id="28" name="Rounded Rectangle 27"/>
+          <p:cNvPr id="29" name="Rounded Rectangle 28"/>
           <p:cNvSpPr/>
           <p:nvPr/>
         </p:nvSpPr>
@@ -17578,7 +17613,7 @@
       </p:sp>
       <p:pic>
         <p:nvPicPr>
-          <p:cNvPr id="29" name="Picture 28" descr="LuAppWindow_c.png"/>
+          <p:cNvPr id="30" name="Picture 29" descr="LuAppWindow_c.png"/>
           <p:cNvPicPr>
             <a:picLocks noChangeAspect="1"/>
           </p:cNvPicPr>
@@ -17602,7 +17637,7 @@
       </p:pic>
       <p:sp>
         <p:nvSpPr>
-          <p:cNvPr id="30" name="Rounded Rectangle 29"/>
+          <p:cNvPr id="31" name="Rounded Rectangle 30"/>
           <p:cNvSpPr/>
           <p:nvPr/>
         </p:nvSpPr>
@@ -17633,7 +17668,7 @@
       </p:sp>
       <p:pic>
         <p:nvPicPr>
-          <p:cNvPr id="31" name="Picture 30" descr="LuAppWindow_c.png"/>
+          <p:cNvPr id="32" name="Picture 31" descr="LuAppWindow_c.png"/>
           <p:cNvPicPr>
             <a:picLocks noChangeAspect="1"/>
           </p:cNvPicPr>
@@ -17657,7 +17692,7 @@
       </p:pic>
       <p:sp>
         <p:nvSpPr>
-          <p:cNvPr id="32" name="Rounded Rectangle 31"/>
+          <p:cNvPr id="33" name="Rounded Rectangle 32"/>
           <p:cNvSpPr/>
           <p:nvPr/>
         </p:nvSpPr>
@@ -17688,7 +17723,7 @@
       </p:sp>
       <p:pic>
         <p:nvPicPr>
-          <p:cNvPr id="33" name="Picture 32" descr="LuAppWindow_c.png"/>
+          <p:cNvPr id="34" name="Picture 33" descr="LuAppWindow_c.png"/>
           <p:cNvPicPr>
             <a:picLocks noChangeAspect="1"/>
           </p:cNvPicPr>
@@ -17712,7 +17747,7 @@
       </p:pic>
       <p:sp>
         <p:nvSpPr>
-          <p:cNvPr id="34" name="Rounded Rectangle 33"/>
+          <p:cNvPr id="35" name="Rounded Rectangle 34"/>
           <p:cNvSpPr/>
           <p:nvPr/>
         </p:nvSpPr>
@@ -17743,7 +17778,7 @@
       </p:sp>
       <p:pic>
         <p:nvPicPr>
-          <p:cNvPr id="35" name="Picture 34" descr="LuAppWindow_c.png"/>
+          <p:cNvPr id="36" name="Picture 35" descr="LuAppWindow_c.png"/>
           <p:cNvPicPr>
             <a:picLocks noChangeAspect="1"/>
           </p:cNvPicPr>
@@ -17767,7 +17802,7 @@
       </p:pic>
       <p:sp>
         <p:nvSpPr>
-          <p:cNvPr id="36" name="TextBox 35"/>
+          <p:cNvPr id="37" name="TextBox 36"/>
           <p:cNvSpPr txBox="1"/>
           <p:nvPr/>
         </p:nvSpPr>
@@ -17802,7 +17837,7 @@
       </p:sp>
       <p:sp>
         <p:nvSpPr>
-          <p:cNvPr id="37" name="Rounded Rectangle 36"/>
+          <p:cNvPr id="38" name="Rounded Rectangle 37"/>
           <p:cNvSpPr/>
           <p:nvPr/>
         </p:nvSpPr>
@@ -17831,7 +17866,7 @@
       </p:sp>
       <p:sp>
         <p:nvSpPr>
-          <p:cNvPr id="38" name="TextBox 37"/>
+          <p:cNvPr id="39" name="TextBox 38"/>
           <p:cNvSpPr txBox="1"/>
           <p:nvPr/>
         </p:nvSpPr>
@@ -17866,7 +17901,7 @@
       </p:sp>
       <p:sp>
         <p:nvSpPr>
-          <p:cNvPr id="39" name="TextBox 38"/>
+          <p:cNvPr id="40" name="TextBox 39"/>
           <p:cNvSpPr txBox="1"/>
           <p:nvPr/>
         </p:nvSpPr>
@@ -17901,7 +17936,7 @@
       </p:sp>
       <p:cxnSp>
         <p:nvCxnSpPr>
-          <p:cNvPr id="40" name="Connector 39"/>
+          <p:cNvPr id="41" name="Connector 40"/>
           <p:cNvCxnSpPr/>
           <p:nvPr/>
         </p:nvCxnSpPr>
@@ -17936,7 +17971,7 @@
       </p:cxnSp>
       <p:sp>
         <p:nvSpPr>
-          <p:cNvPr id="41" name="Oval 40"/>
+          <p:cNvPr id="42" name="Oval 41"/>
           <p:cNvSpPr/>
           <p:nvPr/>
         </p:nvSpPr>
@@ -17965,7 +18000,7 @@
       </p:sp>
       <p:sp>
         <p:nvSpPr>
-          <p:cNvPr id="42" name="Oval 41"/>
+          <p:cNvPr id="43" name="Oval 42"/>
           <p:cNvSpPr/>
           <p:nvPr/>
         </p:nvSpPr>
@@ -17992,7 +18027,7 @@
       </p:sp>
       <p:sp>
         <p:nvSpPr>
-          <p:cNvPr id="43" name="TextBox 42"/>
+          <p:cNvPr id="44" name="TextBox 43"/>
           <p:cNvSpPr txBox="1"/>
           <p:nvPr/>
         </p:nvSpPr>
@@ -18027,7 +18062,7 @@
       </p:sp>
       <p:sp>
         <p:nvSpPr>
-          <p:cNvPr id="44" name="TextBox 43"/>
+          <p:cNvPr id="45" name="TextBox 44"/>
           <p:cNvSpPr txBox="1"/>
           <p:nvPr/>
         </p:nvSpPr>
@@ -18062,7 +18097,7 @@
       </p:sp>
       <p:cxnSp>
         <p:nvCxnSpPr>
-          <p:cNvPr id="45" name="Connector 44"/>
+          <p:cNvPr id="46" name="Connector 45"/>
           <p:cNvCxnSpPr/>
           <p:nvPr/>
         </p:nvCxnSpPr>
@@ -18097,7 +18132,7 @@
       </p:cxnSp>
       <p:sp>
         <p:nvSpPr>
-          <p:cNvPr id="46" name="Oval 45"/>
+          <p:cNvPr id="47" name="Oval 46"/>
           <p:cNvSpPr/>
           <p:nvPr/>
         </p:nvSpPr>
@@ -18126,7 +18161,7 @@
       </p:sp>
       <p:cxnSp>
         <p:nvCxnSpPr>
-          <p:cNvPr id="47" name="Connector 46"/>
+          <p:cNvPr id="48" name="Connector 47"/>
           <p:cNvCxnSpPr/>
           <p:nvPr/>
         </p:nvCxnSpPr>
@@ -18161,7 +18196,7 @@
       </p:cxnSp>
       <p:sp>
         <p:nvSpPr>
-          <p:cNvPr id="48" name="Oval 47"/>
+          <p:cNvPr id="49" name="Oval 48"/>
           <p:cNvSpPr/>
           <p:nvPr/>
         </p:nvSpPr>
@@ -18190,7 +18225,7 @@
       </p:sp>
       <p:sp>
         <p:nvSpPr>
-          <p:cNvPr id="49" name="Oval 48"/>
+          <p:cNvPr id="50" name="Oval 49"/>
           <p:cNvSpPr/>
           <p:nvPr/>
         </p:nvSpPr>
@@ -18217,7 +18252,7 @@
       </p:sp>
       <p:sp>
         <p:nvSpPr>
-          <p:cNvPr id="50" name="TextBox 49"/>
+          <p:cNvPr id="51" name="TextBox 50"/>
           <p:cNvSpPr txBox="1"/>
           <p:nvPr/>
         </p:nvSpPr>
@@ -18252,7 +18287,7 @@
       </p:sp>
       <p:sp>
         <p:nvSpPr>
-          <p:cNvPr id="51" name="TextBox 50"/>
+          <p:cNvPr id="52" name="TextBox 51"/>
           <p:cNvSpPr txBox="1"/>
           <p:nvPr/>
         </p:nvSpPr>
@@ -18287,7 +18322,7 @@
       </p:sp>
       <p:cxnSp>
         <p:nvCxnSpPr>
-          <p:cNvPr id="52" name="Connector 51"/>
+          <p:cNvPr id="53" name="Connector 52"/>
           <p:cNvCxnSpPr/>
           <p:nvPr/>
         </p:nvCxnSpPr>
@@ -18322,7 +18357,7 @@
       </p:cxnSp>
       <p:sp>
         <p:nvSpPr>
-          <p:cNvPr id="53" name="Oval 52"/>
+          <p:cNvPr id="54" name="Oval 53"/>
           <p:cNvSpPr/>
           <p:nvPr/>
         </p:nvSpPr>
@@ -18351,7 +18386,7 @@
       </p:sp>
       <p:cxnSp>
         <p:nvCxnSpPr>
-          <p:cNvPr id="54" name="Connector 53"/>
+          <p:cNvPr id="55" name="Connector 54"/>
           <p:cNvCxnSpPr/>
           <p:nvPr/>
         </p:nvCxnSpPr>
@@ -18386,7 +18421,7 @@
       </p:cxnSp>
       <p:sp>
         <p:nvSpPr>
-          <p:cNvPr id="55" name="Oval 54"/>
+          <p:cNvPr id="56" name="Oval 55"/>
           <p:cNvSpPr/>
           <p:nvPr/>
         </p:nvSpPr>
@@ -18415,7 +18450,7 @@
       </p:sp>
       <p:cxnSp>
         <p:nvCxnSpPr>
-          <p:cNvPr id="56" name="Connector 55"/>
+          <p:cNvPr id="57" name="Connector 56"/>
           <p:cNvCxnSpPr/>
           <p:nvPr/>
         </p:nvCxnSpPr>
@@ -18450,7 +18485,7 @@
       </p:cxnSp>
       <p:sp>
         <p:nvSpPr>
-          <p:cNvPr id="57" name="Oval 56"/>
+          <p:cNvPr id="58" name="Oval 57"/>
           <p:cNvSpPr/>
           <p:nvPr/>
         </p:nvSpPr>
@@ -18479,7 +18514,7 @@
       </p:sp>
       <p:sp>
         <p:nvSpPr>
-          <p:cNvPr id="58" name="Oval 57"/>
+          <p:cNvPr id="59" name="Oval 58"/>
           <p:cNvSpPr/>
           <p:nvPr/>
         </p:nvSpPr>
@@ -18506,7 +18541,7 @@
       </p:sp>
       <p:sp>
         <p:nvSpPr>
-          <p:cNvPr id="59" name="TextBox 58"/>
+          <p:cNvPr id="60" name="TextBox 59"/>
           <p:cNvSpPr txBox="1"/>
           <p:nvPr/>
         </p:nvSpPr>
@@ -18541,7 +18576,7 @@
       </p:sp>
       <p:sp>
         <p:nvSpPr>
-          <p:cNvPr id="60" name="TextBox 59"/>
+          <p:cNvPr id="61" name="TextBox 60"/>
           <p:cNvSpPr txBox="1"/>
           <p:nvPr/>
         </p:nvSpPr>
@@ -18576,7 +18611,7 @@
       </p:sp>
       <p:cxnSp>
         <p:nvCxnSpPr>
-          <p:cNvPr id="61" name="Connector 60"/>
+          <p:cNvPr id="62" name="Connector 61"/>
           <p:cNvCxnSpPr/>
           <p:nvPr/>
         </p:nvCxnSpPr>
@@ -18611,7 +18646,7 @@
       </p:cxnSp>
       <p:sp>
         <p:nvSpPr>
-          <p:cNvPr id="62" name="Oval 61"/>
+          <p:cNvPr id="63" name="Oval 62"/>
           <p:cNvSpPr/>
           <p:nvPr/>
         </p:nvSpPr>
@@ -18640,7 +18675,7 @@
       </p:sp>
       <p:cxnSp>
         <p:nvCxnSpPr>
-          <p:cNvPr id="63" name="Connector 62"/>
+          <p:cNvPr id="64" name="Connector 63"/>
           <p:cNvCxnSpPr/>
           <p:nvPr/>
         </p:nvCxnSpPr>
@@ -18675,7 +18710,7 @@
       </p:cxnSp>
       <p:sp>
         <p:nvSpPr>
-          <p:cNvPr id="64" name="Oval 63"/>
+          <p:cNvPr id="65" name="Oval 64"/>
           <p:cNvSpPr/>
           <p:nvPr/>
         </p:nvSpPr>
@@ -18704,7 +18739,7 @@
       </p:sp>
       <p:cxnSp>
         <p:nvCxnSpPr>
-          <p:cNvPr id="65" name="Connector 64"/>
+          <p:cNvPr id="66" name="Connector 65"/>
           <p:cNvCxnSpPr/>
           <p:nvPr/>
         </p:nvCxnSpPr>
@@ -18739,7 +18774,7 @@
       </p:cxnSp>
       <p:sp>
         <p:nvSpPr>
-          <p:cNvPr id="66" name="Oval 65"/>
+          <p:cNvPr id="67" name="Oval 66"/>
           <p:cNvSpPr/>
           <p:nvPr/>
         </p:nvSpPr>
@@ -18768,7 +18803,7 @@
       </p:sp>
       <p:cxnSp>
         <p:nvCxnSpPr>
-          <p:cNvPr id="67" name="Connector 66"/>
+          <p:cNvPr id="68" name="Connector 67"/>
           <p:cNvCxnSpPr/>
           <p:nvPr/>
         </p:nvCxnSpPr>
@@ -18803,7 +18838,7 @@
       </p:cxnSp>
       <p:sp>
         <p:nvSpPr>
-          <p:cNvPr id="68" name="Oval 67"/>
+          <p:cNvPr id="69" name="Oval 68"/>
           <p:cNvSpPr/>
           <p:nvPr/>
         </p:nvSpPr>
@@ -18832,7 +18867,7 @@
       </p:sp>
       <p:sp>
         <p:nvSpPr>
-          <p:cNvPr id="69" name="Oval 68"/>
+          <p:cNvPr id="70" name="Oval 69"/>
           <p:cNvSpPr/>
           <p:nvPr/>
         </p:nvSpPr>
@@ -18859,7 +18894,7 @@
       </p:sp>
       <p:sp>
         <p:nvSpPr>
-          <p:cNvPr id="70" name="TextBox 69"/>
+          <p:cNvPr id="71" name="TextBox 70"/>
           <p:cNvSpPr txBox="1"/>
           <p:nvPr/>
         </p:nvSpPr>
@@ -18894,7 +18929,7 @@
       </p:sp>
       <p:sp>
         <p:nvSpPr>
-          <p:cNvPr id="71" name="TextBox 70"/>
+          <p:cNvPr id="72" name="TextBox 71"/>
           <p:cNvSpPr txBox="1"/>
           <p:nvPr/>
         </p:nvSpPr>
@@ -18929,7 +18964,7 @@
       </p:sp>
       <p:pic>
         <p:nvPicPr>
-          <p:cNvPr id="72" name="Picture 71" descr="LuPlug_g.png"/>
+          <p:cNvPr id="73" name="Picture 72" descr="LuPlug_g.png"/>
           <p:cNvPicPr>
             <a:picLocks noChangeAspect="1"/>
           </p:cNvPicPr>
@@ -18953,7 +18988,7 @@
       </p:pic>
       <p:sp>
         <p:nvSpPr>
-          <p:cNvPr id="73" name="TextBox 72"/>
+          <p:cNvPr id="74" name="TextBox 73"/>
           <p:cNvSpPr txBox="1"/>
           <p:nvPr/>
         </p:nvSpPr>

--- a/ppt/group_inno_award/Riley_Submission_Deck_Opus.pptx
+++ b/ppt/group_inno_award/Riley_Submission_Deck_Opus.pptx
@@ -6957,12 +6957,12 @@
         </p:nvSpPr>
         <p:spPr>
           <a:xfrm>
-            <a:off x="457200" y="4206240"/>
-            <a:ext cx="2697480" cy="1005840"/>
+            <a:off x="457200" y="4114800"/>
+            <a:ext cx="2697480" cy="1600200"/>
           </a:xfrm>
           <a:prstGeom prst="roundRect">
             <a:avLst>
-              <a:gd name="adj" fmla="val 10000"/>
+              <a:gd name="adj" fmla="val 8000"/>
             </a:avLst>
           </a:prstGeom>
           <a:solidFill>
@@ -6986,8 +6986,8 @@
         </p:nvSpPr>
         <p:spPr>
           <a:xfrm>
-            <a:off x="658368" y="4407408"/>
-            <a:ext cx="603504" cy="603504"/>
+            <a:off x="640080" y="4261104"/>
+            <a:ext cx="512064" cy="512064"/>
           </a:xfrm>
           <a:prstGeom prst="ellipse">
             <a:avLst/>
@@ -7021,8 +7021,8 @@
         </p:blipFill>
         <p:spPr>
           <a:xfrm>
-            <a:off x="803208" y="4552248"/>
-            <a:ext cx="313822" cy="313822"/>
+            <a:off x="762975" y="4383999"/>
+            <a:ext cx="266273" cy="266273"/>
           </a:xfrm>
           <a:prstGeom prst="rect">
             <a:avLst/>
@@ -7037,8 +7037,8 @@
         </p:nvSpPr>
         <p:spPr>
           <a:xfrm>
-            <a:off x="1399032" y="4206240"/>
-            <a:ext cx="1673352" cy="1005840"/>
+            <a:off x="1280160" y="4187952"/>
+            <a:ext cx="1764792" cy="658368"/>
           </a:xfrm>
           <a:prstGeom prst="rect">
             <a:avLst/>
@@ -7066,18 +7066,53 @@
       </p:sp>
       <p:sp>
         <p:nvSpPr>
-          <p:cNvPr id="29" name="Rounded Rectangle 28"/>
+          <p:cNvPr id="29" name="TextBox 28"/>
+          <p:cNvSpPr txBox="1"/>
+          <p:nvPr/>
+        </p:nvSpPr>
+        <p:spPr>
+          <a:xfrm>
+            <a:off x="640080" y="4919472"/>
+            <a:ext cx="2386584" cy="768096"/>
+          </a:xfrm>
+          <a:prstGeom prst="rect">
+            <a:avLst/>
+          </a:prstGeom>
+          <a:noFill/>
+        </p:spPr>
+        <p:txBody>
+          <a:bodyPr wrap="square" lIns="0" rIns="0" tIns="0" bIns="0" anchor="t">
+            <a:noAutofit/>
+          </a:bodyPr>
+          <a:lstStyle/>
+          <a:p>
+            <a:pPr algn="l"/>
+            <a:r>
+              <a:rPr sz="1300" b="0" i="0">
+                <a:solidFill>
+                  <a:srgbClr val="5A6570"/>
+                </a:solidFill>
+                <a:latin typeface="Arial"/>
+              </a:rPr>
+              <a:t>Riley can only use the data, systems and tools you are already authorized to access.</a:t>
+            </a:r>
+          </a:p>
+        </p:txBody>
+      </p:sp>
+      <p:sp>
+        <p:nvSpPr>
+          <p:cNvPr id="30" name="Rounded Rectangle 29"/>
           <p:cNvSpPr/>
           <p:nvPr/>
         </p:nvSpPr>
         <p:spPr>
           <a:xfrm>
-            <a:off x="3319272" y="4206240"/>
-            <a:ext cx="2697480" cy="1005840"/>
+            <a:off x="3319272" y="4114800"/>
+            <a:ext cx="2697480" cy="1600200"/>
           </a:xfrm>
           <a:prstGeom prst="roundRect">
             <a:avLst>
-              <a:gd name="adj" fmla="val 10000"/>
+              <a:gd name="adj" fmla="val 8000"/>
             </a:avLst>
           </a:prstGeom>
           <a:solidFill>
@@ -7095,14 +7130,14 @@
       </p:sp>
       <p:sp>
         <p:nvSpPr>
-          <p:cNvPr id="30" name="Oval 29"/>
+          <p:cNvPr id="31" name="Oval 30"/>
           <p:cNvSpPr/>
           <p:nvPr/>
         </p:nvSpPr>
         <p:spPr>
           <a:xfrm>
-            <a:off x="3520440" y="4407408"/>
-            <a:ext cx="603504" cy="603504"/>
+            <a:off x="3502152" y="4261104"/>
+            <a:ext cx="512064" cy="512064"/>
           </a:xfrm>
           <a:prstGeom prst="ellipse">
             <a:avLst/>
@@ -7122,7 +7157,7 @@
       </p:sp>
       <p:pic>
         <p:nvPicPr>
-          <p:cNvPr id="31" name="Picture 30" descr="LuShieldCheck_w.png"/>
+          <p:cNvPr id="32" name="Picture 31" descr="LuShieldCheck_w.png"/>
           <p:cNvPicPr>
             <a:picLocks noChangeAspect="1"/>
           </p:cNvPicPr>
@@ -7136,8 +7171,8 @@
         </p:blipFill>
         <p:spPr>
           <a:xfrm>
-            <a:off x="3665280" y="4552248"/>
-            <a:ext cx="313822" cy="313822"/>
+            <a:off x="3625047" y="4383999"/>
+            <a:ext cx="266273" cy="266273"/>
           </a:xfrm>
           <a:prstGeom prst="rect">
             <a:avLst/>
@@ -7146,14 +7181,14 @@
       </p:pic>
       <p:sp>
         <p:nvSpPr>
-          <p:cNvPr id="32" name="TextBox 31"/>
+          <p:cNvPr id="33" name="TextBox 32"/>
           <p:cNvSpPr txBox="1"/>
           <p:nvPr/>
         </p:nvSpPr>
         <p:spPr>
           <a:xfrm>
-            <a:off x="4261104" y="4206240"/>
-            <a:ext cx="1673352" cy="1005840"/>
+            <a:off x="4142232" y="4187952"/>
+            <a:ext cx="1764792" cy="658368"/>
           </a:xfrm>
           <a:prstGeom prst="rect">
             <a:avLst/>
@@ -7174,25 +7209,60 @@
                 </a:solidFill>
                 <a:latin typeface="Arial"/>
               </a:rPr>
-              <a:t>AIA data controls</a:t>
-            </a:r>
-          </a:p>
-        </p:txBody>
-      </p:sp>
-      <p:sp>
-        <p:nvSpPr>
-          <p:cNvPr id="33" name="Rounded Rectangle 32"/>
+              <a:t>Data stays under AIA controls</a:t>
+            </a:r>
+          </a:p>
+        </p:txBody>
+      </p:sp>
+      <p:sp>
+        <p:nvSpPr>
+          <p:cNvPr id="34" name="TextBox 33"/>
+          <p:cNvSpPr txBox="1"/>
+          <p:nvPr/>
+        </p:nvSpPr>
+        <p:spPr>
+          <a:xfrm>
+            <a:off x="3502152" y="4919472"/>
+            <a:ext cx="2386584" cy="768096"/>
+          </a:xfrm>
+          <a:prstGeom prst="rect">
+            <a:avLst/>
+          </a:prstGeom>
+          <a:noFill/>
+        </p:spPr>
+        <p:txBody>
+          <a:bodyPr wrap="square" lIns="0" rIns="0" tIns="0" bIns="0" anchor="t">
+            <a:noAutofit/>
+          </a:bodyPr>
+          <a:lstStyle/>
+          <a:p>
+            <a:pPr algn="l"/>
+            <a:r>
+              <a:rPr sz="1300" b="0" i="0">
+                <a:solidFill>
+                  <a:srgbClr val="5A6570"/>
+                </a:solidFill>
+                <a:latin typeface="Arial"/>
+              </a:rPr>
+              <a:t>Sensitive and customer data remain subject to AIA’s existing privacy and security controls.</a:t>
+            </a:r>
+          </a:p>
+        </p:txBody>
+      </p:sp>
+      <p:sp>
+        <p:nvSpPr>
+          <p:cNvPr id="35" name="Rounded Rectangle 34"/>
           <p:cNvSpPr/>
           <p:nvPr/>
         </p:nvSpPr>
         <p:spPr>
           <a:xfrm>
-            <a:off x="6181344" y="4206240"/>
-            <a:ext cx="2697480" cy="1005840"/>
+            <a:off x="6181344" y="4114800"/>
+            <a:ext cx="2697480" cy="1600200"/>
           </a:xfrm>
           <a:prstGeom prst="roundRect">
             <a:avLst>
-              <a:gd name="adj" fmla="val 10000"/>
+              <a:gd name="adj" fmla="val 8000"/>
             </a:avLst>
           </a:prstGeom>
           <a:solidFill>
@@ -7210,14 +7280,14 @@
       </p:sp>
       <p:sp>
         <p:nvSpPr>
-          <p:cNvPr id="34" name="Oval 33"/>
+          <p:cNvPr id="36" name="Oval 35"/>
           <p:cNvSpPr/>
           <p:nvPr/>
         </p:nvSpPr>
         <p:spPr>
           <a:xfrm>
-            <a:off x="6382512" y="4407408"/>
-            <a:ext cx="603504" cy="603504"/>
+            <a:off x="6364224" y="4261104"/>
+            <a:ext cx="512064" cy="512064"/>
           </a:xfrm>
           <a:prstGeom prst="ellipse">
             <a:avLst/>
@@ -7237,7 +7307,7 @@
       </p:sp>
       <p:pic>
         <p:nvPicPr>
-          <p:cNvPr id="35" name="Picture 34" descr="LuRefreshCw_w.png"/>
+          <p:cNvPr id="37" name="Picture 36" descr="LuRefreshCw_w.png"/>
           <p:cNvPicPr>
             <a:picLocks noChangeAspect="1"/>
           </p:cNvPicPr>
@@ -7251,8 +7321,8 @@
         </p:blipFill>
         <p:spPr>
           <a:xfrm>
-            <a:off x="6527352" y="4552248"/>
-            <a:ext cx="313822" cy="313822"/>
+            <a:off x="6487119" y="4383999"/>
+            <a:ext cx="266273" cy="266273"/>
           </a:xfrm>
           <a:prstGeom prst="rect">
             <a:avLst/>
@@ -7261,14 +7331,14 @@
       </p:pic>
       <p:sp>
         <p:nvSpPr>
-          <p:cNvPr id="36" name="TextBox 35"/>
+          <p:cNvPr id="38" name="TextBox 37"/>
           <p:cNvSpPr txBox="1"/>
           <p:nvPr/>
         </p:nvSpPr>
         <p:spPr>
           <a:xfrm>
-            <a:off x="7123176" y="4206240"/>
-            <a:ext cx="1673352" cy="1005840"/>
+            <a:off x="7004304" y="4187952"/>
+            <a:ext cx="1764792" cy="658368"/>
           </a:xfrm>
           <a:prstGeom prst="rect">
             <a:avLst/>
@@ -7289,25 +7359,84 @@
                 </a:solidFill>
                 <a:latin typeface="Arial"/>
               </a:rPr>
-              <a:t>Learning rules agreed with risk and IT</a:t>
-            </a:r>
-          </a:p>
-        </p:txBody>
-      </p:sp>
-      <p:sp>
-        <p:nvSpPr>
-          <p:cNvPr id="37" name="Rounded Rectangle 36"/>
+              <a:t>Learning rules</a:t>
+            </a:r>
+          </a:p>
+          <a:p>
+            <a:pPr algn="l"/>
+            <a:r>
+              <a:rPr sz="1400" b="1" i="0">
+                <a:solidFill>
+                  <a:srgbClr val="333D47"/>
+                </a:solidFill>
+                <a:latin typeface="Arial"/>
+              </a:rPr>
+              <a:t>agreed with</a:t>
+            </a:r>
+          </a:p>
+          <a:p>
+            <a:pPr algn="l"/>
+            <a:r>
+              <a:rPr sz="1400" b="1" i="0">
+                <a:solidFill>
+                  <a:srgbClr val="333D47"/>
+                </a:solidFill>
+                <a:latin typeface="Arial"/>
+              </a:rPr>
+              <a:t>risk and IT</a:t>
+            </a:r>
+          </a:p>
+        </p:txBody>
+      </p:sp>
+      <p:sp>
+        <p:nvSpPr>
+          <p:cNvPr id="39" name="TextBox 38"/>
+          <p:cNvSpPr txBox="1"/>
+          <p:nvPr/>
+        </p:nvSpPr>
+        <p:spPr>
+          <a:xfrm>
+            <a:off x="6364224" y="4919472"/>
+            <a:ext cx="2386584" cy="768096"/>
+          </a:xfrm>
+          <a:prstGeom prst="rect">
+            <a:avLst/>
+          </a:prstGeom>
+          <a:noFill/>
+        </p:spPr>
+        <p:txBody>
+          <a:bodyPr wrap="square" lIns="0" rIns="0" tIns="0" bIns="0" anchor="t">
+            <a:noAutofit/>
+          </a:bodyPr>
+          <a:lstStyle/>
+          <a:p>
+            <a:pPr algn="l"/>
+            <a:r>
+              <a:rPr sz="1300" b="0" i="0">
+                <a:solidFill>
+                  <a:srgbClr val="5A6570"/>
+                </a:solidFill>
+                <a:latin typeface="Arial"/>
+              </a:rPr>
+              <a:t>Feedback is reviewed under agreed governance before it changes Riley’s behaviour.</a:t>
+            </a:r>
+          </a:p>
+        </p:txBody>
+      </p:sp>
+      <p:sp>
+        <p:nvSpPr>
+          <p:cNvPr id="40" name="Rounded Rectangle 39"/>
           <p:cNvSpPr/>
           <p:nvPr/>
         </p:nvSpPr>
         <p:spPr>
           <a:xfrm>
-            <a:off x="9043416" y="4206240"/>
-            <a:ext cx="2697480" cy="1005840"/>
+            <a:off x="9043416" y="4114800"/>
+            <a:ext cx="2697480" cy="1600200"/>
           </a:xfrm>
           <a:prstGeom prst="roundRect">
             <a:avLst>
-              <a:gd name="adj" fmla="val 10000"/>
+              <a:gd name="adj" fmla="val 8000"/>
             </a:avLst>
           </a:prstGeom>
           <a:solidFill>
@@ -7325,14 +7454,14 @@
       </p:sp>
       <p:sp>
         <p:nvSpPr>
-          <p:cNvPr id="38" name="Oval 37"/>
+          <p:cNvPr id="41" name="Oval 40"/>
           <p:cNvSpPr/>
           <p:nvPr/>
         </p:nvSpPr>
         <p:spPr>
           <a:xfrm>
-            <a:off x="9244584" y="4407408"/>
-            <a:ext cx="603504" cy="603504"/>
+            <a:off x="9226296" y="4261104"/>
+            <a:ext cx="512064" cy="512064"/>
           </a:xfrm>
           <a:prstGeom prst="ellipse">
             <a:avLst/>
@@ -7352,7 +7481,7 @@
       </p:sp>
       <p:pic>
         <p:nvPicPr>
-          <p:cNvPr id="39" name="Picture 38" descr="LuUserCheck_w.png"/>
+          <p:cNvPr id="42" name="Picture 41" descr="LuUserCheck_w.png"/>
           <p:cNvPicPr>
             <a:picLocks noChangeAspect="1"/>
           </p:cNvPicPr>
@@ -7366,8 +7495,8 @@
         </p:blipFill>
         <p:spPr>
           <a:xfrm>
-            <a:off x="9389424" y="4552248"/>
-            <a:ext cx="313822" cy="313822"/>
+            <a:off x="9349191" y="4383999"/>
+            <a:ext cx="266273" cy="266273"/>
           </a:xfrm>
           <a:prstGeom prst="rect">
             <a:avLst/>
@@ -7376,14 +7505,14 @@
       </p:pic>
       <p:sp>
         <p:nvSpPr>
-          <p:cNvPr id="40" name="TextBox 39"/>
+          <p:cNvPr id="43" name="TextBox 42"/>
           <p:cNvSpPr txBox="1"/>
           <p:nvPr/>
         </p:nvSpPr>
         <p:spPr>
           <a:xfrm>
-            <a:off x="9985248" y="4206240"/>
-            <a:ext cx="1673352" cy="1005840"/>
+            <a:off x="9866376" y="4187952"/>
+            <a:ext cx="1764792" cy="658368"/>
           </a:xfrm>
           <a:prstGeom prst="rect">
             <a:avLst/>
@@ -7405,6 +7534,41 @@
                 <a:latin typeface="Arial"/>
               </a:rPr>
               <a:t>Independent quality spot-checks</a:t>
+            </a:r>
+          </a:p>
+        </p:txBody>
+      </p:sp>
+      <p:sp>
+        <p:nvSpPr>
+          <p:cNvPr id="44" name="TextBox 43"/>
+          <p:cNvSpPr txBox="1"/>
+          <p:nvPr/>
+        </p:nvSpPr>
+        <p:spPr>
+          <a:xfrm>
+            <a:off x="9226296" y="4919472"/>
+            <a:ext cx="2386584" cy="768096"/>
+          </a:xfrm>
+          <a:prstGeom prst="rect">
+            <a:avLst/>
+          </a:prstGeom>
+          <a:noFill/>
+        </p:spPr>
+        <p:txBody>
+          <a:bodyPr wrap="square" lIns="0" rIns="0" tIns="0" bIns="0" anchor="t">
+            <a:noAutofit/>
+          </a:bodyPr>
+          <a:lstStyle/>
+          <a:p>
+            <a:pPr algn="l"/>
+            <a:r>
+              <a:rPr sz="1300" b="0" i="0">
+                <a:solidFill>
+                  <a:srgbClr val="5A6570"/>
+                </a:solidFill>
+                <a:latin typeface="Arial"/>
+              </a:rPr>
+              <a:t>A business reviewer regularly checks samples of Riley’s work against a human-only baseline.</a:t>
             </a:r>
           </a:p>
         </p:txBody>
@@ -15202,8 +15366,8 @@
         </p:nvSpPr>
         <p:spPr>
           <a:xfrm>
-            <a:off x="457200" y="1737360"/>
-            <a:ext cx="731520" cy="731520"/>
+            <a:off x="457200" y="1627632"/>
+            <a:ext cx="658368" cy="658368"/>
           </a:xfrm>
           <a:prstGeom prst="ellipse">
             <a:avLst/>
@@ -15237,8 +15401,8 @@
         </p:blipFill>
         <p:spPr>
           <a:xfrm>
-            <a:off x="632764" y="1912924"/>
-            <a:ext cx="380390" cy="380390"/>
+            <a:off x="615208" y="1785640"/>
+            <a:ext cx="342351" cy="342351"/>
           </a:xfrm>
           <a:prstGeom prst="rect">
             <a:avLst/>
@@ -15253,8 +15417,8 @@
         </p:nvSpPr>
         <p:spPr>
           <a:xfrm>
-            <a:off x="1353312" y="1737360"/>
-            <a:ext cx="2670048" cy="731520"/>
+            <a:off x="1280160" y="1627632"/>
+            <a:ext cx="2743200" cy="658368"/>
           </a:xfrm>
           <a:prstGeom prst="rect">
             <a:avLst/>
@@ -15269,7 +15433,7 @@
           <a:p>
             <a:pPr algn="l"/>
             <a:r>
-              <a:rPr sz="2400" b="1" i="0">
+              <a:rPr sz="2200" b="1" i="0">
                 <a:solidFill>
                   <a:srgbClr val="333D47"/>
                 </a:solidFill>
@@ -15288,7 +15452,7 @@
         </p:nvCxnSpPr>
         <p:spPr>
           <a:xfrm>
-            <a:off x="457200" y="2651760"/>
+            <a:off x="457200" y="2432303"/>
             <a:ext cx="3566160" cy="0"/>
           </a:xfrm>
           <a:prstGeom prst="line">
@@ -15323,8 +15487,8 @@
         </p:nvSpPr>
         <p:spPr>
           <a:xfrm>
-            <a:off x="457200" y="2788920"/>
-            <a:ext cx="3566160" cy="685800"/>
+            <a:off x="457200" y="2542032"/>
+            <a:ext cx="3566160" cy="274320"/>
           </a:xfrm>
           <a:prstGeom prst="rect">
             <a:avLst/>
@@ -15339,26 +15503,61 @@
           <a:p>
             <a:pPr algn="l"/>
             <a:r>
-              <a:rPr sz="1800" b="1" i="0">
+              <a:rPr sz="1700" b="1" i="0">
                 <a:solidFill>
                   <a:srgbClr val="333D47"/>
                 </a:solidFill>
                 <a:latin typeface="Arial"/>
               </a:rPr>
               <a:t>Employee time per task</a:t>
+            </a:r>
+          </a:p>
+        </p:txBody>
+      </p:sp>
+      <p:sp>
+        <p:nvSpPr>
+          <p:cNvPr id="11" name="TextBox 10"/>
+          <p:cNvSpPr txBox="1"/>
+          <p:nvPr/>
+        </p:nvSpPr>
+        <p:spPr>
+          <a:xfrm>
+            <a:off x="457200" y="2843784"/>
+            <a:ext cx="3566160" cy="457200"/>
+          </a:xfrm>
+          <a:prstGeom prst="rect">
+            <a:avLst/>
+          </a:prstGeom>
+          <a:noFill/>
+        </p:spPr>
+        <p:txBody>
+          <a:bodyPr wrap="square" lIns="0" rIns="0" tIns="0" bIns="0" anchor="t">
+            <a:noAutofit/>
+          </a:bodyPr>
+          <a:lstStyle/>
+          <a:p>
+            <a:pPr algn="l"/>
+            <a:r>
+              <a:rPr sz="1300" b="0" i="0">
+                <a:solidFill>
+                  <a:srgbClr val="5A6570"/>
+                </a:solidFill>
+                <a:latin typeface="Arial"/>
+              </a:rPr>
+              <a:t>Hands-on employee effort before vs. after Riley</a:t>
             </a:r>
           </a:p>
         </p:txBody>
       </p:sp>
       <p:cxnSp>
         <p:nvCxnSpPr>
-          <p:cNvPr id="11" name="Connector 10"/>
+          <p:cNvPr id="12" name="Connector 11"/>
           <p:cNvCxnSpPr/>
           <p:nvPr/>
         </p:nvCxnSpPr>
         <p:spPr>
           <a:xfrm>
-            <a:off x="457200" y="3520440"/>
+            <a:off x="457200" y="3328415"/>
             <a:ext cx="3566160" cy="0"/>
           </a:xfrm>
           <a:prstGeom prst="line">
@@ -15387,14 +15586,14 @@
       </p:cxnSp>
       <p:sp>
         <p:nvSpPr>
-          <p:cNvPr id="12" name="TextBox 11"/>
+          <p:cNvPr id="13" name="TextBox 12"/>
           <p:cNvSpPr txBox="1"/>
           <p:nvPr/>
         </p:nvSpPr>
         <p:spPr>
           <a:xfrm>
-            <a:off x="457200" y="3657600"/>
-            <a:ext cx="3566160" cy="685800"/>
+            <a:off x="457200" y="3438144"/>
+            <a:ext cx="3566160" cy="274320"/>
           </a:xfrm>
           <a:prstGeom prst="rect">
             <a:avLst/>
@@ -15409,7 +15608,7 @@
           <a:p>
             <a:pPr algn="l"/>
             <a:r>
-              <a:rPr sz="1800" b="1" i="0">
+              <a:rPr sz="1700" b="1" i="0">
                 <a:solidFill>
                   <a:srgbClr val="333D47"/>
                 </a:solidFill>
@@ -15422,14 +15621,49 @@
       </p:sp>
       <p:sp>
         <p:nvSpPr>
-          <p:cNvPr id="13" name="Oval 12"/>
+          <p:cNvPr id="14" name="TextBox 13"/>
+          <p:cNvSpPr txBox="1"/>
+          <p:nvPr/>
+        </p:nvSpPr>
+        <p:spPr>
+          <a:xfrm>
+            <a:off x="457200" y="3739896"/>
+            <a:ext cx="3566160" cy="457200"/>
+          </a:xfrm>
+          <a:prstGeom prst="rect">
+            <a:avLst/>
+          </a:prstGeom>
+          <a:noFill/>
+        </p:spPr>
+        <p:txBody>
+          <a:bodyPr wrap="square" lIns="0" rIns="0" tIns="0" bIns="0" anchor="t">
+            <a:noAutofit/>
+          </a:bodyPr>
+          <a:lstStyle/>
+          <a:p>
+            <a:pPr algn="l"/>
+            <a:r>
+              <a:rPr sz="1300" b="0" i="0">
+                <a:solidFill>
+                  <a:srgbClr val="5A6570"/>
+                </a:solidFill>
+                <a:latin typeface="Arial"/>
+              </a:rPr>
+              <a:t>Elapsed time from request to approved output</a:t>
+            </a:r>
+          </a:p>
+        </p:txBody>
+      </p:sp>
+      <p:sp>
+        <p:nvSpPr>
+          <p:cNvPr id="15" name="Oval 14"/>
           <p:cNvSpPr/>
           <p:nvPr/>
         </p:nvSpPr>
         <p:spPr>
           <a:xfrm>
-            <a:off x="4325112" y="1737360"/>
-            <a:ext cx="731520" cy="731520"/>
+            <a:off x="4325112" y="1627632"/>
+            <a:ext cx="658368" cy="658368"/>
           </a:xfrm>
           <a:prstGeom prst="ellipse">
             <a:avLst/>
@@ -15449,7 +15683,7 @@
       </p:sp>
       <p:pic>
         <p:nvPicPr>
-          <p:cNvPr id="14" name="Picture 13" descr="LuBadgeCheck_w.png"/>
+          <p:cNvPr id="16" name="Picture 15" descr="LuBadgeCheck_w.png"/>
           <p:cNvPicPr>
             <a:picLocks noChangeAspect="1"/>
           </p:cNvPicPr>
@@ -15463,8 +15697,8 @@
         </p:blipFill>
         <p:spPr>
           <a:xfrm>
-            <a:off x="4500676" y="1912924"/>
-            <a:ext cx="380390" cy="380390"/>
+            <a:off x="4483120" y="1785640"/>
+            <a:ext cx="342351" cy="342351"/>
           </a:xfrm>
           <a:prstGeom prst="rect">
             <a:avLst/>
@@ -15473,14 +15707,14 @@
       </p:pic>
       <p:sp>
         <p:nvSpPr>
-          <p:cNvPr id="15" name="TextBox 14"/>
+          <p:cNvPr id="17" name="TextBox 16"/>
           <p:cNvSpPr txBox="1"/>
           <p:nvPr/>
         </p:nvSpPr>
         <p:spPr>
           <a:xfrm>
-            <a:off x="5221223" y="1737360"/>
-            <a:ext cx="2670048" cy="731520"/>
+            <a:off x="5148072" y="1627632"/>
+            <a:ext cx="2743200" cy="658368"/>
           </a:xfrm>
           <a:prstGeom prst="rect">
             <a:avLst/>
@@ -15495,7 +15729,7 @@
           <a:p>
             <a:pPr algn="l"/>
             <a:r>
-              <a:rPr sz="2400" b="1" i="0">
+              <a:rPr sz="2200" b="1" i="0">
                 <a:solidFill>
                   <a:srgbClr val="333D47"/>
                 </a:solidFill>
@@ -15508,13 +15742,13 @@
       </p:sp>
       <p:cxnSp>
         <p:nvCxnSpPr>
-          <p:cNvPr id="16" name="Connector 15"/>
+          <p:cNvPr id="18" name="Connector 17"/>
           <p:cNvCxnSpPr/>
           <p:nvPr/>
         </p:nvCxnSpPr>
         <p:spPr>
           <a:xfrm>
-            <a:off x="4325112" y="2651760"/>
+            <a:off x="4325112" y="2432303"/>
             <a:ext cx="3566159" cy="0"/>
           </a:xfrm>
           <a:prstGeom prst="line">
@@ -15543,14 +15777,14 @@
       </p:cxnSp>
       <p:sp>
         <p:nvSpPr>
-          <p:cNvPr id="17" name="TextBox 16"/>
+          <p:cNvPr id="19" name="TextBox 18"/>
           <p:cNvSpPr txBox="1"/>
           <p:nvPr/>
         </p:nvSpPr>
         <p:spPr>
           <a:xfrm>
-            <a:off x="4325112" y="2788920"/>
-            <a:ext cx="3566160" cy="685800"/>
+            <a:off x="4325112" y="2542032"/>
+            <a:ext cx="3566160" cy="274320"/>
           </a:xfrm>
           <a:prstGeom prst="rect">
             <a:avLst/>
@@ -15565,7 +15799,7 @@
           <a:p>
             <a:pPr algn="l"/>
             <a:r>
-              <a:rPr sz="1800" b="1" i="0">
+              <a:rPr sz="1700" b="1" i="0">
                 <a:solidFill>
                   <a:srgbClr val="333D47"/>
                 </a:solidFill>
@@ -15574,29 +15808,52 @@
               <a:t>Quality</a:t>
             </a:r>
           </a:p>
+        </p:txBody>
+      </p:sp>
+      <p:sp>
+        <p:nvSpPr>
+          <p:cNvPr id="20" name="TextBox 19"/>
+          <p:cNvSpPr txBox="1"/>
+          <p:nvPr/>
+        </p:nvSpPr>
+        <p:spPr>
+          <a:xfrm>
+            <a:off x="4325112" y="2843784"/>
+            <a:ext cx="3566160" cy="457200"/>
+          </a:xfrm>
+          <a:prstGeom prst="rect">
+            <a:avLst/>
+          </a:prstGeom>
+          <a:noFill/>
+        </p:spPr>
+        <p:txBody>
+          <a:bodyPr wrap="square" lIns="0" rIns="0" tIns="0" bIns="0" anchor="t">
+            <a:noAutofit/>
+          </a:bodyPr>
+          <a:lstStyle/>
           <a:p>
             <a:pPr algn="l"/>
             <a:r>
-              <a:rPr sz="1400" b="1" i="0">
-                <a:solidFill>
-                  <a:srgbClr val="D31145"/>
-                </a:solidFill>
-                <a:latin typeface="Arial"/>
-              </a:rPr>
-              <a:t>with independent sample reviews</a:t>
+              <a:rPr sz="1300" b="0" i="0">
+                <a:solidFill>
+                  <a:srgbClr val="5A6570"/>
+                </a:solidFill>
+                <a:latin typeface="Arial"/>
+              </a:rPr>
+              <a:t>Accuracy and completeness vs. a human-only baseline, with independent spot-checks</a:t>
             </a:r>
           </a:p>
         </p:txBody>
       </p:sp>
       <p:cxnSp>
         <p:nvCxnSpPr>
-          <p:cNvPr id="18" name="Connector 17"/>
+          <p:cNvPr id="21" name="Connector 20"/>
           <p:cNvCxnSpPr/>
           <p:nvPr/>
         </p:nvCxnSpPr>
         <p:spPr>
           <a:xfrm>
-            <a:off x="4325112" y="3520440"/>
+            <a:off x="4325112" y="3328415"/>
             <a:ext cx="3566159" cy="0"/>
           </a:xfrm>
           <a:prstGeom prst="line">
@@ -15625,14 +15882,14 @@
       </p:cxnSp>
       <p:sp>
         <p:nvSpPr>
-          <p:cNvPr id="19" name="TextBox 18"/>
+          <p:cNvPr id="22" name="TextBox 21"/>
           <p:cNvSpPr txBox="1"/>
           <p:nvPr/>
         </p:nvSpPr>
         <p:spPr>
           <a:xfrm>
-            <a:off x="4325112" y="3657600"/>
-            <a:ext cx="3566160" cy="685800"/>
+            <a:off x="4325112" y="3438144"/>
+            <a:ext cx="3566160" cy="274320"/>
           </a:xfrm>
           <a:prstGeom prst="rect">
             <a:avLst/>
@@ -15647,7 +15904,7 @@
           <a:p>
             <a:pPr algn="l"/>
             <a:r>
-              <a:rPr sz="1800" b="1" i="0">
+              <a:rPr sz="1700" b="1" i="0">
                 <a:solidFill>
                   <a:srgbClr val="333D47"/>
                 </a:solidFill>
@@ -15660,14 +15917,49 @@
       </p:sp>
       <p:sp>
         <p:nvSpPr>
-          <p:cNvPr id="20" name="Oval 19"/>
+          <p:cNvPr id="23" name="TextBox 22"/>
+          <p:cNvSpPr txBox="1"/>
+          <p:nvPr/>
+        </p:nvSpPr>
+        <p:spPr>
+          <a:xfrm>
+            <a:off x="4325112" y="3739896"/>
+            <a:ext cx="3566160" cy="457200"/>
+          </a:xfrm>
+          <a:prstGeom prst="rect">
+            <a:avLst/>
+          </a:prstGeom>
+          <a:noFill/>
+        </p:spPr>
+        <p:txBody>
+          <a:bodyPr wrap="square" lIns="0" rIns="0" tIns="0" bIns="0" anchor="t">
+            <a:noAutofit/>
+          </a:bodyPr>
+          <a:lstStyle/>
+          <a:p>
+            <a:pPr algn="l"/>
+            <a:r>
+              <a:rPr sz="1300" b="0" i="0">
+                <a:solidFill>
+                  <a:srgbClr val="5A6570"/>
+                </a:solidFill>
+                <a:latin typeface="Arial"/>
+              </a:rPr>
+              <a:t>How often Riley’s output needs significant correction</a:t>
+            </a:r>
+          </a:p>
+        </p:txBody>
+      </p:sp>
+      <p:sp>
+        <p:nvSpPr>
+          <p:cNvPr id="24" name="Oval 23"/>
           <p:cNvSpPr/>
           <p:nvPr/>
         </p:nvSpPr>
         <p:spPr>
           <a:xfrm>
-            <a:off x="8193023" y="1737360"/>
-            <a:ext cx="731520" cy="731520"/>
+            <a:off x="8193023" y="1627632"/>
+            <a:ext cx="658368" cy="658368"/>
           </a:xfrm>
           <a:prstGeom prst="ellipse">
             <a:avLst/>
@@ -15687,7 +15979,7 @@
       </p:sp>
       <p:pic>
         <p:nvPicPr>
-          <p:cNvPr id="21" name="Picture 20" descr="LuLayers_w.png"/>
+          <p:cNvPr id="25" name="Picture 24" descr="LuLayers_w.png"/>
           <p:cNvPicPr>
             <a:picLocks noChangeAspect="1"/>
           </p:cNvPicPr>
@@ -15701,8 +15993,8 @@
         </p:blipFill>
         <p:spPr>
           <a:xfrm>
-            <a:off x="8368588" y="1912924"/>
-            <a:ext cx="380390" cy="380390"/>
+            <a:off x="8351032" y="1785640"/>
+            <a:ext cx="342351" cy="342351"/>
           </a:xfrm>
           <a:prstGeom prst="rect">
             <a:avLst/>
@@ -15711,14 +16003,14 @@
       </p:pic>
       <p:sp>
         <p:nvSpPr>
-          <p:cNvPr id="22" name="TextBox 21"/>
+          <p:cNvPr id="26" name="TextBox 25"/>
           <p:cNvSpPr txBox="1"/>
           <p:nvPr/>
         </p:nvSpPr>
         <p:spPr>
           <a:xfrm>
-            <a:off x="9089136" y="1737360"/>
-            <a:ext cx="2670048" cy="731520"/>
+            <a:off x="9015984" y="1627632"/>
+            <a:ext cx="2743200" cy="658368"/>
           </a:xfrm>
           <a:prstGeom prst="rect">
             <a:avLst/>
@@ -15733,7 +16025,7 @@
           <a:p>
             <a:pPr algn="l"/>
             <a:r>
-              <a:rPr sz="2400" b="1" i="0">
+              <a:rPr sz="2200" b="1" i="0">
                 <a:solidFill>
                   <a:srgbClr val="333D47"/>
                 </a:solidFill>
@@ -15746,13 +16038,13 @@
       </p:sp>
       <p:cxnSp>
         <p:nvCxnSpPr>
-          <p:cNvPr id="23" name="Connector 22"/>
+          <p:cNvPr id="27" name="Connector 26"/>
           <p:cNvCxnSpPr/>
           <p:nvPr/>
         </p:nvCxnSpPr>
         <p:spPr>
           <a:xfrm>
-            <a:off x="8193023" y="2651760"/>
+            <a:off x="8193023" y="2432303"/>
             <a:ext cx="3566161" cy="0"/>
           </a:xfrm>
           <a:prstGeom prst="line">
@@ -15781,14 +16073,14 @@
       </p:cxnSp>
       <p:sp>
         <p:nvSpPr>
-          <p:cNvPr id="24" name="TextBox 23"/>
+          <p:cNvPr id="28" name="TextBox 27"/>
           <p:cNvSpPr txBox="1"/>
           <p:nvPr/>
         </p:nvSpPr>
         <p:spPr>
           <a:xfrm>
-            <a:off x="8193023" y="2788920"/>
-            <a:ext cx="3566160" cy="685800"/>
+            <a:off x="8193023" y="2542032"/>
+            <a:ext cx="3566160" cy="274320"/>
           </a:xfrm>
           <a:prstGeom prst="rect">
             <a:avLst/>
@@ -15803,26 +16095,61 @@
           <a:p>
             <a:pPr algn="l"/>
             <a:r>
-              <a:rPr sz="1800" b="1" i="0">
+              <a:rPr sz="1700" b="1" i="0">
                 <a:solidFill>
                   <a:srgbClr val="333D47"/>
                 </a:solidFill>
                 <a:latin typeface="Arial"/>
               </a:rPr>
-              <a:t>Manual steps and systems touched</a:t>
+              <a:t>Manual steps and systems</a:t>
+            </a:r>
+          </a:p>
+        </p:txBody>
+      </p:sp>
+      <p:sp>
+        <p:nvSpPr>
+          <p:cNvPr id="29" name="TextBox 28"/>
+          <p:cNvSpPr txBox="1"/>
+          <p:nvPr/>
+        </p:nvSpPr>
+        <p:spPr>
+          <a:xfrm>
+            <a:off x="8193023" y="2843784"/>
+            <a:ext cx="3566160" cy="457200"/>
+          </a:xfrm>
+          <a:prstGeom prst="rect">
+            <a:avLst/>
+          </a:prstGeom>
+          <a:noFill/>
+        </p:spPr>
+        <p:txBody>
+          <a:bodyPr wrap="square" lIns="0" rIns="0" tIns="0" bIns="0" anchor="t">
+            <a:noAutofit/>
+          </a:bodyPr>
+          <a:lstStyle/>
+          <a:p>
+            <a:pPr algn="l"/>
+            <a:r>
+              <a:rPr sz="1300" b="0" i="0">
+                <a:solidFill>
+                  <a:srgbClr val="5A6570"/>
+                </a:solidFill>
+                <a:latin typeface="Arial"/>
+              </a:rPr>
+              <a:t>How many tools or systems still need manual employee work</a:t>
             </a:r>
           </a:p>
         </p:txBody>
       </p:sp>
       <p:cxnSp>
         <p:nvCxnSpPr>
-          <p:cNvPr id="25" name="Connector 24"/>
+          <p:cNvPr id="30" name="Connector 29"/>
           <p:cNvCxnSpPr/>
           <p:nvPr/>
         </p:nvCxnSpPr>
         <p:spPr>
           <a:xfrm>
-            <a:off x="8193023" y="3520440"/>
+            <a:off x="8193023" y="3328415"/>
             <a:ext cx="3566161" cy="0"/>
           </a:xfrm>
           <a:prstGeom prst="line">
@@ -15851,14 +16178,14 @@
       </p:cxnSp>
       <p:sp>
         <p:nvSpPr>
-          <p:cNvPr id="26" name="TextBox 25"/>
+          <p:cNvPr id="31" name="TextBox 30"/>
           <p:cNvSpPr txBox="1"/>
           <p:nvPr/>
         </p:nvSpPr>
         <p:spPr>
           <a:xfrm>
-            <a:off x="8193023" y="3657600"/>
-            <a:ext cx="3566160" cy="685800"/>
+            <a:off x="8193023" y="3438144"/>
+            <a:ext cx="3566160" cy="274320"/>
           </a:xfrm>
           <a:prstGeom prst="rect">
             <a:avLst/>
@@ -15873,7 +16200,7 @@
           <a:p>
             <a:pPr algn="l"/>
             <a:r>
-              <a:rPr sz="1800" b="1" i="0">
+              <a:rPr sz="1700" b="1" i="0">
                 <a:solidFill>
                   <a:srgbClr val="333D47"/>
                 </a:solidFill>
@@ -15886,14 +16213,49 @@
       </p:sp>
       <p:sp>
         <p:nvSpPr>
-          <p:cNvPr id="27" name="Pentagon 26"/>
+          <p:cNvPr id="32" name="TextBox 31"/>
+          <p:cNvSpPr txBox="1"/>
+          <p:nvPr/>
+        </p:nvSpPr>
+        <p:spPr>
+          <a:xfrm>
+            <a:off x="8193023" y="3739896"/>
+            <a:ext cx="3566160" cy="457200"/>
+          </a:xfrm>
+          <a:prstGeom prst="rect">
+            <a:avLst/>
+          </a:prstGeom>
+          <a:noFill/>
+        </p:spPr>
+        <p:txBody>
+          <a:bodyPr wrap="square" lIns="0" rIns="0" tIns="0" bIns="0" anchor="t">
+            <a:noAutofit/>
+          </a:bodyPr>
+          <a:lstStyle/>
+          <a:p>
+            <a:pPr algn="l"/>
+            <a:r>
+              <a:rPr sz="1300" b="0" i="0">
+                <a:solidFill>
+                  <a:srgbClr val="5A6570"/>
+                </a:solidFill>
+                <a:latin typeface="Arial"/>
+              </a:rPr>
+              <a:t>Whether employees choose to keep using Riley</a:t>
+            </a:r>
+          </a:p>
+        </p:txBody>
+      </p:sp>
+      <p:sp>
+        <p:nvSpPr>
+          <p:cNvPr id="33" name="Pentagon 32"/>
           <p:cNvSpPr/>
           <p:nvPr/>
         </p:nvSpPr>
         <p:spPr>
           <a:xfrm>
-            <a:off x="457200" y="4462272"/>
-            <a:ext cx="2916936" cy="1170432"/>
+            <a:off x="457200" y="4617720"/>
+            <a:ext cx="2916936" cy="1024128"/>
           </a:xfrm>
           <a:prstGeom prst="homePlate">
             <a:avLst>
@@ -15933,21 +16295,21 @@
                 </a:solidFill>
                 <a:latin typeface="Arial"/>
               </a:rPr>
-              <a:t>Baseline</a:t>
-            </a:r>
-          </a:p>
-        </p:txBody>
-      </p:sp>
-      <p:sp>
-        <p:nvSpPr>
-          <p:cNvPr id="28" name="Chevron 27"/>
+              <a:t>Set the baseline</a:t>
+            </a:r>
+          </a:p>
+        </p:txBody>
+      </p:sp>
+      <p:sp>
+        <p:nvSpPr>
+          <p:cNvPr id="34" name="Chevron 33"/>
           <p:cNvSpPr/>
           <p:nvPr/>
         </p:nvSpPr>
         <p:spPr>
           <a:xfrm>
-            <a:off x="3282696" y="4462272"/>
-            <a:ext cx="2916936" cy="1170432"/>
+            <a:off x="3282696" y="4617720"/>
+            <a:ext cx="2916936" cy="1024128"/>
           </a:xfrm>
           <a:prstGeom prst="chevron">
             <a:avLst>
@@ -15987,21 +16349,21 @@
                 </a:solidFill>
                 <a:latin typeface="Arial"/>
               </a:rPr>
-              <a:t>Measure the first workflow</a:t>
-            </a:r>
-          </a:p>
-        </p:txBody>
-      </p:sp>
-      <p:sp>
-        <p:nvSpPr>
-          <p:cNvPr id="29" name="Chevron 28"/>
+              <a:t>Test the first workflow</a:t>
+            </a:r>
+          </a:p>
+        </p:txBody>
+      </p:sp>
+      <p:sp>
+        <p:nvSpPr>
+          <p:cNvPr id="35" name="Chevron 34"/>
           <p:cNvSpPr/>
           <p:nvPr/>
         </p:nvSpPr>
         <p:spPr>
           <a:xfrm>
-            <a:off x="6108192" y="4462272"/>
-            <a:ext cx="2916936" cy="1170432"/>
+            <a:off x="6108192" y="4617720"/>
+            <a:ext cx="2916936" cy="1024128"/>
           </a:xfrm>
           <a:prstGeom prst="chevron">
             <a:avLst>
@@ -16048,14 +16410,14 @@
       </p:sp>
       <p:sp>
         <p:nvSpPr>
-          <p:cNvPr id="30" name="Chevron 29"/>
+          <p:cNvPr id="36" name="Chevron 35"/>
           <p:cNvSpPr/>
           <p:nvPr/>
         </p:nvSpPr>
         <p:spPr>
           <a:xfrm>
-            <a:off x="8933688" y="4462272"/>
-            <a:ext cx="2916936" cy="1170432"/>
+            <a:off x="8933688" y="4617720"/>
+            <a:ext cx="2916936" cy="1024128"/>
           </a:xfrm>
           <a:prstGeom prst="chevron">
             <a:avLst>
@@ -16095,20 +16457,20 @@
                 </a:solidFill>
                 <a:latin typeface="Arial"/>
               </a:rPr>
-              <a:t>Replace the scenario with a measured projection</a:t>
-            </a:r>
-          </a:p>
-        </p:txBody>
-      </p:sp>
-      <p:sp>
-        <p:nvSpPr>
-          <p:cNvPr id="31" name="TextBox 30"/>
+              <a:t>Use measured results to project wider impact</a:t>
+            </a:r>
+          </a:p>
+        </p:txBody>
+      </p:sp>
+      <p:sp>
+        <p:nvSpPr>
+          <p:cNvPr id="37" name="TextBox 36"/>
           <p:cNvSpPr txBox="1"/>
           <p:nvPr/>
         </p:nvSpPr>
         <p:spPr>
           <a:xfrm>
-            <a:off x="6108192" y="4151376"/>
+            <a:off x="6108192" y="4315968"/>
             <a:ext cx="2807208" cy="274320"/>
           </a:xfrm>
           <a:prstGeom prst="rect">
